--- a/week03/2장.pptx
+++ b/week03/2장.pptx
@@ -5,7 +5,7 @@
     <p:sldMasterId id="2147483648" r:id="rId1"/>
   </p:sldMasterIdLst>
   <p:notesMasterIdLst>
-    <p:notesMasterId r:id="rId35"/>
+    <p:notesMasterId r:id="rId37"/>
   </p:notesMasterIdLst>
   <p:sldIdLst>
     <p:sldId id="256" r:id="rId2"/>
@@ -39,8 +39,10 @@
     <p:sldId id="328" r:id="rId30"/>
     <p:sldId id="329" r:id="rId31"/>
     <p:sldId id="330" r:id="rId32"/>
-    <p:sldId id="331" r:id="rId33"/>
-    <p:sldId id="272" r:id="rId34"/>
+    <p:sldId id="333" r:id="rId33"/>
+    <p:sldId id="332" r:id="rId34"/>
+    <p:sldId id="331" r:id="rId35"/>
+    <p:sldId id="272" r:id="rId36"/>
   </p:sldIdLst>
   <p:sldSz cx="12192000" cy="6858000"/>
   <p:notesSz cx="6858000" cy="9144000"/>
@@ -229,7 +231,7 @@
           <a:p>
             <a:fld id="{EB29CB68-1941-4906-AC12-2D09C79E6FC6}" type="datetimeFigureOut">
               <a:rPr lang="ko-KR" altLang="en-US" smtClean="0"/>
-              <a:t>2026-07-01</a:t>
+              <a:t>2026-07-02</a:t>
             </a:fld>
             <a:endParaRPr lang="ko-KR" altLang="en-US"/>
           </a:p>
@@ -643,7 +645,7 @@
           <a:p>
             <a:fld id="{A59215A9-734E-4AD3-8910-5EED93001A62}" type="datetimeFigureOut">
               <a:rPr lang="ko-KR" altLang="en-US" smtClean="0"/>
-              <a:t>2026-07-01</a:t>
+              <a:t>2026-07-02</a:t>
             </a:fld>
             <a:endParaRPr lang="ko-KR" altLang="en-US"/>
           </a:p>
@@ -841,7 +843,7 @@
           <a:p>
             <a:fld id="{A59215A9-734E-4AD3-8910-5EED93001A62}" type="datetimeFigureOut">
               <a:rPr lang="ko-KR" altLang="en-US" smtClean="0"/>
-              <a:t>2026-07-01</a:t>
+              <a:t>2026-07-02</a:t>
             </a:fld>
             <a:endParaRPr lang="ko-KR" altLang="en-US"/>
           </a:p>
@@ -1049,7 +1051,7 @@
           <a:p>
             <a:fld id="{A59215A9-734E-4AD3-8910-5EED93001A62}" type="datetimeFigureOut">
               <a:rPr lang="ko-KR" altLang="en-US" smtClean="0"/>
-              <a:t>2026-07-01</a:t>
+              <a:t>2026-07-02</a:t>
             </a:fld>
             <a:endParaRPr lang="ko-KR" altLang="en-US"/>
           </a:p>
@@ -1253,7 +1255,7 @@
           <a:p>
             <a:fld id="{A59215A9-734E-4AD3-8910-5EED93001A62}" type="datetimeFigureOut">
               <a:rPr lang="ko-KR" altLang="en-US" smtClean="0"/>
-              <a:t>2026-07-01</a:t>
+              <a:t>2026-07-02</a:t>
             </a:fld>
             <a:endParaRPr lang="ko-KR" altLang="en-US"/>
           </a:p>
@@ -1528,7 +1530,7 @@
           <a:p>
             <a:fld id="{A59215A9-734E-4AD3-8910-5EED93001A62}" type="datetimeFigureOut">
               <a:rPr lang="ko-KR" altLang="en-US" smtClean="0"/>
-              <a:t>2026-07-01</a:t>
+              <a:t>2026-07-02</a:t>
             </a:fld>
             <a:endParaRPr lang="ko-KR" altLang="en-US"/>
           </a:p>
@@ -1793,7 +1795,7 @@
           <a:p>
             <a:fld id="{A59215A9-734E-4AD3-8910-5EED93001A62}" type="datetimeFigureOut">
               <a:rPr lang="ko-KR" altLang="en-US" smtClean="0"/>
-              <a:t>2026-07-01</a:t>
+              <a:t>2026-07-02</a:t>
             </a:fld>
             <a:endParaRPr lang="ko-KR" altLang="en-US"/>
           </a:p>
@@ -2205,7 +2207,7 @@
           <a:p>
             <a:fld id="{A59215A9-734E-4AD3-8910-5EED93001A62}" type="datetimeFigureOut">
               <a:rPr lang="ko-KR" altLang="en-US" smtClean="0"/>
-              <a:t>2026-07-01</a:t>
+              <a:t>2026-07-02</a:t>
             </a:fld>
             <a:endParaRPr lang="ko-KR" altLang="en-US"/>
           </a:p>
@@ -2346,7 +2348,7 @@
           <a:p>
             <a:fld id="{A59215A9-734E-4AD3-8910-5EED93001A62}" type="datetimeFigureOut">
               <a:rPr lang="ko-KR" altLang="en-US" smtClean="0"/>
-              <a:t>2026-07-01</a:t>
+              <a:t>2026-07-02</a:t>
             </a:fld>
             <a:endParaRPr lang="ko-KR" altLang="en-US"/>
           </a:p>
@@ -2459,7 +2461,7 @@
           <a:p>
             <a:fld id="{A59215A9-734E-4AD3-8910-5EED93001A62}" type="datetimeFigureOut">
               <a:rPr lang="ko-KR" altLang="en-US" smtClean="0"/>
-              <a:t>2026-07-01</a:t>
+              <a:t>2026-07-02</a:t>
             </a:fld>
             <a:endParaRPr lang="ko-KR" altLang="en-US"/>
           </a:p>
@@ -2770,7 +2772,7 @@
           <a:p>
             <a:fld id="{A59215A9-734E-4AD3-8910-5EED93001A62}" type="datetimeFigureOut">
               <a:rPr lang="ko-KR" altLang="en-US" smtClean="0"/>
-              <a:t>2026-07-01</a:t>
+              <a:t>2026-07-02</a:t>
             </a:fld>
             <a:endParaRPr lang="ko-KR" altLang="en-US"/>
           </a:p>
@@ -3058,7 +3060,7 @@
           <a:p>
             <a:fld id="{A59215A9-734E-4AD3-8910-5EED93001A62}" type="datetimeFigureOut">
               <a:rPr lang="ko-KR" altLang="en-US" smtClean="0"/>
-              <a:t>2026-07-01</a:t>
+              <a:t>2026-07-02</a:t>
             </a:fld>
             <a:endParaRPr lang="ko-KR" altLang="en-US"/>
           </a:p>
@@ -3302,7 +3304,7 @@
           <a:p>
             <a:fld id="{A59215A9-734E-4AD3-8910-5EED93001A62}" type="datetimeFigureOut">
               <a:rPr lang="ko-KR" altLang="en-US" smtClean="0"/>
-              <a:t>2026-07-01</a:t>
+              <a:t>2026-07-02</a:t>
             </a:fld>
             <a:endParaRPr lang="ko-KR" altLang="en-US"/>
           </a:p>
@@ -30749,6 +30751,29 @@
               </a:rPr>
               <a:t>(expression).</a:t>
             </a:r>
+            <a:r>
+              <a:rPr lang="en-US" altLang="ko-KR" sz="2400" dirty="0"/>
+              <a:t> </a:t>
+            </a:r>
+          </a:p>
+          <a:p>
+            <a:pPr>
+              <a:lnSpc>
+                <a:spcPct val="150000"/>
+              </a:lnSpc>
+            </a:pPr>
+            <a:r>
+              <a:rPr lang="en-US" altLang="ko-KR" sz="2400" dirty="0"/>
+              <a:t>try </a:t>
+            </a:r>
+            <a:r>
+              <a:rPr lang="ko-KR" altLang="en-US" sz="2400" dirty="0"/>
+              <a:t>식의 값은 내부적으로 임시 변수에 저장될 수도 있음</a:t>
+            </a:r>
+            <a:r>
+              <a:rPr lang="en-US" altLang="ko-KR" sz="2400" dirty="0"/>
+              <a:t>.</a:t>
+            </a:r>
           </a:p>
         </p:txBody>
       </p:sp>
@@ -30861,7 +30886,7 @@
         <p:spPr>
           <a:xfrm>
             <a:off x="6686549" y="428179"/>
-            <a:ext cx="5219701" cy="6001643"/>
+            <a:ext cx="5219701" cy="5755422"/>
           </a:xfrm>
           <a:prstGeom prst="rect">
             <a:avLst/>
@@ -30878,42 +30903,64 @@
               <a:buNone/>
             </a:pPr>
             <a:r>
-              <a:rPr lang="en-US" altLang="ko-KR" sz="1600" dirty="0">
-                <a:solidFill>
-                  <a:srgbClr val="0033B3"/>
-                </a:solidFill>
-                <a:effectLst/>
-                <a:latin typeface="D2Coding ligature" panose="020B0609020101020101" pitchFamily="49" charset="-127"/>
-                <a:ea typeface="D2Coding ligature" panose="020B0609020101020101" pitchFamily="49" charset="-127"/>
-              </a:rPr>
-              <a:t>private fun </a:t>
-            </a:r>
-            <a:r>
-              <a:rPr lang="en-US" altLang="ko-KR" sz="1600" dirty="0">
-                <a:solidFill>
-                  <a:srgbClr val="00627A"/>
-                </a:solidFill>
-                <a:effectLst/>
-                <a:latin typeface="D2Coding ligature" panose="020B0609020101020101" pitchFamily="49" charset="-127"/>
-                <a:ea typeface="D2Coding ligature" panose="020B0609020101020101" pitchFamily="49" charset="-127"/>
-              </a:rPr>
-              <a:t>main</a:t>
-            </a:r>
-            <a:r>
-              <a:rPr lang="en-US" altLang="ko-KR" sz="1600" dirty="0">
-                <a:solidFill>
-                  <a:srgbClr val="080808"/>
-                </a:solidFill>
-                <a:effectLst/>
-                <a:latin typeface="D2Coding ligature" panose="020B0609020101020101" pitchFamily="49" charset="-127"/>
-                <a:ea typeface="D2Coding ligature" panose="020B0609020101020101" pitchFamily="49" charset="-127"/>
-              </a:rPr>
-              <a:t>(){</a:t>
+              <a:rPr lang="ko-KR" altLang="ko-KR" sz="1600" dirty="0" err="1">
+                <a:solidFill>
+                  <a:srgbClr val="704080"/>
+                </a:solidFill>
+                <a:effectLst/>
+                <a:latin typeface="D2Coding ligature" panose="020B0609020101020101" pitchFamily="49" charset="-127"/>
+                <a:ea typeface="D2Coding ligature" panose="020B0609020101020101" pitchFamily="49" charset="-127"/>
+              </a:rPr>
+              <a:t>return</a:t>
+            </a:r>
+            <a:r>
+              <a:rPr lang="ko-KR" altLang="ko-KR" sz="1600" dirty="0">
+                <a:solidFill>
+                  <a:srgbClr val="704080"/>
+                </a:solidFill>
+                <a:effectLst/>
+                <a:latin typeface="D2Coding ligature" panose="020B0609020101020101" pitchFamily="49" charset="-127"/>
+                <a:ea typeface="D2Coding ligature" panose="020B0609020101020101" pitchFamily="49" charset="-127"/>
+              </a:rPr>
+              <a:t> </a:t>
+            </a:r>
+            <a:r>
+              <a:rPr lang="ko-KR" altLang="ko-KR" sz="1600" dirty="0" err="1">
+                <a:solidFill>
+                  <a:srgbClr val="704080"/>
+                </a:solidFill>
+                <a:effectLst/>
+                <a:latin typeface="D2Coding ligature" panose="020B0609020101020101" pitchFamily="49" charset="-127"/>
+                <a:ea typeface="D2Coding ligature" panose="020B0609020101020101" pitchFamily="49" charset="-127"/>
+              </a:rPr>
+              <a:t>try</a:t>
+            </a:r>
+            <a:r>
+              <a:rPr lang="ko-KR" altLang="ko-KR" sz="1600" dirty="0">
+                <a:solidFill>
+                  <a:srgbClr val="704080"/>
+                </a:solidFill>
+                <a:effectLst/>
+                <a:latin typeface="D2Coding ligature" panose="020B0609020101020101" pitchFamily="49" charset="-127"/>
+                <a:ea typeface="D2Coding ligature" panose="020B0609020101020101" pitchFamily="49" charset="-127"/>
+              </a:rPr>
+              <a:t> </a:t>
+            </a:r>
+            <a:r>
+              <a:rPr lang="ko-KR" altLang="ko-KR" sz="1600" dirty="0">
+                <a:solidFill>
+                  <a:srgbClr val="302A24"/>
+                </a:solidFill>
+                <a:effectLst/>
+                <a:latin typeface="D2Coding ligature" panose="020B0609020101020101" pitchFamily="49" charset="-127"/>
+                <a:ea typeface="D2Coding ligature" panose="020B0609020101020101" pitchFamily="49" charset="-127"/>
+              </a:rPr>
+              <a:t>{</a:t>
             </a:r>
             <a:br>
-              <a:rPr lang="en-US" altLang="ko-KR" sz="1600" dirty="0">
-                <a:solidFill>
-                  <a:srgbClr val="080808"/>
+              <a:rPr lang="ko-KR" altLang="ko-KR" sz="1600" dirty="0">
+                <a:solidFill>
+                  <a:srgbClr val="302A24"/>
                 </a:solidFill>
                 <a:effectLst/>
                 <a:latin typeface="D2Coding ligature" panose="020B0609020101020101" pitchFamily="49" charset="-127"/>
@@ -30921,9 +30968,9 @@
               </a:rPr>
             </a:br>
             <a:r>
-              <a:rPr lang="en-US" altLang="ko-KR" sz="1600" dirty="0">
-                <a:solidFill>
-                  <a:srgbClr val="080808"/>
+              <a:rPr lang="ko-KR" altLang="ko-KR" sz="1600" dirty="0">
+                <a:solidFill>
+                  <a:srgbClr val="302A24"/>
                 </a:solidFill>
                 <a:effectLst/>
                 <a:latin typeface="D2Coding ligature" panose="020B0609020101020101" pitchFamily="49" charset="-127"/>
@@ -30932,20 +30979,498 @@
               <a:t>    </a:t>
             </a:r>
             <a:r>
-              <a:rPr lang="en-US" altLang="ko-KR" sz="1600" dirty="0">
-                <a:solidFill>
-                  <a:srgbClr val="0033B3"/>
-                </a:solidFill>
-                <a:effectLst/>
-                <a:latin typeface="D2Coding ligature" panose="020B0609020101020101" pitchFamily="49" charset="-127"/>
-                <a:ea typeface="D2Coding ligature" panose="020B0609020101020101" pitchFamily="49" charset="-127"/>
-              </a:rPr>
-              <a:t>try </a:t>
-            </a:r>
-            <a:r>
-              <a:rPr lang="en-US" altLang="ko-KR" sz="1600" dirty="0">
-                <a:solidFill>
-                  <a:srgbClr val="080808"/>
+              <a:rPr lang="ko-KR" altLang="ko-KR" sz="1600" dirty="0" err="1">
+                <a:solidFill>
+                  <a:srgbClr val="9C7028"/>
+                </a:solidFill>
+                <a:effectLst/>
+                <a:latin typeface="D2Coding ligature" panose="020B0609020101020101" pitchFamily="49" charset="-127"/>
+                <a:ea typeface="D2Coding ligature" panose="020B0609020101020101" pitchFamily="49" charset="-127"/>
+              </a:rPr>
+              <a:t>println</a:t>
+            </a:r>
+            <a:r>
+              <a:rPr lang="ko-KR" altLang="ko-KR" sz="1600" dirty="0">
+                <a:solidFill>
+                  <a:srgbClr val="302A24"/>
+                </a:solidFill>
+                <a:effectLst/>
+                <a:latin typeface="D2Coding ligature" panose="020B0609020101020101" pitchFamily="49" charset="-127"/>
+                <a:ea typeface="D2Coding ligature" panose="020B0609020101020101" pitchFamily="49" charset="-127"/>
+              </a:rPr>
+              <a:t>(</a:t>
+            </a:r>
+            <a:r>
+              <a:rPr lang="ko-KR" altLang="ko-KR" sz="1600" dirty="0">
+                <a:solidFill>
+                  <a:srgbClr val="486830"/>
+                </a:solidFill>
+                <a:effectLst/>
+                <a:latin typeface="D2Coding ligature" panose="020B0609020101020101" pitchFamily="49" charset="-127"/>
+                <a:ea typeface="D2Coding ligature" panose="020B0609020101020101" pitchFamily="49" charset="-127"/>
+              </a:rPr>
+              <a:t>"</a:t>
+            </a:r>
+            <a:r>
+              <a:rPr lang="ko-KR" altLang="ko-KR" sz="1600" dirty="0" err="1">
+                <a:solidFill>
+                  <a:srgbClr val="486830"/>
+                </a:solidFill>
+                <a:effectLst/>
+                <a:latin typeface="D2Coding ligature" panose="020B0609020101020101" pitchFamily="49" charset="-127"/>
+                <a:ea typeface="D2Coding ligature" panose="020B0609020101020101" pitchFamily="49" charset="-127"/>
+              </a:rPr>
+              <a:t>try</a:t>
+            </a:r>
+            <a:r>
+              <a:rPr lang="ko-KR" altLang="ko-KR" sz="1600" dirty="0">
+                <a:solidFill>
+                  <a:srgbClr val="486830"/>
+                </a:solidFill>
+                <a:effectLst/>
+                <a:latin typeface="D2Coding ligature" panose="020B0609020101020101" pitchFamily="49" charset="-127"/>
+                <a:ea typeface="D2Coding ligature" panose="020B0609020101020101" pitchFamily="49" charset="-127"/>
+              </a:rPr>
+              <a:t> 블록 실행"</a:t>
+            </a:r>
+            <a:r>
+              <a:rPr lang="ko-KR" altLang="ko-KR" sz="1600" dirty="0">
+                <a:solidFill>
+                  <a:srgbClr val="302A24"/>
+                </a:solidFill>
+                <a:effectLst/>
+                <a:latin typeface="D2Coding ligature" panose="020B0609020101020101" pitchFamily="49" charset="-127"/>
+                <a:ea typeface="D2Coding ligature" panose="020B0609020101020101" pitchFamily="49" charset="-127"/>
+              </a:rPr>
+              <a:t>)</a:t>
+            </a:r>
+            <a:br>
+              <a:rPr lang="ko-KR" altLang="ko-KR" sz="1600" dirty="0">
+                <a:solidFill>
+                  <a:srgbClr val="302A24"/>
+                </a:solidFill>
+                <a:effectLst/>
+                <a:latin typeface="D2Coding ligature" panose="020B0609020101020101" pitchFamily="49" charset="-127"/>
+                <a:ea typeface="D2Coding ligature" panose="020B0609020101020101" pitchFamily="49" charset="-127"/>
+              </a:rPr>
+            </a:br>
+            <a:r>
+              <a:rPr lang="ko-KR" altLang="ko-KR" sz="1600" dirty="0">
+                <a:solidFill>
+                  <a:srgbClr val="302A24"/>
+                </a:solidFill>
+                <a:effectLst/>
+                <a:latin typeface="D2Coding ligature" panose="020B0609020101020101" pitchFamily="49" charset="-127"/>
+                <a:ea typeface="D2Coding ligature" panose="020B0609020101020101" pitchFamily="49" charset="-127"/>
+              </a:rPr>
+              <a:t>    </a:t>
+            </a:r>
+            <a:r>
+              <a:rPr lang="ko-KR" altLang="ko-KR" sz="1600" dirty="0" err="1">
+                <a:solidFill>
+                  <a:srgbClr val="704080"/>
+                </a:solidFill>
+                <a:effectLst/>
+                <a:latin typeface="D2Coding ligature" panose="020B0609020101020101" pitchFamily="49" charset="-127"/>
+                <a:ea typeface="D2Coding ligature" panose="020B0609020101020101" pitchFamily="49" charset="-127"/>
+              </a:rPr>
+              <a:t>val</a:t>
+            </a:r>
+            <a:r>
+              <a:rPr lang="ko-KR" altLang="ko-KR" sz="1600" dirty="0">
+                <a:solidFill>
+                  <a:srgbClr val="704080"/>
+                </a:solidFill>
+                <a:effectLst/>
+                <a:latin typeface="D2Coding ligature" panose="020B0609020101020101" pitchFamily="49" charset="-127"/>
+                <a:ea typeface="D2Coding ligature" panose="020B0609020101020101" pitchFamily="49" charset="-127"/>
+              </a:rPr>
+              <a:t> </a:t>
+            </a:r>
+            <a:r>
+              <a:rPr lang="ko-KR" altLang="ko-KR" sz="1600" dirty="0" err="1">
+                <a:solidFill>
+                  <a:srgbClr val="302A24"/>
+                </a:solidFill>
+                <a:effectLst/>
+                <a:latin typeface="D2Coding ligature" panose="020B0609020101020101" pitchFamily="49" charset="-127"/>
+                <a:ea typeface="D2Coding ligature" panose="020B0609020101020101" pitchFamily="49" charset="-127"/>
+              </a:rPr>
+              <a:t>result</a:t>
+            </a:r>
+            <a:r>
+              <a:rPr lang="ko-KR" altLang="ko-KR" sz="1600" dirty="0">
+                <a:solidFill>
+                  <a:srgbClr val="302A24"/>
+                </a:solidFill>
+                <a:effectLst/>
+                <a:latin typeface="D2Coding ligature" panose="020B0609020101020101" pitchFamily="49" charset="-127"/>
+                <a:ea typeface="D2Coding ligature" panose="020B0609020101020101" pitchFamily="49" charset="-127"/>
+              </a:rPr>
+              <a:t> = </a:t>
+            </a:r>
+            <a:r>
+              <a:rPr lang="ko-KR" altLang="ko-KR" sz="1600" dirty="0">
+                <a:solidFill>
+                  <a:srgbClr val="4868FF"/>
+                </a:solidFill>
+                <a:effectLst/>
+                <a:latin typeface="D2Coding ligature" panose="020B0609020101020101" pitchFamily="49" charset="-127"/>
+                <a:ea typeface="D2Coding ligature" panose="020B0609020101020101" pitchFamily="49" charset="-127"/>
+              </a:rPr>
+              <a:t>10 </a:t>
+            </a:r>
+            <a:r>
+              <a:rPr lang="ko-KR" altLang="ko-KR" sz="1600" dirty="0">
+                <a:solidFill>
+                  <a:srgbClr val="302A24"/>
+                </a:solidFill>
+                <a:effectLst/>
+                <a:latin typeface="D2Coding ligature" panose="020B0609020101020101" pitchFamily="49" charset="-127"/>
+                <a:ea typeface="D2Coding ligature" panose="020B0609020101020101" pitchFamily="49" charset="-127"/>
+              </a:rPr>
+              <a:t>/ </a:t>
+            </a:r>
+            <a:r>
+              <a:rPr lang="ko-KR" altLang="ko-KR" sz="1600" dirty="0">
+                <a:solidFill>
+                  <a:srgbClr val="4868FF"/>
+                </a:solidFill>
+                <a:effectLst/>
+                <a:latin typeface="D2Coding ligature" panose="020B0609020101020101" pitchFamily="49" charset="-127"/>
+                <a:ea typeface="D2Coding ligature" panose="020B0609020101020101" pitchFamily="49" charset="-127"/>
+              </a:rPr>
+              <a:t>0</a:t>
+            </a:r>
+            <a:br>
+              <a:rPr lang="ko-KR" altLang="ko-KR" sz="1600" dirty="0">
+                <a:solidFill>
+                  <a:srgbClr val="4868FF"/>
+                </a:solidFill>
+                <a:effectLst/>
+                <a:latin typeface="D2Coding ligature" panose="020B0609020101020101" pitchFamily="49" charset="-127"/>
+                <a:ea typeface="D2Coding ligature" panose="020B0609020101020101" pitchFamily="49" charset="-127"/>
+              </a:rPr>
+            </a:br>
+            <a:r>
+              <a:rPr lang="ko-KR" altLang="ko-KR" sz="1600" dirty="0">
+                <a:solidFill>
+                  <a:srgbClr val="4868FF"/>
+                </a:solidFill>
+                <a:effectLst/>
+                <a:latin typeface="D2Coding ligature" panose="020B0609020101020101" pitchFamily="49" charset="-127"/>
+                <a:ea typeface="D2Coding ligature" panose="020B0609020101020101" pitchFamily="49" charset="-127"/>
+              </a:rPr>
+              <a:t>    </a:t>
+            </a:r>
+            <a:r>
+              <a:rPr lang="ko-KR" altLang="ko-KR" sz="1600" dirty="0" err="1">
+                <a:solidFill>
+                  <a:srgbClr val="302A24"/>
+                </a:solidFill>
+                <a:effectLst/>
+                <a:latin typeface="D2Coding ligature" panose="020B0609020101020101" pitchFamily="49" charset="-127"/>
+                <a:ea typeface="D2Coding ligature" panose="020B0609020101020101" pitchFamily="49" charset="-127"/>
+              </a:rPr>
+              <a:t>result</a:t>
+            </a:r>
+            <a:br>
+              <a:rPr lang="ko-KR" altLang="ko-KR" sz="1600" dirty="0">
+                <a:solidFill>
+                  <a:srgbClr val="302A24"/>
+                </a:solidFill>
+                <a:effectLst/>
+                <a:latin typeface="D2Coding ligature" panose="020B0609020101020101" pitchFamily="49" charset="-127"/>
+                <a:ea typeface="D2Coding ligature" panose="020B0609020101020101" pitchFamily="49" charset="-127"/>
+              </a:rPr>
+            </a:br>
+            <a:r>
+              <a:rPr lang="ko-KR" altLang="ko-KR" sz="1600" dirty="0">
+                <a:solidFill>
+                  <a:srgbClr val="302A24"/>
+                </a:solidFill>
+                <a:effectLst/>
+                <a:latin typeface="D2Coding ligature" panose="020B0609020101020101" pitchFamily="49" charset="-127"/>
+                <a:ea typeface="D2Coding ligature" panose="020B0609020101020101" pitchFamily="49" charset="-127"/>
+              </a:rPr>
+              <a:t>} </a:t>
+            </a:r>
+            <a:r>
+              <a:rPr lang="ko-KR" altLang="ko-KR" sz="1600" dirty="0" err="1">
+                <a:solidFill>
+                  <a:srgbClr val="704080"/>
+                </a:solidFill>
+                <a:effectLst/>
+                <a:latin typeface="D2Coding ligature" panose="020B0609020101020101" pitchFamily="49" charset="-127"/>
+                <a:ea typeface="D2Coding ligature" panose="020B0609020101020101" pitchFamily="49" charset="-127"/>
+              </a:rPr>
+              <a:t>catch</a:t>
+            </a:r>
+            <a:r>
+              <a:rPr lang="ko-KR" altLang="ko-KR" sz="1600" dirty="0">
+                <a:solidFill>
+                  <a:srgbClr val="704080"/>
+                </a:solidFill>
+                <a:effectLst/>
+                <a:latin typeface="D2Coding ligature" panose="020B0609020101020101" pitchFamily="49" charset="-127"/>
+                <a:ea typeface="D2Coding ligature" panose="020B0609020101020101" pitchFamily="49" charset="-127"/>
+              </a:rPr>
+              <a:t> </a:t>
+            </a:r>
+            <a:r>
+              <a:rPr lang="ko-KR" altLang="ko-KR" sz="1600" dirty="0">
+                <a:solidFill>
+                  <a:srgbClr val="302A24"/>
+                </a:solidFill>
+                <a:effectLst/>
+                <a:latin typeface="D2Coding ligature" panose="020B0609020101020101" pitchFamily="49" charset="-127"/>
+                <a:ea typeface="D2Coding ligature" panose="020B0609020101020101" pitchFamily="49" charset="-127"/>
+              </a:rPr>
+              <a:t>(</a:t>
+            </a:r>
+            <a:r>
+              <a:rPr lang="ko-KR" altLang="ko-KR" sz="1600" dirty="0" err="1">
+                <a:solidFill>
+                  <a:srgbClr val="302A24"/>
+                </a:solidFill>
+                <a:effectLst/>
+                <a:latin typeface="D2Coding ligature" panose="020B0609020101020101" pitchFamily="49" charset="-127"/>
+                <a:ea typeface="D2Coding ligature" panose="020B0609020101020101" pitchFamily="49" charset="-127"/>
+              </a:rPr>
+              <a:t>e</a:t>
+            </a:r>
+            <a:r>
+              <a:rPr lang="ko-KR" altLang="ko-KR" sz="1600" dirty="0">
+                <a:solidFill>
+                  <a:srgbClr val="302A24"/>
+                </a:solidFill>
+                <a:effectLst/>
+                <a:latin typeface="D2Coding ligature" panose="020B0609020101020101" pitchFamily="49" charset="-127"/>
+                <a:ea typeface="D2Coding ligature" panose="020B0609020101020101" pitchFamily="49" charset="-127"/>
+              </a:rPr>
+              <a:t>: </a:t>
+            </a:r>
+            <a:r>
+              <a:rPr lang="ko-KR" altLang="ko-KR" sz="1600" i="1" dirty="0" err="1">
+                <a:solidFill>
+                  <a:srgbClr val="9C7028"/>
+                </a:solidFill>
+                <a:effectLst/>
+                <a:latin typeface="D2Coding ligature" panose="020B0609020101020101" pitchFamily="49" charset="-127"/>
+                <a:ea typeface="D2Coding ligature" panose="020B0609020101020101" pitchFamily="49" charset="-127"/>
+              </a:rPr>
+              <a:t>Exception</a:t>
+            </a:r>
+            <a:r>
+              <a:rPr lang="ko-KR" altLang="ko-KR" sz="1600" dirty="0">
+                <a:solidFill>
+                  <a:srgbClr val="302A24"/>
+                </a:solidFill>
+                <a:effectLst/>
+                <a:latin typeface="D2Coding ligature" panose="020B0609020101020101" pitchFamily="49" charset="-127"/>
+                <a:ea typeface="D2Coding ligature" panose="020B0609020101020101" pitchFamily="49" charset="-127"/>
+              </a:rPr>
+              <a:t>) {</a:t>
+            </a:r>
+            <a:br>
+              <a:rPr lang="ko-KR" altLang="ko-KR" sz="1600" dirty="0">
+                <a:solidFill>
+                  <a:srgbClr val="302A24"/>
+                </a:solidFill>
+                <a:effectLst/>
+                <a:latin typeface="D2Coding ligature" panose="020B0609020101020101" pitchFamily="49" charset="-127"/>
+                <a:ea typeface="D2Coding ligature" panose="020B0609020101020101" pitchFamily="49" charset="-127"/>
+              </a:rPr>
+            </a:br>
+            <a:r>
+              <a:rPr lang="ko-KR" altLang="ko-KR" sz="1600" dirty="0">
+                <a:solidFill>
+                  <a:srgbClr val="302A24"/>
+                </a:solidFill>
+                <a:effectLst/>
+                <a:latin typeface="D2Coding ligature" panose="020B0609020101020101" pitchFamily="49" charset="-127"/>
+                <a:ea typeface="D2Coding ligature" panose="020B0609020101020101" pitchFamily="49" charset="-127"/>
+              </a:rPr>
+              <a:t>    </a:t>
+            </a:r>
+            <a:r>
+              <a:rPr lang="ko-KR" altLang="ko-KR" sz="1600" dirty="0" err="1">
+                <a:solidFill>
+                  <a:srgbClr val="9C7028"/>
+                </a:solidFill>
+                <a:effectLst/>
+                <a:latin typeface="D2Coding ligature" panose="020B0609020101020101" pitchFamily="49" charset="-127"/>
+                <a:ea typeface="D2Coding ligature" panose="020B0609020101020101" pitchFamily="49" charset="-127"/>
+              </a:rPr>
+              <a:t>println</a:t>
+            </a:r>
+            <a:r>
+              <a:rPr lang="ko-KR" altLang="ko-KR" sz="1600" dirty="0">
+                <a:solidFill>
+                  <a:srgbClr val="302A24"/>
+                </a:solidFill>
+                <a:effectLst/>
+                <a:latin typeface="D2Coding ligature" panose="020B0609020101020101" pitchFamily="49" charset="-127"/>
+                <a:ea typeface="D2Coding ligature" panose="020B0609020101020101" pitchFamily="49" charset="-127"/>
+              </a:rPr>
+              <a:t>(</a:t>
+            </a:r>
+            <a:r>
+              <a:rPr lang="ko-KR" altLang="ko-KR" sz="1600" dirty="0">
+                <a:solidFill>
+                  <a:srgbClr val="486830"/>
+                </a:solidFill>
+                <a:effectLst/>
+                <a:latin typeface="D2Coding ligature" panose="020B0609020101020101" pitchFamily="49" charset="-127"/>
+                <a:ea typeface="D2Coding ligature" panose="020B0609020101020101" pitchFamily="49" charset="-127"/>
+              </a:rPr>
+              <a:t>"예외 발생: </a:t>
+            </a:r>
+            <a:r>
+              <a:rPr lang="ko-KR" altLang="ko-KR" sz="1600" dirty="0">
+                <a:solidFill>
+                  <a:srgbClr val="174BE6"/>
+                </a:solidFill>
+                <a:effectLst/>
+                <a:latin typeface="D2Coding ligature" panose="020B0609020101020101" pitchFamily="49" charset="-127"/>
+                <a:ea typeface="D2Coding ligature" panose="020B0609020101020101" pitchFamily="49" charset="-127"/>
+              </a:rPr>
+              <a:t>${</a:t>
+            </a:r>
+            <a:r>
+              <a:rPr lang="ko-KR" altLang="ko-KR" sz="1600" dirty="0" err="1">
+                <a:solidFill>
+                  <a:srgbClr val="302A24"/>
+                </a:solidFill>
+                <a:effectLst/>
+                <a:latin typeface="D2Coding ligature" panose="020B0609020101020101" pitchFamily="49" charset="-127"/>
+                <a:ea typeface="D2Coding ligature" panose="020B0609020101020101" pitchFamily="49" charset="-127"/>
+              </a:rPr>
+              <a:t>e.</a:t>
+            </a:r>
+            <a:r>
+              <a:rPr lang="ko-KR" altLang="ko-KR" sz="1600" dirty="0" err="1">
+                <a:solidFill>
+                  <a:srgbClr val="B45050"/>
+                </a:solidFill>
+                <a:effectLst/>
+                <a:latin typeface="D2Coding ligature" panose="020B0609020101020101" pitchFamily="49" charset="-127"/>
+                <a:ea typeface="D2Coding ligature" panose="020B0609020101020101" pitchFamily="49" charset="-127"/>
+              </a:rPr>
+              <a:t>message</a:t>
+            </a:r>
+            <a:r>
+              <a:rPr lang="ko-KR" altLang="ko-KR" sz="1600" dirty="0">
+                <a:solidFill>
+                  <a:srgbClr val="174BE6"/>
+                </a:solidFill>
+                <a:effectLst/>
+                <a:latin typeface="D2Coding ligature" panose="020B0609020101020101" pitchFamily="49" charset="-127"/>
+                <a:ea typeface="D2Coding ligature" panose="020B0609020101020101" pitchFamily="49" charset="-127"/>
+              </a:rPr>
+              <a:t>}</a:t>
+            </a:r>
+            <a:r>
+              <a:rPr lang="ko-KR" altLang="ko-KR" sz="1600" dirty="0">
+                <a:solidFill>
+                  <a:srgbClr val="486830"/>
+                </a:solidFill>
+                <a:effectLst/>
+                <a:latin typeface="D2Coding ligature" panose="020B0609020101020101" pitchFamily="49" charset="-127"/>
+                <a:ea typeface="D2Coding ligature" panose="020B0609020101020101" pitchFamily="49" charset="-127"/>
+              </a:rPr>
+              <a:t>"</a:t>
+            </a:r>
+            <a:r>
+              <a:rPr lang="ko-KR" altLang="ko-KR" sz="1600" dirty="0">
+                <a:solidFill>
+                  <a:srgbClr val="302A24"/>
+                </a:solidFill>
+                <a:effectLst/>
+                <a:latin typeface="D2Coding ligature" panose="020B0609020101020101" pitchFamily="49" charset="-127"/>
+                <a:ea typeface="D2Coding ligature" panose="020B0609020101020101" pitchFamily="49" charset="-127"/>
+              </a:rPr>
+              <a:t>)</a:t>
+            </a:r>
+            <a:br>
+              <a:rPr lang="ko-KR" altLang="ko-KR" sz="1600" dirty="0">
+                <a:solidFill>
+                  <a:srgbClr val="302A24"/>
+                </a:solidFill>
+                <a:effectLst/>
+                <a:latin typeface="D2Coding ligature" panose="020B0609020101020101" pitchFamily="49" charset="-127"/>
+                <a:ea typeface="D2Coding ligature" panose="020B0609020101020101" pitchFamily="49" charset="-127"/>
+              </a:rPr>
+            </a:br>
+            <a:r>
+              <a:rPr lang="ko-KR" altLang="ko-KR" sz="1600" dirty="0">
+                <a:solidFill>
+                  <a:srgbClr val="302A24"/>
+                </a:solidFill>
+                <a:effectLst/>
+                <a:latin typeface="D2Coding ligature" panose="020B0609020101020101" pitchFamily="49" charset="-127"/>
+                <a:ea typeface="D2Coding ligature" panose="020B0609020101020101" pitchFamily="49" charset="-127"/>
+              </a:rPr>
+              <a:t>    -</a:t>
+            </a:r>
+            <a:r>
+              <a:rPr lang="ko-KR" altLang="ko-KR" sz="1600" dirty="0">
+                <a:solidFill>
+                  <a:srgbClr val="4868FF"/>
+                </a:solidFill>
+                <a:effectLst/>
+                <a:latin typeface="D2Coding ligature" panose="020B0609020101020101" pitchFamily="49" charset="-127"/>
+                <a:ea typeface="D2Coding ligature" panose="020B0609020101020101" pitchFamily="49" charset="-127"/>
+              </a:rPr>
+              <a:t>1</a:t>
+            </a:r>
+            <a:br>
+              <a:rPr lang="ko-KR" altLang="ko-KR" sz="1600" dirty="0">
+                <a:solidFill>
+                  <a:srgbClr val="4868FF"/>
+                </a:solidFill>
+                <a:effectLst/>
+                <a:latin typeface="D2Coding ligature" panose="020B0609020101020101" pitchFamily="49" charset="-127"/>
+                <a:ea typeface="D2Coding ligature" panose="020B0609020101020101" pitchFamily="49" charset="-127"/>
+              </a:rPr>
+            </a:br>
+            <a:r>
+              <a:rPr lang="ko-KR" altLang="ko-KR" sz="1600" dirty="0">
+                <a:solidFill>
+                  <a:srgbClr val="302A24"/>
+                </a:solidFill>
+                <a:effectLst/>
+                <a:latin typeface="D2Coding ligature" panose="020B0609020101020101" pitchFamily="49" charset="-127"/>
+                <a:ea typeface="D2Coding ligature" panose="020B0609020101020101" pitchFamily="49" charset="-127"/>
+              </a:rPr>
+              <a:t>} </a:t>
+            </a:r>
+            <a:r>
+              <a:rPr lang="ko-KR" altLang="ko-KR" sz="1600" dirty="0" err="1">
+                <a:solidFill>
+                  <a:srgbClr val="704080"/>
+                </a:solidFill>
+                <a:effectLst/>
+                <a:latin typeface="D2Coding ligature" panose="020B0609020101020101" pitchFamily="49" charset="-127"/>
+                <a:ea typeface="D2Coding ligature" panose="020B0609020101020101" pitchFamily="49" charset="-127"/>
+              </a:rPr>
+              <a:t>finally</a:t>
+            </a:r>
+            <a:r>
+              <a:rPr lang="ko-KR" altLang="ko-KR" sz="1600" dirty="0">
+                <a:solidFill>
+                  <a:srgbClr val="704080"/>
+                </a:solidFill>
+                <a:effectLst/>
+                <a:latin typeface="D2Coding ligature" panose="020B0609020101020101" pitchFamily="49" charset="-127"/>
+                <a:ea typeface="D2Coding ligature" panose="020B0609020101020101" pitchFamily="49" charset="-127"/>
+              </a:rPr>
+              <a:t> </a:t>
+            </a:r>
+            <a:r>
+              <a:rPr lang="ko-KR" altLang="ko-KR" sz="1600" dirty="0">
+                <a:solidFill>
+                  <a:srgbClr val="302A24"/>
                 </a:solidFill>
                 <a:effectLst/>
                 <a:latin typeface="D2Coding ligature" panose="020B0609020101020101" pitchFamily="49" charset="-127"/>
@@ -30954,9 +31479,9 @@
               <a:t>{</a:t>
             </a:r>
             <a:br>
-              <a:rPr lang="en-US" altLang="ko-KR" sz="1600" dirty="0">
-                <a:solidFill>
-                  <a:srgbClr val="080808"/>
+              <a:rPr lang="ko-KR" altLang="ko-KR" sz="1600" dirty="0">
+                <a:solidFill>
+                  <a:srgbClr val="302A24"/>
                 </a:solidFill>
                 <a:effectLst/>
                 <a:latin typeface="D2Coding ligature" panose="020B0609020101020101" pitchFamily="49" charset="-127"/>
@@ -30964,20 +31489,20 @@
               </a:rPr>
             </a:br>
             <a:r>
-              <a:rPr lang="en-US" altLang="ko-KR" sz="1600" dirty="0">
-                <a:solidFill>
-                  <a:srgbClr val="080808"/>
-                </a:solidFill>
-                <a:effectLst/>
-                <a:latin typeface="D2Coding ligature" panose="020B0609020101020101" pitchFamily="49" charset="-127"/>
-                <a:ea typeface="D2Coding ligature" panose="020B0609020101020101" pitchFamily="49" charset="-127"/>
-              </a:rPr>
-              <a:t>        </a:t>
-            </a:r>
-            <a:r>
-              <a:rPr lang="en-US" altLang="ko-KR" sz="1600" i="1" dirty="0" err="1">
-                <a:solidFill>
-                  <a:srgbClr val="00627A"/>
+              <a:rPr lang="ko-KR" altLang="ko-KR" sz="1600" dirty="0">
+                <a:solidFill>
+                  <a:srgbClr val="302A24"/>
+                </a:solidFill>
+                <a:effectLst/>
+                <a:latin typeface="D2Coding ligature" panose="020B0609020101020101" pitchFamily="49" charset="-127"/>
+                <a:ea typeface="D2Coding ligature" panose="020B0609020101020101" pitchFamily="49" charset="-127"/>
+              </a:rPr>
+              <a:t>    </a:t>
+            </a:r>
+            <a:r>
+              <a:rPr lang="ko-KR" altLang="ko-KR" sz="1600" dirty="0" err="1">
+                <a:solidFill>
+                  <a:srgbClr val="9C7028"/>
                 </a:solidFill>
                 <a:effectLst/>
                 <a:latin typeface="D2Coding ligature" panose="020B0609020101020101" pitchFamily="49" charset="-127"/>
@@ -30986,9 +31511,9 @@
               <a:t>println</a:t>
             </a:r>
             <a:r>
-              <a:rPr lang="en-US" altLang="ko-KR" sz="1600" dirty="0">
-                <a:solidFill>
-                  <a:srgbClr val="080808"/>
+              <a:rPr lang="ko-KR" altLang="ko-KR" sz="1600" dirty="0">
+                <a:solidFill>
+                  <a:srgbClr val="302A24"/>
                 </a:solidFill>
                 <a:effectLst/>
                 <a:latin typeface="D2Coding ligature" panose="020B0609020101020101" pitchFamily="49" charset="-127"/>
@@ -30997,31 +31522,9 @@
               <a:t>(</a:t>
             </a:r>
             <a:r>
-              <a:rPr lang="en-US" altLang="ko-KR" sz="1600" dirty="0">
-                <a:solidFill>
-                  <a:srgbClr val="067D17"/>
-                </a:solidFill>
-                <a:effectLst/>
-                <a:latin typeface="D2Coding ligature" panose="020B0609020101020101" pitchFamily="49" charset="-127"/>
-                <a:ea typeface="D2Coding ligature" panose="020B0609020101020101" pitchFamily="49" charset="-127"/>
-              </a:rPr>
-              <a:t>"try </a:t>
-            </a:r>
-            <a:r>
-              <a:rPr lang="ko-KR" altLang="en-US" sz="1600" dirty="0">
-                <a:solidFill>
-                  <a:srgbClr val="067D17"/>
-                </a:solidFill>
-                <a:effectLst/>
-                <a:latin typeface="D2Coding ligature" panose="020B0609020101020101" pitchFamily="49" charset="-127"/>
-                <a:ea typeface="D2Coding ligature" panose="020B0609020101020101" pitchFamily="49" charset="-127"/>
-              </a:rPr>
-              <a:t>블록 실행</a:t>
-            </a:r>
-            <a:r>
-              <a:rPr lang="en-US" altLang="ko-KR" sz="1600" dirty="0">
-                <a:solidFill>
-                  <a:srgbClr val="067D17"/>
+              <a:rPr lang="ko-KR" altLang="ko-KR" sz="1600" dirty="0">
+                <a:solidFill>
+                  <a:srgbClr val="486830"/>
                 </a:solidFill>
                 <a:effectLst/>
                 <a:latin typeface="D2Coding ligature" panose="020B0609020101020101" pitchFamily="49" charset="-127"/>
@@ -31030,9 +31533,31 @@
               <a:t>"</a:t>
             </a:r>
             <a:r>
-              <a:rPr lang="en-US" altLang="ko-KR" sz="1600" dirty="0">
-                <a:solidFill>
-                  <a:srgbClr val="080808"/>
+              <a:rPr lang="ko-KR" altLang="ko-KR" sz="1600" dirty="0" err="1">
+                <a:solidFill>
+                  <a:srgbClr val="486830"/>
+                </a:solidFill>
+                <a:effectLst/>
+                <a:latin typeface="D2Coding ligature" panose="020B0609020101020101" pitchFamily="49" charset="-127"/>
+                <a:ea typeface="D2Coding ligature" panose="020B0609020101020101" pitchFamily="49" charset="-127"/>
+              </a:rPr>
+              <a:t>finally</a:t>
+            </a:r>
+            <a:r>
+              <a:rPr lang="ko-KR" altLang="ko-KR" sz="1600" dirty="0">
+                <a:solidFill>
+                  <a:srgbClr val="486830"/>
+                </a:solidFill>
+                <a:effectLst/>
+                <a:latin typeface="D2Coding ligature" panose="020B0609020101020101" pitchFamily="49" charset="-127"/>
+                <a:ea typeface="D2Coding ligature" panose="020B0609020101020101" pitchFamily="49" charset="-127"/>
+              </a:rPr>
+              <a:t> 실행 (항상 실행됨)"</a:t>
+            </a:r>
+            <a:r>
+              <a:rPr lang="ko-KR" altLang="ko-KR" sz="1600" dirty="0">
+                <a:solidFill>
+                  <a:srgbClr val="302A24"/>
                 </a:solidFill>
                 <a:effectLst/>
                 <a:latin typeface="D2Coding ligature" panose="020B0609020101020101" pitchFamily="49" charset="-127"/>
@@ -31041,9 +31566,9 @@
               <a:t>)</a:t>
             </a:r>
             <a:br>
-              <a:rPr lang="en-US" altLang="ko-KR" sz="1600" dirty="0">
-                <a:solidFill>
-                  <a:srgbClr val="080808"/>
+              <a:rPr lang="ko-KR" altLang="ko-KR" sz="1600" dirty="0">
+                <a:solidFill>
+                  <a:srgbClr val="302A24"/>
                 </a:solidFill>
                 <a:effectLst/>
                 <a:latin typeface="D2Coding ligature" panose="020B0609020101020101" pitchFamily="49" charset="-127"/>
@@ -31051,630 +31576,20 @@
               </a:rPr>
             </a:br>
             <a:r>
-              <a:rPr lang="en-US" altLang="ko-KR" sz="1600" dirty="0">
-                <a:solidFill>
-                  <a:srgbClr val="080808"/>
-                </a:solidFill>
-                <a:effectLst/>
-                <a:latin typeface="D2Coding ligature" panose="020B0609020101020101" pitchFamily="49" charset="-127"/>
-                <a:ea typeface="D2Coding ligature" panose="020B0609020101020101" pitchFamily="49" charset="-127"/>
-              </a:rPr>
-              <a:t>        </a:t>
-            </a:r>
-            <a:r>
-              <a:rPr lang="en-US" altLang="ko-KR" sz="1600" dirty="0" err="1">
-                <a:solidFill>
-                  <a:srgbClr val="0033B3"/>
-                </a:solidFill>
-                <a:effectLst/>
-                <a:latin typeface="D2Coding ligature" panose="020B0609020101020101" pitchFamily="49" charset="-127"/>
-                <a:ea typeface="D2Coding ligature" panose="020B0609020101020101" pitchFamily="49" charset="-127"/>
-              </a:rPr>
-              <a:t>val</a:t>
-            </a:r>
-            <a:r>
-              <a:rPr lang="en-US" altLang="ko-KR" sz="1600" dirty="0">
-                <a:solidFill>
-                  <a:srgbClr val="0033B3"/>
-                </a:solidFill>
-                <a:effectLst/>
-                <a:latin typeface="D2Coding ligature" panose="020B0609020101020101" pitchFamily="49" charset="-127"/>
-                <a:ea typeface="D2Coding ligature" panose="020B0609020101020101" pitchFamily="49" charset="-127"/>
-              </a:rPr>
-              <a:t> </a:t>
-            </a:r>
-            <a:r>
-              <a:rPr lang="en-US" altLang="ko-KR" sz="1600" dirty="0">
-                <a:solidFill>
-                  <a:srgbClr val="000000"/>
-                </a:solidFill>
-                <a:effectLst/>
-                <a:latin typeface="D2Coding ligature" panose="020B0609020101020101" pitchFamily="49" charset="-127"/>
-                <a:ea typeface="D2Coding ligature" panose="020B0609020101020101" pitchFamily="49" charset="-127"/>
-              </a:rPr>
-              <a:t>result </a:t>
-            </a:r>
-            <a:r>
-              <a:rPr lang="en-US" altLang="ko-KR" sz="1600" dirty="0">
-                <a:solidFill>
-                  <a:srgbClr val="080808"/>
-                </a:solidFill>
-                <a:effectLst/>
-                <a:latin typeface="D2Coding ligature" panose="020B0609020101020101" pitchFamily="49" charset="-127"/>
-                <a:ea typeface="D2Coding ligature" panose="020B0609020101020101" pitchFamily="49" charset="-127"/>
-              </a:rPr>
-              <a:t>= </a:t>
-            </a:r>
-            <a:r>
-              <a:rPr lang="en-US" altLang="ko-KR" sz="1600" dirty="0">
-                <a:solidFill>
-                  <a:srgbClr val="1750EB"/>
-                </a:solidFill>
-                <a:effectLst/>
-                <a:latin typeface="D2Coding ligature" panose="020B0609020101020101" pitchFamily="49" charset="-127"/>
-                <a:ea typeface="D2Coding ligature" panose="020B0609020101020101" pitchFamily="49" charset="-127"/>
-              </a:rPr>
-              <a:t>10 </a:t>
-            </a:r>
-            <a:r>
-              <a:rPr lang="en-US" altLang="ko-KR" sz="1600" dirty="0">
-                <a:solidFill>
-                  <a:srgbClr val="080808"/>
-                </a:solidFill>
-                <a:effectLst/>
-                <a:latin typeface="D2Coding ligature" panose="020B0609020101020101" pitchFamily="49" charset="-127"/>
-                <a:ea typeface="D2Coding ligature" panose="020B0609020101020101" pitchFamily="49" charset="-127"/>
-              </a:rPr>
-              <a:t>/ </a:t>
-            </a:r>
-            <a:r>
-              <a:rPr lang="en-US" altLang="ko-KR" sz="1600" dirty="0">
-                <a:solidFill>
-                  <a:srgbClr val="1750EB"/>
-                </a:solidFill>
-                <a:effectLst/>
-                <a:latin typeface="D2Coding ligature" panose="020B0609020101020101" pitchFamily="49" charset="-127"/>
-                <a:ea typeface="D2Coding ligature" panose="020B0609020101020101" pitchFamily="49" charset="-127"/>
-              </a:rPr>
-              <a:t>2</a:t>
+              <a:rPr lang="ko-KR" altLang="ko-KR" sz="1600" dirty="0">
+                <a:solidFill>
+                  <a:srgbClr val="302A24"/>
+                </a:solidFill>
+                <a:effectLst/>
+                <a:latin typeface="D2Coding ligature" panose="020B0609020101020101" pitchFamily="49" charset="-127"/>
+                <a:ea typeface="D2Coding ligature" panose="020B0609020101020101" pitchFamily="49" charset="-127"/>
+              </a:rPr>
+              <a:t>}</a:t>
             </a:r>
             <a:br>
-              <a:rPr lang="en-US" altLang="ko-KR" sz="1600" dirty="0">
-                <a:solidFill>
-                  <a:srgbClr val="1750EB"/>
-                </a:solidFill>
-                <a:effectLst/>
-                <a:latin typeface="D2Coding ligature" panose="020B0609020101020101" pitchFamily="49" charset="-127"/>
-                <a:ea typeface="D2Coding ligature" panose="020B0609020101020101" pitchFamily="49" charset="-127"/>
-              </a:rPr>
-            </a:br>
-            <a:r>
-              <a:rPr lang="en-US" altLang="ko-KR" sz="1600" dirty="0">
-                <a:solidFill>
-                  <a:srgbClr val="1750EB"/>
-                </a:solidFill>
-                <a:effectLst/>
-                <a:latin typeface="D2Coding ligature" panose="020B0609020101020101" pitchFamily="49" charset="-127"/>
-                <a:ea typeface="D2Coding ligature" panose="020B0609020101020101" pitchFamily="49" charset="-127"/>
-              </a:rPr>
-              <a:t>        </a:t>
-            </a:r>
-            <a:r>
-              <a:rPr lang="en-US" altLang="ko-KR" sz="1600" i="1" dirty="0" err="1">
-                <a:solidFill>
-                  <a:srgbClr val="00627A"/>
-                </a:solidFill>
-                <a:effectLst/>
-                <a:latin typeface="D2Coding ligature" panose="020B0609020101020101" pitchFamily="49" charset="-127"/>
-                <a:ea typeface="D2Coding ligature" panose="020B0609020101020101" pitchFamily="49" charset="-127"/>
-              </a:rPr>
-              <a:t>println</a:t>
-            </a:r>
-            <a:r>
-              <a:rPr lang="en-US" altLang="ko-KR" sz="1600" dirty="0">
-                <a:solidFill>
-                  <a:srgbClr val="080808"/>
-                </a:solidFill>
-                <a:effectLst/>
-                <a:latin typeface="D2Coding ligature" panose="020B0609020101020101" pitchFamily="49" charset="-127"/>
-                <a:ea typeface="D2Coding ligature" panose="020B0609020101020101" pitchFamily="49" charset="-127"/>
-              </a:rPr>
-              <a:t>(</a:t>
-            </a:r>
-            <a:r>
-              <a:rPr lang="en-US" altLang="ko-KR" sz="1600" dirty="0">
-                <a:solidFill>
-                  <a:srgbClr val="067D17"/>
-                </a:solidFill>
-                <a:effectLst/>
-                <a:latin typeface="D2Coding ligature" panose="020B0609020101020101" pitchFamily="49" charset="-127"/>
-                <a:ea typeface="D2Coding ligature" panose="020B0609020101020101" pitchFamily="49" charset="-127"/>
-              </a:rPr>
-              <a:t>"</a:t>
-            </a:r>
-            <a:r>
-              <a:rPr lang="ko-KR" altLang="en-US" sz="1600" dirty="0">
-                <a:solidFill>
-                  <a:srgbClr val="067D17"/>
-                </a:solidFill>
-                <a:effectLst/>
-                <a:latin typeface="D2Coding ligature" panose="020B0609020101020101" pitchFamily="49" charset="-127"/>
-                <a:ea typeface="D2Coding ligature" panose="020B0609020101020101" pitchFamily="49" charset="-127"/>
-              </a:rPr>
-              <a:t>결과</a:t>
-            </a:r>
-            <a:r>
-              <a:rPr lang="en-US" altLang="ko-KR" sz="1600" dirty="0">
-                <a:solidFill>
-                  <a:srgbClr val="067D17"/>
-                </a:solidFill>
-                <a:effectLst/>
-                <a:latin typeface="D2Coding ligature" panose="020B0609020101020101" pitchFamily="49" charset="-127"/>
-                <a:ea typeface="D2Coding ligature" panose="020B0609020101020101" pitchFamily="49" charset="-127"/>
-              </a:rPr>
-              <a:t>: </a:t>
-            </a:r>
-            <a:r>
-              <a:rPr lang="en-US" altLang="ko-KR" sz="1600" dirty="0">
-                <a:solidFill>
-                  <a:srgbClr val="0037A6"/>
-                </a:solidFill>
-                <a:effectLst/>
-                <a:latin typeface="D2Coding ligature" panose="020B0609020101020101" pitchFamily="49" charset="-127"/>
-                <a:ea typeface="D2Coding ligature" panose="020B0609020101020101" pitchFamily="49" charset="-127"/>
-              </a:rPr>
-              <a:t>$</a:t>
-            </a:r>
-            <a:r>
-              <a:rPr lang="en-US" altLang="ko-KR" sz="1600" dirty="0">
-                <a:solidFill>
-                  <a:srgbClr val="000000"/>
-                </a:solidFill>
-                <a:effectLst/>
-                <a:latin typeface="D2Coding ligature" panose="020B0609020101020101" pitchFamily="49" charset="-127"/>
-                <a:ea typeface="D2Coding ligature" panose="020B0609020101020101" pitchFamily="49" charset="-127"/>
-              </a:rPr>
-              <a:t>result</a:t>
-            </a:r>
-            <a:r>
-              <a:rPr lang="en-US" altLang="ko-KR" sz="1600" dirty="0">
-                <a:solidFill>
-                  <a:srgbClr val="067D17"/>
-                </a:solidFill>
-                <a:effectLst/>
-                <a:latin typeface="D2Coding ligature" panose="020B0609020101020101" pitchFamily="49" charset="-127"/>
-                <a:ea typeface="D2Coding ligature" panose="020B0609020101020101" pitchFamily="49" charset="-127"/>
-              </a:rPr>
-              <a:t>"</a:t>
-            </a:r>
-            <a:r>
-              <a:rPr lang="en-US" altLang="ko-KR" sz="1600" dirty="0">
-                <a:solidFill>
-                  <a:srgbClr val="080808"/>
-                </a:solidFill>
-                <a:effectLst/>
-                <a:latin typeface="D2Coding ligature" panose="020B0609020101020101" pitchFamily="49" charset="-127"/>
-                <a:ea typeface="D2Coding ligature" panose="020B0609020101020101" pitchFamily="49" charset="-127"/>
-              </a:rPr>
-              <a:t>)</a:t>
-            </a:r>
-            <a:br>
-              <a:rPr lang="en-US" altLang="ko-KR" sz="1600" dirty="0">
-                <a:solidFill>
-                  <a:srgbClr val="080808"/>
-                </a:solidFill>
-                <a:effectLst/>
-                <a:latin typeface="D2Coding ligature" panose="020B0609020101020101" pitchFamily="49" charset="-127"/>
-                <a:ea typeface="D2Coding ligature" panose="020B0609020101020101" pitchFamily="49" charset="-127"/>
-              </a:rPr>
-            </a:br>
-            <a:r>
-              <a:rPr lang="en-US" altLang="ko-KR" sz="1600" dirty="0">
-                <a:solidFill>
-                  <a:srgbClr val="080808"/>
-                </a:solidFill>
-                <a:effectLst/>
-                <a:latin typeface="D2Coding ligature" panose="020B0609020101020101" pitchFamily="49" charset="-127"/>
-                <a:ea typeface="D2Coding ligature" panose="020B0609020101020101" pitchFamily="49" charset="-127"/>
-              </a:rPr>
-              <a:t>    } </a:t>
-            </a:r>
-            <a:r>
-              <a:rPr lang="en-US" altLang="ko-KR" sz="1600" dirty="0">
-                <a:solidFill>
-                  <a:srgbClr val="0033B3"/>
-                </a:solidFill>
-                <a:effectLst/>
-                <a:latin typeface="D2Coding ligature" panose="020B0609020101020101" pitchFamily="49" charset="-127"/>
-                <a:ea typeface="D2Coding ligature" panose="020B0609020101020101" pitchFamily="49" charset="-127"/>
-              </a:rPr>
-              <a:t>catch </a:t>
-            </a:r>
-            <a:r>
-              <a:rPr lang="en-US" altLang="ko-KR" sz="1600" dirty="0">
-                <a:solidFill>
-                  <a:srgbClr val="080808"/>
-                </a:solidFill>
-                <a:effectLst/>
-                <a:latin typeface="D2Coding ligature" panose="020B0609020101020101" pitchFamily="49" charset="-127"/>
-                <a:ea typeface="D2Coding ligature" panose="020B0609020101020101" pitchFamily="49" charset="-127"/>
-              </a:rPr>
-              <a:t>(</a:t>
-            </a:r>
-            <a:r>
-              <a:rPr lang="en-US" altLang="ko-KR" sz="1600" dirty="0">
-                <a:solidFill>
-                  <a:srgbClr val="000000"/>
-                </a:solidFill>
-                <a:effectLst/>
-                <a:latin typeface="D2Coding ligature" panose="020B0609020101020101" pitchFamily="49" charset="-127"/>
-                <a:ea typeface="D2Coding ligature" panose="020B0609020101020101" pitchFamily="49" charset="-127"/>
-              </a:rPr>
-              <a:t>e</a:t>
-            </a:r>
-            <a:r>
-              <a:rPr lang="en-US" altLang="ko-KR" sz="1600" dirty="0">
-                <a:solidFill>
-                  <a:srgbClr val="080808"/>
-                </a:solidFill>
-                <a:effectLst/>
-                <a:latin typeface="D2Coding ligature" panose="020B0609020101020101" pitchFamily="49" charset="-127"/>
-                <a:ea typeface="D2Coding ligature" panose="020B0609020101020101" pitchFamily="49" charset="-127"/>
-              </a:rPr>
-              <a:t>: </a:t>
-            </a:r>
-            <a:r>
-              <a:rPr lang="en-US" altLang="ko-KR" sz="1600" dirty="0">
-                <a:solidFill>
-                  <a:srgbClr val="000000"/>
-                </a:solidFill>
-                <a:effectLst/>
-                <a:latin typeface="D2Coding ligature" panose="020B0609020101020101" pitchFamily="49" charset="-127"/>
-                <a:ea typeface="D2Coding ligature" panose="020B0609020101020101" pitchFamily="49" charset="-127"/>
-              </a:rPr>
-              <a:t>Exception</a:t>
-            </a:r>
-            <a:r>
-              <a:rPr lang="en-US" altLang="ko-KR" sz="1600" dirty="0">
-                <a:solidFill>
-                  <a:srgbClr val="080808"/>
-                </a:solidFill>
-                <a:effectLst/>
-                <a:latin typeface="D2Coding ligature" panose="020B0609020101020101" pitchFamily="49" charset="-127"/>
-                <a:ea typeface="D2Coding ligature" panose="020B0609020101020101" pitchFamily="49" charset="-127"/>
-              </a:rPr>
-              <a:t>) {</a:t>
-            </a:r>
-            <a:br>
-              <a:rPr lang="en-US" altLang="ko-KR" sz="1600" dirty="0">
-                <a:solidFill>
-                  <a:srgbClr val="080808"/>
-                </a:solidFill>
-                <a:effectLst/>
-                <a:latin typeface="D2Coding ligature" panose="020B0609020101020101" pitchFamily="49" charset="-127"/>
-                <a:ea typeface="D2Coding ligature" panose="020B0609020101020101" pitchFamily="49" charset="-127"/>
-              </a:rPr>
-            </a:br>
-            <a:r>
-              <a:rPr lang="en-US" altLang="ko-KR" sz="1600" dirty="0">
-                <a:solidFill>
-                  <a:srgbClr val="080808"/>
-                </a:solidFill>
-                <a:effectLst/>
-                <a:latin typeface="D2Coding ligature" panose="020B0609020101020101" pitchFamily="49" charset="-127"/>
-                <a:ea typeface="D2Coding ligature" panose="020B0609020101020101" pitchFamily="49" charset="-127"/>
-              </a:rPr>
-              <a:t>        </a:t>
-            </a:r>
-            <a:r>
-              <a:rPr lang="en-US" altLang="ko-KR" sz="1600" i="1" dirty="0" err="1">
-                <a:solidFill>
-                  <a:srgbClr val="00627A"/>
-                </a:solidFill>
-                <a:effectLst/>
-                <a:latin typeface="D2Coding ligature" panose="020B0609020101020101" pitchFamily="49" charset="-127"/>
-                <a:ea typeface="D2Coding ligature" panose="020B0609020101020101" pitchFamily="49" charset="-127"/>
-              </a:rPr>
-              <a:t>println</a:t>
-            </a:r>
-            <a:r>
-              <a:rPr lang="en-US" altLang="ko-KR" sz="1600" dirty="0">
-                <a:solidFill>
-                  <a:srgbClr val="080808"/>
-                </a:solidFill>
-                <a:effectLst/>
-                <a:latin typeface="D2Coding ligature" panose="020B0609020101020101" pitchFamily="49" charset="-127"/>
-                <a:ea typeface="D2Coding ligature" panose="020B0609020101020101" pitchFamily="49" charset="-127"/>
-              </a:rPr>
-              <a:t>(</a:t>
-            </a:r>
-            <a:r>
-              <a:rPr lang="en-US" altLang="ko-KR" sz="1600" dirty="0">
-                <a:solidFill>
-                  <a:srgbClr val="067D17"/>
-                </a:solidFill>
-                <a:effectLst/>
-                <a:latin typeface="D2Coding ligature" panose="020B0609020101020101" pitchFamily="49" charset="-127"/>
-                <a:ea typeface="D2Coding ligature" panose="020B0609020101020101" pitchFamily="49" charset="-127"/>
-              </a:rPr>
-              <a:t>"</a:t>
-            </a:r>
-            <a:r>
-              <a:rPr lang="ko-KR" altLang="en-US" sz="1600" dirty="0">
-                <a:solidFill>
-                  <a:srgbClr val="067D17"/>
-                </a:solidFill>
-                <a:effectLst/>
-                <a:latin typeface="D2Coding ligature" panose="020B0609020101020101" pitchFamily="49" charset="-127"/>
-                <a:ea typeface="D2Coding ligature" panose="020B0609020101020101" pitchFamily="49" charset="-127"/>
-              </a:rPr>
-              <a:t>예외 발생</a:t>
-            </a:r>
-            <a:r>
-              <a:rPr lang="en-US" altLang="ko-KR" sz="1600" dirty="0">
-                <a:solidFill>
-                  <a:srgbClr val="067D17"/>
-                </a:solidFill>
-                <a:effectLst/>
-                <a:latin typeface="D2Coding ligature" panose="020B0609020101020101" pitchFamily="49" charset="-127"/>
-                <a:ea typeface="D2Coding ligature" panose="020B0609020101020101" pitchFamily="49" charset="-127"/>
-              </a:rPr>
-              <a:t>: </a:t>
-            </a:r>
-            <a:r>
-              <a:rPr lang="en-US" altLang="ko-KR" sz="1600" dirty="0">
-                <a:solidFill>
-                  <a:srgbClr val="0037A6"/>
-                </a:solidFill>
-                <a:effectLst/>
-                <a:latin typeface="D2Coding ligature" panose="020B0609020101020101" pitchFamily="49" charset="-127"/>
-                <a:ea typeface="D2Coding ligature" panose="020B0609020101020101" pitchFamily="49" charset="-127"/>
-              </a:rPr>
-              <a:t>${</a:t>
-            </a:r>
-            <a:r>
-              <a:rPr lang="en-US" altLang="ko-KR" sz="1600" dirty="0" err="1">
-                <a:solidFill>
-                  <a:srgbClr val="000000"/>
-                </a:solidFill>
-                <a:effectLst/>
-                <a:latin typeface="D2Coding ligature" panose="020B0609020101020101" pitchFamily="49" charset="-127"/>
-                <a:ea typeface="D2Coding ligature" panose="020B0609020101020101" pitchFamily="49" charset="-127"/>
-              </a:rPr>
-              <a:t>e</a:t>
-            </a:r>
-            <a:r>
-              <a:rPr lang="en-US" altLang="ko-KR" sz="1600" dirty="0" err="1">
-                <a:solidFill>
-                  <a:srgbClr val="080808"/>
-                </a:solidFill>
-                <a:effectLst/>
-                <a:latin typeface="D2Coding ligature" panose="020B0609020101020101" pitchFamily="49" charset="-127"/>
-                <a:ea typeface="D2Coding ligature" panose="020B0609020101020101" pitchFamily="49" charset="-127"/>
-              </a:rPr>
-              <a:t>.</a:t>
-            </a:r>
-            <a:r>
-              <a:rPr lang="en-US" altLang="ko-KR" sz="1600" dirty="0" err="1">
-                <a:solidFill>
-                  <a:srgbClr val="871094"/>
-                </a:solidFill>
-                <a:effectLst/>
-                <a:latin typeface="D2Coding ligature" panose="020B0609020101020101" pitchFamily="49" charset="-127"/>
-                <a:ea typeface="D2Coding ligature" panose="020B0609020101020101" pitchFamily="49" charset="-127"/>
-              </a:rPr>
-              <a:t>message</a:t>
-            </a:r>
-            <a:r>
-              <a:rPr lang="en-US" altLang="ko-KR" sz="1600" dirty="0">
-                <a:solidFill>
-                  <a:srgbClr val="0037A6"/>
-                </a:solidFill>
-                <a:effectLst/>
-                <a:latin typeface="D2Coding ligature" panose="020B0609020101020101" pitchFamily="49" charset="-127"/>
-                <a:ea typeface="D2Coding ligature" panose="020B0609020101020101" pitchFamily="49" charset="-127"/>
-              </a:rPr>
-              <a:t>}</a:t>
-            </a:r>
-            <a:r>
-              <a:rPr lang="en-US" altLang="ko-KR" sz="1600" dirty="0">
-                <a:solidFill>
-                  <a:srgbClr val="067D17"/>
-                </a:solidFill>
-                <a:effectLst/>
-                <a:latin typeface="D2Coding ligature" panose="020B0609020101020101" pitchFamily="49" charset="-127"/>
-                <a:ea typeface="D2Coding ligature" panose="020B0609020101020101" pitchFamily="49" charset="-127"/>
-              </a:rPr>
-              <a:t>"</a:t>
-            </a:r>
-            <a:r>
-              <a:rPr lang="en-US" altLang="ko-KR" sz="1600" dirty="0">
-                <a:solidFill>
-                  <a:srgbClr val="080808"/>
-                </a:solidFill>
-                <a:effectLst/>
-                <a:latin typeface="D2Coding ligature" panose="020B0609020101020101" pitchFamily="49" charset="-127"/>
-                <a:ea typeface="D2Coding ligature" panose="020B0609020101020101" pitchFamily="49" charset="-127"/>
-              </a:rPr>
-              <a:t>)</a:t>
-            </a:r>
-            <a:br>
-              <a:rPr lang="en-US" altLang="ko-KR" sz="1600" dirty="0">
-                <a:solidFill>
-                  <a:srgbClr val="080808"/>
-                </a:solidFill>
-                <a:effectLst/>
-                <a:latin typeface="D2Coding ligature" panose="020B0609020101020101" pitchFamily="49" charset="-127"/>
-                <a:ea typeface="D2Coding ligature" panose="020B0609020101020101" pitchFamily="49" charset="-127"/>
-              </a:rPr>
-            </a:br>
-            <a:r>
-              <a:rPr lang="en-US" altLang="ko-KR" sz="1600" dirty="0">
-                <a:solidFill>
-                  <a:srgbClr val="080808"/>
-                </a:solidFill>
-                <a:effectLst/>
-                <a:latin typeface="D2Coding ligature" panose="020B0609020101020101" pitchFamily="49" charset="-127"/>
-                <a:ea typeface="D2Coding ligature" panose="020B0609020101020101" pitchFamily="49" charset="-127"/>
-              </a:rPr>
-              <a:t>    } </a:t>
-            </a:r>
-            <a:r>
-              <a:rPr lang="en-US" altLang="ko-KR" sz="1600" dirty="0">
-                <a:solidFill>
-                  <a:srgbClr val="0033B3"/>
-                </a:solidFill>
-                <a:effectLst/>
-                <a:latin typeface="D2Coding ligature" panose="020B0609020101020101" pitchFamily="49" charset="-127"/>
-                <a:ea typeface="D2Coding ligature" panose="020B0609020101020101" pitchFamily="49" charset="-127"/>
-              </a:rPr>
-              <a:t>finally </a:t>
-            </a:r>
-            <a:r>
-              <a:rPr lang="en-US" altLang="ko-KR" sz="1600" dirty="0">
-                <a:solidFill>
-                  <a:srgbClr val="080808"/>
-                </a:solidFill>
-                <a:effectLst/>
-                <a:latin typeface="D2Coding ligature" panose="020B0609020101020101" pitchFamily="49" charset="-127"/>
-                <a:ea typeface="D2Coding ligature" panose="020B0609020101020101" pitchFamily="49" charset="-127"/>
-              </a:rPr>
-              <a:t>{</a:t>
-            </a:r>
-            <a:br>
-              <a:rPr lang="en-US" altLang="ko-KR" sz="1600" dirty="0">
-                <a:solidFill>
-                  <a:srgbClr val="080808"/>
-                </a:solidFill>
-                <a:effectLst/>
-                <a:latin typeface="D2Coding ligature" panose="020B0609020101020101" pitchFamily="49" charset="-127"/>
-                <a:ea typeface="D2Coding ligature" panose="020B0609020101020101" pitchFamily="49" charset="-127"/>
-              </a:rPr>
-            </a:br>
-            <a:r>
-              <a:rPr lang="en-US" altLang="ko-KR" sz="1600" dirty="0">
-                <a:solidFill>
-                  <a:srgbClr val="080808"/>
-                </a:solidFill>
-                <a:effectLst/>
-                <a:latin typeface="D2Coding ligature" panose="020B0609020101020101" pitchFamily="49" charset="-127"/>
-                <a:ea typeface="D2Coding ligature" panose="020B0609020101020101" pitchFamily="49" charset="-127"/>
-              </a:rPr>
-              <a:t>        </a:t>
-            </a:r>
-            <a:r>
-              <a:rPr lang="en-US" altLang="ko-KR" sz="1600" i="1" dirty="0" err="1">
-                <a:solidFill>
-                  <a:srgbClr val="00627A"/>
-                </a:solidFill>
-                <a:effectLst/>
-                <a:latin typeface="D2Coding ligature" panose="020B0609020101020101" pitchFamily="49" charset="-127"/>
-                <a:ea typeface="D2Coding ligature" panose="020B0609020101020101" pitchFamily="49" charset="-127"/>
-              </a:rPr>
-              <a:t>println</a:t>
-            </a:r>
-            <a:r>
-              <a:rPr lang="en-US" altLang="ko-KR" sz="1600" dirty="0">
-                <a:solidFill>
-                  <a:srgbClr val="080808"/>
-                </a:solidFill>
-                <a:effectLst/>
-                <a:latin typeface="D2Coding ligature" panose="020B0609020101020101" pitchFamily="49" charset="-127"/>
-                <a:ea typeface="D2Coding ligature" panose="020B0609020101020101" pitchFamily="49" charset="-127"/>
-              </a:rPr>
-              <a:t>(</a:t>
-            </a:r>
-            <a:r>
-              <a:rPr lang="en-US" altLang="ko-KR" sz="1600" dirty="0">
-                <a:solidFill>
-                  <a:srgbClr val="067D17"/>
-                </a:solidFill>
-                <a:effectLst/>
-                <a:latin typeface="D2Coding ligature" panose="020B0609020101020101" pitchFamily="49" charset="-127"/>
-                <a:ea typeface="D2Coding ligature" panose="020B0609020101020101" pitchFamily="49" charset="-127"/>
-              </a:rPr>
-              <a:t>"finally </a:t>
-            </a:r>
-            <a:r>
-              <a:rPr lang="ko-KR" altLang="en-US" sz="1600" dirty="0">
-                <a:solidFill>
-                  <a:srgbClr val="067D17"/>
-                </a:solidFill>
-                <a:effectLst/>
-                <a:latin typeface="D2Coding ligature" panose="020B0609020101020101" pitchFamily="49" charset="-127"/>
-                <a:ea typeface="D2Coding ligature" panose="020B0609020101020101" pitchFamily="49" charset="-127"/>
-              </a:rPr>
-              <a:t>실행 </a:t>
-            </a:r>
-            <a:r>
-              <a:rPr lang="en-US" altLang="ko-KR" sz="1600" dirty="0">
-                <a:solidFill>
-                  <a:srgbClr val="067D17"/>
-                </a:solidFill>
-                <a:effectLst/>
-                <a:latin typeface="D2Coding ligature" panose="020B0609020101020101" pitchFamily="49" charset="-127"/>
-                <a:ea typeface="D2Coding ligature" panose="020B0609020101020101" pitchFamily="49" charset="-127"/>
-              </a:rPr>
-              <a:t>(</a:t>
-            </a:r>
-            <a:r>
-              <a:rPr lang="ko-KR" altLang="en-US" sz="1600" dirty="0">
-                <a:solidFill>
-                  <a:srgbClr val="067D17"/>
-                </a:solidFill>
-                <a:effectLst/>
-                <a:latin typeface="D2Coding ligature" panose="020B0609020101020101" pitchFamily="49" charset="-127"/>
-                <a:ea typeface="D2Coding ligature" panose="020B0609020101020101" pitchFamily="49" charset="-127"/>
-              </a:rPr>
-              <a:t>항상 실행됨</a:t>
-            </a:r>
-            <a:r>
-              <a:rPr lang="en-US" altLang="ko-KR" sz="1600" dirty="0">
-                <a:solidFill>
-                  <a:srgbClr val="067D17"/>
-                </a:solidFill>
-                <a:effectLst/>
-                <a:latin typeface="D2Coding ligature" panose="020B0609020101020101" pitchFamily="49" charset="-127"/>
-                <a:ea typeface="D2Coding ligature" panose="020B0609020101020101" pitchFamily="49" charset="-127"/>
-              </a:rPr>
-              <a:t>)"</a:t>
-            </a:r>
-            <a:r>
-              <a:rPr lang="en-US" altLang="ko-KR" sz="1600" dirty="0">
-                <a:solidFill>
-                  <a:srgbClr val="080808"/>
-                </a:solidFill>
-                <a:effectLst/>
-                <a:latin typeface="D2Coding ligature" panose="020B0609020101020101" pitchFamily="49" charset="-127"/>
-                <a:ea typeface="D2Coding ligature" panose="020B0609020101020101" pitchFamily="49" charset="-127"/>
-              </a:rPr>
-              <a:t>)</a:t>
-            </a:r>
-            <a:br>
-              <a:rPr lang="en-US" altLang="ko-KR" sz="1600" dirty="0">
-                <a:solidFill>
-                  <a:srgbClr val="080808"/>
-                </a:solidFill>
-                <a:effectLst/>
-                <a:latin typeface="D2Coding ligature" panose="020B0609020101020101" pitchFamily="49" charset="-127"/>
-                <a:ea typeface="D2Coding ligature" panose="020B0609020101020101" pitchFamily="49" charset="-127"/>
-              </a:rPr>
-            </a:br>
-            <a:r>
-              <a:rPr lang="en-US" altLang="ko-KR" sz="1600" dirty="0">
-                <a:solidFill>
-                  <a:srgbClr val="080808"/>
-                </a:solidFill>
-                <a:effectLst/>
-                <a:latin typeface="D2Coding ligature" panose="020B0609020101020101" pitchFamily="49" charset="-127"/>
-                <a:ea typeface="D2Coding ligature" panose="020B0609020101020101" pitchFamily="49" charset="-127"/>
-              </a:rPr>
-              <a:t>    }</a:t>
-            </a:r>
-            <a:br>
-              <a:rPr lang="en-US" altLang="ko-KR" sz="1600" dirty="0">
-                <a:solidFill>
-                  <a:srgbClr val="080808"/>
+              <a:rPr lang="ko-KR" altLang="ko-KR" sz="1600" dirty="0">
+                <a:solidFill>
+                  <a:srgbClr val="302A24"/>
                 </a:solidFill>
                 <a:effectLst/>
                 <a:latin typeface="D2Coding ligature" panose="020B0609020101020101" pitchFamily="49" charset="-127"/>
@@ -31682,9 +31597,9 @@
               </a:rPr>
             </a:br>
             <a:br>
-              <a:rPr lang="en-US" altLang="ko-KR" sz="1600" dirty="0">
-                <a:solidFill>
-                  <a:srgbClr val="080808"/>
+              <a:rPr lang="ko-KR" altLang="ko-KR" sz="1600" dirty="0">
+                <a:solidFill>
+                  <a:srgbClr val="302A24"/>
                 </a:solidFill>
                 <a:effectLst/>
                 <a:latin typeface="D2Coding ligature" panose="020B0609020101020101" pitchFamily="49" charset="-127"/>
@@ -31692,9 +31607,96 @@
               </a:rPr>
             </a:br>
             <a:r>
-              <a:rPr lang="en-US" altLang="ko-KR" sz="1600" dirty="0">
-                <a:solidFill>
-                  <a:srgbClr val="080808"/>
+              <a:rPr lang="ko-KR" altLang="ko-KR" sz="1600" dirty="0">
+                <a:solidFill>
+                  <a:srgbClr val="A0A0A0"/>
+                </a:solidFill>
+                <a:effectLst/>
+                <a:latin typeface="D2Coding ligature" panose="020B0609020101020101" pitchFamily="49" charset="-127"/>
+                <a:ea typeface="D2Coding ligature" panose="020B0609020101020101" pitchFamily="49" charset="-127"/>
+              </a:rPr>
+              <a:t>/*</a:t>
+            </a:r>
+            <a:r>
+              <a:rPr lang="ko-KR" altLang="ko-KR" sz="1600" dirty="0" err="1">
+                <a:solidFill>
+                  <a:srgbClr val="A0A0A0"/>
+                </a:solidFill>
+                <a:effectLst/>
+                <a:latin typeface="D2Coding ligature" panose="020B0609020101020101" pitchFamily="49" charset="-127"/>
+                <a:ea typeface="D2Coding ligature" panose="020B0609020101020101" pitchFamily="49" charset="-127"/>
+              </a:rPr>
+              <a:t>val</a:t>
+            </a:r>
+            <a:r>
+              <a:rPr lang="ko-KR" altLang="ko-KR" sz="1600" dirty="0">
+                <a:solidFill>
+                  <a:srgbClr val="A0A0A0"/>
+                </a:solidFill>
+                <a:effectLst/>
+                <a:latin typeface="D2Coding ligature" panose="020B0609020101020101" pitchFamily="49" charset="-127"/>
+                <a:ea typeface="D2Coding ligature" panose="020B0609020101020101" pitchFamily="49" charset="-127"/>
+              </a:rPr>
+              <a:t> </a:t>
+            </a:r>
+            <a:r>
+              <a:rPr lang="ko-KR" altLang="ko-KR" sz="1600" dirty="0" err="1">
+                <a:solidFill>
+                  <a:srgbClr val="A0A0A0"/>
+                </a:solidFill>
+                <a:effectLst/>
+                <a:latin typeface="D2Coding ligature" panose="020B0609020101020101" pitchFamily="49" charset="-127"/>
+                <a:ea typeface="D2Coding ligature" panose="020B0609020101020101" pitchFamily="49" charset="-127"/>
+              </a:rPr>
+              <a:t>num</a:t>
+            </a:r>
+            <a:r>
+              <a:rPr lang="ko-KR" altLang="ko-KR" sz="1600" dirty="0">
+                <a:solidFill>
+                  <a:srgbClr val="A0A0A0"/>
+                </a:solidFill>
+                <a:effectLst/>
+                <a:latin typeface="D2Coding ligature" panose="020B0609020101020101" pitchFamily="49" charset="-127"/>
+                <a:ea typeface="D2Coding ligature" panose="020B0609020101020101" pitchFamily="49" charset="-127"/>
+              </a:rPr>
+              <a:t> = </a:t>
+            </a:r>
+            <a:r>
+              <a:rPr lang="ko-KR" altLang="ko-KR" sz="1600" dirty="0" err="1">
+                <a:solidFill>
+                  <a:srgbClr val="A0A0A0"/>
+                </a:solidFill>
+                <a:effectLst/>
+                <a:latin typeface="D2Coding ligature" panose="020B0609020101020101" pitchFamily="49" charset="-127"/>
+                <a:ea typeface="D2Coding ligature" panose="020B0609020101020101" pitchFamily="49" charset="-127"/>
+              </a:rPr>
+              <a:t>try</a:t>
+            </a:r>
+            <a:r>
+              <a:rPr lang="ko-KR" altLang="ko-KR" sz="1600" dirty="0">
+                <a:solidFill>
+                  <a:srgbClr val="A0A0A0"/>
+                </a:solidFill>
+                <a:effectLst/>
+                <a:latin typeface="D2Coding ligature" panose="020B0609020101020101" pitchFamily="49" charset="-127"/>
+                <a:ea typeface="D2Coding ligature" panose="020B0609020101020101" pitchFamily="49" charset="-127"/>
+              </a:rPr>
+              <a:t> {</a:t>
+            </a:r>
+            <a:br>
+              <a:rPr lang="ko-KR" altLang="ko-KR" sz="1600" dirty="0">
+                <a:solidFill>
+                  <a:srgbClr val="A0A0A0"/>
+                </a:solidFill>
+                <a:effectLst/>
+                <a:latin typeface="D2Coding ligature" panose="020B0609020101020101" pitchFamily="49" charset="-127"/>
+                <a:ea typeface="D2Coding ligature" panose="020B0609020101020101" pitchFamily="49" charset="-127"/>
+              </a:rPr>
+            </a:br>
+            <a:r>
+              <a:rPr lang="ko-KR" altLang="ko-KR" sz="1600" dirty="0">
+                <a:solidFill>
+                  <a:srgbClr val="A0A0A0"/>
                 </a:solidFill>
                 <a:effectLst/>
                 <a:latin typeface="D2Coding ligature" panose="020B0609020101020101" pitchFamily="49" charset="-127"/>
@@ -31703,9 +31705,74 @@
               <a:t>    </a:t>
             </a:r>
             <a:r>
-              <a:rPr lang="en-US" altLang="ko-KR" sz="1600" dirty="0" err="1">
-                <a:solidFill>
-                  <a:srgbClr val="0033B3"/>
+              <a:rPr lang="ko-KR" altLang="ko-KR" sz="1600" dirty="0" err="1">
+                <a:solidFill>
+                  <a:srgbClr val="A0A0A0"/>
+                </a:solidFill>
+                <a:effectLst/>
+                <a:latin typeface="D2Coding ligature" panose="020B0609020101020101" pitchFamily="49" charset="-127"/>
+                <a:ea typeface="D2Coding ligature" panose="020B0609020101020101" pitchFamily="49" charset="-127"/>
+              </a:rPr>
+              <a:t>println</a:t>
+            </a:r>
+            <a:r>
+              <a:rPr lang="ko-KR" altLang="ko-KR" sz="1600" dirty="0">
+                <a:solidFill>
+                  <a:srgbClr val="A0A0A0"/>
+                </a:solidFill>
+                <a:effectLst/>
+                <a:latin typeface="D2Coding ligature" panose="020B0609020101020101" pitchFamily="49" charset="-127"/>
+                <a:ea typeface="D2Coding ligature" panose="020B0609020101020101" pitchFamily="49" charset="-127"/>
+              </a:rPr>
+              <a:t>("</a:t>
+            </a:r>
+            <a:r>
+              <a:rPr lang="ko-KR" altLang="ko-KR" sz="1600" dirty="0" err="1">
+                <a:solidFill>
+                  <a:srgbClr val="A0A0A0"/>
+                </a:solidFill>
+                <a:effectLst/>
+                <a:latin typeface="D2Coding ligature" panose="020B0609020101020101" pitchFamily="49" charset="-127"/>
+                <a:ea typeface="D2Coding ligature" panose="020B0609020101020101" pitchFamily="49" charset="-127"/>
+              </a:rPr>
+              <a:t>try</a:t>
+            </a:r>
+            <a:r>
+              <a:rPr lang="ko-KR" altLang="ko-KR" sz="1600" dirty="0">
+                <a:solidFill>
+                  <a:srgbClr val="A0A0A0"/>
+                </a:solidFill>
+                <a:effectLst/>
+                <a:latin typeface="D2Coding ligature" panose="020B0609020101020101" pitchFamily="49" charset="-127"/>
+                <a:ea typeface="D2Coding ligature" panose="020B0609020101020101" pitchFamily="49" charset="-127"/>
+              </a:rPr>
+              <a:t> 블록 실행")</a:t>
+            </a:r>
+            <a:br>
+              <a:rPr lang="ko-KR" altLang="ko-KR" sz="1600" dirty="0">
+                <a:solidFill>
+                  <a:srgbClr val="A0A0A0"/>
+                </a:solidFill>
+                <a:effectLst/>
+                <a:latin typeface="D2Coding ligature" panose="020B0609020101020101" pitchFamily="49" charset="-127"/>
+                <a:ea typeface="D2Coding ligature" panose="020B0609020101020101" pitchFamily="49" charset="-127"/>
+              </a:rPr>
+            </a:br>
+            <a:r>
+              <a:rPr lang="ko-KR" altLang="ko-KR" sz="1600" dirty="0">
+                <a:solidFill>
+                  <a:srgbClr val="A0A0A0"/>
+                </a:solidFill>
+                <a:effectLst/>
+                <a:latin typeface="D2Coding ligature" panose="020B0609020101020101" pitchFamily="49" charset="-127"/>
+                <a:ea typeface="D2Coding ligature" panose="020B0609020101020101" pitchFamily="49" charset="-127"/>
+              </a:rPr>
+              <a:t>    </a:t>
+            </a:r>
+            <a:r>
+              <a:rPr lang="ko-KR" altLang="ko-KR" sz="1600" dirty="0" err="1">
+                <a:solidFill>
+                  <a:srgbClr val="A0A0A0"/>
                 </a:solidFill>
                 <a:effectLst/>
                 <a:latin typeface="D2Coding ligature" panose="020B0609020101020101" pitchFamily="49" charset="-127"/>
@@ -31714,9 +31781,9 @@
               <a:t>val</a:t>
             </a:r>
             <a:r>
-              <a:rPr lang="en-US" altLang="ko-KR" sz="1600" dirty="0">
-                <a:solidFill>
-                  <a:srgbClr val="0033B3"/>
+              <a:rPr lang="ko-KR" altLang="ko-KR" sz="1600" dirty="0">
+                <a:solidFill>
+                  <a:srgbClr val="A0A0A0"/>
                 </a:solidFill>
                 <a:effectLst/>
                 <a:latin typeface="D2Coding ligature" panose="020B0609020101020101" pitchFamily="49" charset="-127"/>
@@ -31725,53 +31792,31 @@
               <a:t> </a:t>
             </a:r>
             <a:r>
-              <a:rPr lang="en-US" altLang="ko-KR" sz="1600" dirty="0">
-                <a:solidFill>
-                  <a:srgbClr val="000000"/>
-                </a:solidFill>
-                <a:effectLst/>
-                <a:latin typeface="D2Coding ligature" panose="020B0609020101020101" pitchFamily="49" charset="-127"/>
-                <a:ea typeface="D2Coding ligature" panose="020B0609020101020101" pitchFamily="49" charset="-127"/>
-              </a:rPr>
-              <a:t>value </a:t>
-            </a:r>
-            <a:r>
-              <a:rPr lang="en-US" altLang="ko-KR" sz="1600" dirty="0">
-                <a:solidFill>
-                  <a:srgbClr val="080808"/>
-                </a:solidFill>
-                <a:effectLst/>
-                <a:latin typeface="D2Coding ligature" panose="020B0609020101020101" pitchFamily="49" charset="-127"/>
-                <a:ea typeface="D2Coding ligature" panose="020B0609020101020101" pitchFamily="49" charset="-127"/>
-              </a:rPr>
-              <a:t>= </a:t>
-            </a:r>
-            <a:r>
-              <a:rPr lang="en-US" altLang="ko-KR" sz="1600" dirty="0">
-                <a:solidFill>
-                  <a:srgbClr val="0033B3"/>
-                </a:solidFill>
-                <a:effectLst/>
-                <a:latin typeface="D2Coding ligature" panose="020B0609020101020101" pitchFamily="49" charset="-127"/>
-                <a:ea typeface="D2Coding ligature" panose="020B0609020101020101" pitchFamily="49" charset="-127"/>
-              </a:rPr>
-              <a:t>try </a:t>
-            </a:r>
-            <a:r>
-              <a:rPr lang="en-US" altLang="ko-KR" sz="1600" dirty="0">
-                <a:solidFill>
-                  <a:srgbClr val="080808"/>
-                </a:solidFill>
-                <a:effectLst/>
-                <a:latin typeface="D2Coding ligature" panose="020B0609020101020101" pitchFamily="49" charset="-127"/>
-                <a:ea typeface="D2Coding ligature" panose="020B0609020101020101" pitchFamily="49" charset="-127"/>
-              </a:rPr>
-              <a:t>{</a:t>
+              <a:rPr lang="ko-KR" altLang="ko-KR" sz="1600" dirty="0" err="1">
+                <a:solidFill>
+                  <a:srgbClr val="A0A0A0"/>
+                </a:solidFill>
+                <a:effectLst/>
+                <a:latin typeface="D2Coding ligature" panose="020B0609020101020101" pitchFamily="49" charset="-127"/>
+                <a:ea typeface="D2Coding ligature" panose="020B0609020101020101" pitchFamily="49" charset="-127"/>
+              </a:rPr>
+              <a:t>result</a:t>
+            </a:r>
+            <a:r>
+              <a:rPr lang="ko-KR" altLang="ko-KR" sz="1600" dirty="0">
+                <a:solidFill>
+                  <a:srgbClr val="A0A0A0"/>
+                </a:solidFill>
+                <a:effectLst/>
+                <a:latin typeface="D2Coding ligature" panose="020B0609020101020101" pitchFamily="49" charset="-127"/>
+                <a:ea typeface="D2Coding ligature" panose="020B0609020101020101" pitchFamily="49" charset="-127"/>
+              </a:rPr>
+              <a:t> = 10 / 0</a:t>
             </a:r>
             <a:br>
-              <a:rPr lang="en-US" altLang="ko-KR" sz="1600" dirty="0">
-                <a:solidFill>
-                  <a:srgbClr val="080808"/>
+              <a:rPr lang="ko-KR" altLang="ko-KR" sz="1600" dirty="0">
+                <a:solidFill>
+                  <a:srgbClr val="A0A0A0"/>
                 </a:solidFill>
                 <a:effectLst/>
                 <a:latin typeface="D2Coding ligature" panose="020B0609020101020101" pitchFamily="49" charset="-127"/>
@@ -31779,20 +31824,139 @@
               </a:rPr>
             </a:br>
             <a:r>
-              <a:rPr lang="en-US" altLang="ko-KR" sz="1600" dirty="0">
-                <a:solidFill>
-                  <a:srgbClr val="080808"/>
-                </a:solidFill>
-                <a:effectLst/>
-                <a:latin typeface="D2Coding ligature" panose="020B0609020101020101" pitchFamily="49" charset="-127"/>
-                <a:ea typeface="D2Coding ligature" panose="020B0609020101020101" pitchFamily="49" charset="-127"/>
-              </a:rPr>
-              <a:t>        </a:t>
-            </a:r>
-            <a:r>
-              <a:rPr lang="en-US" altLang="ko-KR" sz="1600" i="1" dirty="0" err="1">
-                <a:solidFill>
-                  <a:srgbClr val="00627A"/>
+              <a:rPr lang="ko-KR" altLang="ko-KR" sz="1600" dirty="0">
+                <a:solidFill>
+                  <a:srgbClr val="A0A0A0"/>
+                </a:solidFill>
+                <a:effectLst/>
+                <a:latin typeface="D2Coding ligature" panose="020B0609020101020101" pitchFamily="49" charset="-127"/>
+                <a:ea typeface="D2Coding ligature" panose="020B0609020101020101" pitchFamily="49" charset="-127"/>
+              </a:rPr>
+              <a:t>    </a:t>
+            </a:r>
+            <a:r>
+              <a:rPr lang="ko-KR" altLang="ko-KR" sz="1600" dirty="0" err="1">
+                <a:solidFill>
+                  <a:srgbClr val="A0A0A0"/>
+                </a:solidFill>
+                <a:effectLst/>
+                <a:latin typeface="D2Coding ligature" panose="020B0609020101020101" pitchFamily="49" charset="-127"/>
+                <a:ea typeface="D2Coding ligature" panose="020B0609020101020101" pitchFamily="49" charset="-127"/>
+              </a:rPr>
+              <a:t>result</a:t>
+            </a:r>
+            <a:br>
+              <a:rPr lang="ko-KR" altLang="ko-KR" sz="1600" dirty="0">
+                <a:solidFill>
+                  <a:srgbClr val="A0A0A0"/>
+                </a:solidFill>
+                <a:effectLst/>
+                <a:latin typeface="D2Coding ligature" panose="020B0609020101020101" pitchFamily="49" charset="-127"/>
+                <a:ea typeface="D2Coding ligature" panose="020B0609020101020101" pitchFamily="49" charset="-127"/>
+              </a:rPr>
+            </a:br>
+            <a:r>
+              <a:rPr lang="ko-KR" altLang="ko-KR" sz="1600" dirty="0">
+                <a:solidFill>
+                  <a:srgbClr val="A0A0A0"/>
+                </a:solidFill>
+                <a:effectLst/>
+                <a:latin typeface="D2Coding ligature" panose="020B0609020101020101" pitchFamily="49" charset="-127"/>
+                <a:ea typeface="D2Coding ligature" panose="020B0609020101020101" pitchFamily="49" charset="-127"/>
+              </a:rPr>
+              <a:t>} </a:t>
+            </a:r>
+            <a:r>
+              <a:rPr lang="ko-KR" altLang="ko-KR" sz="1600" dirty="0" err="1">
+                <a:solidFill>
+                  <a:srgbClr val="A0A0A0"/>
+                </a:solidFill>
+                <a:effectLst/>
+                <a:latin typeface="D2Coding ligature" panose="020B0609020101020101" pitchFamily="49" charset="-127"/>
+                <a:ea typeface="D2Coding ligature" panose="020B0609020101020101" pitchFamily="49" charset="-127"/>
+              </a:rPr>
+              <a:t>catch</a:t>
+            </a:r>
+            <a:r>
+              <a:rPr lang="ko-KR" altLang="ko-KR" sz="1600" dirty="0">
+                <a:solidFill>
+                  <a:srgbClr val="A0A0A0"/>
+                </a:solidFill>
+                <a:effectLst/>
+                <a:latin typeface="D2Coding ligature" panose="020B0609020101020101" pitchFamily="49" charset="-127"/>
+                <a:ea typeface="D2Coding ligature" panose="020B0609020101020101" pitchFamily="49" charset="-127"/>
+              </a:rPr>
+              <a:t> (</a:t>
+            </a:r>
+            <a:r>
+              <a:rPr lang="ko-KR" altLang="ko-KR" sz="1600" dirty="0" err="1">
+                <a:solidFill>
+                  <a:srgbClr val="A0A0A0"/>
+                </a:solidFill>
+                <a:effectLst/>
+                <a:latin typeface="D2Coding ligature" panose="020B0609020101020101" pitchFamily="49" charset="-127"/>
+                <a:ea typeface="D2Coding ligature" panose="020B0609020101020101" pitchFamily="49" charset="-127"/>
+              </a:rPr>
+              <a:t>e</a:t>
+            </a:r>
+            <a:r>
+              <a:rPr lang="ko-KR" altLang="ko-KR" sz="1600" dirty="0">
+                <a:solidFill>
+                  <a:srgbClr val="A0A0A0"/>
+                </a:solidFill>
+                <a:effectLst/>
+                <a:latin typeface="D2Coding ligature" panose="020B0609020101020101" pitchFamily="49" charset="-127"/>
+                <a:ea typeface="D2Coding ligature" panose="020B0609020101020101" pitchFamily="49" charset="-127"/>
+              </a:rPr>
+              <a:t>: </a:t>
+            </a:r>
+            <a:r>
+              <a:rPr lang="ko-KR" altLang="ko-KR" sz="1600" dirty="0" err="1">
+                <a:solidFill>
+                  <a:srgbClr val="A0A0A0"/>
+                </a:solidFill>
+                <a:effectLst/>
+                <a:latin typeface="D2Coding ligature" panose="020B0609020101020101" pitchFamily="49" charset="-127"/>
+                <a:ea typeface="D2Coding ligature" panose="020B0609020101020101" pitchFamily="49" charset="-127"/>
+              </a:rPr>
+              <a:t>Exception</a:t>
+            </a:r>
+            <a:r>
+              <a:rPr lang="ko-KR" altLang="ko-KR" sz="1600" dirty="0">
+                <a:solidFill>
+                  <a:srgbClr val="A0A0A0"/>
+                </a:solidFill>
+                <a:effectLst/>
+                <a:latin typeface="D2Coding ligature" panose="020B0609020101020101" pitchFamily="49" charset="-127"/>
+                <a:ea typeface="D2Coding ligature" panose="020B0609020101020101" pitchFamily="49" charset="-127"/>
+              </a:rPr>
+              <a:t>) {</a:t>
+            </a:r>
+            <a:br>
+              <a:rPr lang="ko-KR" altLang="ko-KR" sz="1600" dirty="0">
+                <a:solidFill>
+                  <a:srgbClr val="A0A0A0"/>
+                </a:solidFill>
+                <a:effectLst/>
+                <a:latin typeface="D2Coding ligature" panose="020B0609020101020101" pitchFamily="49" charset="-127"/>
+                <a:ea typeface="D2Coding ligature" panose="020B0609020101020101" pitchFamily="49" charset="-127"/>
+              </a:rPr>
+            </a:br>
+            <a:r>
+              <a:rPr lang="ko-KR" altLang="ko-KR" sz="1600" dirty="0">
+                <a:solidFill>
+                  <a:srgbClr val="A0A0A0"/>
+                </a:solidFill>
+                <a:effectLst/>
+                <a:latin typeface="D2Coding ligature" panose="020B0609020101020101" pitchFamily="49" charset="-127"/>
+                <a:ea typeface="D2Coding ligature" panose="020B0609020101020101" pitchFamily="49" charset="-127"/>
+              </a:rPr>
+              <a:t>    </a:t>
+            </a:r>
+            <a:r>
+              <a:rPr lang="ko-KR" altLang="ko-KR" sz="1600" dirty="0" err="1">
+                <a:solidFill>
+                  <a:srgbClr val="A0A0A0"/>
                 </a:solidFill>
                 <a:effectLst/>
                 <a:latin typeface="D2Coding ligature" panose="020B0609020101020101" pitchFamily="49" charset="-127"/>
@@ -31801,64 +31965,42 @@
               <a:t>println</a:t>
             </a:r>
             <a:r>
-              <a:rPr lang="en-US" altLang="ko-KR" sz="1600" dirty="0">
-                <a:solidFill>
-                  <a:srgbClr val="080808"/>
-                </a:solidFill>
-                <a:effectLst/>
-                <a:latin typeface="D2Coding ligature" panose="020B0609020101020101" pitchFamily="49" charset="-127"/>
-                <a:ea typeface="D2Coding ligature" panose="020B0609020101020101" pitchFamily="49" charset="-127"/>
-              </a:rPr>
-              <a:t>(</a:t>
-            </a:r>
-            <a:r>
-              <a:rPr lang="en-US" altLang="ko-KR" sz="1600" dirty="0">
-                <a:solidFill>
-                  <a:srgbClr val="067D17"/>
-                </a:solidFill>
-                <a:effectLst/>
-                <a:latin typeface="D2Coding ligature" panose="020B0609020101020101" pitchFamily="49" charset="-127"/>
-                <a:ea typeface="D2Coding ligature" panose="020B0609020101020101" pitchFamily="49" charset="-127"/>
-              </a:rPr>
-              <a:t>"try </a:t>
-            </a:r>
-            <a:r>
-              <a:rPr lang="ko-KR" altLang="en-US" sz="1600" dirty="0">
-                <a:solidFill>
-                  <a:srgbClr val="067D17"/>
-                </a:solidFill>
-                <a:effectLst/>
-                <a:latin typeface="D2Coding ligature" panose="020B0609020101020101" pitchFamily="49" charset="-127"/>
-                <a:ea typeface="D2Coding ligature" panose="020B0609020101020101" pitchFamily="49" charset="-127"/>
-              </a:rPr>
-              <a:t>블록 실행</a:t>
-            </a:r>
-            <a:r>
-              <a:rPr lang="en-US" altLang="ko-KR" sz="1600" dirty="0">
-                <a:solidFill>
-                  <a:srgbClr val="067D17"/>
-                </a:solidFill>
-                <a:effectLst/>
-                <a:latin typeface="D2Coding ligature" panose="020B0609020101020101" pitchFamily="49" charset="-127"/>
-                <a:ea typeface="D2Coding ligature" panose="020B0609020101020101" pitchFamily="49" charset="-127"/>
-              </a:rPr>
-              <a:t>"</a:t>
-            </a:r>
-            <a:r>
-              <a:rPr lang="en-US" altLang="ko-KR" sz="1600" dirty="0">
-                <a:solidFill>
-                  <a:srgbClr val="080808"/>
-                </a:solidFill>
-                <a:effectLst/>
-                <a:latin typeface="D2Coding ligature" panose="020B0609020101020101" pitchFamily="49" charset="-127"/>
-                <a:ea typeface="D2Coding ligature" panose="020B0609020101020101" pitchFamily="49" charset="-127"/>
-              </a:rPr>
-              <a:t>)</a:t>
+              <a:rPr lang="ko-KR" altLang="ko-KR" sz="1600" dirty="0">
+                <a:solidFill>
+                  <a:srgbClr val="A0A0A0"/>
+                </a:solidFill>
+                <a:effectLst/>
+                <a:latin typeface="D2Coding ligature" panose="020B0609020101020101" pitchFamily="49" charset="-127"/>
+                <a:ea typeface="D2Coding ligature" panose="020B0609020101020101" pitchFamily="49" charset="-127"/>
+              </a:rPr>
+              <a:t>("예외 발생: ${</a:t>
+            </a:r>
+            <a:r>
+              <a:rPr lang="ko-KR" altLang="ko-KR" sz="1600" dirty="0" err="1">
+                <a:solidFill>
+                  <a:srgbClr val="A0A0A0"/>
+                </a:solidFill>
+                <a:effectLst/>
+                <a:latin typeface="D2Coding ligature" panose="020B0609020101020101" pitchFamily="49" charset="-127"/>
+                <a:ea typeface="D2Coding ligature" panose="020B0609020101020101" pitchFamily="49" charset="-127"/>
+              </a:rPr>
+              <a:t>e.message</a:t>
+            </a:r>
+            <a:r>
+              <a:rPr lang="ko-KR" altLang="ko-KR" sz="1600" dirty="0">
+                <a:solidFill>
+                  <a:srgbClr val="A0A0A0"/>
+                </a:solidFill>
+                <a:effectLst/>
+                <a:latin typeface="D2Coding ligature" panose="020B0609020101020101" pitchFamily="49" charset="-127"/>
+                <a:ea typeface="D2Coding ligature" panose="020B0609020101020101" pitchFamily="49" charset="-127"/>
+              </a:rPr>
+              <a:t>}")</a:t>
             </a:r>
             <a:br>
-              <a:rPr lang="en-US" altLang="ko-KR" sz="1600" dirty="0">
-                <a:solidFill>
-                  <a:srgbClr val="080808"/>
+              <a:rPr lang="ko-KR" altLang="ko-KR" sz="1600" dirty="0">
+                <a:solidFill>
+                  <a:srgbClr val="A0A0A0"/>
                 </a:solidFill>
                 <a:effectLst/>
                 <a:latin typeface="D2Coding ligature" panose="020B0609020101020101" pitchFamily="49" charset="-127"/>
@@ -31866,31 +32008,180 @@
               </a:rPr>
             </a:br>
             <a:r>
-              <a:rPr lang="en-US" altLang="ko-KR" sz="1600" dirty="0">
-                <a:solidFill>
-                  <a:srgbClr val="080808"/>
-                </a:solidFill>
-                <a:effectLst/>
-                <a:latin typeface="D2Coding ligature" panose="020B0609020101020101" pitchFamily="49" charset="-127"/>
-                <a:ea typeface="D2Coding ligature" panose="020B0609020101020101" pitchFamily="49" charset="-127"/>
-              </a:rPr>
-              <a:t>        </a:t>
-            </a:r>
-            <a:r>
-              <a:rPr lang="en-US" altLang="ko-KR" sz="1600" dirty="0" err="1">
-                <a:solidFill>
-                  <a:srgbClr val="0033B3"/>
-                </a:solidFill>
-                <a:effectLst/>
-                <a:latin typeface="D2Coding ligature" panose="020B0609020101020101" pitchFamily="49" charset="-127"/>
-                <a:ea typeface="D2Coding ligature" panose="020B0609020101020101" pitchFamily="49" charset="-127"/>
-              </a:rPr>
-              <a:t>val</a:t>
-            </a:r>
-            <a:r>
-              <a:rPr lang="en-US" altLang="ko-KR" sz="1600" dirty="0">
-                <a:solidFill>
-                  <a:srgbClr val="0033B3"/>
+              <a:rPr lang="ko-KR" altLang="ko-KR" sz="1600" dirty="0">
+                <a:solidFill>
+                  <a:srgbClr val="A0A0A0"/>
+                </a:solidFill>
+                <a:effectLst/>
+                <a:latin typeface="D2Coding ligature" panose="020B0609020101020101" pitchFamily="49" charset="-127"/>
+                <a:ea typeface="D2Coding ligature" panose="020B0609020101020101" pitchFamily="49" charset="-127"/>
+              </a:rPr>
+              <a:t>    -1</a:t>
+            </a:r>
+            <a:br>
+              <a:rPr lang="ko-KR" altLang="ko-KR" sz="1600" dirty="0">
+                <a:solidFill>
+                  <a:srgbClr val="A0A0A0"/>
+                </a:solidFill>
+                <a:effectLst/>
+                <a:latin typeface="D2Coding ligature" panose="020B0609020101020101" pitchFamily="49" charset="-127"/>
+                <a:ea typeface="D2Coding ligature" panose="020B0609020101020101" pitchFamily="49" charset="-127"/>
+              </a:rPr>
+            </a:br>
+            <a:r>
+              <a:rPr lang="ko-KR" altLang="ko-KR" sz="1600" dirty="0">
+                <a:solidFill>
+                  <a:srgbClr val="A0A0A0"/>
+                </a:solidFill>
+                <a:effectLst/>
+                <a:latin typeface="D2Coding ligature" panose="020B0609020101020101" pitchFamily="49" charset="-127"/>
+                <a:ea typeface="D2Coding ligature" panose="020B0609020101020101" pitchFamily="49" charset="-127"/>
+              </a:rPr>
+              <a:t>} </a:t>
+            </a:r>
+            <a:r>
+              <a:rPr lang="ko-KR" altLang="ko-KR" sz="1600" dirty="0" err="1">
+                <a:solidFill>
+                  <a:srgbClr val="A0A0A0"/>
+                </a:solidFill>
+                <a:effectLst/>
+                <a:latin typeface="D2Coding ligature" panose="020B0609020101020101" pitchFamily="49" charset="-127"/>
+                <a:ea typeface="D2Coding ligature" panose="020B0609020101020101" pitchFamily="49" charset="-127"/>
+              </a:rPr>
+              <a:t>finally</a:t>
+            </a:r>
+            <a:r>
+              <a:rPr lang="ko-KR" altLang="ko-KR" sz="1600" dirty="0">
+                <a:solidFill>
+                  <a:srgbClr val="A0A0A0"/>
+                </a:solidFill>
+                <a:effectLst/>
+                <a:latin typeface="D2Coding ligature" panose="020B0609020101020101" pitchFamily="49" charset="-127"/>
+                <a:ea typeface="D2Coding ligature" panose="020B0609020101020101" pitchFamily="49" charset="-127"/>
+              </a:rPr>
+              <a:t> {</a:t>
+            </a:r>
+            <a:br>
+              <a:rPr lang="ko-KR" altLang="ko-KR" sz="1600" dirty="0">
+                <a:solidFill>
+                  <a:srgbClr val="A0A0A0"/>
+                </a:solidFill>
+                <a:effectLst/>
+                <a:latin typeface="D2Coding ligature" panose="020B0609020101020101" pitchFamily="49" charset="-127"/>
+                <a:ea typeface="D2Coding ligature" panose="020B0609020101020101" pitchFamily="49" charset="-127"/>
+              </a:rPr>
+            </a:br>
+            <a:r>
+              <a:rPr lang="ko-KR" altLang="ko-KR" sz="1600" dirty="0">
+                <a:solidFill>
+                  <a:srgbClr val="A0A0A0"/>
+                </a:solidFill>
+                <a:effectLst/>
+                <a:latin typeface="D2Coding ligature" panose="020B0609020101020101" pitchFamily="49" charset="-127"/>
+                <a:ea typeface="D2Coding ligature" panose="020B0609020101020101" pitchFamily="49" charset="-127"/>
+              </a:rPr>
+              <a:t>    </a:t>
+            </a:r>
+            <a:r>
+              <a:rPr lang="ko-KR" altLang="ko-KR" sz="1600" dirty="0" err="1">
+                <a:solidFill>
+                  <a:srgbClr val="A0A0A0"/>
+                </a:solidFill>
+                <a:effectLst/>
+                <a:latin typeface="D2Coding ligature" panose="020B0609020101020101" pitchFamily="49" charset="-127"/>
+                <a:ea typeface="D2Coding ligature" panose="020B0609020101020101" pitchFamily="49" charset="-127"/>
+              </a:rPr>
+              <a:t>println</a:t>
+            </a:r>
+            <a:r>
+              <a:rPr lang="ko-KR" altLang="ko-KR" sz="1600" dirty="0">
+                <a:solidFill>
+                  <a:srgbClr val="A0A0A0"/>
+                </a:solidFill>
+                <a:effectLst/>
+                <a:latin typeface="D2Coding ligature" panose="020B0609020101020101" pitchFamily="49" charset="-127"/>
+                <a:ea typeface="D2Coding ligature" panose="020B0609020101020101" pitchFamily="49" charset="-127"/>
+              </a:rPr>
+              <a:t>("</a:t>
+            </a:r>
+            <a:r>
+              <a:rPr lang="ko-KR" altLang="ko-KR" sz="1600" dirty="0" err="1">
+                <a:solidFill>
+                  <a:srgbClr val="A0A0A0"/>
+                </a:solidFill>
+                <a:effectLst/>
+                <a:latin typeface="D2Coding ligature" panose="020B0609020101020101" pitchFamily="49" charset="-127"/>
+                <a:ea typeface="D2Coding ligature" panose="020B0609020101020101" pitchFamily="49" charset="-127"/>
+              </a:rPr>
+              <a:t>finally</a:t>
+            </a:r>
+            <a:r>
+              <a:rPr lang="ko-KR" altLang="ko-KR" sz="1600" dirty="0">
+                <a:solidFill>
+                  <a:srgbClr val="A0A0A0"/>
+                </a:solidFill>
+                <a:effectLst/>
+                <a:latin typeface="D2Coding ligature" panose="020B0609020101020101" pitchFamily="49" charset="-127"/>
+                <a:ea typeface="D2Coding ligature" panose="020B0609020101020101" pitchFamily="49" charset="-127"/>
+              </a:rPr>
+              <a:t> 실행 (항상 실행됨)")</a:t>
+            </a:r>
+            <a:br>
+              <a:rPr lang="ko-KR" altLang="ko-KR" sz="1600" dirty="0">
+                <a:solidFill>
+                  <a:srgbClr val="A0A0A0"/>
+                </a:solidFill>
+                <a:effectLst/>
+                <a:latin typeface="D2Coding ligature" panose="020B0609020101020101" pitchFamily="49" charset="-127"/>
+                <a:ea typeface="D2Coding ligature" panose="020B0609020101020101" pitchFamily="49" charset="-127"/>
+              </a:rPr>
+            </a:br>
+            <a:r>
+              <a:rPr lang="ko-KR" altLang="ko-KR" sz="1600" dirty="0">
+                <a:solidFill>
+                  <a:srgbClr val="A0A0A0"/>
+                </a:solidFill>
+                <a:effectLst/>
+                <a:latin typeface="D2Coding ligature" panose="020B0609020101020101" pitchFamily="49" charset="-127"/>
+                <a:ea typeface="D2Coding ligature" panose="020B0609020101020101" pitchFamily="49" charset="-127"/>
+              </a:rPr>
+              <a:t>}</a:t>
+            </a:r>
+            <a:br>
+              <a:rPr lang="ko-KR" altLang="ko-KR" sz="1600" dirty="0">
+                <a:solidFill>
+                  <a:srgbClr val="A0A0A0"/>
+                </a:solidFill>
+                <a:effectLst/>
+                <a:latin typeface="D2Coding ligature" panose="020B0609020101020101" pitchFamily="49" charset="-127"/>
+                <a:ea typeface="D2Coding ligature" panose="020B0609020101020101" pitchFamily="49" charset="-127"/>
+              </a:rPr>
+            </a:br>
+            <a:br>
+              <a:rPr lang="ko-KR" altLang="ko-KR" sz="1600" dirty="0">
+                <a:solidFill>
+                  <a:srgbClr val="A0A0A0"/>
+                </a:solidFill>
+                <a:effectLst/>
+                <a:latin typeface="D2Coding ligature" panose="020B0609020101020101" pitchFamily="49" charset="-127"/>
+                <a:ea typeface="D2Coding ligature" panose="020B0609020101020101" pitchFamily="49" charset="-127"/>
+              </a:rPr>
+            </a:br>
+            <a:r>
+              <a:rPr lang="ko-KR" altLang="ko-KR" sz="1600" dirty="0" err="1">
+                <a:solidFill>
+                  <a:srgbClr val="A0A0A0"/>
+                </a:solidFill>
+                <a:effectLst/>
+                <a:latin typeface="D2Coding ligature" panose="020B0609020101020101" pitchFamily="49" charset="-127"/>
+                <a:ea typeface="D2Coding ligature" panose="020B0609020101020101" pitchFamily="49" charset="-127"/>
+              </a:rPr>
+              <a:t>return</a:t>
+            </a:r>
+            <a:r>
+              <a:rPr lang="ko-KR" altLang="ko-KR" sz="1600" dirty="0">
+                <a:solidFill>
+                  <a:srgbClr val="A0A0A0"/>
                 </a:solidFill>
                 <a:effectLst/>
                 <a:latin typeface="D2Coding ligature" panose="020B0609020101020101" pitchFamily="49" charset="-127"/>
@@ -31899,666 +32190,92 @@
               <a:t> </a:t>
             </a:r>
             <a:r>
-              <a:rPr lang="en-US" altLang="ko-KR" sz="1600" dirty="0">
-                <a:solidFill>
-                  <a:srgbClr val="000000"/>
-                </a:solidFill>
-                <a:effectLst/>
-                <a:latin typeface="D2Coding ligature" panose="020B0609020101020101" pitchFamily="49" charset="-127"/>
-                <a:ea typeface="D2Coding ligature" panose="020B0609020101020101" pitchFamily="49" charset="-127"/>
-              </a:rPr>
-              <a:t>result </a:t>
-            </a:r>
-            <a:r>
-              <a:rPr lang="en-US" altLang="ko-KR" sz="1600" dirty="0">
-                <a:solidFill>
-                  <a:srgbClr val="080808"/>
-                </a:solidFill>
-                <a:effectLst/>
-                <a:latin typeface="D2Coding ligature" panose="020B0609020101020101" pitchFamily="49" charset="-127"/>
-                <a:ea typeface="D2Coding ligature" panose="020B0609020101020101" pitchFamily="49" charset="-127"/>
-              </a:rPr>
-              <a:t>= </a:t>
-            </a:r>
-            <a:r>
-              <a:rPr lang="en-US" altLang="ko-KR" sz="1600" dirty="0">
-                <a:solidFill>
-                  <a:srgbClr val="1750EB"/>
-                </a:solidFill>
-                <a:effectLst/>
-                <a:latin typeface="D2Coding ligature" panose="020B0609020101020101" pitchFamily="49" charset="-127"/>
-                <a:ea typeface="D2Coding ligature" panose="020B0609020101020101" pitchFamily="49" charset="-127"/>
-              </a:rPr>
-              <a:t>10 </a:t>
-            </a:r>
-            <a:r>
-              <a:rPr lang="en-US" altLang="ko-KR" sz="1600" dirty="0">
-                <a:solidFill>
-                  <a:srgbClr val="080808"/>
-                </a:solidFill>
-                <a:effectLst/>
-                <a:latin typeface="D2Coding ligature" panose="020B0609020101020101" pitchFamily="49" charset="-127"/>
-                <a:ea typeface="D2Coding ligature" panose="020B0609020101020101" pitchFamily="49" charset="-127"/>
-              </a:rPr>
-              <a:t>/ </a:t>
-            </a:r>
-            <a:r>
-              <a:rPr lang="en-US" altLang="ko-KR" sz="1600" dirty="0">
-                <a:solidFill>
-                  <a:srgbClr val="1750EB"/>
-                </a:solidFill>
-                <a:effectLst/>
-                <a:latin typeface="D2Coding ligature" panose="020B0609020101020101" pitchFamily="49" charset="-127"/>
-                <a:ea typeface="D2Coding ligature" panose="020B0609020101020101" pitchFamily="49" charset="-127"/>
-              </a:rPr>
-              <a:t>0</a:t>
-            </a:r>
-            <a:br>
-              <a:rPr lang="en-US" altLang="ko-KR" sz="1600" dirty="0">
-                <a:solidFill>
-                  <a:srgbClr val="1750EB"/>
-                </a:solidFill>
-                <a:effectLst/>
-                <a:latin typeface="D2Coding ligature" panose="020B0609020101020101" pitchFamily="49" charset="-127"/>
-                <a:ea typeface="D2Coding ligature" panose="020B0609020101020101" pitchFamily="49" charset="-127"/>
-              </a:rPr>
-            </a:br>
-            <a:r>
-              <a:rPr lang="en-US" altLang="ko-KR" sz="1600" dirty="0">
-                <a:solidFill>
-                  <a:srgbClr val="1750EB"/>
-                </a:solidFill>
-                <a:effectLst/>
-                <a:latin typeface="D2Coding ligature" panose="020B0609020101020101" pitchFamily="49" charset="-127"/>
-                <a:ea typeface="D2Coding ligature" panose="020B0609020101020101" pitchFamily="49" charset="-127"/>
-              </a:rPr>
-              <a:t>        </a:t>
-            </a:r>
-            <a:r>
-              <a:rPr lang="en-US" altLang="ko-KR" sz="1600" dirty="0">
-                <a:solidFill>
-                  <a:srgbClr val="000000"/>
-                </a:solidFill>
-                <a:effectLst/>
-                <a:latin typeface="D2Coding ligature" panose="020B0609020101020101" pitchFamily="49" charset="-127"/>
-                <a:ea typeface="D2Coding ligature" panose="020B0609020101020101" pitchFamily="49" charset="-127"/>
-              </a:rPr>
-              <a:t>result</a:t>
-            </a:r>
-            <a:br>
-              <a:rPr lang="en-US" altLang="ko-KR" sz="1600" dirty="0">
-                <a:solidFill>
-                  <a:srgbClr val="000000"/>
-                </a:solidFill>
-                <a:effectLst/>
-                <a:latin typeface="D2Coding ligature" panose="020B0609020101020101" pitchFamily="49" charset="-127"/>
-                <a:ea typeface="D2Coding ligature" panose="020B0609020101020101" pitchFamily="49" charset="-127"/>
-              </a:rPr>
-            </a:br>
-            <a:r>
-              <a:rPr lang="en-US" altLang="ko-KR" sz="1600" dirty="0">
-                <a:solidFill>
-                  <a:srgbClr val="000000"/>
-                </a:solidFill>
-                <a:effectLst/>
-                <a:latin typeface="D2Coding ligature" panose="020B0609020101020101" pitchFamily="49" charset="-127"/>
-                <a:ea typeface="D2Coding ligature" panose="020B0609020101020101" pitchFamily="49" charset="-127"/>
-              </a:rPr>
-              <a:t>    </a:t>
-            </a:r>
-            <a:r>
-              <a:rPr lang="en-US" altLang="ko-KR" sz="1600" dirty="0">
-                <a:solidFill>
-                  <a:srgbClr val="080808"/>
-                </a:solidFill>
-                <a:effectLst/>
-                <a:latin typeface="D2Coding ligature" panose="020B0609020101020101" pitchFamily="49" charset="-127"/>
-                <a:ea typeface="D2Coding ligature" panose="020B0609020101020101" pitchFamily="49" charset="-127"/>
-              </a:rPr>
-              <a:t>} </a:t>
-            </a:r>
-            <a:r>
-              <a:rPr lang="en-US" altLang="ko-KR" sz="1600" dirty="0">
-                <a:solidFill>
-                  <a:srgbClr val="0033B3"/>
-                </a:solidFill>
-                <a:effectLst/>
-                <a:latin typeface="D2Coding ligature" panose="020B0609020101020101" pitchFamily="49" charset="-127"/>
-                <a:ea typeface="D2Coding ligature" panose="020B0609020101020101" pitchFamily="49" charset="-127"/>
-              </a:rPr>
-              <a:t>catch </a:t>
-            </a:r>
-            <a:r>
-              <a:rPr lang="en-US" altLang="ko-KR" sz="1600" dirty="0">
-                <a:solidFill>
-                  <a:srgbClr val="080808"/>
-                </a:solidFill>
-                <a:effectLst/>
-                <a:latin typeface="D2Coding ligature" panose="020B0609020101020101" pitchFamily="49" charset="-127"/>
-                <a:ea typeface="D2Coding ligature" panose="020B0609020101020101" pitchFamily="49" charset="-127"/>
-              </a:rPr>
-              <a:t>(</a:t>
-            </a:r>
-            <a:r>
-              <a:rPr lang="en-US" altLang="ko-KR" sz="1600" dirty="0">
-                <a:solidFill>
-                  <a:srgbClr val="000000"/>
-                </a:solidFill>
-                <a:effectLst/>
-                <a:latin typeface="D2Coding ligature" panose="020B0609020101020101" pitchFamily="49" charset="-127"/>
-                <a:ea typeface="D2Coding ligature" panose="020B0609020101020101" pitchFamily="49" charset="-127"/>
-              </a:rPr>
-              <a:t>e</a:t>
-            </a:r>
-            <a:r>
-              <a:rPr lang="en-US" altLang="ko-KR" sz="1600" dirty="0">
-                <a:solidFill>
-                  <a:srgbClr val="080808"/>
-                </a:solidFill>
-                <a:effectLst/>
-                <a:latin typeface="D2Coding ligature" panose="020B0609020101020101" pitchFamily="49" charset="-127"/>
-                <a:ea typeface="D2Coding ligature" panose="020B0609020101020101" pitchFamily="49" charset="-127"/>
-              </a:rPr>
-              <a:t>: </a:t>
-            </a:r>
-            <a:r>
-              <a:rPr lang="en-US" altLang="ko-KR" sz="1600" dirty="0">
-                <a:solidFill>
-                  <a:srgbClr val="000000"/>
-                </a:solidFill>
-                <a:effectLst/>
-                <a:latin typeface="D2Coding ligature" panose="020B0609020101020101" pitchFamily="49" charset="-127"/>
-                <a:ea typeface="D2Coding ligature" panose="020B0609020101020101" pitchFamily="49" charset="-127"/>
-              </a:rPr>
-              <a:t>Exception</a:t>
-            </a:r>
-            <a:r>
-              <a:rPr lang="en-US" altLang="ko-KR" sz="1600" dirty="0">
-                <a:solidFill>
-                  <a:srgbClr val="080808"/>
-                </a:solidFill>
-                <a:effectLst/>
-                <a:latin typeface="D2Coding ligature" panose="020B0609020101020101" pitchFamily="49" charset="-127"/>
-                <a:ea typeface="D2Coding ligature" panose="020B0609020101020101" pitchFamily="49" charset="-127"/>
-              </a:rPr>
-              <a:t>) {</a:t>
-            </a:r>
-            <a:br>
-              <a:rPr lang="en-US" altLang="ko-KR" sz="1600" dirty="0">
-                <a:solidFill>
-                  <a:srgbClr val="080808"/>
-                </a:solidFill>
-                <a:effectLst/>
-                <a:latin typeface="D2Coding ligature" panose="020B0609020101020101" pitchFamily="49" charset="-127"/>
-                <a:ea typeface="D2Coding ligature" panose="020B0609020101020101" pitchFamily="49" charset="-127"/>
-              </a:rPr>
-            </a:br>
-            <a:r>
-              <a:rPr lang="en-US" altLang="ko-KR" sz="1600" dirty="0">
-                <a:solidFill>
-                  <a:srgbClr val="080808"/>
-                </a:solidFill>
-                <a:effectLst/>
-                <a:latin typeface="D2Coding ligature" panose="020B0609020101020101" pitchFamily="49" charset="-127"/>
-                <a:ea typeface="D2Coding ligature" panose="020B0609020101020101" pitchFamily="49" charset="-127"/>
-              </a:rPr>
-              <a:t>        </a:t>
-            </a:r>
-            <a:r>
-              <a:rPr lang="en-US" altLang="ko-KR" sz="1600" i="1" dirty="0" err="1">
-                <a:solidFill>
-                  <a:srgbClr val="00627A"/>
-                </a:solidFill>
-                <a:effectLst/>
-                <a:latin typeface="D2Coding ligature" panose="020B0609020101020101" pitchFamily="49" charset="-127"/>
-                <a:ea typeface="D2Coding ligature" panose="020B0609020101020101" pitchFamily="49" charset="-127"/>
-              </a:rPr>
-              <a:t>println</a:t>
-            </a:r>
-            <a:r>
-              <a:rPr lang="en-US" altLang="ko-KR" sz="1600" dirty="0">
-                <a:solidFill>
-                  <a:srgbClr val="080808"/>
-                </a:solidFill>
-                <a:effectLst/>
-                <a:latin typeface="D2Coding ligature" panose="020B0609020101020101" pitchFamily="49" charset="-127"/>
-                <a:ea typeface="D2Coding ligature" panose="020B0609020101020101" pitchFamily="49" charset="-127"/>
-              </a:rPr>
-              <a:t>(</a:t>
-            </a:r>
-            <a:r>
-              <a:rPr lang="en-US" altLang="ko-KR" sz="1600" dirty="0">
-                <a:solidFill>
-                  <a:srgbClr val="067D17"/>
-                </a:solidFill>
-                <a:effectLst/>
-                <a:latin typeface="D2Coding ligature" panose="020B0609020101020101" pitchFamily="49" charset="-127"/>
-                <a:ea typeface="D2Coding ligature" panose="020B0609020101020101" pitchFamily="49" charset="-127"/>
-              </a:rPr>
-              <a:t>"</a:t>
-            </a:r>
-            <a:r>
-              <a:rPr lang="ko-KR" altLang="en-US" sz="1600" dirty="0">
-                <a:solidFill>
-                  <a:srgbClr val="067D17"/>
-                </a:solidFill>
-                <a:effectLst/>
-                <a:latin typeface="D2Coding ligature" panose="020B0609020101020101" pitchFamily="49" charset="-127"/>
-                <a:ea typeface="D2Coding ligature" panose="020B0609020101020101" pitchFamily="49" charset="-127"/>
-              </a:rPr>
-              <a:t>예외 발생</a:t>
-            </a:r>
-            <a:r>
-              <a:rPr lang="en-US" altLang="ko-KR" sz="1600" dirty="0">
-                <a:solidFill>
-                  <a:srgbClr val="067D17"/>
-                </a:solidFill>
-                <a:effectLst/>
-                <a:latin typeface="D2Coding ligature" panose="020B0609020101020101" pitchFamily="49" charset="-127"/>
-                <a:ea typeface="D2Coding ligature" panose="020B0609020101020101" pitchFamily="49" charset="-127"/>
-              </a:rPr>
-              <a:t>: </a:t>
-            </a:r>
-            <a:r>
-              <a:rPr lang="en-US" altLang="ko-KR" sz="1600" dirty="0">
-                <a:solidFill>
-                  <a:srgbClr val="0037A6"/>
-                </a:solidFill>
-                <a:effectLst/>
-                <a:latin typeface="D2Coding ligature" panose="020B0609020101020101" pitchFamily="49" charset="-127"/>
-                <a:ea typeface="D2Coding ligature" panose="020B0609020101020101" pitchFamily="49" charset="-127"/>
-              </a:rPr>
-              <a:t>${</a:t>
-            </a:r>
-            <a:r>
-              <a:rPr lang="en-US" altLang="ko-KR" sz="1600" dirty="0" err="1">
-                <a:solidFill>
-                  <a:srgbClr val="000000"/>
-                </a:solidFill>
-                <a:effectLst/>
-                <a:latin typeface="D2Coding ligature" panose="020B0609020101020101" pitchFamily="49" charset="-127"/>
-                <a:ea typeface="D2Coding ligature" panose="020B0609020101020101" pitchFamily="49" charset="-127"/>
-              </a:rPr>
-              <a:t>e</a:t>
-            </a:r>
-            <a:r>
-              <a:rPr lang="en-US" altLang="ko-KR" sz="1600" dirty="0" err="1">
-                <a:solidFill>
-                  <a:srgbClr val="080808"/>
-                </a:solidFill>
-                <a:effectLst/>
-                <a:latin typeface="D2Coding ligature" panose="020B0609020101020101" pitchFamily="49" charset="-127"/>
-                <a:ea typeface="D2Coding ligature" panose="020B0609020101020101" pitchFamily="49" charset="-127"/>
-              </a:rPr>
-              <a:t>.</a:t>
-            </a:r>
-            <a:r>
-              <a:rPr lang="en-US" altLang="ko-KR" sz="1600" dirty="0" err="1">
-                <a:solidFill>
-                  <a:srgbClr val="871094"/>
-                </a:solidFill>
-                <a:effectLst/>
-                <a:latin typeface="D2Coding ligature" panose="020B0609020101020101" pitchFamily="49" charset="-127"/>
-                <a:ea typeface="D2Coding ligature" panose="020B0609020101020101" pitchFamily="49" charset="-127"/>
-              </a:rPr>
-              <a:t>message</a:t>
-            </a:r>
-            <a:r>
-              <a:rPr lang="en-US" altLang="ko-KR" sz="1600" dirty="0">
-                <a:solidFill>
-                  <a:srgbClr val="0037A6"/>
-                </a:solidFill>
-                <a:effectLst/>
-                <a:latin typeface="D2Coding ligature" panose="020B0609020101020101" pitchFamily="49" charset="-127"/>
-                <a:ea typeface="D2Coding ligature" panose="020B0609020101020101" pitchFamily="49" charset="-127"/>
-              </a:rPr>
-              <a:t>}</a:t>
-            </a:r>
-            <a:r>
-              <a:rPr lang="en-US" altLang="ko-KR" sz="1600" dirty="0">
-                <a:solidFill>
-                  <a:srgbClr val="067D17"/>
-                </a:solidFill>
-                <a:effectLst/>
-                <a:latin typeface="D2Coding ligature" panose="020B0609020101020101" pitchFamily="49" charset="-127"/>
-                <a:ea typeface="D2Coding ligature" panose="020B0609020101020101" pitchFamily="49" charset="-127"/>
-              </a:rPr>
-              <a:t>"</a:t>
-            </a:r>
-            <a:r>
-              <a:rPr lang="en-US" altLang="ko-KR" sz="1600" dirty="0">
-                <a:solidFill>
-                  <a:srgbClr val="080808"/>
-                </a:solidFill>
-                <a:effectLst/>
-                <a:latin typeface="D2Coding ligature" panose="020B0609020101020101" pitchFamily="49" charset="-127"/>
-                <a:ea typeface="D2Coding ligature" panose="020B0609020101020101" pitchFamily="49" charset="-127"/>
-              </a:rPr>
-              <a:t>)</a:t>
-            </a:r>
-            <a:br>
-              <a:rPr lang="en-US" altLang="ko-KR" sz="1600" dirty="0">
-                <a:solidFill>
-                  <a:srgbClr val="080808"/>
-                </a:solidFill>
-                <a:effectLst/>
-                <a:latin typeface="D2Coding ligature" panose="020B0609020101020101" pitchFamily="49" charset="-127"/>
-                <a:ea typeface="D2Coding ligature" panose="020B0609020101020101" pitchFamily="49" charset="-127"/>
-              </a:rPr>
-            </a:br>
-            <a:r>
-              <a:rPr lang="en-US" altLang="ko-KR" sz="1600" dirty="0">
-                <a:solidFill>
-                  <a:srgbClr val="080808"/>
-                </a:solidFill>
-                <a:effectLst/>
-                <a:latin typeface="D2Coding ligature" panose="020B0609020101020101" pitchFamily="49" charset="-127"/>
-                <a:ea typeface="D2Coding ligature" panose="020B0609020101020101" pitchFamily="49" charset="-127"/>
-              </a:rPr>
-              <a:t>        -</a:t>
-            </a:r>
-            <a:r>
-              <a:rPr lang="en-US" altLang="ko-KR" sz="1600" dirty="0">
-                <a:solidFill>
-                  <a:srgbClr val="1750EB"/>
-                </a:solidFill>
-                <a:effectLst/>
-                <a:latin typeface="D2Coding ligature" panose="020B0609020101020101" pitchFamily="49" charset="-127"/>
-                <a:ea typeface="D2Coding ligature" panose="020B0609020101020101" pitchFamily="49" charset="-127"/>
-              </a:rPr>
-              <a:t>1</a:t>
-            </a:r>
-            <a:br>
-              <a:rPr lang="en-US" altLang="ko-KR" sz="1600" dirty="0">
-                <a:solidFill>
-                  <a:srgbClr val="1750EB"/>
-                </a:solidFill>
-                <a:effectLst/>
-                <a:latin typeface="D2Coding ligature" panose="020B0609020101020101" pitchFamily="49" charset="-127"/>
-                <a:ea typeface="D2Coding ligature" panose="020B0609020101020101" pitchFamily="49" charset="-127"/>
-              </a:rPr>
-            </a:br>
-            <a:r>
-              <a:rPr lang="en-US" altLang="ko-KR" sz="1600" dirty="0">
-                <a:solidFill>
-                  <a:srgbClr val="1750EB"/>
-                </a:solidFill>
-                <a:effectLst/>
-                <a:latin typeface="D2Coding ligature" panose="020B0609020101020101" pitchFamily="49" charset="-127"/>
-                <a:ea typeface="D2Coding ligature" panose="020B0609020101020101" pitchFamily="49" charset="-127"/>
-              </a:rPr>
-              <a:t>    </a:t>
-            </a:r>
-            <a:r>
-              <a:rPr lang="en-US" altLang="ko-KR" sz="1600" dirty="0">
-                <a:solidFill>
-                  <a:srgbClr val="080808"/>
-                </a:solidFill>
-                <a:effectLst/>
-                <a:latin typeface="D2Coding ligature" panose="020B0609020101020101" pitchFamily="49" charset="-127"/>
-                <a:ea typeface="D2Coding ligature" panose="020B0609020101020101" pitchFamily="49" charset="-127"/>
-              </a:rPr>
-              <a:t>} </a:t>
-            </a:r>
-            <a:r>
-              <a:rPr lang="en-US" altLang="ko-KR" sz="1600" dirty="0">
-                <a:solidFill>
-                  <a:srgbClr val="0033B3"/>
-                </a:solidFill>
-                <a:effectLst/>
-                <a:latin typeface="D2Coding ligature" panose="020B0609020101020101" pitchFamily="49" charset="-127"/>
-                <a:ea typeface="D2Coding ligature" panose="020B0609020101020101" pitchFamily="49" charset="-127"/>
-              </a:rPr>
-              <a:t>finally </a:t>
-            </a:r>
-            <a:r>
-              <a:rPr lang="en-US" altLang="ko-KR" sz="1600" dirty="0">
-                <a:solidFill>
-                  <a:srgbClr val="080808"/>
-                </a:solidFill>
-                <a:effectLst/>
-                <a:latin typeface="D2Coding ligature" panose="020B0609020101020101" pitchFamily="49" charset="-127"/>
-                <a:ea typeface="D2Coding ligature" panose="020B0609020101020101" pitchFamily="49" charset="-127"/>
-              </a:rPr>
-              <a:t>{</a:t>
-            </a:r>
-            <a:br>
-              <a:rPr lang="en-US" altLang="ko-KR" sz="1600" dirty="0">
-                <a:solidFill>
-                  <a:srgbClr val="080808"/>
-                </a:solidFill>
-                <a:effectLst/>
-                <a:latin typeface="D2Coding ligature" panose="020B0609020101020101" pitchFamily="49" charset="-127"/>
-                <a:ea typeface="D2Coding ligature" panose="020B0609020101020101" pitchFamily="49" charset="-127"/>
-              </a:rPr>
-            </a:br>
-            <a:r>
-              <a:rPr lang="en-US" altLang="ko-KR" sz="1600" dirty="0">
-                <a:solidFill>
-                  <a:srgbClr val="080808"/>
-                </a:solidFill>
-                <a:effectLst/>
-                <a:latin typeface="D2Coding ligature" panose="020B0609020101020101" pitchFamily="49" charset="-127"/>
-                <a:ea typeface="D2Coding ligature" panose="020B0609020101020101" pitchFamily="49" charset="-127"/>
-              </a:rPr>
-              <a:t>        </a:t>
-            </a:r>
-            <a:r>
-              <a:rPr lang="en-US" altLang="ko-KR" sz="1600" i="1" dirty="0" err="1">
-                <a:solidFill>
-                  <a:srgbClr val="00627A"/>
-                </a:solidFill>
-                <a:effectLst/>
-                <a:latin typeface="D2Coding ligature" panose="020B0609020101020101" pitchFamily="49" charset="-127"/>
-                <a:ea typeface="D2Coding ligature" panose="020B0609020101020101" pitchFamily="49" charset="-127"/>
-              </a:rPr>
-              <a:t>println</a:t>
-            </a:r>
-            <a:r>
-              <a:rPr lang="en-US" altLang="ko-KR" sz="1600" dirty="0">
-                <a:solidFill>
-                  <a:srgbClr val="080808"/>
-                </a:solidFill>
-                <a:effectLst/>
-                <a:latin typeface="D2Coding ligature" panose="020B0609020101020101" pitchFamily="49" charset="-127"/>
-                <a:ea typeface="D2Coding ligature" panose="020B0609020101020101" pitchFamily="49" charset="-127"/>
-              </a:rPr>
-              <a:t>(</a:t>
-            </a:r>
-            <a:r>
-              <a:rPr lang="en-US" altLang="ko-KR" sz="1600" dirty="0">
-                <a:solidFill>
-                  <a:srgbClr val="067D17"/>
-                </a:solidFill>
-                <a:effectLst/>
-                <a:latin typeface="D2Coding ligature" panose="020B0609020101020101" pitchFamily="49" charset="-127"/>
-                <a:ea typeface="D2Coding ligature" panose="020B0609020101020101" pitchFamily="49" charset="-127"/>
-              </a:rPr>
-              <a:t>"finally </a:t>
-            </a:r>
-            <a:r>
-              <a:rPr lang="ko-KR" altLang="en-US" sz="1600" dirty="0">
-                <a:solidFill>
-                  <a:srgbClr val="067D17"/>
-                </a:solidFill>
-                <a:effectLst/>
-                <a:latin typeface="D2Coding ligature" panose="020B0609020101020101" pitchFamily="49" charset="-127"/>
-                <a:ea typeface="D2Coding ligature" panose="020B0609020101020101" pitchFamily="49" charset="-127"/>
-              </a:rPr>
-              <a:t>실행 </a:t>
-            </a:r>
-            <a:r>
-              <a:rPr lang="en-US" altLang="ko-KR" sz="1600" dirty="0">
-                <a:solidFill>
-                  <a:srgbClr val="067D17"/>
-                </a:solidFill>
-                <a:effectLst/>
-                <a:latin typeface="D2Coding ligature" panose="020B0609020101020101" pitchFamily="49" charset="-127"/>
-                <a:ea typeface="D2Coding ligature" panose="020B0609020101020101" pitchFamily="49" charset="-127"/>
-              </a:rPr>
-              <a:t>(</a:t>
-            </a:r>
-            <a:r>
-              <a:rPr lang="ko-KR" altLang="en-US" sz="1600" dirty="0">
-                <a:solidFill>
-                  <a:srgbClr val="067D17"/>
-                </a:solidFill>
-                <a:effectLst/>
-                <a:latin typeface="D2Coding ligature" panose="020B0609020101020101" pitchFamily="49" charset="-127"/>
-                <a:ea typeface="D2Coding ligature" panose="020B0609020101020101" pitchFamily="49" charset="-127"/>
-              </a:rPr>
-              <a:t>항상 실행됨</a:t>
-            </a:r>
-            <a:r>
-              <a:rPr lang="en-US" altLang="ko-KR" sz="1600" dirty="0">
-                <a:solidFill>
-                  <a:srgbClr val="067D17"/>
-                </a:solidFill>
-                <a:effectLst/>
-                <a:latin typeface="D2Coding ligature" panose="020B0609020101020101" pitchFamily="49" charset="-127"/>
-                <a:ea typeface="D2Coding ligature" panose="020B0609020101020101" pitchFamily="49" charset="-127"/>
-              </a:rPr>
-              <a:t>)"</a:t>
-            </a:r>
-            <a:r>
-              <a:rPr lang="en-US" altLang="ko-KR" sz="1600" dirty="0">
-                <a:solidFill>
-                  <a:srgbClr val="080808"/>
-                </a:solidFill>
-                <a:effectLst/>
-                <a:latin typeface="D2Coding ligature" panose="020B0609020101020101" pitchFamily="49" charset="-127"/>
-                <a:ea typeface="D2Coding ligature" panose="020B0609020101020101" pitchFamily="49" charset="-127"/>
-              </a:rPr>
-              <a:t>)</a:t>
-            </a:r>
-            <a:br>
-              <a:rPr lang="en-US" altLang="ko-KR" sz="1600" dirty="0">
-                <a:solidFill>
-                  <a:srgbClr val="080808"/>
-                </a:solidFill>
-                <a:effectLst/>
-                <a:latin typeface="D2Coding ligature" panose="020B0609020101020101" pitchFamily="49" charset="-127"/>
-                <a:ea typeface="D2Coding ligature" panose="020B0609020101020101" pitchFamily="49" charset="-127"/>
-              </a:rPr>
-            </a:br>
-            <a:r>
-              <a:rPr lang="en-US" altLang="ko-KR" sz="1600" dirty="0">
-                <a:solidFill>
-                  <a:srgbClr val="080808"/>
-                </a:solidFill>
-                <a:effectLst/>
-                <a:latin typeface="D2Coding ligature" panose="020B0609020101020101" pitchFamily="49" charset="-127"/>
-                <a:ea typeface="D2Coding ligature" panose="020B0609020101020101" pitchFamily="49" charset="-127"/>
-              </a:rPr>
-              <a:t>    }</a:t>
-            </a:r>
-            <a:br>
-              <a:rPr lang="en-US" altLang="ko-KR" sz="1600" dirty="0">
-                <a:solidFill>
-                  <a:srgbClr val="080808"/>
-                </a:solidFill>
-                <a:effectLst/>
-                <a:latin typeface="D2Coding ligature" panose="020B0609020101020101" pitchFamily="49" charset="-127"/>
-                <a:ea typeface="D2Coding ligature" panose="020B0609020101020101" pitchFamily="49" charset="-127"/>
-              </a:rPr>
-            </a:br>
-            <a:r>
-              <a:rPr lang="en-US" altLang="ko-KR" sz="1600" dirty="0">
-                <a:solidFill>
-                  <a:srgbClr val="080808"/>
-                </a:solidFill>
-                <a:effectLst/>
-                <a:latin typeface="D2Coding ligature" panose="020B0609020101020101" pitchFamily="49" charset="-127"/>
-                <a:ea typeface="D2Coding ligature" panose="020B0609020101020101" pitchFamily="49" charset="-127"/>
-              </a:rPr>
-              <a:t>    </a:t>
-            </a:r>
-            <a:br>
-              <a:rPr lang="en-US" altLang="ko-KR" sz="1600" dirty="0">
-                <a:solidFill>
-                  <a:srgbClr val="080808"/>
-                </a:solidFill>
-                <a:effectLst/>
-                <a:latin typeface="D2Coding ligature" panose="020B0609020101020101" pitchFamily="49" charset="-127"/>
-                <a:ea typeface="D2Coding ligature" panose="020B0609020101020101" pitchFamily="49" charset="-127"/>
-              </a:rPr>
-            </a:br>
-            <a:r>
-              <a:rPr lang="en-US" altLang="ko-KR" sz="1600" dirty="0">
-                <a:solidFill>
-                  <a:srgbClr val="080808"/>
-                </a:solidFill>
-                <a:effectLst/>
-                <a:latin typeface="D2Coding ligature" panose="020B0609020101020101" pitchFamily="49" charset="-127"/>
-                <a:ea typeface="D2Coding ligature" panose="020B0609020101020101" pitchFamily="49" charset="-127"/>
-              </a:rPr>
-              <a:t>    </a:t>
-            </a:r>
-            <a:r>
-              <a:rPr lang="en-US" altLang="ko-KR" sz="1600" i="1" dirty="0" err="1">
-                <a:solidFill>
-                  <a:srgbClr val="00627A"/>
-                </a:solidFill>
-                <a:effectLst/>
-                <a:latin typeface="D2Coding ligature" panose="020B0609020101020101" pitchFamily="49" charset="-127"/>
-                <a:ea typeface="D2Coding ligature" panose="020B0609020101020101" pitchFamily="49" charset="-127"/>
-              </a:rPr>
-              <a:t>println</a:t>
-            </a:r>
-            <a:r>
-              <a:rPr lang="en-US" altLang="ko-KR" sz="1600" dirty="0">
-                <a:solidFill>
-                  <a:srgbClr val="080808"/>
-                </a:solidFill>
-                <a:effectLst/>
-                <a:latin typeface="D2Coding ligature" panose="020B0609020101020101" pitchFamily="49" charset="-127"/>
-                <a:ea typeface="D2Coding ligature" panose="020B0609020101020101" pitchFamily="49" charset="-127"/>
-              </a:rPr>
-              <a:t>(</a:t>
-            </a:r>
-            <a:r>
-              <a:rPr lang="en-US" altLang="ko-KR" sz="1600" dirty="0">
-                <a:solidFill>
-                  <a:srgbClr val="000000"/>
-                </a:solidFill>
-                <a:effectLst/>
-                <a:latin typeface="D2Coding ligature" panose="020B0609020101020101" pitchFamily="49" charset="-127"/>
-                <a:ea typeface="D2Coding ligature" panose="020B0609020101020101" pitchFamily="49" charset="-127"/>
-              </a:rPr>
-              <a:t>value</a:t>
-            </a:r>
-            <a:r>
-              <a:rPr lang="en-US" altLang="ko-KR" sz="1600" dirty="0">
-                <a:solidFill>
-                  <a:srgbClr val="080808"/>
-                </a:solidFill>
-                <a:effectLst/>
-                <a:latin typeface="D2Coding ligature" panose="020B0609020101020101" pitchFamily="49" charset="-127"/>
-                <a:ea typeface="D2Coding ligature" panose="020B0609020101020101" pitchFamily="49" charset="-127"/>
-              </a:rPr>
-              <a:t>)</a:t>
-            </a:r>
-            <a:br>
-              <a:rPr lang="en-US" altLang="ko-KR" sz="1600" dirty="0">
-                <a:solidFill>
-                  <a:srgbClr val="080808"/>
-                </a:solidFill>
-                <a:effectLst/>
-                <a:latin typeface="D2Coding ligature" panose="020B0609020101020101" pitchFamily="49" charset="-127"/>
-                <a:ea typeface="D2Coding ligature" panose="020B0609020101020101" pitchFamily="49" charset="-127"/>
-              </a:rPr>
-            </a:br>
-            <a:r>
-              <a:rPr lang="en-US" altLang="ko-KR" sz="1600" dirty="0">
-                <a:solidFill>
-                  <a:srgbClr val="080808"/>
-                </a:solidFill>
-                <a:effectLst/>
-                <a:latin typeface="D2Coding ligature" panose="020B0609020101020101" pitchFamily="49" charset="-127"/>
-                <a:ea typeface="D2Coding ligature" panose="020B0609020101020101" pitchFamily="49" charset="-127"/>
-              </a:rPr>
-              <a:t>}</a:t>
-            </a:r>
+              <a:rPr lang="ko-KR" altLang="ko-KR" sz="1600" dirty="0" err="1">
+                <a:solidFill>
+                  <a:srgbClr val="A0A0A0"/>
+                </a:solidFill>
+                <a:effectLst/>
+                <a:latin typeface="D2Coding ligature" panose="020B0609020101020101" pitchFamily="49" charset="-127"/>
+                <a:ea typeface="D2Coding ligature" panose="020B0609020101020101" pitchFamily="49" charset="-127"/>
+              </a:rPr>
+              <a:t>num</a:t>
+            </a:r>
+            <a:r>
+              <a:rPr lang="ko-KR" altLang="ko-KR" sz="1600" dirty="0">
+                <a:solidFill>
+                  <a:srgbClr val="A0A0A0"/>
+                </a:solidFill>
+                <a:effectLst/>
+                <a:latin typeface="D2Coding ligature" panose="020B0609020101020101" pitchFamily="49" charset="-127"/>
+                <a:ea typeface="D2Coding ligature" panose="020B0609020101020101" pitchFamily="49" charset="-127"/>
+              </a:rPr>
+              <a:t>*/</a:t>
+            </a:r>
+            <a:endParaRPr lang="ko-KR" altLang="ko-KR" sz="1600" dirty="0">
+              <a:solidFill>
+                <a:srgbClr val="302A24"/>
+              </a:solidFill>
+              <a:effectLst/>
+              <a:latin typeface="D2Coding ligature" panose="020B0609020101020101" pitchFamily="49" charset="-127"/>
+              <a:ea typeface="D2Coding ligature" panose="020B0609020101020101" pitchFamily="49" charset="-127"/>
+            </a:endParaRPr>
+          </a:p>
+        </p:txBody>
+      </p:sp>
+      <p:sp>
+        <p:nvSpPr>
+          <p:cNvPr id="4" name="TextBox 3">
+            <a:extLst>
+              <a:ext uri="{FF2B5EF4-FFF2-40B4-BE49-F238E27FC236}">
+                <a16:creationId xmlns:a16="http://schemas.microsoft.com/office/drawing/2014/main" id="{086D4F18-1544-9760-FECA-EED61C740900}"/>
+              </a:ext>
+            </a:extLst>
+          </p:cNvPr>
+          <p:cNvSpPr txBox="1"/>
+          <p:nvPr/>
+        </p:nvSpPr>
+        <p:spPr>
+          <a:xfrm>
+            <a:off x="8953500" y="6364843"/>
+            <a:ext cx="3057525" cy="369332"/>
+          </a:xfrm>
+          <a:prstGeom prst="rect">
+            <a:avLst/>
+          </a:prstGeom>
+          <a:noFill/>
+        </p:spPr>
+        <p:txBody>
+          <a:bodyPr wrap="square">
+            <a:spAutoFit/>
+          </a:bodyPr>
+          <a:lstStyle/>
+          <a:p>
+            <a:pPr algn="r">
+              <a:buNone/>
+            </a:pPr>
+            <a:r>
+              <a:rPr lang="en-US" altLang="ko-KR" sz="1800" dirty="0" err="1">
+                <a:solidFill>
+                  <a:schemeClr val="bg1">
+                    <a:lumMod val="50000"/>
+                  </a:schemeClr>
+                </a:solidFill>
+                <a:effectLst/>
+                <a:latin typeface="나눔스퀘어라운드OTF Light" panose="020B0600000101010101" pitchFamily="34" charset="-127"/>
+                <a:ea typeface="나눔스퀘어라운드OTF Light" panose="020B0600000101010101" pitchFamily="34" charset="-127"/>
+              </a:rPr>
+              <a:t>tryCatchFinally.kt</a:t>
+            </a:r>
+            <a:endParaRPr lang="ko-KR" altLang="ko-KR" sz="1800" dirty="0">
+              <a:solidFill>
+                <a:schemeClr val="bg1">
+                  <a:lumMod val="50000"/>
+                </a:schemeClr>
+              </a:solidFill>
+              <a:effectLst/>
+              <a:latin typeface="나눔스퀘어라운드OTF Light" panose="020B0600000101010101" pitchFamily="34" charset="-127"/>
+              <a:ea typeface="나눔스퀘어라운드OTF Light" panose="020B0600000101010101" pitchFamily="34" charset="-127"/>
+            </a:endParaRPr>
           </a:p>
         </p:txBody>
       </p:sp>
@@ -34545,6 +34262,63 @@
           </a:p>
         </p:txBody>
       </p:sp>
+      <p:sp>
+        <p:nvSpPr>
+          <p:cNvPr id="4" name="TextBox 3">
+            <a:extLst>
+              <a:ext uri="{FF2B5EF4-FFF2-40B4-BE49-F238E27FC236}">
+                <a16:creationId xmlns:a16="http://schemas.microsoft.com/office/drawing/2014/main" id="{DA855C4E-9F08-6C11-D065-029858151DA6}"/>
+              </a:ext>
+            </a:extLst>
+          </p:cNvPr>
+          <p:cNvSpPr txBox="1"/>
+          <p:nvPr/>
+        </p:nvSpPr>
+        <p:spPr>
+          <a:xfrm>
+            <a:off x="8953500" y="6364843"/>
+            <a:ext cx="3057525" cy="369332"/>
+          </a:xfrm>
+          <a:prstGeom prst="rect">
+            <a:avLst/>
+          </a:prstGeom>
+          <a:noFill/>
+        </p:spPr>
+        <p:txBody>
+          <a:bodyPr wrap="square">
+            <a:spAutoFit/>
+          </a:bodyPr>
+          <a:lstStyle/>
+          <a:p>
+            <a:pPr algn="r">
+              <a:buNone/>
+            </a:pPr>
+            <a:r>
+              <a:rPr lang="en-US" altLang="ko-KR" sz="1800" dirty="0" err="1">
+                <a:solidFill>
+                  <a:schemeClr val="bg1">
+                    <a:lumMod val="50000"/>
+                  </a:schemeClr>
+                </a:solidFill>
+                <a:effectLst/>
+                <a:latin typeface="나눔스퀘어라운드OTF Light" panose="020B0600000101010101" pitchFamily="34" charset="-127"/>
+                <a:ea typeface="나눔스퀘어라운드OTF Light" panose="020B0600000101010101" pitchFamily="34" charset="-127"/>
+              </a:rPr>
+              <a:t>tryCatchFinally.kt</a:t>
+            </a:r>
+            <a:endParaRPr lang="ko-KR" altLang="ko-KR" sz="1800" dirty="0">
+              <a:solidFill>
+                <a:schemeClr val="bg1">
+                  <a:lumMod val="50000"/>
+                </a:schemeClr>
+              </a:solidFill>
+              <a:effectLst/>
+              <a:latin typeface="나눔스퀘어라운드OTF Light" panose="020B0600000101010101" pitchFamily="34" charset="-127"/>
+              <a:ea typeface="나눔스퀘어라운드OTF Light" panose="020B0600000101010101" pitchFamily="34" charset="-127"/>
+            </a:endParaRPr>
+          </a:p>
+        </p:txBody>
+      </p:sp>
     </p:spTree>
     <p:extLst>
       <p:ext uri="{BB962C8B-B14F-4D97-AF65-F5344CB8AC3E}">
@@ -34559,6 +34333,2739 @@
 </file>
 
 <file path=ppt/slides/slide32.xml><?xml version="1.0" encoding="utf-8"?>
+<p:sld xmlns:a="http://schemas.openxmlformats.org/drawingml/2006/main" xmlns:r="http://schemas.openxmlformats.org/officeDocument/2006/relationships" xmlns:p="http://schemas.openxmlformats.org/presentationml/2006/main">
+  <p:cSld>
+    <p:spTree>
+      <p:nvGrpSpPr>
+        <p:cNvPr id="1" name="">
+          <a:extLst>
+            <a:ext uri="{FF2B5EF4-FFF2-40B4-BE49-F238E27FC236}">
+              <a16:creationId xmlns:a16="http://schemas.microsoft.com/office/drawing/2014/main" id="{B6396F8F-95BB-8B52-B4DB-BA120502BB10}"/>
+            </a:ext>
+          </a:extLst>
+        </p:cNvPr>
+        <p:cNvGrpSpPr/>
+        <p:nvPr/>
+      </p:nvGrpSpPr>
+      <p:grpSpPr>
+        <a:xfrm>
+          <a:off x="0" y="0"/>
+          <a:ext cx="0" cy="0"/>
+          <a:chOff x="0" y="0"/>
+          <a:chExt cx="0" cy="0"/>
+        </a:xfrm>
+      </p:grpSpPr>
+      <p:sp>
+        <p:nvSpPr>
+          <p:cNvPr id="2" name="제목 1">
+            <a:extLst>
+              <a:ext uri="{FF2B5EF4-FFF2-40B4-BE49-F238E27FC236}">
+                <a16:creationId xmlns:a16="http://schemas.microsoft.com/office/drawing/2014/main" id="{FD2FC7C2-DFA5-B6B8-3F71-908CF8C7D775}"/>
+              </a:ext>
+            </a:extLst>
+          </p:cNvPr>
+          <p:cNvSpPr>
+            <a:spLocks noGrp="1"/>
+          </p:cNvSpPr>
+          <p:nvPr>
+            <p:ph type="title"/>
+          </p:nvPr>
+        </p:nvSpPr>
+        <p:spPr/>
+        <p:txBody>
+          <a:bodyPr/>
+          <a:lstStyle/>
+          <a:p>
+            <a:r>
+              <a:rPr lang="ko-KR" altLang="en-US" dirty="0"/>
+              <a:t>예외 처리</a:t>
+            </a:r>
+          </a:p>
+        </p:txBody>
+      </p:sp>
+      <p:sp>
+        <p:nvSpPr>
+          <p:cNvPr id="3" name="내용 개체 틀 2">
+            <a:extLst>
+              <a:ext uri="{FF2B5EF4-FFF2-40B4-BE49-F238E27FC236}">
+                <a16:creationId xmlns:a16="http://schemas.microsoft.com/office/drawing/2014/main" id="{616EC9C3-F026-D9A5-8F79-ABD6013C99DF}"/>
+              </a:ext>
+            </a:extLst>
+          </p:cNvPr>
+          <p:cNvSpPr>
+            <a:spLocks noGrp="1"/>
+          </p:cNvSpPr>
+          <p:nvPr>
+            <p:ph idx="1"/>
+          </p:nvPr>
+        </p:nvSpPr>
+        <p:spPr>
+          <a:xfrm>
+            <a:off x="838201" y="1825625"/>
+            <a:ext cx="5257799" cy="4351338"/>
+          </a:xfrm>
+        </p:spPr>
+        <p:txBody>
+          <a:bodyPr>
+            <a:normAutofit/>
+          </a:bodyPr>
+          <a:lstStyle/>
+          <a:p>
+            <a:pPr>
+              <a:lnSpc>
+                <a:spcPct val="200000"/>
+              </a:lnSpc>
+              <a:buFont typeface="Wingdings" panose="05000000000000000000" pitchFamily="2" charset="2"/>
+              <a:buChar char="u"/>
+            </a:pPr>
+            <a:r>
+              <a:rPr lang="en-US" altLang="ko-KR" sz="3200" b="1" dirty="0">
+                <a:latin typeface="+mn-ea"/>
+              </a:rPr>
+              <a:t> catch</a:t>
+            </a:r>
+          </a:p>
+          <a:p>
+            <a:pPr>
+              <a:lnSpc>
+                <a:spcPct val="150000"/>
+              </a:lnSpc>
+            </a:pPr>
+            <a:r>
+              <a:rPr lang="en-US" altLang="ko-KR" sz="2400" dirty="0"/>
+              <a:t>throw </a:t>
+            </a:r>
+            <a:r>
+              <a:rPr lang="ko-KR" altLang="en-US" sz="2400" dirty="0"/>
+              <a:t>당한 </a:t>
+            </a:r>
+            <a:r>
+              <a:rPr lang="en-US" altLang="ko-KR" sz="2400" dirty="0"/>
+              <a:t>Throwable </a:t>
+            </a:r>
+            <a:r>
+              <a:rPr lang="ko-KR" altLang="en-US" sz="2400" dirty="0"/>
+              <a:t>객체를 잡음</a:t>
+            </a:r>
+            <a:r>
+              <a:rPr lang="en-US" altLang="ko-KR" sz="2400" dirty="0"/>
+              <a:t>.</a:t>
+            </a:r>
+          </a:p>
+          <a:p>
+            <a:pPr>
+              <a:lnSpc>
+                <a:spcPct val="150000"/>
+              </a:lnSpc>
+            </a:pPr>
+            <a:r>
+              <a:rPr lang="ko-KR" altLang="en-US" sz="2400" dirty="0"/>
+              <a:t>예외를 만났을 때 </a:t>
+            </a:r>
+            <a:r>
+              <a:rPr lang="en-US" altLang="ko-KR" sz="2400" dirty="0"/>
+              <a:t>JVM</a:t>
+            </a:r>
+            <a:r>
+              <a:rPr lang="ko-KR" altLang="en-US" sz="2400" dirty="0"/>
+              <a:t>이 어디로 보내는지 결정하는 과정</a:t>
+            </a:r>
+            <a:r>
+              <a:rPr lang="en-US" altLang="ko-KR" sz="2400" dirty="0"/>
+              <a:t>.</a:t>
+            </a:r>
+          </a:p>
+          <a:p>
+            <a:pPr>
+              <a:lnSpc>
+                <a:spcPct val="150000"/>
+              </a:lnSpc>
+            </a:pPr>
+            <a:r>
+              <a:rPr lang="ko-KR" altLang="en-US" sz="2400" dirty="0"/>
+              <a:t>잡지 못한 예외는 외부로 전파</a:t>
+            </a:r>
+            <a:r>
+              <a:rPr lang="en-US" altLang="ko-KR" sz="2400" dirty="0"/>
+              <a:t>.</a:t>
+            </a:r>
+          </a:p>
+        </p:txBody>
+      </p:sp>
+      <p:sp>
+        <p:nvSpPr>
+          <p:cNvPr id="25" name="Rectangle 7">
+            <a:extLst>
+              <a:ext uri="{FF2B5EF4-FFF2-40B4-BE49-F238E27FC236}">
+                <a16:creationId xmlns:a16="http://schemas.microsoft.com/office/drawing/2014/main" id="{0F1EB9C0-B830-42EB-8E89-7A4596F31BA0}"/>
+              </a:ext>
+            </a:extLst>
+          </p:cNvPr>
+          <p:cNvSpPr>
+            <a:spLocks noChangeArrowheads="1"/>
+          </p:cNvSpPr>
+          <p:nvPr/>
+        </p:nvSpPr>
+        <p:spPr bwMode="auto">
+          <a:xfrm>
+            <a:off x="0" y="-184666"/>
+            <a:ext cx="264816" cy="369332"/>
+          </a:xfrm>
+          <a:prstGeom prst="rect">
+            <a:avLst/>
+          </a:prstGeom>
+          <a:noFill/>
+          <a:ln>
+            <a:noFill/>
+          </a:ln>
+          <a:effectLst/>
+          <a:extLst>
+            <a:ext uri="{909E8E84-426E-40DD-AFC4-6F175D3DCCD1}">
+              <a14:hiddenFill xmlns:a14="http://schemas.microsoft.com/office/drawing/2010/main">
+                <a:solidFill>
+                  <a:schemeClr val="accent1"/>
+                </a:solidFill>
+              </a14:hiddenFill>
+            </a:ext>
+            <a:ext uri="{91240B29-F687-4F45-9708-019B960494DF}">
+              <a14:hiddenLine xmlns:a14="http://schemas.microsoft.com/office/drawing/2010/main" w="9525">
+                <a:solidFill>
+                  <a:schemeClr val="tx1"/>
+                </a:solidFill>
+                <a:miter lim="800000"/>
+                <a:headEnd/>
+                <a:tailEnd/>
+              </a14:hiddenLine>
+            </a:ext>
+            <a:ext uri="{AF507438-7753-43E0-B8FC-AC1667EBCBE1}">
+              <a14:hiddenEffects xmlns:a14="http://schemas.microsoft.com/office/drawing/2010/main">
+                <a:effectLst>
+                  <a:outerShdw dist="35921" dir="2700000" algn="ctr" rotWithShape="0">
+                    <a:schemeClr val="bg2"/>
+                  </a:outerShdw>
+                </a:effectLst>
+              </a14:hiddenEffects>
+            </a:ext>
+          </a:extLst>
+        </p:spPr>
+        <p:txBody>
+          <a:bodyPr vert="horz" wrap="none" lIns="91440" tIns="45720" rIns="91440" bIns="45720" numCol="1" anchor="ctr" anchorCtr="0" compatLnSpc="1">
+            <a:prstTxWarp prst="textNoShape">
+              <a:avLst/>
+            </a:prstTxWarp>
+            <a:spAutoFit/>
+          </a:bodyPr>
+          <a:lstStyle/>
+          <a:p>
+            <a:pPr marL="0" marR="0" lvl="0" indent="0" algn="l" defTabSz="914400" rtl="0" eaLnBrk="0" fontAlgn="base" latinLnBrk="0" hangingPunct="0">
+              <a:lnSpc>
+                <a:spcPct val="100000"/>
+              </a:lnSpc>
+              <a:spcBef>
+                <a:spcPct val="0"/>
+              </a:spcBef>
+              <a:spcAft>
+                <a:spcPct val="0"/>
+              </a:spcAft>
+              <a:buClrTx/>
+              <a:buSzTx/>
+              <a:buFontTx/>
+              <a:buChar char="•"/>
+              <a:tabLst/>
+            </a:pPr>
+            <a:endParaRPr kumimoji="0" lang="ko-KR" altLang="ko-KR" sz="1800" b="0" i="0" u="none" strike="noStrike" cap="none" normalizeH="0" baseline="0" dirty="0">
+              <a:ln>
+                <a:noFill/>
+              </a:ln>
+              <a:solidFill>
+                <a:schemeClr val="tx1"/>
+              </a:solidFill>
+              <a:effectLst/>
+              <a:latin typeface="Arial" panose="020B0604020202020204" pitchFamily="34" charset="0"/>
+            </a:endParaRPr>
+          </a:p>
+        </p:txBody>
+      </p:sp>
+      <p:sp>
+        <p:nvSpPr>
+          <p:cNvPr id="5" name="TextBox 4">
+            <a:extLst>
+              <a:ext uri="{FF2B5EF4-FFF2-40B4-BE49-F238E27FC236}">
+                <a16:creationId xmlns:a16="http://schemas.microsoft.com/office/drawing/2014/main" id="{CE97E6D2-379A-6B02-CF1A-D4FB94F97101}"/>
+              </a:ext>
+            </a:extLst>
+          </p:cNvPr>
+          <p:cNvSpPr txBox="1"/>
+          <p:nvPr/>
+        </p:nvSpPr>
+        <p:spPr>
+          <a:xfrm>
+            <a:off x="6686549" y="428179"/>
+            <a:ext cx="5219701" cy="6001643"/>
+          </a:xfrm>
+          <a:prstGeom prst="rect">
+            <a:avLst/>
+          </a:prstGeom>
+          <a:noFill/>
+        </p:spPr>
+        <p:txBody>
+          <a:bodyPr wrap="square">
+            <a:spAutoFit/>
+          </a:bodyPr>
+          <a:lstStyle/>
+          <a:p>
+            <a:pPr>
+              <a:buNone/>
+            </a:pPr>
+            <a:r>
+              <a:rPr lang="en-US" altLang="ko-KR" sz="1600" dirty="0">
+                <a:solidFill>
+                  <a:srgbClr val="0033B3"/>
+                </a:solidFill>
+                <a:effectLst/>
+                <a:latin typeface="D2Coding ligature" panose="020B0609020101020101" pitchFamily="49" charset="-127"/>
+                <a:ea typeface="D2Coding ligature" panose="020B0609020101020101" pitchFamily="49" charset="-127"/>
+              </a:rPr>
+              <a:t>private fun </a:t>
+            </a:r>
+            <a:r>
+              <a:rPr lang="en-US" altLang="ko-KR" sz="1600" dirty="0">
+                <a:solidFill>
+                  <a:srgbClr val="00627A"/>
+                </a:solidFill>
+                <a:effectLst/>
+                <a:latin typeface="D2Coding ligature" panose="020B0609020101020101" pitchFamily="49" charset="-127"/>
+                <a:ea typeface="D2Coding ligature" panose="020B0609020101020101" pitchFamily="49" charset="-127"/>
+              </a:rPr>
+              <a:t>main</a:t>
+            </a:r>
+            <a:r>
+              <a:rPr lang="en-US" altLang="ko-KR" sz="1600" dirty="0">
+                <a:solidFill>
+                  <a:srgbClr val="080808"/>
+                </a:solidFill>
+                <a:effectLst/>
+                <a:latin typeface="D2Coding ligature" panose="020B0609020101020101" pitchFamily="49" charset="-127"/>
+                <a:ea typeface="D2Coding ligature" panose="020B0609020101020101" pitchFamily="49" charset="-127"/>
+              </a:rPr>
+              <a:t>(){</a:t>
+            </a:r>
+            <a:br>
+              <a:rPr lang="en-US" altLang="ko-KR" sz="1600" dirty="0">
+                <a:solidFill>
+                  <a:srgbClr val="080808"/>
+                </a:solidFill>
+                <a:effectLst/>
+                <a:latin typeface="D2Coding ligature" panose="020B0609020101020101" pitchFamily="49" charset="-127"/>
+                <a:ea typeface="D2Coding ligature" panose="020B0609020101020101" pitchFamily="49" charset="-127"/>
+              </a:rPr>
+            </a:br>
+            <a:r>
+              <a:rPr lang="en-US" altLang="ko-KR" sz="1600" dirty="0">
+                <a:solidFill>
+                  <a:srgbClr val="080808"/>
+                </a:solidFill>
+                <a:effectLst/>
+                <a:latin typeface="D2Coding ligature" panose="020B0609020101020101" pitchFamily="49" charset="-127"/>
+                <a:ea typeface="D2Coding ligature" panose="020B0609020101020101" pitchFamily="49" charset="-127"/>
+              </a:rPr>
+              <a:t>    </a:t>
+            </a:r>
+            <a:r>
+              <a:rPr lang="en-US" altLang="ko-KR" sz="1600" dirty="0">
+                <a:solidFill>
+                  <a:srgbClr val="0033B3"/>
+                </a:solidFill>
+                <a:effectLst/>
+                <a:latin typeface="D2Coding ligature" panose="020B0609020101020101" pitchFamily="49" charset="-127"/>
+                <a:ea typeface="D2Coding ligature" panose="020B0609020101020101" pitchFamily="49" charset="-127"/>
+              </a:rPr>
+              <a:t>try </a:t>
+            </a:r>
+            <a:r>
+              <a:rPr lang="en-US" altLang="ko-KR" sz="1600" dirty="0">
+                <a:solidFill>
+                  <a:srgbClr val="080808"/>
+                </a:solidFill>
+                <a:effectLst/>
+                <a:latin typeface="D2Coding ligature" panose="020B0609020101020101" pitchFamily="49" charset="-127"/>
+                <a:ea typeface="D2Coding ligature" panose="020B0609020101020101" pitchFamily="49" charset="-127"/>
+              </a:rPr>
+              <a:t>{</a:t>
+            </a:r>
+            <a:br>
+              <a:rPr lang="en-US" altLang="ko-KR" sz="1600" dirty="0">
+                <a:solidFill>
+                  <a:srgbClr val="080808"/>
+                </a:solidFill>
+                <a:effectLst/>
+                <a:latin typeface="D2Coding ligature" panose="020B0609020101020101" pitchFamily="49" charset="-127"/>
+                <a:ea typeface="D2Coding ligature" panose="020B0609020101020101" pitchFamily="49" charset="-127"/>
+              </a:rPr>
+            </a:br>
+            <a:r>
+              <a:rPr lang="en-US" altLang="ko-KR" sz="1600" dirty="0">
+                <a:solidFill>
+                  <a:srgbClr val="080808"/>
+                </a:solidFill>
+                <a:effectLst/>
+                <a:latin typeface="D2Coding ligature" panose="020B0609020101020101" pitchFamily="49" charset="-127"/>
+                <a:ea typeface="D2Coding ligature" panose="020B0609020101020101" pitchFamily="49" charset="-127"/>
+              </a:rPr>
+              <a:t>        </a:t>
+            </a:r>
+            <a:r>
+              <a:rPr lang="en-US" altLang="ko-KR" sz="1600" i="1" dirty="0" err="1">
+                <a:solidFill>
+                  <a:srgbClr val="00627A"/>
+                </a:solidFill>
+                <a:effectLst/>
+                <a:latin typeface="D2Coding ligature" panose="020B0609020101020101" pitchFamily="49" charset="-127"/>
+                <a:ea typeface="D2Coding ligature" panose="020B0609020101020101" pitchFamily="49" charset="-127"/>
+              </a:rPr>
+              <a:t>println</a:t>
+            </a:r>
+            <a:r>
+              <a:rPr lang="en-US" altLang="ko-KR" sz="1600" dirty="0">
+                <a:solidFill>
+                  <a:srgbClr val="080808"/>
+                </a:solidFill>
+                <a:effectLst/>
+                <a:latin typeface="D2Coding ligature" panose="020B0609020101020101" pitchFamily="49" charset="-127"/>
+                <a:ea typeface="D2Coding ligature" panose="020B0609020101020101" pitchFamily="49" charset="-127"/>
+              </a:rPr>
+              <a:t>(</a:t>
+            </a:r>
+            <a:r>
+              <a:rPr lang="en-US" altLang="ko-KR" sz="1600" dirty="0">
+                <a:solidFill>
+                  <a:srgbClr val="067D17"/>
+                </a:solidFill>
+                <a:effectLst/>
+                <a:latin typeface="D2Coding ligature" panose="020B0609020101020101" pitchFamily="49" charset="-127"/>
+                <a:ea typeface="D2Coding ligature" panose="020B0609020101020101" pitchFamily="49" charset="-127"/>
+              </a:rPr>
+              <a:t>"try </a:t>
+            </a:r>
+            <a:r>
+              <a:rPr lang="ko-KR" altLang="en-US" sz="1600" dirty="0">
+                <a:solidFill>
+                  <a:srgbClr val="067D17"/>
+                </a:solidFill>
+                <a:effectLst/>
+                <a:latin typeface="D2Coding ligature" panose="020B0609020101020101" pitchFamily="49" charset="-127"/>
+                <a:ea typeface="D2Coding ligature" panose="020B0609020101020101" pitchFamily="49" charset="-127"/>
+              </a:rPr>
+              <a:t>블록 실행</a:t>
+            </a:r>
+            <a:r>
+              <a:rPr lang="en-US" altLang="ko-KR" sz="1600" dirty="0">
+                <a:solidFill>
+                  <a:srgbClr val="067D17"/>
+                </a:solidFill>
+                <a:effectLst/>
+                <a:latin typeface="D2Coding ligature" panose="020B0609020101020101" pitchFamily="49" charset="-127"/>
+                <a:ea typeface="D2Coding ligature" panose="020B0609020101020101" pitchFamily="49" charset="-127"/>
+              </a:rPr>
+              <a:t>"</a:t>
+            </a:r>
+            <a:r>
+              <a:rPr lang="en-US" altLang="ko-KR" sz="1600" dirty="0">
+                <a:solidFill>
+                  <a:srgbClr val="080808"/>
+                </a:solidFill>
+                <a:effectLst/>
+                <a:latin typeface="D2Coding ligature" panose="020B0609020101020101" pitchFamily="49" charset="-127"/>
+                <a:ea typeface="D2Coding ligature" panose="020B0609020101020101" pitchFamily="49" charset="-127"/>
+              </a:rPr>
+              <a:t>)</a:t>
+            </a:r>
+            <a:br>
+              <a:rPr lang="en-US" altLang="ko-KR" sz="1600" dirty="0">
+                <a:solidFill>
+                  <a:srgbClr val="080808"/>
+                </a:solidFill>
+                <a:effectLst/>
+                <a:latin typeface="D2Coding ligature" panose="020B0609020101020101" pitchFamily="49" charset="-127"/>
+                <a:ea typeface="D2Coding ligature" panose="020B0609020101020101" pitchFamily="49" charset="-127"/>
+              </a:rPr>
+            </a:br>
+            <a:r>
+              <a:rPr lang="en-US" altLang="ko-KR" sz="1600" dirty="0">
+                <a:solidFill>
+                  <a:srgbClr val="080808"/>
+                </a:solidFill>
+                <a:effectLst/>
+                <a:latin typeface="D2Coding ligature" panose="020B0609020101020101" pitchFamily="49" charset="-127"/>
+                <a:ea typeface="D2Coding ligature" panose="020B0609020101020101" pitchFamily="49" charset="-127"/>
+              </a:rPr>
+              <a:t>        </a:t>
+            </a:r>
+            <a:r>
+              <a:rPr lang="en-US" altLang="ko-KR" sz="1600" dirty="0" err="1">
+                <a:solidFill>
+                  <a:srgbClr val="0033B3"/>
+                </a:solidFill>
+                <a:effectLst/>
+                <a:latin typeface="D2Coding ligature" panose="020B0609020101020101" pitchFamily="49" charset="-127"/>
+                <a:ea typeface="D2Coding ligature" panose="020B0609020101020101" pitchFamily="49" charset="-127"/>
+              </a:rPr>
+              <a:t>val</a:t>
+            </a:r>
+            <a:r>
+              <a:rPr lang="en-US" altLang="ko-KR" sz="1600" dirty="0">
+                <a:solidFill>
+                  <a:srgbClr val="0033B3"/>
+                </a:solidFill>
+                <a:effectLst/>
+                <a:latin typeface="D2Coding ligature" panose="020B0609020101020101" pitchFamily="49" charset="-127"/>
+                <a:ea typeface="D2Coding ligature" panose="020B0609020101020101" pitchFamily="49" charset="-127"/>
+              </a:rPr>
+              <a:t> </a:t>
+            </a:r>
+            <a:r>
+              <a:rPr lang="en-US" altLang="ko-KR" sz="1600" dirty="0">
+                <a:solidFill>
+                  <a:srgbClr val="000000"/>
+                </a:solidFill>
+                <a:effectLst/>
+                <a:latin typeface="D2Coding ligature" panose="020B0609020101020101" pitchFamily="49" charset="-127"/>
+                <a:ea typeface="D2Coding ligature" panose="020B0609020101020101" pitchFamily="49" charset="-127"/>
+              </a:rPr>
+              <a:t>result </a:t>
+            </a:r>
+            <a:r>
+              <a:rPr lang="en-US" altLang="ko-KR" sz="1600" dirty="0">
+                <a:solidFill>
+                  <a:srgbClr val="080808"/>
+                </a:solidFill>
+                <a:effectLst/>
+                <a:latin typeface="D2Coding ligature" panose="020B0609020101020101" pitchFamily="49" charset="-127"/>
+                <a:ea typeface="D2Coding ligature" panose="020B0609020101020101" pitchFamily="49" charset="-127"/>
+              </a:rPr>
+              <a:t>= </a:t>
+            </a:r>
+            <a:r>
+              <a:rPr lang="en-US" altLang="ko-KR" sz="1600" dirty="0">
+                <a:solidFill>
+                  <a:srgbClr val="1750EB"/>
+                </a:solidFill>
+                <a:effectLst/>
+                <a:latin typeface="D2Coding ligature" panose="020B0609020101020101" pitchFamily="49" charset="-127"/>
+                <a:ea typeface="D2Coding ligature" panose="020B0609020101020101" pitchFamily="49" charset="-127"/>
+              </a:rPr>
+              <a:t>10 </a:t>
+            </a:r>
+            <a:r>
+              <a:rPr lang="en-US" altLang="ko-KR" sz="1600" dirty="0">
+                <a:solidFill>
+                  <a:srgbClr val="080808"/>
+                </a:solidFill>
+                <a:effectLst/>
+                <a:latin typeface="D2Coding ligature" panose="020B0609020101020101" pitchFamily="49" charset="-127"/>
+                <a:ea typeface="D2Coding ligature" panose="020B0609020101020101" pitchFamily="49" charset="-127"/>
+              </a:rPr>
+              <a:t>/ </a:t>
+            </a:r>
+            <a:r>
+              <a:rPr lang="en-US" altLang="ko-KR" sz="1600" dirty="0">
+                <a:solidFill>
+                  <a:srgbClr val="1750EB"/>
+                </a:solidFill>
+                <a:effectLst/>
+                <a:latin typeface="D2Coding ligature" panose="020B0609020101020101" pitchFamily="49" charset="-127"/>
+                <a:ea typeface="D2Coding ligature" panose="020B0609020101020101" pitchFamily="49" charset="-127"/>
+              </a:rPr>
+              <a:t>2</a:t>
+            </a:r>
+            <a:br>
+              <a:rPr lang="en-US" altLang="ko-KR" sz="1600" dirty="0">
+                <a:solidFill>
+                  <a:srgbClr val="1750EB"/>
+                </a:solidFill>
+                <a:effectLst/>
+                <a:latin typeface="D2Coding ligature" panose="020B0609020101020101" pitchFamily="49" charset="-127"/>
+                <a:ea typeface="D2Coding ligature" panose="020B0609020101020101" pitchFamily="49" charset="-127"/>
+              </a:rPr>
+            </a:br>
+            <a:r>
+              <a:rPr lang="en-US" altLang="ko-KR" sz="1600" dirty="0">
+                <a:solidFill>
+                  <a:srgbClr val="1750EB"/>
+                </a:solidFill>
+                <a:effectLst/>
+                <a:latin typeface="D2Coding ligature" panose="020B0609020101020101" pitchFamily="49" charset="-127"/>
+                <a:ea typeface="D2Coding ligature" panose="020B0609020101020101" pitchFamily="49" charset="-127"/>
+              </a:rPr>
+              <a:t>        </a:t>
+            </a:r>
+            <a:r>
+              <a:rPr lang="en-US" altLang="ko-KR" sz="1600" i="1" dirty="0" err="1">
+                <a:solidFill>
+                  <a:srgbClr val="00627A"/>
+                </a:solidFill>
+                <a:effectLst/>
+                <a:latin typeface="D2Coding ligature" panose="020B0609020101020101" pitchFamily="49" charset="-127"/>
+                <a:ea typeface="D2Coding ligature" panose="020B0609020101020101" pitchFamily="49" charset="-127"/>
+              </a:rPr>
+              <a:t>println</a:t>
+            </a:r>
+            <a:r>
+              <a:rPr lang="en-US" altLang="ko-KR" sz="1600" dirty="0">
+                <a:solidFill>
+                  <a:srgbClr val="080808"/>
+                </a:solidFill>
+                <a:effectLst/>
+                <a:latin typeface="D2Coding ligature" panose="020B0609020101020101" pitchFamily="49" charset="-127"/>
+                <a:ea typeface="D2Coding ligature" panose="020B0609020101020101" pitchFamily="49" charset="-127"/>
+              </a:rPr>
+              <a:t>(</a:t>
+            </a:r>
+            <a:r>
+              <a:rPr lang="en-US" altLang="ko-KR" sz="1600" dirty="0">
+                <a:solidFill>
+                  <a:srgbClr val="067D17"/>
+                </a:solidFill>
+                <a:effectLst/>
+                <a:latin typeface="D2Coding ligature" panose="020B0609020101020101" pitchFamily="49" charset="-127"/>
+                <a:ea typeface="D2Coding ligature" panose="020B0609020101020101" pitchFamily="49" charset="-127"/>
+              </a:rPr>
+              <a:t>"</a:t>
+            </a:r>
+            <a:r>
+              <a:rPr lang="ko-KR" altLang="en-US" sz="1600" dirty="0">
+                <a:solidFill>
+                  <a:srgbClr val="067D17"/>
+                </a:solidFill>
+                <a:effectLst/>
+                <a:latin typeface="D2Coding ligature" panose="020B0609020101020101" pitchFamily="49" charset="-127"/>
+                <a:ea typeface="D2Coding ligature" panose="020B0609020101020101" pitchFamily="49" charset="-127"/>
+              </a:rPr>
+              <a:t>결과</a:t>
+            </a:r>
+            <a:r>
+              <a:rPr lang="en-US" altLang="ko-KR" sz="1600" dirty="0">
+                <a:solidFill>
+                  <a:srgbClr val="067D17"/>
+                </a:solidFill>
+                <a:effectLst/>
+                <a:latin typeface="D2Coding ligature" panose="020B0609020101020101" pitchFamily="49" charset="-127"/>
+                <a:ea typeface="D2Coding ligature" panose="020B0609020101020101" pitchFamily="49" charset="-127"/>
+              </a:rPr>
+              <a:t>: </a:t>
+            </a:r>
+            <a:r>
+              <a:rPr lang="en-US" altLang="ko-KR" sz="1600" dirty="0">
+                <a:solidFill>
+                  <a:srgbClr val="0037A6"/>
+                </a:solidFill>
+                <a:effectLst/>
+                <a:latin typeface="D2Coding ligature" panose="020B0609020101020101" pitchFamily="49" charset="-127"/>
+                <a:ea typeface="D2Coding ligature" panose="020B0609020101020101" pitchFamily="49" charset="-127"/>
+              </a:rPr>
+              <a:t>$</a:t>
+            </a:r>
+            <a:r>
+              <a:rPr lang="en-US" altLang="ko-KR" sz="1600" dirty="0">
+                <a:solidFill>
+                  <a:srgbClr val="000000"/>
+                </a:solidFill>
+                <a:effectLst/>
+                <a:latin typeface="D2Coding ligature" panose="020B0609020101020101" pitchFamily="49" charset="-127"/>
+                <a:ea typeface="D2Coding ligature" panose="020B0609020101020101" pitchFamily="49" charset="-127"/>
+              </a:rPr>
+              <a:t>result</a:t>
+            </a:r>
+            <a:r>
+              <a:rPr lang="en-US" altLang="ko-KR" sz="1600" dirty="0">
+                <a:solidFill>
+                  <a:srgbClr val="067D17"/>
+                </a:solidFill>
+                <a:effectLst/>
+                <a:latin typeface="D2Coding ligature" panose="020B0609020101020101" pitchFamily="49" charset="-127"/>
+                <a:ea typeface="D2Coding ligature" panose="020B0609020101020101" pitchFamily="49" charset="-127"/>
+              </a:rPr>
+              <a:t>"</a:t>
+            </a:r>
+            <a:r>
+              <a:rPr lang="en-US" altLang="ko-KR" sz="1600" dirty="0">
+                <a:solidFill>
+                  <a:srgbClr val="080808"/>
+                </a:solidFill>
+                <a:effectLst/>
+                <a:latin typeface="D2Coding ligature" panose="020B0609020101020101" pitchFamily="49" charset="-127"/>
+                <a:ea typeface="D2Coding ligature" panose="020B0609020101020101" pitchFamily="49" charset="-127"/>
+              </a:rPr>
+              <a:t>)</a:t>
+            </a:r>
+            <a:br>
+              <a:rPr lang="en-US" altLang="ko-KR" sz="1600" dirty="0">
+                <a:solidFill>
+                  <a:srgbClr val="080808"/>
+                </a:solidFill>
+                <a:effectLst/>
+                <a:latin typeface="D2Coding ligature" panose="020B0609020101020101" pitchFamily="49" charset="-127"/>
+                <a:ea typeface="D2Coding ligature" panose="020B0609020101020101" pitchFamily="49" charset="-127"/>
+              </a:rPr>
+            </a:br>
+            <a:r>
+              <a:rPr lang="en-US" altLang="ko-KR" sz="1600" dirty="0">
+                <a:solidFill>
+                  <a:srgbClr val="080808"/>
+                </a:solidFill>
+                <a:effectLst/>
+                <a:latin typeface="D2Coding ligature" panose="020B0609020101020101" pitchFamily="49" charset="-127"/>
+                <a:ea typeface="D2Coding ligature" panose="020B0609020101020101" pitchFamily="49" charset="-127"/>
+              </a:rPr>
+              <a:t>    } </a:t>
+            </a:r>
+            <a:r>
+              <a:rPr lang="en-US" altLang="ko-KR" sz="1600" dirty="0">
+                <a:solidFill>
+                  <a:srgbClr val="0033B3"/>
+                </a:solidFill>
+                <a:effectLst/>
+                <a:latin typeface="D2Coding ligature" panose="020B0609020101020101" pitchFamily="49" charset="-127"/>
+                <a:ea typeface="D2Coding ligature" panose="020B0609020101020101" pitchFamily="49" charset="-127"/>
+              </a:rPr>
+              <a:t>catch </a:t>
+            </a:r>
+            <a:r>
+              <a:rPr lang="en-US" altLang="ko-KR" sz="1600" dirty="0">
+                <a:solidFill>
+                  <a:srgbClr val="080808"/>
+                </a:solidFill>
+                <a:effectLst/>
+                <a:latin typeface="D2Coding ligature" panose="020B0609020101020101" pitchFamily="49" charset="-127"/>
+                <a:ea typeface="D2Coding ligature" panose="020B0609020101020101" pitchFamily="49" charset="-127"/>
+              </a:rPr>
+              <a:t>(</a:t>
+            </a:r>
+            <a:r>
+              <a:rPr lang="en-US" altLang="ko-KR" sz="1600" dirty="0">
+                <a:solidFill>
+                  <a:srgbClr val="000000"/>
+                </a:solidFill>
+                <a:effectLst/>
+                <a:latin typeface="D2Coding ligature" panose="020B0609020101020101" pitchFamily="49" charset="-127"/>
+                <a:ea typeface="D2Coding ligature" panose="020B0609020101020101" pitchFamily="49" charset="-127"/>
+              </a:rPr>
+              <a:t>e</a:t>
+            </a:r>
+            <a:r>
+              <a:rPr lang="en-US" altLang="ko-KR" sz="1600" dirty="0">
+                <a:solidFill>
+                  <a:srgbClr val="080808"/>
+                </a:solidFill>
+                <a:effectLst/>
+                <a:latin typeface="D2Coding ligature" panose="020B0609020101020101" pitchFamily="49" charset="-127"/>
+                <a:ea typeface="D2Coding ligature" panose="020B0609020101020101" pitchFamily="49" charset="-127"/>
+              </a:rPr>
+              <a:t>: </a:t>
+            </a:r>
+            <a:r>
+              <a:rPr lang="en-US" altLang="ko-KR" sz="1600" dirty="0">
+                <a:solidFill>
+                  <a:srgbClr val="000000"/>
+                </a:solidFill>
+                <a:effectLst/>
+                <a:latin typeface="D2Coding ligature" panose="020B0609020101020101" pitchFamily="49" charset="-127"/>
+                <a:ea typeface="D2Coding ligature" panose="020B0609020101020101" pitchFamily="49" charset="-127"/>
+              </a:rPr>
+              <a:t>Exception</a:t>
+            </a:r>
+            <a:r>
+              <a:rPr lang="en-US" altLang="ko-KR" sz="1600" dirty="0">
+                <a:solidFill>
+                  <a:srgbClr val="080808"/>
+                </a:solidFill>
+                <a:effectLst/>
+                <a:latin typeface="D2Coding ligature" panose="020B0609020101020101" pitchFamily="49" charset="-127"/>
+                <a:ea typeface="D2Coding ligature" panose="020B0609020101020101" pitchFamily="49" charset="-127"/>
+              </a:rPr>
+              <a:t>) {</a:t>
+            </a:r>
+            <a:br>
+              <a:rPr lang="en-US" altLang="ko-KR" sz="1600" dirty="0">
+                <a:solidFill>
+                  <a:srgbClr val="080808"/>
+                </a:solidFill>
+                <a:effectLst/>
+                <a:latin typeface="D2Coding ligature" panose="020B0609020101020101" pitchFamily="49" charset="-127"/>
+                <a:ea typeface="D2Coding ligature" panose="020B0609020101020101" pitchFamily="49" charset="-127"/>
+              </a:rPr>
+            </a:br>
+            <a:r>
+              <a:rPr lang="en-US" altLang="ko-KR" sz="1600" dirty="0">
+                <a:solidFill>
+                  <a:srgbClr val="080808"/>
+                </a:solidFill>
+                <a:effectLst/>
+                <a:latin typeface="D2Coding ligature" panose="020B0609020101020101" pitchFamily="49" charset="-127"/>
+                <a:ea typeface="D2Coding ligature" panose="020B0609020101020101" pitchFamily="49" charset="-127"/>
+              </a:rPr>
+              <a:t>        </a:t>
+            </a:r>
+            <a:r>
+              <a:rPr lang="en-US" altLang="ko-KR" sz="1600" i="1" dirty="0" err="1">
+                <a:solidFill>
+                  <a:srgbClr val="00627A"/>
+                </a:solidFill>
+                <a:effectLst/>
+                <a:latin typeface="D2Coding ligature" panose="020B0609020101020101" pitchFamily="49" charset="-127"/>
+                <a:ea typeface="D2Coding ligature" panose="020B0609020101020101" pitchFamily="49" charset="-127"/>
+              </a:rPr>
+              <a:t>println</a:t>
+            </a:r>
+            <a:r>
+              <a:rPr lang="en-US" altLang="ko-KR" sz="1600" dirty="0">
+                <a:solidFill>
+                  <a:srgbClr val="080808"/>
+                </a:solidFill>
+                <a:effectLst/>
+                <a:latin typeface="D2Coding ligature" panose="020B0609020101020101" pitchFamily="49" charset="-127"/>
+                <a:ea typeface="D2Coding ligature" panose="020B0609020101020101" pitchFamily="49" charset="-127"/>
+              </a:rPr>
+              <a:t>(</a:t>
+            </a:r>
+            <a:r>
+              <a:rPr lang="en-US" altLang="ko-KR" sz="1600" dirty="0">
+                <a:solidFill>
+                  <a:srgbClr val="067D17"/>
+                </a:solidFill>
+                <a:effectLst/>
+                <a:latin typeface="D2Coding ligature" panose="020B0609020101020101" pitchFamily="49" charset="-127"/>
+                <a:ea typeface="D2Coding ligature" panose="020B0609020101020101" pitchFamily="49" charset="-127"/>
+              </a:rPr>
+              <a:t>"</a:t>
+            </a:r>
+            <a:r>
+              <a:rPr lang="ko-KR" altLang="en-US" sz="1600" dirty="0">
+                <a:solidFill>
+                  <a:srgbClr val="067D17"/>
+                </a:solidFill>
+                <a:effectLst/>
+                <a:latin typeface="D2Coding ligature" panose="020B0609020101020101" pitchFamily="49" charset="-127"/>
+                <a:ea typeface="D2Coding ligature" panose="020B0609020101020101" pitchFamily="49" charset="-127"/>
+              </a:rPr>
+              <a:t>예외 발생</a:t>
+            </a:r>
+            <a:r>
+              <a:rPr lang="en-US" altLang="ko-KR" sz="1600" dirty="0">
+                <a:solidFill>
+                  <a:srgbClr val="067D17"/>
+                </a:solidFill>
+                <a:effectLst/>
+                <a:latin typeface="D2Coding ligature" panose="020B0609020101020101" pitchFamily="49" charset="-127"/>
+                <a:ea typeface="D2Coding ligature" panose="020B0609020101020101" pitchFamily="49" charset="-127"/>
+              </a:rPr>
+              <a:t>: </a:t>
+            </a:r>
+            <a:r>
+              <a:rPr lang="en-US" altLang="ko-KR" sz="1600" dirty="0">
+                <a:solidFill>
+                  <a:srgbClr val="0037A6"/>
+                </a:solidFill>
+                <a:effectLst/>
+                <a:latin typeface="D2Coding ligature" panose="020B0609020101020101" pitchFamily="49" charset="-127"/>
+                <a:ea typeface="D2Coding ligature" panose="020B0609020101020101" pitchFamily="49" charset="-127"/>
+              </a:rPr>
+              <a:t>${</a:t>
+            </a:r>
+            <a:r>
+              <a:rPr lang="en-US" altLang="ko-KR" sz="1600" dirty="0" err="1">
+                <a:solidFill>
+                  <a:srgbClr val="000000"/>
+                </a:solidFill>
+                <a:effectLst/>
+                <a:latin typeface="D2Coding ligature" panose="020B0609020101020101" pitchFamily="49" charset="-127"/>
+                <a:ea typeface="D2Coding ligature" panose="020B0609020101020101" pitchFamily="49" charset="-127"/>
+              </a:rPr>
+              <a:t>e</a:t>
+            </a:r>
+            <a:r>
+              <a:rPr lang="en-US" altLang="ko-KR" sz="1600" dirty="0" err="1">
+                <a:solidFill>
+                  <a:srgbClr val="080808"/>
+                </a:solidFill>
+                <a:effectLst/>
+                <a:latin typeface="D2Coding ligature" panose="020B0609020101020101" pitchFamily="49" charset="-127"/>
+                <a:ea typeface="D2Coding ligature" panose="020B0609020101020101" pitchFamily="49" charset="-127"/>
+              </a:rPr>
+              <a:t>.</a:t>
+            </a:r>
+            <a:r>
+              <a:rPr lang="en-US" altLang="ko-KR" sz="1600" dirty="0" err="1">
+                <a:solidFill>
+                  <a:srgbClr val="871094"/>
+                </a:solidFill>
+                <a:effectLst/>
+                <a:latin typeface="D2Coding ligature" panose="020B0609020101020101" pitchFamily="49" charset="-127"/>
+                <a:ea typeface="D2Coding ligature" panose="020B0609020101020101" pitchFamily="49" charset="-127"/>
+              </a:rPr>
+              <a:t>message</a:t>
+            </a:r>
+            <a:r>
+              <a:rPr lang="en-US" altLang="ko-KR" sz="1600" dirty="0">
+                <a:solidFill>
+                  <a:srgbClr val="0037A6"/>
+                </a:solidFill>
+                <a:effectLst/>
+                <a:latin typeface="D2Coding ligature" panose="020B0609020101020101" pitchFamily="49" charset="-127"/>
+                <a:ea typeface="D2Coding ligature" panose="020B0609020101020101" pitchFamily="49" charset="-127"/>
+              </a:rPr>
+              <a:t>}</a:t>
+            </a:r>
+            <a:r>
+              <a:rPr lang="en-US" altLang="ko-KR" sz="1600" dirty="0">
+                <a:solidFill>
+                  <a:srgbClr val="067D17"/>
+                </a:solidFill>
+                <a:effectLst/>
+                <a:latin typeface="D2Coding ligature" panose="020B0609020101020101" pitchFamily="49" charset="-127"/>
+                <a:ea typeface="D2Coding ligature" panose="020B0609020101020101" pitchFamily="49" charset="-127"/>
+              </a:rPr>
+              <a:t>"</a:t>
+            </a:r>
+            <a:r>
+              <a:rPr lang="en-US" altLang="ko-KR" sz="1600" dirty="0">
+                <a:solidFill>
+                  <a:srgbClr val="080808"/>
+                </a:solidFill>
+                <a:effectLst/>
+                <a:latin typeface="D2Coding ligature" panose="020B0609020101020101" pitchFamily="49" charset="-127"/>
+                <a:ea typeface="D2Coding ligature" panose="020B0609020101020101" pitchFamily="49" charset="-127"/>
+              </a:rPr>
+              <a:t>)</a:t>
+            </a:r>
+            <a:br>
+              <a:rPr lang="en-US" altLang="ko-KR" sz="1600" dirty="0">
+                <a:solidFill>
+                  <a:srgbClr val="080808"/>
+                </a:solidFill>
+                <a:effectLst/>
+                <a:latin typeface="D2Coding ligature" panose="020B0609020101020101" pitchFamily="49" charset="-127"/>
+                <a:ea typeface="D2Coding ligature" panose="020B0609020101020101" pitchFamily="49" charset="-127"/>
+              </a:rPr>
+            </a:br>
+            <a:r>
+              <a:rPr lang="en-US" altLang="ko-KR" sz="1600" dirty="0">
+                <a:solidFill>
+                  <a:srgbClr val="080808"/>
+                </a:solidFill>
+                <a:effectLst/>
+                <a:latin typeface="D2Coding ligature" panose="020B0609020101020101" pitchFamily="49" charset="-127"/>
+                <a:ea typeface="D2Coding ligature" panose="020B0609020101020101" pitchFamily="49" charset="-127"/>
+              </a:rPr>
+              <a:t>    } </a:t>
+            </a:r>
+            <a:r>
+              <a:rPr lang="en-US" altLang="ko-KR" sz="1600" dirty="0">
+                <a:solidFill>
+                  <a:srgbClr val="0033B3"/>
+                </a:solidFill>
+                <a:effectLst/>
+                <a:latin typeface="D2Coding ligature" panose="020B0609020101020101" pitchFamily="49" charset="-127"/>
+                <a:ea typeface="D2Coding ligature" panose="020B0609020101020101" pitchFamily="49" charset="-127"/>
+              </a:rPr>
+              <a:t>finally </a:t>
+            </a:r>
+            <a:r>
+              <a:rPr lang="en-US" altLang="ko-KR" sz="1600" dirty="0">
+                <a:solidFill>
+                  <a:srgbClr val="080808"/>
+                </a:solidFill>
+                <a:effectLst/>
+                <a:latin typeface="D2Coding ligature" panose="020B0609020101020101" pitchFamily="49" charset="-127"/>
+                <a:ea typeface="D2Coding ligature" panose="020B0609020101020101" pitchFamily="49" charset="-127"/>
+              </a:rPr>
+              <a:t>{</a:t>
+            </a:r>
+            <a:br>
+              <a:rPr lang="en-US" altLang="ko-KR" sz="1600" dirty="0">
+                <a:solidFill>
+                  <a:srgbClr val="080808"/>
+                </a:solidFill>
+                <a:effectLst/>
+                <a:latin typeface="D2Coding ligature" panose="020B0609020101020101" pitchFamily="49" charset="-127"/>
+                <a:ea typeface="D2Coding ligature" panose="020B0609020101020101" pitchFamily="49" charset="-127"/>
+              </a:rPr>
+            </a:br>
+            <a:r>
+              <a:rPr lang="en-US" altLang="ko-KR" sz="1600" dirty="0">
+                <a:solidFill>
+                  <a:srgbClr val="080808"/>
+                </a:solidFill>
+                <a:effectLst/>
+                <a:latin typeface="D2Coding ligature" panose="020B0609020101020101" pitchFamily="49" charset="-127"/>
+                <a:ea typeface="D2Coding ligature" panose="020B0609020101020101" pitchFamily="49" charset="-127"/>
+              </a:rPr>
+              <a:t>        </a:t>
+            </a:r>
+            <a:r>
+              <a:rPr lang="en-US" altLang="ko-KR" sz="1600" i="1" dirty="0" err="1">
+                <a:solidFill>
+                  <a:srgbClr val="00627A"/>
+                </a:solidFill>
+                <a:effectLst/>
+                <a:latin typeface="D2Coding ligature" panose="020B0609020101020101" pitchFamily="49" charset="-127"/>
+                <a:ea typeface="D2Coding ligature" panose="020B0609020101020101" pitchFamily="49" charset="-127"/>
+              </a:rPr>
+              <a:t>println</a:t>
+            </a:r>
+            <a:r>
+              <a:rPr lang="en-US" altLang="ko-KR" sz="1600" dirty="0">
+                <a:solidFill>
+                  <a:srgbClr val="080808"/>
+                </a:solidFill>
+                <a:effectLst/>
+                <a:latin typeface="D2Coding ligature" panose="020B0609020101020101" pitchFamily="49" charset="-127"/>
+                <a:ea typeface="D2Coding ligature" panose="020B0609020101020101" pitchFamily="49" charset="-127"/>
+              </a:rPr>
+              <a:t>(</a:t>
+            </a:r>
+            <a:r>
+              <a:rPr lang="en-US" altLang="ko-KR" sz="1600" dirty="0">
+                <a:solidFill>
+                  <a:srgbClr val="067D17"/>
+                </a:solidFill>
+                <a:effectLst/>
+                <a:latin typeface="D2Coding ligature" panose="020B0609020101020101" pitchFamily="49" charset="-127"/>
+                <a:ea typeface="D2Coding ligature" panose="020B0609020101020101" pitchFamily="49" charset="-127"/>
+              </a:rPr>
+              <a:t>"finally </a:t>
+            </a:r>
+            <a:r>
+              <a:rPr lang="ko-KR" altLang="en-US" sz="1600" dirty="0">
+                <a:solidFill>
+                  <a:srgbClr val="067D17"/>
+                </a:solidFill>
+                <a:effectLst/>
+                <a:latin typeface="D2Coding ligature" panose="020B0609020101020101" pitchFamily="49" charset="-127"/>
+                <a:ea typeface="D2Coding ligature" panose="020B0609020101020101" pitchFamily="49" charset="-127"/>
+              </a:rPr>
+              <a:t>실행 </a:t>
+            </a:r>
+            <a:r>
+              <a:rPr lang="en-US" altLang="ko-KR" sz="1600" dirty="0">
+                <a:solidFill>
+                  <a:srgbClr val="067D17"/>
+                </a:solidFill>
+                <a:effectLst/>
+                <a:latin typeface="D2Coding ligature" panose="020B0609020101020101" pitchFamily="49" charset="-127"/>
+                <a:ea typeface="D2Coding ligature" panose="020B0609020101020101" pitchFamily="49" charset="-127"/>
+              </a:rPr>
+              <a:t>(</a:t>
+            </a:r>
+            <a:r>
+              <a:rPr lang="ko-KR" altLang="en-US" sz="1600" dirty="0">
+                <a:solidFill>
+                  <a:srgbClr val="067D17"/>
+                </a:solidFill>
+                <a:effectLst/>
+                <a:latin typeface="D2Coding ligature" panose="020B0609020101020101" pitchFamily="49" charset="-127"/>
+                <a:ea typeface="D2Coding ligature" panose="020B0609020101020101" pitchFamily="49" charset="-127"/>
+              </a:rPr>
+              <a:t>항상 실행됨</a:t>
+            </a:r>
+            <a:r>
+              <a:rPr lang="en-US" altLang="ko-KR" sz="1600" dirty="0">
+                <a:solidFill>
+                  <a:srgbClr val="067D17"/>
+                </a:solidFill>
+                <a:effectLst/>
+                <a:latin typeface="D2Coding ligature" panose="020B0609020101020101" pitchFamily="49" charset="-127"/>
+                <a:ea typeface="D2Coding ligature" panose="020B0609020101020101" pitchFamily="49" charset="-127"/>
+              </a:rPr>
+              <a:t>)"</a:t>
+            </a:r>
+            <a:r>
+              <a:rPr lang="en-US" altLang="ko-KR" sz="1600" dirty="0">
+                <a:solidFill>
+                  <a:srgbClr val="080808"/>
+                </a:solidFill>
+                <a:effectLst/>
+                <a:latin typeface="D2Coding ligature" panose="020B0609020101020101" pitchFamily="49" charset="-127"/>
+                <a:ea typeface="D2Coding ligature" panose="020B0609020101020101" pitchFamily="49" charset="-127"/>
+              </a:rPr>
+              <a:t>)</a:t>
+            </a:r>
+            <a:br>
+              <a:rPr lang="en-US" altLang="ko-KR" sz="1600" dirty="0">
+                <a:solidFill>
+                  <a:srgbClr val="080808"/>
+                </a:solidFill>
+                <a:effectLst/>
+                <a:latin typeface="D2Coding ligature" panose="020B0609020101020101" pitchFamily="49" charset="-127"/>
+                <a:ea typeface="D2Coding ligature" panose="020B0609020101020101" pitchFamily="49" charset="-127"/>
+              </a:rPr>
+            </a:br>
+            <a:r>
+              <a:rPr lang="en-US" altLang="ko-KR" sz="1600" dirty="0">
+                <a:solidFill>
+                  <a:srgbClr val="080808"/>
+                </a:solidFill>
+                <a:effectLst/>
+                <a:latin typeface="D2Coding ligature" panose="020B0609020101020101" pitchFamily="49" charset="-127"/>
+                <a:ea typeface="D2Coding ligature" panose="020B0609020101020101" pitchFamily="49" charset="-127"/>
+              </a:rPr>
+              <a:t>    }</a:t>
+            </a:r>
+            <a:br>
+              <a:rPr lang="en-US" altLang="ko-KR" sz="1600" dirty="0">
+                <a:solidFill>
+                  <a:srgbClr val="080808"/>
+                </a:solidFill>
+                <a:effectLst/>
+                <a:latin typeface="D2Coding ligature" panose="020B0609020101020101" pitchFamily="49" charset="-127"/>
+                <a:ea typeface="D2Coding ligature" panose="020B0609020101020101" pitchFamily="49" charset="-127"/>
+              </a:rPr>
+            </a:br>
+            <a:br>
+              <a:rPr lang="en-US" altLang="ko-KR" sz="1600" dirty="0">
+                <a:solidFill>
+                  <a:srgbClr val="080808"/>
+                </a:solidFill>
+                <a:effectLst/>
+                <a:latin typeface="D2Coding ligature" panose="020B0609020101020101" pitchFamily="49" charset="-127"/>
+                <a:ea typeface="D2Coding ligature" panose="020B0609020101020101" pitchFamily="49" charset="-127"/>
+              </a:rPr>
+            </a:br>
+            <a:r>
+              <a:rPr lang="en-US" altLang="ko-KR" sz="1600" dirty="0">
+                <a:solidFill>
+                  <a:srgbClr val="080808"/>
+                </a:solidFill>
+                <a:effectLst/>
+                <a:latin typeface="D2Coding ligature" panose="020B0609020101020101" pitchFamily="49" charset="-127"/>
+                <a:ea typeface="D2Coding ligature" panose="020B0609020101020101" pitchFamily="49" charset="-127"/>
+              </a:rPr>
+              <a:t>    </a:t>
+            </a:r>
+            <a:r>
+              <a:rPr lang="en-US" altLang="ko-KR" sz="1600" dirty="0" err="1">
+                <a:solidFill>
+                  <a:srgbClr val="0033B3"/>
+                </a:solidFill>
+                <a:effectLst/>
+                <a:latin typeface="D2Coding ligature" panose="020B0609020101020101" pitchFamily="49" charset="-127"/>
+                <a:ea typeface="D2Coding ligature" panose="020B0609020101020101" pitchFamily="49" charset="-127"/>
+              </a:rPr>
+              <a:t>val</a:t>
+            </a:r>
+            <a:r>
+              <a:rPr lang="en-US" altLang="ko-KR" sz="1600" dirty="0">
+                <a:solidFill>
+                  <a:srgbClr val="0033B3"/>
+                </a:solidFill>
+                <a:effectLst/>
+                <a:latin typeface="D2Coding ligature" panose="020B0609020101020101" pitchFamily="49" charset="-127"/>
+                <a:ea typeface="D2Coding ligature" panose="020B0609020101020101" pitchFamily="49" charset="-127"/>
+              </a:rPr>
+              <a:t> </a:t>
+            </a:r>
+            <a:r>
+              <a:rPr lang="en-US" altLang="ko-KR" sz="1600" dirty="0">
+                <a:solidFill>
+                  <a:srgbClr val="000000"/>
+                </a:solidFill>
+                <a:effectLst/>
+                <a:latin typeface="D2Coding ligature" panose="020B0609020101020101" pitchFamily="49" charset="-127"/>
+                <a:ea typeface="D2Coding ligature" panose="020B0609020101020101" pitchFamily="49" charset="-127"/>
+              </a:rPr>
+              <a:t>value </a:t>
+            </a:r>
+            <a:r>
+              <a:rPr lang="en-US" altLang="ko-KR" sz="1600" dirty="0">
+                <a:solidFill>
+                  <a:srgbClr val="080808"/>
+                </a:solidFill>
+                <a:effectLst/>
+                <a:latin typeface="D2Coding ligature" panose="020B0609020101020101" pitchFamily="49" charset="-127"/>
+                <a:ea typeface="D2Coding ligature" panose="020B0609020101020101" pitchFamily="49" charset="-127"/>
+              </a:rPr>
+              <a:t>= </a:t>
+            </a:r>
+            <a:r>
+              <a:rPr lang="en-US" altLang="ko-KR" sz="1600" dirty="0">
+                <a:solidFill>
+                  <a:srgbClr val="0033B3"/>
+                </a:solidFill>
+                <a:effectLst/>
+                <a:latin typeface="D2Coding ligature" panose="020B0609020101020101" pitchFamily="49" charset="-127"/>
+                <a:ea typeface="D2Coding ligature" panose="020B0609020101020101" pitchFamily="49" charset="-127"/>
+              </a:rPr>
+              <a:t>try </a:t>
+            </a:r>
+            <a:r>
+              <a:rPr lang="en-US" altLang="ko-KR" sz="1600" dirty="0">
+                <a:solidFill>
+                  <a:srgbClr val="080808"/>
+                </a:solidFill>
+                <a:effectLst/>
+                <a:latin typeface="D2Coding ligature" panose="020B0609020101020101" pitchFamily="49" charset="-127"/>
+                <a:ea typeface="D2Coding ligature" panose="020B0609020101020101" pitchFamily="49" charset="-127"/>
+              </a:rPr>
+              <a:t>{</a:t>
+            </a:r>
+            <a:br>
+              <a:rPr lang="en-US" altLang="ko-KR" sz="1600" dirty="0">
+                <a:solidFill>
+                  <a:srgbClr val="080808"/>
+                </a:solidFill>
+                <a:effectLst/>
+                <a:latin typeface="D2Coding ligature" panose="020B0609020101020101" pitchFamily="49" charset="-127"/>
+                <a:ea typeface="D2Coding ligature" panose="020B0609020101020101" pitchFamily="49" charset="-127"/>
+              </a:rPr>
+            </a:br>
+            <a:r>
+              <a:rPr lang="en-US" altLang="ko-KR" sz="1600" dirty="0">
+                <a:solidFill>
+                  <a:srgbClr val="080808"/>
+                </a:solidFill>
+                <a:effectLst/>
+                <a:latin typeface="D2Coding ligature" panose="020B0609020101020101" pitchFamily="49" charset="-127"/>
+                <a:ea typeface="D2Coding ligature" panose="020B0609020101020101" pitchFamily="49" charset="-127"/>
+              </a:rPr>
+              <a:t>        </a:t>
+            </a:r>
+            <a:r>
+              <a:rPr lang="en-US" altLang="ko-KR" sz="1600" i="1" dirty="0" err="1">
+                <a:solidFill>
+                  <a:srgbClr val="00627A"/>
+                </a:solidFill>
+                <a:effectLst/>
+                <a:latin typeface="D2Coding ligature" panose="020B0609020101020101" pitchFamily="49" charset="-127"/>
+                <a:ea typeface="D2Coding ligature" panose="020B0609020101020101" pitchFamily="49" charset="-127"/>
+              </a:rPr>
+              <a:t>println</a:t>
+            </a:r>
+            <a:r>
+              <a:rPr lang="en-US" altLang="ko-KR" sz="1600" dirty="0">
+                <a:solidFill>
+                  <a:srgbClr val="080808"/>
+                </a:solidFill>
+                <a:effectLst/>
+                <a:latin typeface="D2Coding ligature" panose="020B0609020101020101" pitchFamily="49" charset="-127"/>
+                <a:ea typeface="D2Coding ligature" panose="020B0609020101020101" pitchFamily="49" charset="-127"/>
+              </a:rPr>
+              <a:t>(</a:t>
+            </a:r>
+            <a:r>
+              <a:rPr lang="en-US" altLang="ko-KR" sz="1600" dirty="0">
+                <a:solidFill>
+                  <a:srgbClr val="067D17"/>
+                </a:solidFill>
+                <a:effectLst/>
+                <a:latin typeface="D2Coding ligature" panose="020B0609020101020101" pitchFamily="49" charset="-127"/>
+                <a:ea typeface="D2Coding ligature" panose="020B0609020101020101" pitchFamily="49" charset="-127"/>
+              </a:rPr>
+              <a:t>"try </a:t>
+            </a:r>
+            <a:r>
+              <a:rPr lang="ko-KR" altLang="en-US" sz="1600" dirty="0">
+                <a:solidFill>
+                  <a:srgbClr val="067D17"/>
+                </a:solidFill>
+                <a:effectLst/>
+                <a:latin typeface="D2Coding ligature" panose="020B0609020101020101" pitchFamily="49" charset="-127"/>
+                <a:ea typeface="D2Coding ligature" panose="020B0609020101020101" pitchFamily="49" charset="-127"/>
+              </a:rPr>
+              <a:t>블록 실행</a:t>
+            </a:r>
+            <a:r>
+              <a:rPr lang="en-US" altLang="ko-KR" sz="1600" dirty="0">
+                <a:solidFill>
+                  <a:srgbClr val="067D17"/>
+                </a:solidFill>
+                <a:effectLst/>
+                <a:latin typeface="D2Coding ligature" panose="020B0609020101020101" pitchFamily="49" charset="-127"/>
+                <a:ea typeface="D2Coding ligature" panose="020B0609020101020101" pitchFamily="49" charset="-127"/>
+              </a:rPr>
+              <a:t>"</a:t>
+            </a:r>
+            <a:r>
+              <a:rPr lang="en-US" altLang="ko-KR" sz="1600" dirty="0">
+                <a:solidFill>
+                  <a:srgbClr val="080808"/>
+                </a:solidFill>
+                <a:effectLst/>
+                <a:latin typeface="D2Coding ligature" panose="020B0609020101020101" pitchFamily="49" charset="-127"/>
+                <a:ea typeface="D2Coding ligature" panose="020B0609020101020101" pitchFamily="49" charset="-127"/>
+              </a:rPr>
+              <a:t>)</a:t>
+            </a:r>
+            <a:br>
+              <a:rPr lang="en-US" altLang="ko-KR" sz="1600" dirty="0">
+                <a:solidFill>
+                  <a:srgbClr val="080808"/>
+                </a:solidFill>
+                <a:effectLst/>
+                <a:latin typeface="D2Coding ligature" panose="020B0609020101020101" pitchFamily="49" charset="-127"/>
+                <a:ea typeface="D2Coding ligature" panose="020B0609020101020101" pitchFamily="49" charset="-127"/>
+              </a:rPr>
+            </a:br>
+            <a:r>
+              <a:rPr lang="en-US" altLang="ko-KR" sz="1600" dirty="0">
+                <a:solidFill>
+                  <a:srgbClr val="080808"/>
+                </a:solidFill>
+                <a:effectLst/>
+                <a:latin typeface="D2Coding ligature" panose="020B0609020101020101" pitchFamily="49" charset="-127"/>
+                <a:ea typeface="D2Coding ligature" panose="020B0609020101020101" pitchFamily="49" charset="-127"/>
+              </a:rPr>
+              <a:t>        </a:t>
+            </a:r>
+            <a:r>
+              <a:rPr lang="en-US" altLang="ko-KR" sz="1600" dirty="0" err="1">
+                <a:solidFill>
+                  <a:srgbClr val="0033B3"/>
+                </a:solidFill>
+                <a:effectLst/>
+                <a:latin typeface="D2Coding ligature" panose="020B0609020101020101" pitchFamily="49" charset="-127"/>
+                <a:ea typeface="D2Coding ligature" panose="020B0609020101020101" pitchFamily="49" charset="-127"/>
+              </a:rPr>
+              <a:t>val</a:t>
+            </a:r>
+            <a:r>
+              <a:rPr lang="en-US" altLang="ko-KR" sz="1600" dirty="0">
+                <a:solidFill>
+                  <a:srgbClr val="0033B3"/>
+                </a:solidFill>
+                <a:effectLst/>
+                <a:latin typeface="D2Coding ligature" panose="020B0609020101020101" pitchFamily="49" charset="-127"/>
+                <a:ea typeface="D2Coding ligature" panose="020B0609020101020101" pitchFamily="49" charset="-127"/>
+              </a:rPr>
+              <a:t> </a:t>
+            </a:r>
+            <a:r>
+              <a:rPr lang="en-US" altLang="ko-KR" sz="1600" dirty="0">
+                <a:solidFill>
+                  <a:srgbClr val="000000"/>
+                </a:solidFill>
+                <a:effectLst/>
+                <a:latin typeface="D2Coding ligature" panose="020B0609020101020101" pitchFamily="49" charset="-127"/>
+                <a:ea typeface="D2Coding ligature" panose="020B0609020101020101" pitchFamily="49" charset="-127"/>
+              </a:rPr>
+              <a:t>result </a:t>
+            </a:r>
+            <a:r>
+              <a:rPr lang="en-US" altLang="ko-KR" sz="1600" dirty="0">
+                <a:solidFill>
+                  <a:srgbClr val="080808"/>
+                </a:solidFill>
+                <a:effectLst/>
+                <a:latin typeface="D2Coding ligature" panose="020B0609020101020101" pitchFamily="49" charset="-127"/>
+                <a:ea typeface="D2Coding ligature" panose="020B0609020101020101" pitchFamily="49" charset="-127"/>
+              </a:rPr>
+              <a:t>= </a:t>
+            </a:r>
+            <a:r>
+              <a:rPr lang="en-US" altLang="ko-KR" sz="1600" dirty="0">
+                <a:solidFill>
+                  <a:srgbClr val="1750EB"/>
+                </a:solidFill>
+                <a:effectLst/>
+                <a:latin typeface="D2Coding ligature" panose="020B0609020101020101" pitchFamily="49" charset="-127"/>
+                <a:ea typeface="D2Coding ligature" panose="020B0609020101020101" pitchFamily="49" charset="-127"/>
+              </a:rPr>
+              <a:t>10 </a:t>
+            </a:r>
+            <a:r>
+              <a:rPr lang="en-US" altLang="ko-KR" sz="1600" dirty="0">
+                <a:solidFill>
+                  <a:srgbClr val="080808"/>
+                </a:solidFill>
+                <a:effectLst/>
+                <a:latin typeface="D2Coding ligature" panose="020B0609020101020101" pitchFamily="49" charset="-127"/>
+                <a:ea typeface="D2Coding ligature" panose="020B0609020101020101" pitchFamily="49" charset="-127"/>
+              </a:rPr>
+              <a:t>/ </a:t>
+            </a:r>
+            <a:r>
+              <a:rPr lang="en-US" altLang="ko-KR" sz="1600" dirty="0">
+                <a:solidFill>
+                  <a:srgbClr val="1750EB"/>
+                </a:solidFill>
+                <a:effectLst/>
+                <a:latin typeface="D2Coding ligature" panose="020B0609020101020101" pitchFamily="49" charset="-127"/>
+                <a:ea typeface="D2Coding ligature" panose="020B0609020101020101" pitchFamily="49" charset="-127"/>
+              </a:rPr>
+              <a:t>0</a:t>
+            </a:r>
+            <a:br>
+              <a:rPr lang="en-US" altLang="ko-KR" sz="1600" dirty="0">
+                <a:solidFill>
+                  <a:srgbClr val="1750EB"/>
+                </a:solidFill>
+                <a:effectLst/>
+                <a:latin typeface="D2Coding ligature" panose="020B0609020101020101" pitchFamily="49" charset="-127"/>
+                <a:ea typeface="D2Coding ligature" panose="020B0609020101020101" pitchFamily="49" charset="-127"/>
+              </a:rPr>
+            </a:br>
+            <a:r>
+              <a:rPr lang="en-US" altLang="ko-KR" sz="1600" dirty="0">
+                <a:solidFill>
+                  <a:srgbClr val="1750EB"/>
+                </a:solidFill>
+                <a:effectLst/>
+                <a:latin typeface="D2Coding ligature" panose="020B0609020101020101" pitchFamily="49" charset="-127"/>
+                <a:ea typeface="D2Coding ligature" panose="020B0609020101020101" pitchFamily="49" charset="-127"/>
+              </a:rPr>
+              <a:t>        </a:t>
+            </a:r>
+            <a:r>
+              <a:rPr lang="en-US" altLang="ko-KR" sz="1600" dirty="0">
+                <a:solidFill>
+                  <a:srgbClr val="000000"/>
+                </a:solidFill>
+                <a:effectLst/>
+                <a:latin typeface="D2Coding ligature" panose="020B0609020101020101" pitchFamily="49" charset="-127"/>
+                <a:ea typeface="D2Coding ligature" panose="020B0609020101020101" pitchFamily="49" charset="-127"/>
+              </a:rPr>
+              <a:t>result</a:t>
+            </a:r>
+            <a:br>
+              <a:rPr lang="en-US" altLang="ko-KR" sz="1600" dirty="0">
+                <a:solidFill>
+                  <a:srgbClr val="000000"/>
+                </a:solidFill>
+                <a:effectLst/>
+                <a:latin typeface="D2Coding ligature" panose="020B0609020101020101" pitchFamily="49" charset="-127"/>
+                <a:ea typeface="D2Coding ligature" panose="020B0609020101020101" pitchFamily="49" charset="-127"/>
+              </a:rPr>
+            </a:br>
+            <a:r>
+              <a:rPr lang="en-US" altLang="ko-KR" sz="1600" dirty="0">
+                <a:solidFill>
+                  <a:srgbClr val="000000"/>
+                </a:solidFill>
+                <a:effectLst/>
+                <a:latin typeface="D2Coding ligature" panose="020B0609020101020101" pitchFamily="49" charset="-127"/>
+                <a:ea typeface="D2Coding ligature" panose="020B0609020101020101" pitchFamily="49" charset="-127"/>
+              </a:rPr>
+              <a:t>    </a:t>
+            </a:r>
+            <a:r>
+              <a:rPr lang="en-US" altLang="ko-KR" sz="1600" dirty="0">
+                <a:solidFill>
+                  <a:srgbClr val="080808"/>
+                </a:solidFill>
+                <a:effectLst/>
+                <a:latin typeface="D2Coding ligature" panose="020B0609020101020101" pitchFamily="49" charset="-127"/>
+                <a:ea typeface="D2Coding ligature" panose="020B0609020101020101" pitchFamily="49" charset="-127"/>
+              </a:rPr>
+              <a:t>} </a:t>
+            </a:r>
+            <a:r>
+              <a:rPr lang="en-US" altLang="ko-KR" sz="1600" dirty="0">
+                <a:solidFill>
+                  <a:srgbClr val="0033B3"/>
+                </a:solidFill>
+                <a:effectLst/>
+                <a:latin typeface="D2Coding ligature" panose="020B0609020101020101" pitchFamily="49" charset="-127"/>
+                <a:ea typeface="D2Coding ligature" panose="020B0609020101020101" pitchFamily="49" charset="-127"/>
+              </a:rPr>
+              <a:t>catch </a:t>
+            </a:r>
+            <a:r>
+              <a:rPr lang="en-US" altLang="ko-KR" sz="1600" dirty="0">
+                <a:solidFill>
+                  <a:srgbClr val="080808"/>
+                </a:solidFill>
+                <a:effectLst/>
+                <a:latin typeface="D2Coding ligature" panose="020B0609020101020101" pitchFamily="49" charset="-127"/>
+                <a:ea typeface="D2Coding ligature" panose="020B0609020101020101" pitchFamily="49" charset="-127"/>
+              </a:rPr>
+              <a:t>(</a:t>
+            </a:r>
+            <a:r>
+              <a:rPr lang="en-US" altLang="ko-KR" sz="1600" dirty="0">
+                <a:solidFill>
+                  <a:srgbClr val="000000"/>
+                </a:solidFill>
+                <a:effectLst/>
+                <a:latin typeface="D2Coding ligature" panose="020B0609020101020101" pitchFamily="49" charset="-127"/>
+                <a:ea typeface="D2Coding ligature" panose="020B0609020101020101" pitchFamily="49" charset="-127"/>
+              </a:rPr>
+              <a:t>e</a:t>
+            </a:r>
+            <a:r>
+              <a:rPr lang="en-US" altLang="ko-KR" sz="1600" dirty="0">
+                <a:solidFill>
+                  <a:srgbClr val="080808"/>
+                </a:solidFill>
+                <a:effectLst/>
+                <a:latin typeface="D2Coding ligature" panose="020B0609020101020101" pitchFamily="49" charset="-127"/>
+                <a:ea typeface="D2Coding ligature" panose="020B0609020101020101" pitchFamily="49" charset="-127"/>
+              </a:rPr>
+              <a:t>: </a:t>
+            </a:r>
+            <a:r>
+              <a:rPr lang="en-US" altLang="ko-KR" sz="1600" dirty="0">
+                <a:solidFill>
+                  <a:srgbClr val="000000"/>
+                </a:solidFill>
+                <a:effectLst/>
+                <a:latin typeface="D2Coding ligature" panose="020B0609020101020101" pitchFamily="49" charset="-127"/>
+                <a:ea typeface="D2Coding ligature" panose="020B0609020101020101" pitchFamily="49" charset="-127"/>
+              </a:rPr>
+              <a:t>Exception</a:t>
+            </a:r>
+            <a:r>
+              <a:rPr lang="en-US" altLang="ko-KR" sz="1600" dirty="0">
+                <a:solidFill>
+                  <a:srgbClr val="080808"/>
+                </a:solidFill>
+                <a:effectLst/>
+                <a:latin typeface="D2Coding ligature" panose="020B0609020101020101" pitchFamily="49" charset="-127"/>
+                <a:ea typeface="D2Coding ligature" panose="020B0609020101020101" pitchFamily="49" charset="-127"/>
+              </a:rPr>
+              <a:t>) {</a:t>
+            </a:r>
+            <a:br>
+              <a:rPr lang="en-US" altLang="ko-KR" sz="1600" dirty="0">
+                <a:solidFill>
+                  <a:srgbClr val="080808"/>
+                </a:solidFill>
+                <a:effectLst/>
+                <a:latin typeface="D2Coding ligature" panose="020B0609020101020101" pitchFamily="49" charset="-127"/>
+                <a:ea typeface="D2Coding ligature" panose="020B0609020101020101" pitchFamily="49" charset="-127"/>
+              </a:rPr>
+            </a:br>
+            <a:r>
+              <a:rPr lang="en-US" altLang="ko-KR" sz="1600" dirty="0">
+                <a:solidFill>
+                  <a:srgbClr val="080808"/>
+                </a:solidFill>
+                <a:effectLst/>
+                <a:latin typeface="D2Coding ligature" panose="020B0609020101020101" pitchFamily="49" charset="-127"/>
+                <a:ea typeface="D2Coding ligature" panose="020B0609020101020101" pitchFamily="49" charset="-127"/>
+              </a:rPr>
+              <a:t>        </a:t>
+            </a:r>
+            <a:r>
+              <a:rPr lang="en-US" altLang="ko-KR" sz="1600" i="1" dirty="0" err="1">
+                <a:solidFill>
+                  <a:srgbClr val="00627A"/>
+                </a:solidFill>
+                <a:effectLst/>
+                <a:latin typeface="D2Coding ligature" panose="020B0609020101020101" pitchFamily="49" charset="-127"/>
+                <a:ea typeface="D2Coding ligature" panose="020B0609020101020101" pitchFamily="49" charset="-127"/>
+              </a:rPr>
+              <a:t>println</a:t>
+            </a:r>
+            <a:r>
+              <a:rPr lang="en-US" altLang="ko-KR" sz="1600" dirty="0">
+                <a:solidFill>
+                  <a:srgbClr val="080808"/>
+                </a:solidFill>
+                <a:effectLst/>
+                <a:latin typeface="D2Coding ligature" panose="020B0609020101020101" pitchFamily="49" charset="-127"/>
+                <a:ea typeface="D2Coding ligature" panose="020B0609020101020101" pitchFamily="49" charset="-127"/>
+              </a:rPr>
+              <a:t>(</a:t>
+            </a:r>
+            <a:r>
+              <a:rPr lang="en-US" altLang="ko-KR" sz="1600" dirty="0">
+                <a:solidFill>
+                  <a:srgbClr val="067D17"/>
+                </a:solidFill>
+                <a:effectLst/>
+                <a:latin typeface="D2Coding ligature" panose="020B0609020101020101" pitchFamily="49" charset="-127"/>
+                <a:ea typeface="D2Coding ligature" panose="020B0609020101020101" pitchFamily="49" charset="-127"/>
+              </a:rPr>
+              <a:t>"</a:t>
+            </a:r>
+            <a:r>
+              <a:rPr lang="ko-KR" altLang="en-US" sz="1600" dirty="0">
+                <a:solidFill>
+                  <a:srgbClr val="067D17"/>
+                </a:solidFill>
+                <a:effectLst/>
+                <a:latin typeface="D2Coding ligature" panose="020B0609020101020101" pitchFamily="49" charset="-127"/>
+                <a:ea typeface="D2Coding ligature" panose="020B0609020101020101" pitchFamily="49" charset="-127"/>
+              </a:rPr>
+              <a:t>예외 발생</a:t>
+            </a:r>
+            <a:r>
+              <a:rPr lang="en-US" altLang="ko-KR" sz="1600" dirty="0">
+                <a:solidFill>
+                  <a:srgbClr val="067D17"/>
+                </a:solidFill>
+                <a:effectLst/>
+                <a:latin typeface="D2Coding ligature" panose="020B0609020101020101" pitchFamily="49" charset="-127"/>
+                <a:ea typeface="D2Coding ligature" panose="020B0609020101020101" pitchFamily="49" charset="-127"/>
+              </a:rPr>
+              <a:t>: </a:t>
+            </a:r>
+            <a:r>
+              <a:rPr lang="en-US" altLang="ko-KR" sz="1600" dirty="0">
+                <a:solidFill>
+                  <a:srgbClr val="0037A6"/>
+                </a:solidFill>
+                <a:effectLst/>
+                <a:latin typeface="D2Coding ligature" panose="020B0609020101020101" pitchFamily="49" charset="-127"/>
+                <a:ea typeface="D2Coding ligature" panose="020B0609020101020101" pitchFamily="49" charset="-127"/>
+              </a:rPr>
+              <a:t>${</a:t>
+            </a:r>
+            <a:r>
+              <a:rPr lang="en-US" altLang="ko-KR" sz="1600" dirty="0" err="1">
+                <a:solidFill>
+                  <a:srgbClr val="000000"/>
+                </a:solidFill>
+                <a:effectLst/>
+                <a:latin typeface="D2Coding ligature" panose="020B0609020101020101" pitchFamily="49" charset="-127"/>
+                <a:ea typeface="D2Coding ligature" panose="020B0609020101020101" pitchFamily="49" charset="-127"/>
+              </a:rPr>
+              <a:t>e</a:t>
+            </a:r>
+            <a:r>
+              <a:rPr lang="en-US" altLang="ko-KR" sz="1600" dirty="0" err="1">
+                <a:solidFill>
+                  <a:srgbClr val="080808"/>
+                </a:solidFill>
+                <a:effectLst/>
+                <a:latin typeface="D2Coding ligature" panose="020B0609020101020101" pitchFamily="49" charset="-127"/>
+                <a:ea typeface="D2Coding ligature" panose="020B0609020101020101" pitchFamily="49" charset="-127"/>
+              </a:rPr>
+              <a:t>.</a:t>
+            </a:r>
+            <a:r>
+              <a:rPr lang="en-US" altLang="ko-KR" sz="1600" dirty="0" err="1">
+                <a:solidFill>
+                  <a:srgbClr val="871094"/>
+                </a:solidFill>
+                <a:effectLst/>
+                <a:latin typeface="D2Coding ligature" panose="020B0609020101020101" pitchFamily="49" charset="-127"/>
+                <a:ea typeface="D2Coding ligature" panose="020B0609020101020101" pitchFamily="49" charset="-127"/>
+              </a:rPr>
+              <a:t>message</a:t>
+            </a:r>
+            <a:r>
+              <a:rPr lang="en-US" altLang="ko-KR" sz="1600" dirty="0">
+                <a:solidFill>
+                  <a:srgbClr val="0037A6"/>
+                </a:solidFill>
+                <a:effectLst/>
+                <a:latin typeface="D2Coding ligature" panose="020B0609020101020101" pitchFamily="49" charset="-127"/>
+                <a:ea typeface="D2Coding ligature" panose="020B0609020101020101" pitchFamily="49" charset="-127"/>
+              </a:rPr>
+              <a:t>}</a:t>
+            </a:r>
+            <a:r>
+              <a:rPr lang="en-US" altLang="ko-KR" sz="1600" dirty="0">
+                <a:solidFill>
+                  <a:srgbClr val="067D17"/>
+                </a:solidFill>
+                <a:effectLst/>
+                <a:latin typeface="D2Coding ligature" panose="020B0609020101020101" pitchFamily="49" charset="-127"/>
+                <a:ea typeface="D2Coding ligature" panose="020B0609020101020101" pitchFamily="49" charset="-127"/>
+              </a:rPr>
+              <a:t>"</a:t>
+            </a:r>
+            <a:r>
+              <a:rPr lang="en-US" altLang="ko-KR" sz="1600" dirty="0">
+                <a:solidFill>
+                  <a:srgbClr val="080808"/>
+                </a:solidFill>
+                <a:effectLst/>
+                <a:latin typeface="D2Coding ligature" panose="020B0609020101020101" pitchFamily="49" charset="-127"/>
+                <a:ea typeface="D2Coding ligature" panose="020B0609020101020101" pitchFamily="49" charset="-127"/>
+              </a:rPr>
+              <a:t>)</a:t>
+            </a:r>
+            <a:br>
+              <a:rPr lang="en-US" altLang="ko-KR" sz="1600" dirty="0">
+                <a:solidFill>
+                  <a:srgbClr val="080808"/>
+                </a:solidFill>
+                <a:effectLst/>
+                <a:latin typeface="D2Coding ligature" panose="020B0609020101020101" pitchFamily="49" charset="-127"/>
+                <a:ea typeface="D2Coding ligature" panose="020B0609020101020101" pitchFamily="49" charset="-127"/>
+              </a:rPr>
+            </a:br>
+            <a:r>
+              <a:rPr lang="en-US" altLang="ko-KR" sz="1600" dirty="0">
+                <a:solidFill>
+                  <a:srgbClr val="080808"/>
+                </a:solidFill>
+                <a:effectLst/>
+                <a:latin typeface="D2Coding ligature" panose="020B0609020101020101" pitchFamily="49" charset="-127"/>
+                <a:ea typeface="D2Coding ligature" panose="020B0609020101020101" pitchFamily="49" charset="-127"/>
+              </a:rPr>
+              <a:t>        -</a:t>
+            </a:r>
+            <a:r>
+              <a:rPr lang="en-US" altLang="ko-KR" sz="1600" dirty="0">
+                <a:solidFill>
+                  <a:srgbClr val="1750EB"/>
+                </a:solidFill>
+                <a:effectLst/>
+                <a:latin typeface="D2Coding ligature" panose="020B0609020101020101" pitchFamily="49" charset="-127"/>
+                <a:ea typeface="D2Coding ligature" panose="020B0609020101020101" pitchFamily="49" charset="-127"/>
+              </a:rPr>
+              <a:t>1</a:t>
+            </a:r>
+            <a:br>
+              <a:rPr lang="en-US" altLang="ko-KR" sz="1600" dirty="0">
+                <a:solidFill>
+                  <a:srgbClr val="1750EB"/>
+                </a:solidFill>
+                <a:effectLst/>
+                <a:latin typeface="D2Coding ligature" panose="020B0609020101020101" pitchFamily="49" charset="-127"/>
+                <a:ea typeface="D2Coding ligature" panose="020B0609020101020101" pitchFamily="49" charset="-127"/>
+              </a:rPr>
+            </a:br>
+            <a:r>
+              <a:rPr lang="en-US" altLang="ko-KR" sz="1600" dirty="0">
+                <a:solidFill>
+                  <a:srgbClr val="1750EB"/>
+                </a:solidFill>
+                <a:effectLst/>
+                <a:latin typeface="D2Coding ligature" panose="020B0609020101020101" pitchFamily="49" charset="-127"/>
+                <a:ea typeface="D2Coding ligature" panose="020B0609020101020101" pitchFamily="49" charset="-127"/>
+              </a:rPr>
+              <a:t>    </a:t>
+            </a:r>
+            <a:r>
+              <a:rPr lang="en-US" altLang="ko-KR" sz="1600" dirty="0">
+                <a:solidFill>
+                  <a:srgbClr val="080808"/>
+                </a:solidFill>
+                <a:effectLst/>
+                <a:latin typeface="D2Coding ligature" panose="020B0609020101020101" pitchFamily="49" charset="-127"/>
+                <a:ea typeface="D2Coding ligature" panose="020B0609020101020101" pitchFamily="49" charset="-127"/>
+              </a:rPr>
+              <a:t>} </a:t>
+            </a:r>
+            <a:r>
+              <a:rPr lang="en-US" altLang="ko-KR" sz="1600" dirty="0">
+                <a:solidFill>
+                  <a:srgbClr val="0033B3"/>
+                </a:solidFill>
+                <a:effectLst/>
+                <a:latin typeface="D2Coding ligature" panose="020B0609020101020101" pitchFamily="49" charset="-127"/>
+                <a:ea typeface="D2Coding ligature" panose="020B0609020101020101" pitchFamily="49" charset="-127"/>
+              </a:rPr>
+              <a:t>finally </a:t>
+            </a:r>
+            <a:r>
+              <a:rPr lang="en-US" altLang="ko-KR" sz="1600" dirty="0">
+                <a:solidFill>
+                  <a:srgbClr val="080808"/>
+                </a:solidFill>
+                <a:effectLst/>
+                <a:latin typeface="D2Coding ligature" panose="020B0609020101020101" pitchFamily="49" charset="-127"/>
+                <a:ea typeface="D2Coding ligature" panose="020B0609020101020101" pitchFamily="49" charset="-127"/>
+              </a:rPr>
+              <a:t>{</a:t>
+            </a:r>
+            <a:br>
+              <a:rPr lang="en-US" altLang="ko-KR" sz="1600" dirty="0">
+                <a:solidFill>
+                  <a:srgbClr val="080808"/>
+                </a:solidFill>
+                <a:effectLst/>
+                <a:latin typeface="D2Coding ligature" panose="020B0609020101020101" pitchFamily="49" charset="-127"/>
+                <a:ea typeface="D2Coding ligature" panose="020B0609020101020101" pitchFamily="49" charset="-127"/>
+              </a:rPr>
+            </a:br>
+            <a:r>
+              <a:rPr lang="en-US" altLang="ko-KR" sz="1600" dirty="0">
+                <a:solidFill>
+                  <a:srgbClr val="080808"/>
+                </a:solidFill>
+                <a:effectLst/>
+                <a:latin typeface="D2Coding ligature" panose="020B0609020101020101" pitchFamily="49" charset="-127"/>
+                <a:ea typeface="D2Coding ligature" panose="020B0609020101020101" pitchFamily="49" charset="-127"/>
+              </a:rPr>
+              <a:t>        </a:t>
+            </a:r>
+            <a:r>
+              <a:rPr lang="en-US" altLang="ko-KR" sz="1600" i="1" dirty="0" err="1">
+                <a:solidFill>
+                  <a:srgbClr val="00627A"/>
+                </a:solidFill>
+                <a:effectLst/>
+                <a:latin typeface="D2Coding ligature" panose="020B0609020101020101" pitchFamily="49" charset="-127"/>
+                <a:ea typeface="D2Coding ligature" panose="020B0609020101020101" pitchFamily="49" charset="-127"/>
+              </a:rPr>
+              <a:t>println</a:t>
+            </a:r>
+            <a:r>
+              <a:rPr lang="en-US" altLang="ko-KR" sz="1600" dirty="0">
+                <a:solidFill>
+                  <a:srgbClr val="080808"/>
+                </a:solidFill>
+                <a:effectLst/>
+                <a:latin typeface="D2Coding ligature" panose="020B0609020101020101" pitchFamily="49" charset="-127"/>
+                <a:ea typeface="D2Coding ligature" panose="020B0609020101020101" pitchFamily="49" charset="-127"/>
+              </a:rPr>
+              <a:t>(</a:t>
+            </a:r>
+            <a:r>
+              <a:rPr lang="en-US" altLang="ko-KR" sz="1600" dirty="0">
+                <a:solidFill>
+                  <a:srgbClr val="067D17"/>
+                </a:solidFill>
+                <a:effectLst/>
+                <a:latin typeface="D2Coding ligature" panose="020B0609020101020101" pitchFamily="49" charset="-127"/>
+                <a:ea typeface="D2Coding ligature" panose="020B0609020101020101" pitchFamily="49" charset="-127"/>
+              </a:rPr>
+              <a:t>"finally </a:t>
+            </a:r>
+            <a:r>
+              <a:rPr lang="ko-KR" altLang="en-US" sz="1600" dirty="0">
+                <a:solidFill>
+                  <a:srgbClr val="067D17"/>
+                </a:solidFill>
+                <a:effectLst/>
+                <a:latin typeface="D2Coding ligature" panose="020B0609020101020101" pitchFamily="49" charset="-127"/>
+                <a:ea typeface="D2Coding ligature" panose="020B0609020101020101" pitchFamily="49" charset="-127"/>
+              </a:rPr>
+              <a:t>실행 </a:t>
+            </a:r>
+            <a:r>
+              <a:rPr lang="en-US" altLang="ko-KR" sz="1600" dirty="0">
+                <a:solidFill>
+                  <a:srgbClr val="067D17"/>
+                </a:solidFill>
+                <a:effectLst/>
+                <a:latin typeface="D2Coding ligature" panose="020B0609020101020101" pitchFamily="49" charset="-127"/>
+                <a:ea typeface="D2Coding ligature" panose="020B0609020101020101" pitchFamily="49" charset="-127"/>
+              </a:rPr>
+              <a:t>(</a:t>
+            </a:r>
+            <a:r>
+              <a:rPr lang="ko-KR" altLang="en-US" sz="1600" dirty="0">
+                <a:solidFill>
+                  <a:srgbClr val="067D17"/>
+                </a:solidFill>
+                <a:effectLst/>
+                <a:latin typeface="D2Coding ligature" panose="020B0609020101020101" pitchFamily="49" charset="-127"/>
+                <a:ea typeface="D2Coding ligature" panose="020B0609020101020101" pitchFamily="49" charset="-127"/>
+              </a:rPr>
+              <a:t>항상 실행됨</a:t>
+            </a:r>
+            <a:r>
+              <a:rPr lang="en-US" altLang="ko-KR" sz="1600" dirty="0">
+                <a:solidFill>
+                  <a:srgbClr val="067D17"/>
+                </a:solidFill>
+                <a:effectLst/>
+                <a:latin typeface="D2Coding ligature" panose="020B0609020101020101" pitchFamily="49" charset="-127"/>
+                <a:ea typeface="D2Coding ligature" panose="020B0609020101020101" pitchFamily="49" charset="-127"/>
+              </a:rPr>
+              <a:t>)"</a:t>
+            </a:r>
+            <a:r>
+              <a:rPr lang="en-US" altLang="ko-KR" sz="1600" dirty="0">
+                <a:solidFill>
+                  <a:srgbClr val="080808"/>
+                </a:solidFill>
+                <a:effectLst/>
+                <a:latin typeface="D2Coding ligature" panose="020B0609020101020101" pitchFamily="49" charset="-127"/>
+                <a:ea typeface="D2Coding ligature" panose="020B0609020101020101" pitchFamily="49" charset="-127"/>
+              </a:rPr>
+              <a:t>)</a:t>
+            </a:r>
+            <a:br>
+              <a:rPr lang="en-US" altLang="ko-KR" sz="1600" dirty="0">
+                <a:solidFill>
+                  <a:srgbClr val="080808"/>
+                </a:solidFill>
+                <a:effectLst/>
+                <a:latin typeface="D2Coding ligature" panose="020B0609020101020101" pitchFamily="49" charset="-127"/>
+                <a:ea typeface="D2Coding ligature" panose="020B0609020101020101" pitchFamily="49" charset="-127"/>
+              </a:rPr>
+            </a:br>
+            <a:r>
+              <a:rPr lang="en-US" altLang="ko-KR" sz="1600" dirty="0">
+                <a:solidFill>
+                  <a:srgbClr val="080808"/>
+                </a:solidFill>
+                <a:effectLst/>
+                <a:latin typeface="D2Coding ligature" panose="020B0609020101020101" pitchFamily="49" charset="-127"/>
+                <a:ea typeface="D2Coding ligature" panose="020B0609020101020101" pitchFamily="49" charset="-127"/>
+              </a:rPr>
+              <a:t>    }</a:t>
+            </a:r>
+            <a:br>
+              <a:rPr lang="en-US" altLang="ko-KR" sz="1600" dirty="0">
+                <a:solidFill>
+                  <a:srgbClr val="080808"/>
+                </a:solidFill>
+                <a:effectLst/>
+                <a:latin typeface="D2Coding ligature" panose="020B0609020101020101" pitchFamily="49" charset="-127"/>
+                <a:ea typeface="D2Coding ligature" panose="020B0609020101020101" pitchFamily="49" charset="-127"/>
+              </a:rPr>
+            </a:br>
+            <a:r>
+              <a:rPr lang="en-US" altLang="ko-KR" sz="1600" dirty="0">
+                <a:solidFill>
+                  <a:srgbClr val="080808"/>
+                </a:solidFill>
+                <a:effectLst/>
+                <a:latin typeface="D2Coding ligature" panose="020B0609020101020101" pitchFamily="49" charset="-127"/>
+                <a:ea typeface="D2Coding ligature" panose="020B0609020101020101" pitchFamily="49" charset="-127"/>
+              </a:rPr>
+              <a:t>    </a:t>
+            </a:r>
+            <a:br>
+              <a:rPr lang="en-US" altLang="ko-KR" sz="1600" dirty="0">
+                <a:solidFill>
+                  <a:srgbClr val="080808"/>
+                </a:solidFill>
+                <a:effectLst/>
+                <a:latin typeface="D2Coding ligature" panose="020B0609020101020101" pitchFamily="49" charset="-127"/>
+                <a:ea typeface="D2Coding ligature" panose="020B0609020101020101" pitchFamily="49" charset="-127"/>
+              </a:rPr>
+            </a:br>
+            <a:r>
+              <a:rPr lang="en-US" altLang="ko-KR" sz="1600" dirty="0">
+                <a:solidFill>
+                  <a:srgbClr val="080808"/>
+                </a:solidFill>
+                <a:effectLst/>
+                <a:latin typeface="D2Coding ligature" panose="020B0609020101020101" pitchFamily="49" charset="-127"/>
+                <a:ea typeface="D2Coding ligature" panose="020B0609020101020101" pitchFamily="49" charset="-127"/>
+              </a:rPr>
+              <a:t>    </a:t>
+            </a:r>
+            <a:r>
+              <a:rPr lang="en-US" altLang="ko-KR" sz="1600" i="1" dirty="0" err="1">
+                <a:solidFill>
+                  <a:srgbClr val="00627A"/>
+                </a:solidFill>
+                <a:effectLst/>
+                <a:latin typeface="D2Coding ligature" panose="020B0609020101020101" pitchFamily="49" charset="-127"/>
+                <a:ea typeface="D2Coding ligature" panose="020B0609020101020101" pitchFamily="49" charset="-127"/>
+              </a:rPr>
+              <a:t>println</a:t>
+            </a:r>
+            <a:r>
+              <a:rPr lang="en-US" altLang="ko-KR" sz="1600" dirty="0">
+                <a:solidFill>
+                  <a:srgbClr val="080808"/>
+                </a:solidFill>
+                <a:effectLst/>
+                <a:latin typeface="D2Coding ligature" panose="020B0609020101020101" pitchFamily="49" charset="-127"/>
+                <a:ea typeface="D2Coding ligature" panose="020B0609020101020101" pitchFamily="49" charset="-127"/>
+              </a:rPr>
+              <a:t>(</a:t>
+            </a:r>
+            <a:r>
+              <a:rPr lang="en-US" altLang="ko-KR" sz="1600" dirty="0">
+                <a:solidFill>
+                  <a:srgbClr val="000000"/>
+                </a:solidFill>
+                <a:effectLst/>
+                <a:latin typeface="D2Coding ligature" panose="020B0609020101020101" pitchFamily="49" charset="-127"/>
+                <a:ea typeface="D2Coding ligature" panose="020B0609020101020101" pitchFamily="49" charset="-127"/>
+              </a:rPr>
+              <a:t>value</a:t>
+            </a:r>
+            <a:r>
+              <a:rPr lang="en-US" altLang="ko-KR" sz="1600" dirty="0">
+                <a:solidFill>
+                  <a:srgbClr val="080808"/>
+                </a:solidFill>
+                <a:effectLst/>
+                <a:latin typeface="D2Coding ligature" panose="020B0609020101020101" pitchFamily="49" charset="-127"/>
+                <a:ea typeface="D2Coding ligature" panose="020B0609020101020101" pitchFamily="49" charset="-127"/>
+              </a:rPr>
+              <a:t>)</a:t>
+            </a:r>
+            <a:br>
+              <a:rPr lang="en-US" altLang="ko-KR" sz="1600" dirty="0">
+                <a:solidFill>
+                  <a:srgbClr val="080808"/>
+                </a:solidFill>
+                <a:effectLst/>
+                <a:latin typeface="D2Coding ligature" panose="020B0609020101020101" pitchFamily="49" charset="-127"/>
+                <a:ea typeface="D2Coding ligature" panose="020B0609020101020101" pitchFamily="49" charset="-127"/>
+              </a:rPr>
+            </a:br>
+            <a:r>
+              <a:rPr lang="en-US" altLang="ko-KR" sz="1600" dirty="0">
+                <a:solidFill>
+                  <a:srgbClr val="080808"/>
+                </a:solidFill>
+                <a:effectLst/>
+                <a:latin typeface="D2Coding ligature" panose="020B0609020101020101" pitchFamily="49" charset="-127"/>
+                <a:ea typeface="D2Coding ligature" panose="020B0609020101020101" pitchFamily="49" charset="-127"/>
+              </a:rPr>
+              <a:t>}</a:t>
+            </a:r>
+          </a:p>
+        </p:txBody>
+      </p:sp>
+      <p:sp>
+        <p:nvSpPr>
+          <p:cNvPr id="4" name="TextBox 3">
+            <a:extLst>
+              <a:ext uri="{FF2B5EF4-FFF2-40B4-BE49-F238E27FC236}">
+                <a16:creationId xmlns:a16="http://schemas.microsoft.com/office/drawing/2014/main" id="{CA5BE452-EFD8-C6FE-7147-190601F20565}"/>
+              </a:ext>
+            </a:extLst>
+          </p:cNvPr>
+          <p:cNvSpPr txBox="1"/>
+          <p:nvPr/>
+        </p:nvSpPr>
+        <p:spPr>
+          <a:xfrm>
+            <a:off x="8953500" y="6364843"/>
+            <a:ext cx="3057525" cy="369332"/>
+          </a:xfrm>
+          <a:prstGeom prst="rect">
+            <a:avLst/>
+          </a:prstGeom>
+          <a:noFill/>
+        </p:spPr>
+        <p:txBody>
+          <a:bodyPr wrap="square">
+            <a:spAutoFit/>
+          </a:bodyPr>
+          <a:lstStyle/>
+          <a:p>
+            <a:pPr algn="r">
+              <a:buNone/>
+            </a:pPr>
+            <a:r>
+              <a:rPr lang="en-US" altLang="ko-KR" sz="1800" dirty="0" err="1">
+                <a:solidFill>
+                  <a:schemeClr val="bg1">
+                    <a:lumMod val="50000"/>
+                  </a:schemeClr>
+                </a:solidFill>
+                <a:effectLst/>
+                <a:latin typeface="나눔스퀘어라운드OTF Light" panose="020B0600000101010101" pitchFamily="34" charset="-127"/>
+                <a:ea typeface="나눔스퀘어라운드OTF Light" panose="020B0600000101010101" pitchFamily="34" charset="-127"/>
+              </a:rPr>
+              <a:t>tryCatchFinally.kt</a:t>
+            </a:r>
+            <a:endParaRPr lang="ko-KR" altLang="ko-KR" sz="1800" dirty="0">
+              <a:solidFill>
+                <a:schemeClr val="bg1">
+                  <a:lumMod val="50000"/>
+                </a:schemeClr>
+              </a:solidFill>
+              <a:effectLst/>
+              <a:latin typeface="나눔스퀘어라운드OTF Light" panose="020B0600000101010101" pitchFamily="34" charset="-127"/>
+              <a:ea typeface="나눔스퀘어라운드OTF Light" panose="020B0600000101010101" pitchFamily="34" charset="-127"/>
+            </a:endParaRPr>
+          </a:p>
+        </p:txBody>
+      </p:sp>
+    </p:spTree>
+    <p:extLst>
+      <p:ext uri="{BB962C8B-B14F-4D97-AF65-F5344CB8AC3E}">
+        <p14:creationId xmlns:p14="http://schemas.microsoft.com/office/powerpoint/2010/main" val="498173436"/>
+      </p:ext>
+    </p:extLst>
+  </p:cSld>
+  <p:clrMapOvr>
+    <a:masterClrMapping/>
+  </p:clrMapOvr>
+</p:sld>
+</file>
+
+<file path=ppt/slides/slide33.xml><?xml version="1.0" encoding="utf-8"?>
+<p:sld xmlns:a="http://schemas.openxmlformats.org/drawingml/2006/main" xmlns:r="http://schemas.openxmlformats.org/officeDocument/2006/relationships" xmlns:p="http://schemas.openxmlformats.org/presentationml/2006/main">
+  <p:cSld>
+    <p:spTree>
+      <p:nvGrpSpPr>
+        <p:cNvPr id="1" name="">
+          <a:extLst>
+            <a:ext uri="{FF2B5EF4-FFF2-40B4-BE49-F238E27FC236}">
+              <a16:creationId xmlns:a16="http://schemas.microsoft.com/office/drawing/2014/main" id="{C4E302CC-B4F3-DF2A-2A1E-8F340C660388}"/>
+            </a:ext>
+          </a:extLst>
+        </p:cNvPr>
+        <p:cNvGrpSpPr/>
+        <p:nvPr/>
+      </p:nvGrpSpPr>
+      <p:grpSpPr>
+        <a:xfrm>
+          <a:off x="0" y="0"/>
+          <a:ext cx="0" cy="0"/>
+          <a:chOff x="0" y="0"/>
+          <a:chExt cx="0" cy="0"/>
+        </a:xfrm>
+      </p:grpSpPr>
+      <p:sp>
+        <p:nvSpPr>
+          <p:cNvPr id="2" name="제목 1">
+            <a:extLst>
+              <a:ext uri="{FF2B5EF4-FFF2-40B4-BE49-F238E27FC236}">
+                <a16:creationId xmlns:a16="http://schemas.microsoft.com/office/drawing/2014/main" id="{0655CDD8-6160-8FEA-C00C-1D5DDA57D93E}"/>
+              </a:ext>
+            </a:extLst>
+          </p:cNvPr>
+          <p:cNvSpPr>
+            <a:spLocks noGrp="1"/>
+          </p:cNvSpPr>
+          <p:nvPr>
+            <p:ph type="title"/>
+          </p:nvPr>
+        </p:nvSpPr>
+        <p:spPr/>
+        <p:txBody>
+          <a:bodyPr/>
+          <a:lstStyle/>
+          <a:p>
+            <a:r>
+              <a:rPr lang="ko-KR" altLang="en-US" dirty="0"/>
+              <a:t>예외 처리</a:t>
+            </a:r>
+          </a:p>
+        </p:txBody>
+      </p:sp>
+      <p:sp>
+        <p:nvSpPr>
+          <p:cNvPr id="3" name="내용 개체 틀 2">
+            <a:extLst>
+              <a:ext uri="{FF2B5EF4-FFF2-40B4-BE49-F238E27FC236}">
+                <a16:creationId xmlns:a16="http://schemas.microsoft.com/office/drawing/2014/main" id="{6C2E75B7-FB72-3251-00EE-791BAA61815F}"/>
+              </a:ext>
+            </a:extLst>
+          </p:cNvPr>
+          <p:cNvSpPr>
+            <a:spLocks noGrp="1"/>
+          </p:cNvSpPr>
+          <p:nvPr>
+            <p:ph idx="1"/>
+          </p:nvPr>
+        </p:nvSpPr>
+        <p:spPr>
+          <a:xfrm>
+            <a:off x="838201" y="1825625"/>
+            <a:ext cx="5791199" cy="4351338"/>
+          </a:xfrm>
+        </p:spPr>
+        <p:txBody>
+          <a:bodyPr>
+            <a:normAutofit/>
+          </a:bodyPr>
+          <a:lstStyle/>
+          <a:p>
+            <a:pPr>
+              <a:lnSpc>
+                <a:spcPct val="200000"/>
+              </a:lnSpc>
+              <a:buFont typeface="Wingdings" panose="05000000000000000000" pitchFamily="2" charset="2"/>
+              <a:buChar char="u"/>
+            </a:pPr>
+            <a:r>
+              <a:rPr lang="en-US" altLang="ko-KR" sz="3200" b="1" dirty="0">
+                <a:latin typeface="+mn-ea"/>
+              </a:rPr>
+              <a:t> Throwable</a:t>
+            </a:r>
+          </a:p>
+          <a:p>
+            <a:pPr>
+              <a:lnSpc>
+                <a:spcPct val="150000"/>
+              </a:lnSpc>
+            </a:pPr>
+            <a:r>
+              <a:rPr lang="en-US" altLang="ko-KR" sz="2400" dirty="0">
+                <a:solidFill>
+                  <a:srgbClr val="080808"/>
+                </a:solidFill>
+                <a:ea typeface="D2Coding ligature" panose="020B0609020101020101" pitchFamily="49" charset="-127"/>
+              </a:rPr>
+              <a:t>Throwable: throw </a:t>
+            </a:r>
+            <a:r>
+              <a:rPr lang="ko-KR" altLang="en-US" sz="2400" dirty="0">
+                <a:solidFill>
+                  <a:srgbClr val="080808"/>
+                </a:solidFill>
+                <a:ea typeface="D2Coding ligature" panose="020B0609020101020101" pitchFamily="49" charset="-127"/>
+              </a:rPr>
+              <a:t>가능한 객체</a:t>
+            </a:r>
+            <a:r>
+              <a:rPr lang="en-US" altLang="ko-KR" sz="2400" dirty="0">
+                <a:solidFill>
+                  <a:srgbClr val="080808"/>
+                </a:solidFill>
+                <a:ea typeface="D2Coding ligature" panose="020B0609020101020101" pitchFamily="49" charset="-127"/>
+              </a:rPr>
+              <a:t>.</a:t>
+            </a:r>
+            <a:endParaRPr lang="en-US" altLang="ko-KR" sz="2400" dirty="0"/>
+          </a:p>
+          <a:p>
+            <a:pPr>
+              <a:lnSpc>
+                <a:spcPct val="150000"/>
+              </a:lnSpc>
+            </a:pPr>
+            <a:r>
+              <a:rPr lang="en-US" altLang="ko-KR" sz="2400" dirty="0">
+                <a:solidFill>
+                  <a:srgbClr val="080808"/>
+                </a:solidFill>
+                <a:ea typeface="D2Coding ligature" panose="020B0609020101020101" pitchFamily="49" charset="-127"/>
+              </a:rPr>
+              <a:t>Exception: </a:t>
+            </a:r>
+            <a:r>
+              <a:rPr lang="ko-KR" altLang="en-US" sz="2400" dirty="0">
+                <a:solidFill>
+                  <a:srgbClr val="080808"/>
+                </a:solidFill>
+                <a:ea typeface="D2Coding ligature" panose="020B0609020101020101" pitchFamily="49" charset="-127"/>
+              </a:rPr>
+              <a:t>런타임에 발생한 예외</a:t>
+            </a:r>
+            <a:r>
+              <a:rPr lang="en-US" altLang="ko-KR" sz="2400" dirty="0"/>
+              <a:t>.</a:t>
+            </a:r>
+          </a:p>
+          <a:p>
+            <a:pPr marL="457200" lvl="1" indent="0">
+              <a:lnSpc>
+                <a:spcPct val="150000"/>
+              </a:lnSpc>
+              <a:buNone/>
+            </a:pPr>
+            <a:r>
+              <a:rPr lang="en-US" altLang="ko-KR" sz="2000" dirty="0"/>
+              <a:t>ex) NPE,</a:t>
+            </a:r>
+            <a:r>
+              <a:rPr lang="ko-KR" altLang="en-US" sz="2000" dirty="0"/>
+              <a:t> </a:t>
+            </a:r>
+            <a:r>
+              <a:rPr lang="en-US" altLang="ko-KR" sz="2000" dirty="0"/>
+              <a:t>0</a:t>
+            </a:r>
+            <a:r>
+              <a:rPr lang="ko-KR" altLang="en-US" sz="2000" dirty="0"/>
+              <a:t>으로 나눴을 때 등등</a:t>
+            </a:r>
+            <a:endParaRPr lang="en-US" altLang="ko-KR" sz="2000" dirty="0"/>
+          </a:p>
+          <a:p>
+            <a:pPr>
+              <a:lnSpc>
+                <a:spcPct val="150000"/>
+              </a:lnSpc>
+            </a:pPr>
+            <a:r>
+              <a:rPr lang="en-US" altLang="ko-KR" sz="2400" dirty="0">
+                <a:solidFill>
+                  <a:srgbClr val="080808"/>
+                </a:solidFill>
+                <a:ea typeface="D2Coding ligature" panose="020B0609020101020101" pitchFamily="49" charset="-127"/>
+              </a:rPr>
+              <a:t>Error: </a:t>
+            </a:r>
+            <a:r>
+              <a:rPr lang="ko-KR" altLang="en-US" sz="2400" dirty="0">
+                <a:solidFill>
+                  <a:srgbClr val="080808"/>
+                </a:solidFill>
+                <a:ea typeface="D2Coding ligature" panose="020B0609020101020101" pitchFamily="49" charset="-127"/>
+              </a:rPr>
+              <a:t>내부적으로 발생한 시스템 에러</a:t>
+            </a:r>
+            <a:r>
+              <a:rPr lang="en-US" altLang="ko-KR" sz="2400" dirty="0"/>
+              <a:t>.</a:t>
+            </a:r>
+          </a:p>
+          <a:p>
+            <a:pPr marL="457200" lvl="1" indent="0">
+              <a:lnSpc>
+                <a:spcPct val="150000"/>
+              </a:lnSpc>
+              <a:buNone/>
+            </a:pPr>
+            <a:r>
+              <a:rPr lang="en-US" altLang="ko-KR" sz="2000" dirty="0"/>
+              <a:t>ex) OOM, </a:t>
+            </a:r>
+            <a:r>
+              <a:rPr lang="ko-KR" altLang="en-US" sz="2000" dirty="0"/>
+              <a:t>스택 </a:t>
+            </a:r>
+            <a:r>
+              <a:rPr lang="ko-KR" altLang="en-US" sz="2000" dirty="0" err="1"/>
+              <a:t>오버플로우</a:t>
+            </a:r>
+            <a:r>
+              <a:rPr lang="ko-KR" altLang="en-US" sz="2000" dirty="0"/>
+              <a:t> 등등</a:t>
+            </a:r>
+            <a:endParaRPr lang="en-US" altLang="ko-KR" sz="2000" dirty="0"/>
+          </a:p>
+        </p:txBody>
+      </p:sp>
+      <p:sp>
+        <p:nvSpPr>
+          <p:cNvPr id="25" name="Rectangle 7">
+            <a:extLst>
+              <a:ext uri="{FF2B5EF4-FFF2-40B4-BE49-F238E27FC236}">
+                <a16:creationId xmlns:a16="http://schemas.microsoft.com/office/drawing/2014/main" id="{4A25165B-C5DE-0644-C246-6FD91A604BC0}"/>
+              </a:ext>
+            </a:extLst>
+          </p:cNvPr>
+          <p:cNvSpPr>
+            <a:spLocks noChangeArrowheads="1"/>
+          </p:cNvSpPr>
+          <p:nvPr/>
+        </p:nvSpPr>
+        <p:spPr bwMode="auto">
+          <a:xfrm>
+            <a:off x="0" y="-184666"/>
+            <a:ext cx="264816" cy="369332"/>
+          </a:xfrm>
+          <a:prstGeom prst="rect">
+            <a:avLst/>
+          </a:prstGeom>
+          <a:noFill/>
+          <a:ln>
+            <a:noFill/>
+          </a:ln>
+          <a:effectLst/>
+          <a:extLst>
+            <a:ext uri="{909E8E84-426E-40DD-AFC4-6F175D3DCCD1}">
+              <a14:hiddenFill xmlns:a14="http://schemas.microsoft.com/office/drawing/2010/main">
+                <a:solidFill>
+                  <a:schemeClr val="accent1"/>
+                </a:solidFill>
+              </a14:hiddenFill>
+            </a:ext>
+            <a:ext uri="{91240B29-F687-4F45-9708-019B960494DF}">
+              <a14:hiddenLine xmlns:a14="http://schemas.microsoft.com/office/drawing/2010/main" w="9525">
+                <a:solidFill>
+                  <a:schemeClr val="tx1"/>
+                </a:solidFill>
+                <a:miter lim="800000"/>
+                <a:headEnd/>
+                <a:tailEnd/>
+              </a14:hiddenLine>
+            </a:ext>
+            <a:ext uri="{AF507438-7753-43E0-B8FC-AC1667EBCBE1}">
+              <a14:hiddenEffects xmlns:a14="http://schemas.microsoft.com/office/drawing/2010/main">
+                <a:effectLst>
+                  <a:outerShdw dist="35921" dir="2700000" algn="ctr" rotWithShape="0">
+                    <a:schemeClr val="bg2"/>
+                  </a:outerShdw>
+                </a:effectLst>
+              </a14:hiddenEffects>
+            </a:ext>
+          </a:extLst>
+        </p:spPr>
+        <p:txBody>
+          <a:bodyPr vert="horz" wrap="none" lIns="91440" tIns="45720" rIns="91440" bIns="45720" numCol="1" anchor="ctr" anchorCtr="0" compatLnSpc="1">
+            <a:prstTxWarp prst="textNoShape">
+              <a:avLst/>
+            </a:prstTxWarp>
+            <a:spAutoFit/>
+          </a:bodyPr>
+          <a:lstStyle/>
+          <a:p>
+            <a:pPr marL="0" marR="0" lvl="0" indent="0" algn="l" defTabSz="914400" rtl="0" eaLnBrk="0" fontAlgn="base" latinLnBrk="0" hangingPunct="0">
+              <a:lnSpc>
+                <a:spcPct val="100000"/>
+              </a:lnSpc>
+              <a:spcBef>
+                <a:spcPct val="0"/>
+              </a:spcBef>
+              <a:spcAft>
+                <a:spcPct val="0"/>
+              </a:spcAft>
+              <a:buClrTx/>
+              <a:buSzTx/>
+              <a:buFontTx/>
+              <a:buChar char="•"/>
+              <a:tabLst/>
+            </a:pPr>
+            <a:endParaRPr kumimoji="0" lang="ko-KR" altLang="ko-KR" sz="1800" b="0" i="0" u="none" strike="noStrike" cap="none" normalizeH="0" baseline="0" dirty="0">
+              <a:ln>
+                <a:noFill/>
+              </a:ln>
+              <a:solidFill>
+                <a:schemeClr val="tx1"/>
+              </a:solidFill>
+              <a:effectLst/>
+              <a:latin typeface="Arial" panose="020B0604020202020204" pitchFamily="34" charset="0"/>
+            </a:endParaRPr>
+          </a:p>
+        </p:txBody>
+      </p:sp>
+      <p:sp>
+        <p:nvSpPr>
+          <p:cNvPr id="4" name="TextBox 3">
+            <a:extLst>
+              <a:ext uri="{FF2B5EF4-FFF2-40B4-BE49-F238E27FC236}">
+                <a16:creationId xmlns:a16="http://schemas.microsoft.com/office/drawing/2014/main" id="{1C87D0DD-806C-4BA5-960D-F42666DB4591}"/>
+              </a:ext>
+            </a:extLst>
+          </p:cNvPr>
+          <p:cNvSpPr txBox="1"/>
+          <p:nvPr/>
+        </p:nvSpPr>
+        <p:spPr>
+          <a:xfrm>
+            <a:off x="8953500" y="6364843"/>
+            <a:ext cx="3057525" cy="369332"/>
+          </a:xfrm>
+          <a:prstGeom prst="rect">
+            <a:avLst/>
+          </a:prstGeom>
+          <a:noFill/>
+        </p:spPr>
+        <p:txBody>
+          <a:bodyPr wrap="square">
+            <a:spAutoFit/>
+          </a:bodyPr>
+          <a:lstStyle/>
+          <a:p>
+            <a:pPr algn="r">
+              <a:buNone/>
+            </a:pPr>
+            <a:r>
+              <a:rPr lang="en-US" altLang="ko-KR" sz="1800" dirty="0" err="1">
+                <a:solidFill>
+                  <a:schemeClr val="bg1">
+                    <a:lumMod val="50000"/>
+                  </a:schemeClr>
+                </a:solidFill>
+                <a:effectLst/>
+                <a:latin typeface="나눔스퀘어라운드OTF Light" panose="020B0600000101010101" pitchFamily="34" charset="-127"/>
+                <a:ea typeface="나눔스퀘어라운드OTF Light" panose="020B0600000101010101" pitchFamily="34" charset="-127"/>
+              </a:rPr>
+              <a:t>tryCatchFinally.kt</a:t>
+            </a:r>
+            <a:endParaRPr lang="ko-KR" altLang="ko-KR" sz="1800" dirty="0">
+              <a:solidFill>
+                <a:schemeClr val="bg1">
+                  <a:lumMod val="50000"/>
+                </a:schemeClr>
+              </a:solidFill>
+              <a:effectLst/>
+              <a:latin typeface="나눔스퀘어라운드OTF Light" panose="020B0600000101010101" pitchFamily="34" charset="-127"/>
+              <a:ea typeface="나눔스퀘어라운드OTF Light" panose="020B0600000101010101" pitchFamily="34" charset="-127"/>
+            </a:endParaRPr>
+          </a:p>
+        </p:txBody>
+      </p:sp>
+      <p:grpSp>
+        <p:nvGrpSpPr>
+          <p:cNvPr id="17" name="그룹 16">
+            <a:extLst>
+              <a:ext uri="{FF2B5EF4-FFF2-40B4-BE49-F238E27FC236}">
+                <a16:creationId xmlns:a16="http://schemas.microsoft.com/office/drawing/2014/main" id="{41E78EBF-0EC1-25E8-7D51-0F6DB394CC3E}"/>
+              </a:ext>
+            </a:extLst>
+          </p:cNvPr>
+          <p:cNvGrpSpPr/>
+          <p:nvPr/>
+        </p:nvGrpSpPr>
+        <p:grpSpPr>
+          <a:xfrm>
+            <a:off x="7610475" y="1714501"/>
+            <a:ext cx="3162300" cy="3428999"/>
+            <a:chOff x="7981950" y="1181101"/>
+            <a:chExt cx="3162300" cy="3428999"/>
+          </a:xfrm>
+        </p:grpSpPr>
+        <p:sp>
+          <p:nvSpPr>
+            <p:cNvPr id="6" name="사각형: 둥근 모서리 5">
+              <a:extLst>
+                <a:ext uri="{FF2B5EF4-FFF2-40B4-BE49-F238E27FC236}">
+                  <a16:creationId xmlns:a16="http://schemas.microsoft.com/office/drawing/2014/main" id="{FF3775C7-F21D-8330-9C6A-5A63ED401D0A}"/>
+                </a:ext>
+              </a:extLst>
+            </p:cNvPr>
+            <p:cNvSpPr/>
+            <p:nvPr/>
+          </p:nvSpPr>
+          <p:spPr>
+            <a:xfrm>
+              <a:off x="7981950" y="1181101"/>
+              <a:ext cx="3162300" cy="1743075"/>
+            </a:xfrm>
+            <a:prstGeom prst="roundRect">
+              <a:avLst/>
+            </a:prstGeom>
+            <a:noFill/>
+            <a:ln>
+              <a:prstDash val="lgDash"/>
+            </a:ln>
+          </p:spPr>
+          <p:style>
+            <a:lnRef idx="2">
+              <a:schemeClr val="accent1">
+                <a:shade val="15000"/>
+              </a:schemeClr>
+            </a:lnRef>
+            <a:fillRef idx="1">
+              <a:schemeClr val="accent1"/>
+            </a:fillRef>
+            <a:effectRef idx="0">
+              <a:schemeClr val="accent1"/>
+            </a:effectRef>
+            <a:fontRef idx="minor">
+              <a:schemeClr val="lt1"/>
+            </a:fontRef>
+          </p:style>
+          <p:txBody>
+            <a:bodyPr rtlCol="0" anchor="ctr"/>
+            <a:lstStyle/>
+            <a:p>
+              <a:pPr algn="ctr">
+                <a:buNone/>
+              </a:pPr>
+              <a:r>
+                <a:rPr lang="en-US" altLang="ko-KR" dirty="0">
+                  <a:solidFill>
+                    <a:srgbClr val="080808"/>
+                  </a:solidFill>
+                  <a:ea typeface="D2Coding ligature" panose="020B0609020101020101" pitchFamily="49" charset="-127"/>
+                </a:rPr>
+                <a:t>Throwable</a:t>
+              </a:r>
+            </a:p>
+          </p:txBody>
+        </p:sp>
+        <p:sp>
+          <p:nvSpPr>
+            <p:cNvPr id="7" name="사각형: 둥근 모서리 6">
+              <a:extLst>
+                <a:ext uri="{FF2B5EF4-FFF2-40B4-BE49-F238E27FC236}">
+                  <a16:creationId xmlns:a16="http://schemas.microsoft.com/office/drawing/2014/main" id="{62F8716B-0A3E-4967-7E80-09EA39FFE4EE}"/>
+                </a:ext>
+              </a:extLst>
+            </p:cNvPr>
+            <p:cNvSpPr/>
+            <p:nvPr/>
+          </p:nvSpPr>
+          <p:spPr>
+            <a:xfrm>
+              <a:off x="7981950" y="3619501"/>
+              <a:ext cx="1504950" cy="990599"/>
+            </a:xfrm>
+            <a:prstGeom prst="roundRect">
+              <a:avLst/>
+            </a:prstGeom>
+            <a:noFill/>
+            <a:ln>
+              <a:prstDash val="lgDash"/>
+            </a:ln>
+          </p:spPr>
+          <p:style>
+            <a:lnRef idx="2">
+              <a:schemeClr val="accent1">
+                <a:shade val="15000"/>
+              </a:schemeClr>
+            </a:lnRef>
+            <a:fillRef idx="1">
+              <a:schemeClr val="accent1"/>
+            </a:fillRef>
+            <a:effectRef idx="0">
+              <a:schemeClr val="accent1"/>
+            </a:effectRef>
+            <a:fontRef idx="minor">
+              <a:schemeClr val="lt1"/>
+            </a:fontRef>
+          </p:style>
+          <p:txBody>
+            <a:bodyPr rtlCol="0" anchor="ctr"/>
+            <a:lstStyle/>
+            <a:p>
+              <a:pPr algn="ctr">
+                <a:buNone/>
+              </a:pPr>
+              <a:r>
+                <a:rPr lang="en-US" altLang="ko-KR" dirty="0">
+                  <a:solidFill>
+                    <a:srgbClr val="080808"/>
+                  </a:solidFill>
+                  <a:ea typeface="D2Coding ligature" panose="020B0609020101020101" pitchFamily="49" charset="-127"/>
+                </a:rPr>
+                <a:t>Exception</a:t>
+              </a:r>
+            </a:p>
+          </p:txBody>
+        </p:sp>
+        <p:sp>
+          <p:nvSpPr>
+            <p:cNvPr id="8" name="사각형: 둥근 모서리 7">
+              <a:extLst>
+                <a:ext uri="{FF2B5EF4-FFF2-40B4-BE49-F238E27FC236}">
+                  <a16:creationId xmlns:a16="http://schemas.microsoft.com/office/drawing/2014/main" id="{409D597D-DDF6-7B26-BC82-6C27B5B4F804}"/>
+                </a:ext>
+              </a:extLst>
+            </p:cNvPr>
+            <p:cNvSpPr/>
+            <p:nvPr/>
+          </p:nvSpPr>
+          <p:spPr>
+            <a:xfrm>
+              <a:off x="9639300" y="3619501"/>
+              <a:ext cx="1504950" cy="990599"/>
+            </a:xfrm>
+            <a:prstGeom prst="roundRect">
+              <a:avLst/>
+            </a:prstGeom>
+            <a:noFill/>
+            <a:ln>
+              <a:prstDash val="lgDash"/>
+            </a:ln>
+          </p:spPr>
+          <p:style>
+            <a:lnRef idx="2">
+              <a:schemeClr val="accent1">
+                <a:shade val="15000"/>
+              </a:schemeClr>
+            </a:lnRef>
+            <a:fillRef idx="1">
+              <a:schemeClr val="accent1"/>
+            </a:fillRef>
+            <a:effectRef idx="0">
+              <a:schemeClr val="accent1"/>
+            </a:effectRef>
+            <a:fontRef idx="minor">
+              <a:schemeClr val="lt1"/>
+            </a:fontRef>
+          </p:style>
+          <p:txBody>
+            <a:bodyPr rtlCol="0" anchor="ctr"/>
+            <a:lstStyle/>
+            <a:p>
+              <a:pPr algn="ctr">
+                <a:buNone/>
+              </a:pPr>
+              <a:r>
+                <a:rPr lang="en-US" altLang="ko-KR" dirty="0">
+                  <a:solidFill>
+                    <a:srgbClr val="080808"/>
+                  </a:solidFill>
+                  <a:ea typeface="D2Coding ligature" panose="020B0609020101020101" pitchFamily="49" charset="-127"/>
+                </a:rPr>
+                <a:t>Error</a:t>
+              </a:r>
+            </a:p>
+          </p:txBody>
+        </p:sp>
+        <p:cxnSp>
+          <p:nvCxnSpPr>
+            <p:cNvPr id="14" name="연결선: 꺾임 13">
+              <a:extLst>
+                <a:ext uri="{FF2B5EF4-FFF2-40B4-BE49-F238E27FC236}">
+                  <a16:creationId xmlns:a16="http://schemas.microsoft.com/office/drawing/2014/main" id="{710ED3ED-C92B-E1F4-C8A4-7D6A67348DB5}"/>
+                </a:ext>
+              </a:extLst>
+            </p:cNvPr>
+            <p:cNvCxnSpPr>
+              <a:stCxn id="6" idx="2"/>
+              <a:endCxn id="7" idx="0"/>
+            </p:cNvCxnSpPr>
+            <p:nvPr/>
+          </p:nvCxnSpPr>
+          <p:spPr>
+            <a:xfrm rot="5400000">
+              <a:off x="8801101" y="2857501"/>
+              <a:ext cx="695325" cy="828675"/>
+            </a:xfrm>
+            <a:prstGeom prst="bentConnector3">
+              <a:avLst/>
+            </a:prstGeom>
+            <a:ln>
+              <a:solidFill>
+                <a:srgbClr val="000000"/>
+              </a:solidFill>
+              <a:tailEnd type="triangle"/>
+            </a:ln>
+          </p:spPr>
+          <p:style>
+            <a:lnRef idx="1">
+              <a:schemeClr val="accent1"/>
+            </a:lnRef>
+            <a:fillRef idx="0">
+              <a:schemeClr val="accent1"/>
+            </a:fillRef>
+            <a:effectRef idx="0">
+              <a:schemeClr val="accent1"/>
+            </a:effectRef>
+            <a:fontRef idx="minor">
+              <a:schemeClr val="tx1"/>
+            </a:fontRef>
+          </p:style>
+        </p:cxnSp>
+        <p:cxnSp>
+          <p:nvCxnSpPr>
+            <p:cNvPr id="16" name="연결선: 꺾임 15">
+              <a:extLst>
+                <a:ext uri="{FF2B5EF4-FFF2-40B4-BE49-F238E27FC236}">
+                  <a16:creationId xmlns:a16="http://schemas.microsoft.com/office/drawing/2014/main" id="{C68E46A7-531B-9C31-717F-71F317552FA1}"/>
+                </a:ext>
+              </a:extLst>
+            </p:cNvPr>
+            <p:cNvCxnSpPr>
+              <a:stCxn id="6" idx="2"/>
+              <a:endCxn id="8" idx="0"/>
+            </p:cNvCxnSpPr>
+            <p:nvPr/>
+          </p:nvCxnSpPr>
+          <p:spPr>
+            <a:xfrm rot="16200000" flipH="1">
+              <a:off x="9629775" y="2857500"/>
+              <a:ext cx="695325" cy="828675"/>
+            </a:xfrm>
+            <a:prstGeom prst="bentConnector3">
+              <a:avLst/>
+            </a:prstGeom>
+            <a:ln>
+              <a:solidFill>
+                <a:srgbClr val="000000"/>
+              </a:solidFill>
+              <a:tailEnd type="triangle"/>
+            </a:ln>
+          </p:spPr>
+          <p:style>
+            <a:lnRef idx="1">
+              <a:schemeClr val="accent1"/>
+            </a:lnRef>
+            <a:fillRef idx="0">
+              <a:schemeClr val="accent1"/>
+            </a:fillRef>
+            <a:effectRef idx="0">
+              <a:schemeClr val="accent1"/>
+            </a:effectRef>
+            <a:fontRef idx="minor">
+              <a:schemeClr val="tx1"/>
+            </a:fontRef>
+          </p:style>
+        </p:cxnSp>
+      </p:grpSp>
+    </p:spTree>
+    <p:extLst>
+      <p:ext uri="{BB962C8B-B14F-4D97-AF65-F5344CB8AC3E}">
+        <p14:creationId xmlns:p14="http://schemas.microsoft.com/office/powerpoint/2010/main" val="1241391777"/>
+      </p:ext>
+    </p:extLst>
+  </p:cSld>
+  <p:clrMapOvr>
+    <a:masterClrMapping/>
+  </p:clrMapOvr>
+</p:sld>
+</file>
+
+<file path=ppt/slides/slide34.xml><?xml version="1.0" encoding="utf-8"?>
 <p:sld xmlns:a="http://schemas.openxmlformats.org/drawingml/2006/main" xmlns:r="http://schemas.openxmlformats.org/officeDocument/2006/relationships" xmlns:p="http://schemas.openxmlformats.org/presentationml/2006/main">
   <p:cSld>
     <p:spTree>
@@ -34820,8 +37327,8 @@
         </p:nvSpPr>
         <p:spPr>
           <a:xfrm>
-            <a:off x="6686549" y="428179"/>
-            <a:ext cx="5219701" cy="6001643"/>
+            <a:off x="6686549" y="920621"/>
+            <a:ext cx="5219701" cy="5016758"/>
           </a:xfrm>
           <a:prstGeom prst="rect">
             <a:avLst/>
@@ -34838,42 +37345,42 @@
               <a:buNone/>
             </a:pPr>
             <a:r>
-              <a:rPr lang="en-US" altLang="ko-KR" sz="1600" dirty="0">
-                <a:solidFill>
-                  <a:srgbClr val="0033B3"/>
-                </a:solidFill>
-                <a:effectLst/>
-                <a:latin typeface="D2Coding ligature" panose="020B0609020101020101" pitchFamily="49" charset="-127"/>
-                <a:ea typeface="D2Coding ligature" panose="020B0609020101020101" pitchFamily="49" charset="-127"/>
-              </a:rPr>
-              <a:t>private fun </a:t>
-            </a:r>
-            <a:r>
-              <a:rPr lang="en-US" altLang="ko-KR" sz="1600" dirty="0">
-                <a:solidFill>
-                  <a:srgbClr val="00627A"/>
-                </a:solidFill>
-                <a:effectLst/>
-                <a:latin typeface="D2Coding ligature" panose="020B0609020101020101" pitchFamily="49" charset="-127"/>
-                <a:ea typeface="D2Coding ligature" panose="020B0609020101020101" pitchFamily="49" charset="-127"/>
-              </a:rPr>
-              <a:t>main</a:t>
-            </a:r>
-            <a:r>
-              <a:rPr lang="en-US" altLang="ko-KR" sz="1600" dirty="0">
-                <a:solidFill>
-                  <a:srgbClr val="080808"/>
-                </a:solidFill>
-                <a:effectLst/>
-                <a:latin typeface="D2Coding ligature" panose="020B0609020101020101" pitchFamily="49" charset="-127"/>
-                <a:ea typeface="D2Coding ligature" panose="020B0609020101020101" pitchFamily="49" charset="-127"/>
-              </a:rPr>
-              <a:t>(){</a:t>
+              <a:rPr lang="ko-KR" altLang="ko-KR" sz="1600" dirty="0" err="1">
+                <a:solidFill>
+                  <a:srgbClr val="704080"/>
+                </a:solidFill>
+                <a:effectLst/>
+                <a:latin typeface="D2Coding ligature" panose="020B0609020101020101" pitchFamily="49" charset="-127"/>
+                <a:ea typeface="D2Coding ligature" panose="020B0609020101020101" pitchFamily="49" charset="-127"/>
+              </a:rPr>
+              <a:t>try</a:t>
+            </a:r>
+            <a:r>
+              <a:rPr lang="ko-KR" altLang="ko-KR" sz="1600" dirty="0">
+                <a:solidFill>
+                  <a:srgbClr val="704080"/>
+                </a:solidFill>
+                <a:effectLst/>
+                <a:latin typeface="D2Coding ligature" panose="020B0609020101020101" pitchFamily="49" charset="-127"/>
+                <a:ea typeface="D2Coding ligature" panose="020B0609020101020101" pitchFamily="49" charset="-127"/>
+              </a:rPr>
+              <a:t> </a:t>
+            </a:r>
+            <a:r>
+              <a:rPr lang="ko-KR" altLang="ko-KR" sz="1600" dirty="0">
+                <a:solidFill>
+                  <a:srgbClr val="302A24"/>
+                </a:solidFill>
+                <a:effectLst/>
+                <a:latin typeface="D2Coding ligature" panose="020B0609020101020101" pitchFamily="49" charset="-127"/>
+                <a:ea typeface="D2Coding ligature" panose="020B0609020101020101" pitchFamily="49" charset="-127"/>
+              </a:rPr>
+              <a:t>{</a:t>
             </a:r>
             <a:br>
-              <a:rPr lang="en-US" altLang="ko-KR" sz="1600" dirty="0">
-                <a:solidFill>
-                  <a:srgbClr val="080808"/>
+              <a:rPr lang="ko-KR" altLang="ko-KR" sz="1600" dirty="0">
+                <a:solidFill>
+                  <a:srgbClr val="302A24"/>
                 </a:solidFill>
                 <a:effectLst/>
                 <a:latin typeface="D2Coding ligature" panose="020B0609020101020101" pitchFamily="49" charset="-127"/>
@@ -34881,9 +37388,9 @@
               </a:rPr>
             </a:br>
             <a:r>
-              <a:rPr lang="en-US" altLang="ko-KR" sz="1600" dirty="0">
-                <a:solidFill>
-                  <a:srgbClr val="080808"/>
+              <a:rPr lang="ko-KR" altLang="ko-KR" sz="1600" dirty="0">
+                <a:solidFill>
+                  <a:srgbClr val="302A24"/>
                 </a:solidFill>
                 <a:effectLst/>
                 <a:latin typeface="D2Coding ligature" panose="020B0609020101020101" pitchFamily="49" charset="-127"/>
@@ -34892,20 +37399,303 @@
               <a:t>    </a:t>
             </a:r>
             <a:r>
-              <a:rPr lang="en-US" altLang="ko-KR" sz="1600" dirty="0">
-                <a:solidFill>
-                  <a:srgbClr val="0033B3"/>
-                </a:solidFill>
-                <a:effectLst/>
-                <a:latin typeface="D2Coding ligature" panose="020B0609020101020101" pitchFamily="49" charset="-127"/>
-                <a:ea typeface="D2Coding ligature" panose="020B0609020101020101" pitchFamily="49" charset="-127"/>
-              </a:rPr>
-              <a:t>try </a:t>
-            </a:r>
-            <a:r>
-              <a:rPr lang="en-US" altLang="ko-KR" sz="1600" dirty="0">
-                <a:solidFill>
-                  <a:srgbClr val="080808"/>
+              <a:rPr lang="ko-KR" altLang="ko-KR" sz="1600" dirty="0" err="1">
+                <a:solidFill>
+                  <a:srgbClr val="9C7028"/>
+                </a:solidFill>
+                <a:effectLst/>
+                <a:latin typeface="D2Coding ligature" panose="020B0609020101020101" pitchFamily="49" charset="-127"/>
+                <a:ea typeface="D2Coding ligature" panose="020B0609020101020101" pitchFamily="49" charset="-127"/>
+              </a:rPr>
+              <a:t>println</a:t>
+            </a:r>
+            <a:r>
+              <a:rPr lang="ko-KR" altLang="ko-KR" sz="1600" dirty="0">
+                <a:solidFill>
+                  <a:srgbClr val="302A24"/>
+                </a:solidFill>
+                <a:effectLst/>
+                <a:latin typeface="D2Coding ligature" panose="020B0609020101020101" pitchFamily="49" charset="-127"/>
+                <a:ea typeface="D2Coding ligature" panose="020B0609020101020101" pitchFamily="49" charset="-127"/>
+              </a:rPr>
+              <a:t>(</a:t>
+            </a:r>
+            <a:r>
+              <a:rPr lang="ko-KR" altLang="ko-KR" sz="1600" dirty="0">
+                <a:solidFill>
+                  <a:srgbClr val="486830"/>
+                </a:solidFill>
+                <a:effectLst/>
+                <a:latin typeface="D2Coding ligature" panose="020B0609020101020101" pitchFamily="49" charset="-127"/>
+                <a:ea typeface="D2Coding ligature" panose="020B0609020101020101" pitchFamily="49" charset="-127"/>
+              </a:rPr>
+              <a:t>"</a:t>
+            </a:r>
+            <a:r>
+              <a:rPr lang="ko-KR" altLang="ko-KR" sz="1600" dirty="0" err="1">
+                <a:solidFill>
+                  <a:srgbClr val="486830"/>
+                </a:solidFill>
+                <a:effectLst/>
+                <a:latin typeface="D2Coding ligature" panose="020B0609020101020101" pitchFamily="49" charset="-127"/>
+                <a:ea typeface="D2Coding ligature" panose="020B0609020101020101" pitchFamily="49" charset="-127"/>
+              </a:rPr>
+              <a:t>try</a:t>
+            </a:r>
+            <a:r>
+              <a:rPr lang="ko-KR" altLang="ko-KR" sz="1600" dirty="0">
+                <a:solidFill>
+                  <a:srgbClr val="486830"/>
+                </a:solidFill>
+                <a:effectLst/>
+                <a:latin typeface="D2Coding ligature" panose="020B0609020101020101" pitchFamily="49" charset="-127"/>
+                <a:ea typeface="D2Coding ligature" panose="020B0609020101020101" pitchFamily="49" charset="-127"/>
+              </a:rPr>
+              <a:t>"</a:t>
+            </a:r>
+            <a:r>
+              <a:rPr lang="ko-KR" altLang="ko-KR" sz="1600" dirty="0">
+                <a:solidFill>
+                  <a:srgbClr val="302A24"/>
+                </a:solidFill>
+                <a:effectLst/>
+                <a:latin typeface="D2Coding ligature" panose="020B0609020101020101" pitchFamily="49" charset="-127"/>
+                <a:ea typeface="D2Coding ligature" panose="020B0609020101020101" pitchFamily="49" charset="-127"/>
+              </a:rPr>
+              <a:t>)</a:t>
+            </a:r>
+            <a:br>
+              <a:rPr lang="ko-KR" altLang="ko-KR" sz="1600" dirty="0">
+                <a:solidFill>
+                  <a:srgbClr val="302A24"/>
+                </a:solidFill>
+                <a:effectLst/>
+                <a:latin typeface="D2Coding ligature" panose="020B0609020101020101" pitchFamily="49" charset="-127"/>
+                <a:ea typeface="D2Coding ligature" panose="020B0609020101020101" pitchFamily="49" charset="-127"/>
+              </a:rPr>
+            </a:br>
+            <a:r>
+              <a:rPr lang="ko-KR" altLang="ko-KR" sz="1600" dirty="0">
+                <a:solidFill>
+                  <a:srgbClr val="302A24"/>
+                </a:solidFill>
+                <a:effectLst/>
+                <a:latin typeface="D2Coding ligature" panose="020B0609020101020101" pitchFamily="49" charset="-127"/>
+                <a:ea typeface="D2Coding ligature" panose="020B0609020101020101" pitchFamily="49" charset="-127"/>
+              </a:rPr>
+              <a:t>} </a:t>
+            </a:r>
+            <a:r>
+              <a:rPr lang="ko-KR" altLang="ko-KR" sz="1600" dirty="0" err="1">
+                <a:solidFill>
+                  <a:srgbClr val="704080"/>
+                </a:solidFill>
+                <a:effectLst/>
+                <a:latin typeface="D2Coding ligature" panose="020B0609020101020101" pitchFamily="49" charset="-127"/>
+                <a:ea typeface="D2Coding ligature" panose="020B0609020101020101" pitchFamily="49" charset="-127"/>
+              </a:rPr>
+              <a:t>catch</a:t>
+            </a:r>
+            <a:r>
+              <a:rPr lang="ko-KR" altLang="ko-KR" sz="1600" dirty="0">
+                <a:solidFill>
+                  <a:srgbClr val="704080"/>
+                </a:solidFill>
+                <a:effectLst/>
+                <a:latin typeface="D2Coding ligature" panose="020B0609020101020101" pitchFamily="49" charset="-127"/>
+                <a:ea typeface="D2Coding ligature" panose="020B0609020101020101" pitchFamily="49" charset="-127"/>
+              </a:rPr>
+              <a:t> </a:t>
+            </a:r>
+            <a:r>
+              <a:rPr lang="ko-KR" altLang="ko-KR" sz="1600" dirty="0">
+                <a:solidFill>
+                  <a:srgbClr val="302A24"/>
+                </a:solidFill>
+                <a:effectLst/>
+                <a:latin typeface="D2Coding ligature" panose="020B0609020101020101" pitchFamily="49" charset="-127"/>
+                <a:ea typeface="D2Coding ligature" panose="020B0609020101020101" pitchFamily="49" charset="-127"/>
+              </a:rPr>
+              <a:t>(</a:t>
+            </a:r>
+            <a:r>
+              <a:rPr lang="ko-KR" altLang="ko-KR" sz="1600" dirty="0" err="1">
+                <a:solidFill>
+                  <a:srgbClr val="302A24"/>
+                </a:solidFill>
+                <a:effectLst/>
+                <a:latin typeface="D2Coding ligature" panose="020B0609020101020101" pitchFamily="49" charset="-127"/>
+                <a:ea typeface="D2Coding ligature" panose="020B0609020101020101" pitchFamily="49" charset="-127"/>
+              </a:rPr>
+              <a:t>e</a:t>
+            </a:r>
+            <a:r>
+              <a:rPr lang="ko-KR" altLang="ko-KR" sz="1600" dirty="0">
+                <a:solidFill>
+                  <a:srgbClr val="302A24"/>
+                </a:solidFill>
+                <a:effectLst/>
+                <a:latin typeface="D2Coding ligature" panose="020B0609020101020101" pitchFamily="49" charset="-127"/>
+                <a:ea typeface="D2Coding ligature" panose="020B0609020101020101" pitchFamily="49" charset="-127"/>
+              </a:rPr>
+              <a:t>: </a:t>
+            </a:r>
+            <a:r>
+              <a:rPr lang="ko-KR" altLang="ko-KR" sz="1600" i="1" dirty="0" err="1">
+                <a:solidFill>
+                  <a:srgbClr val="9C7028"/>
+                </a:solidFill>
+                <a:effectLst/>
+                <a:latin typeface="D2Coding ligature" panose="020B0609020101020101" pitchFamily="49" charset="-127"/>
+                <a:ea typeface="D2Coding ligature" panose="020B0609020101020101" pitchFamily="49" charset="-127"/>
+              </a:rPr>
+              <a:t>Exception</a:t>
+            </a:r>
+            <a:r>
+              <a:rPr lang="ko-KR" altLang="ko-KR" sz="1600" dirty="0">
+                <a:solidFill>
+                  <a:srgbClr val="302A24"/>
+                </a:solidFill>
+                <a:effectLst/>
+                <a:latin typeface="D2Coding ligature" panose="020B0609020101020101" pitchFamily="49" charset="-127"/>
+                <a:ea typeface="D2Coding ligature" panose="020B0609020101020101" pitchFamily="49" charset="-127"/>
+              </a:rPr>
+              <a:t>) {</a:t>
+            </a:r>
+            <a:br>
+              <a:rPr lang="ko-KR" altLang="ko-KR" sz="1600" dirty="0">
+                <a:solidFill>
+                  <a:srgbClr val="302A24"/>
+                </a:solidFill>
+                <a:effectLst/>
+                <a:latin typeface="D2Coding ligature" panose="020B0609020101020101" pitchFamily="49" charset="-127"/>
+                <a:ea typeface="D2Coding ligature" panose="020B0609020101020101" pitchFamily="49" charset="-127"/>
+              </a:rPr>
+            </a:br>
+            <a:r>
+              <a:rPr lang="ko-KR" altLang="ko-KR" sz="1600" dirty="0">
+                <a:solidFill>
+                  <a:srgbClr val="302A24"/>
+                </a:solidFill>
+                <a:effectLst/>
+                <a:latin typeface="D2Coding ligature" panose="020B0609020101020101" pitchFamily="49" charset="-127"/>
+                <a:ea typeface="D2Coding ligature" panose="020B0609020101020101" pitchFamily="49" charset="-127"/>
+              </a:rPr>
+              <a:t>    </a:t>
+            </a:r>
+            <a:r>
+              <a:rPr lang="ko-KR" altLang="ko-KR" sz="1600" dirty="0" err="1">
+                <a:solidFill>
+                  <a:srgbClr val="9C7028"/>
+                </a:solidFill>
+                <a:effectLst/>
+                <a:latin typeface="D2Coding ligature" panose="020B0609020101020101" pitchFamily="49" charset="-127"/>
+                <a:ea typeface="D2Coding ligature" panose="020B0609020101020101" pitchFamily="49" charset="-127"/>
+              </a:rPr>
+              <a:t>println</a:t>
+            </a:r>
+            <a:r>
+              <a:rPr lang="ko-KR" altLang="ko-KR" sz="1600" dirty="0">
+                <a:solidFill>
+                  <a:srgbClr val="302A24"/>
+                </a:solidFill>
+                <a:effectLst/>
+                <a:latin typeface="D2Coding ligature" panose="020B0609020101020101" pitchFamily="49" charset="-127"/>
+                <a:ea typeface="D2Coding ligature" panose="020B0609020101020101" pitchFamily="49" charset="-127"/>
+              </a:rPr>
+              <a:t>(</a:t>
+            </a:r>
+            <a:r>
+              <a:rPr lang="ko-KR" altLang="ko-KR" sz="1600" dirty="0">
+                <a:solidFill>
+                  <a:srgbClr val="486830"/>
+                </a:solidFill>
+                <a:effectLst/>
+                <a:latin typeface="D2Coding ligature" panose="020B0609020101020101" pitchFamily="49" charset="-127"/>
+                <a:ea typeface="D2Coding ligature" panose="020B0609020101020101" pitchFamily="49" charset="-127"/>
+              </a:rPr>
+              <a:t>"</a:t>
+            </a:r>
+            <a:r>
+              <a:rPr lang="ko-KR" altLang="ko-KR" sz="1600" dirty="0" err="1">
+                <a:solidFill>
+                  <a:srgbClr val="486830"/>
+                </a:solidFill>
+                <a:effectLst/>
+                <a:latin typeface="D2Coding ligature" panose="020B0609020101020101" pitchFamily="49" charset="-127"/>
+                <a:ea typeface="D2Coding ligature" panose="020B0609020101020101" pitchFamily="49" charset="-127"/>
+              </a:rPr>
+              <a:t>catch</a:t>
+            </a:r>
+            <a:r>
+              <a:rPr lang="ko-KR" altLang="ko-KR" sz="1600" dirty="0">
+                <a:solidFill>
+                  <a:srgbClr val="486830"/>
+                </a:solidFill>
+                <a:effectLst/>
+                <a:latin typeface="D2Coding ligature" panose="020B0609020101020101" pitchFamily="49" charset="-127"/>
+                <a:ea typeface="D2Coding ligature" panose="020B0609020101020101" pitchFamily="49" charset="-127"/>
+              </a:rPr>
+              <a:t>"</a:t>
+            </a:r>
+            <a:r>
+              <a:rPr lang="ko-KR" altLang="ko-KR" sz="1600" dirty="0">
+                <a:solidFill>
+                  <a:srgbClr val="302A24"/>
+                </a:solidFill>
+                <a:effectLst/>
+                <a:latin typeface="D2Coding ligature" panose="020B0609020101020101" pitchFamily="49" charset="-127"/>
+                <a:ea typeface="D2Coding ligature" panose="020B0609020101020101" pitchFamily="49" charset="-127"/>
+              </a:rPr>
+              <a:t>)</a:t>
+            </a:r>
+            <a:br>
+              <a:rPr lang="ko-KR" altLang="ko-KR" sz="1600" dirty="0">
+                <a:solidFill>
+                  <a:srgbClr val="302A24"/>
+                </a:solidFill>
+                <a:effectLst/>
+                <a:latin typeface="D2Coding ligature" panose="020B0609020101020101" pitchFamily="49" charset="-127"/>
+                <a:ea typeface="D2Coding ligature" panose="020B0609020101020101" pitchFamily="49" charset="-127"/>
+              </a:rPr>
+            </a:br>
+            <a:r>
+              <a:rPr lang="ko-KR" altLang="ko-KR" sz="1600" dirty="0">
+                <a:solidFill>
+                  <a:srgbClr val="302A24"/>
+                </a:solidFill>
+                <a:effectLst/>
+                <a:latin typeface="D2Coding ligature" panose="020B0609020101020101" pitchFamily="49" charset="-127"/>
+                <a:ea typeface="D2Coding ligature" panose="020B0609020101020101" pitchFamily="49" charset="-127"/>
+              </a:rPr>
+              <a:t>} </a:t>
+            </a:r>
+            <a:r>
+              <a:rPr lang="ko-KR" altLang="ko-KR" sz="1600" dirty="0" err="1">
+                <a:solidFill>
+                  <a:srgbClr val="704080"/>
+                </a:solidFill>
+                <a:effectLst/>
+                <a:latin typeface="D2Coding ligature" panose="020B0609020101020101" pitchFamily="49" charset="-127"/>
+                <a:ea typeface="D2Coding ligature" panose="020B0609020101020101" pitchFamily="49" charset="-127"/>
+              </a:rPr>
+              <a:t>finally</a:t>
+            </a:r>
+            <a:r>
+              <a:rPr lang="ko-KR" altLang="ko-KR" sz="1600" dirty="0">
+                <a:solidFill>
+                  <a:srgbClr val="704080"/>
+                </a:solidFill>
+                <a:effectLst/>
+                <a:latin typeface="D2Coding ligature" panose="020B0609020101020101" pitchFamily="49" charset="-127"/>
+                <a:ea typeface="D2Coding ligature" panose="020B0609020101020101" pitchFamily="49" charset="-127"/>
+              </a:rPr>
+              <a:t> </a:t>
+            </a:r>
+            <a:r>
+              <a:rPr lang="ko-KR" altLang="ko-KR" sz="1600" dirty="0">
+                <a:solidFill>
+                  <a:srgbClr val="302A24"/>
                 </a:solidFill>
                 <a:effectLst/>
                 <a:latin typeface="D2Coding ligature" panose="020B0609020101020101" pitchFamily="49" charset="-127"/>
@@ -34914,9 +37704,9 @@
               <a:t>{</a:t>
             </a:r>
             <a:br>
-              <a:rPr lang="en-US" altLang="ko-KR" sz="1600" dirty="0">
-                <a:solidFill>
-                  <a:srgbClr val="080808"/>
+              <a:rPr lang="ko-KR" altLang="ko-KR" sz="1600" dirty="0">
+                <a:solidFill>
+                  <a:srgbClr val="302A24"/>
                 </a:solidFill>
                 <a:effectLst/>
                 <a:latin typeface="D2Coding ligature" panose="020B0609020101020101" pitchFamily="49" charset="-127"/>
@@ -34924,20 +37714,20 @@
               </a:rPr>
             </a:br>
             <a:r>
-              <a:rPr lang="en-US" altLang="ko-KR" sz="1600" dirty="0">
-                <a:solidFill>
-                  <a:srgbClr val="080808"/>
-                </a:solidFill>
-                <a:effectLst/>
-                <a:latin typeface="D2Coding ligature" panose="020B0609020101020101" pitchFamily="49" charset="-127"/>
-                <a:ea typeface="D2Coding ligature" panose="020B0609020101020101" pitchFamily="49" charset="-127"/>
-              </a:rPr>
-              <a:t>        </a:t>
-            </a:r>
-            <a:r>
-              <a:rPr lang="en-US" altLang="ko-KR" sz="1600" i="1" dirty="0" err="1">
-                <a:solidFill>
-                  <a:srgbClr val="00627A"/>
+              <a:rPr lang="ko-KR" altLang="ko-KR" sz="1600" dirty="0">
+                <a:solidFill>
+                  <a:srgbClr val="302A24"/>
+                </a:solidFill>
+                <a:effectLst/>
+                <a:latin typeface="D2Coding ligature" panose="020B0609020101020101" pitchFamily="49" charset="-127"/>
+                <a:ea typeface="D2Coding ligature" panose="020B0609020101020101" pitchFamily="49" charset="-127"/>
+              </a:rPr>
+              <a:t>    </a:t>
+            </a:r>
+            <a:r>
+              <a:rPr lang="ko-KR" altLang="ko-KR" sz="1600" dirty="0" err="1">
+                <a:solidFill>
+                  <a:srgbClr val="9C7028"/>
                 </a:solidFill>
                 <a:effectLst/>
                 <a:latin typeface="D2Coding ligature" panose="020B0609020101020101" pitchFamily="49" charset="-127"/>
@@ -34946,9 +37736,9 @@
               <a:t>println</a:t>
             </a:r>
             <a:r>
-              <a:rPr lang="en-US" altLang="ko-KR" sz="1600" dirty="0">
-                <a:solidFill>
-                  <a:srgbClr val="080808"/>
+              <a:rPr lang="ko-KR" altLang="ko-KR" sz="1600" dirty="0">
+                <a:solidFill>
+                  <a:srgbClr val="302A24"/>
                 </a:solidFill>
                 <a:effectLst/>
                 <a:latin typeface="D2Coding ligature" panose="020B0609020101020101" pitchFamily="49" charset="-127"/>
@@ -34957,31 +37747,9 @@
               <a:t>(</a:t>
             </a:r>
             <a:r>
-              <a:rPr lang="en-US" altLang="ko-KR" sz="1600" dirty="0">
-                <a:solidFill>
-                  <a:srgbClr val="067D17"/>
-                </a:solidFill>
-                <a:effectLst/>
-                <a:latin typeface="D2Coding ligature" panose="020B0609020101020101" pitchFamily="49" charset="-127"/>
-                <a:ea typeface="D2Coding ligature" panose="020B0609020101020101" pitchFamily="49" charset="-127"/>
-              </a:rPr>
-              <a:t>"try </a:t>
-            </a:r>
-            <a:r>
-              <a:rPr lang="ko-KR" altLang="en-US" sz="1600" dirty="0">
-                <a:solidFill>
-                  <a:srgbClr val="067D17"/>
-                </a:solidFill>
-                <a:effectLst/>
-                <a:latin typeface="D2Coding ligature" panose="020B0609020101020101" pitchFamily="49" charset="-127"/>
-                <a:ea typeface="D2Coding ligature" panose="020B0609020101020101" pitchFamily="49" charset="-127"/>
-              </a:rPr>
-              <a:t>블록 실행</a:t>
-            </a:r>
-            <a:r>
-              <a:rPr lang="en-US" altLang="ko-KR" sz="1600" dirty="0">
-                <a:solidFill>
-                  <a:srgbClr val="067D17"/>
+              <a:rPr lang="ko-KR" altLang="ko-KR" sz="1600" dirty="0">
+                <a:solidFill>
+                  <a:srgbClr val="486830"/>
                 </a:solidFill>
                 <a:effectLst/>
                 <a:latin typeface="D2Coding ligature" panose="020B0609020101020101" pitchFamily="49" charset="-127"/>
@@ -34990,9 +37758,31 @@
               <a:t>"</a:t>
             </a:r>
             <a:r>
-              <a:rPr lang="en-US" altLang="ko-KR" sz="1600" dirty="0">
-                <a:solidFill>
-                  <a:srgbClr val="080808"/>
+              <a:rPr lang="ko-KR" altLang="ko-KR" sz="1600" dirty="0" err="1">
+                <a:solidFill>
+                  <a:srgbClr val="486830"/>
+                </a:solidFill>
+                <a:effectLst/>
+                <a:latin typeface="D2Coding ligature" panose="020B0609020101020101" pitchFamily="49" charset="-127"/>
+                <a:ea typeface="D2Coding ligature" panose="020B0609020101020101" pitchFamily="49" charset="-127"/>
+              </a:rPr>
+              <a:t>finally</a:t>
+            </a:r>
+            <a:r>
+              <a:rPr lang="ko-KR" altLang="ko-KR" sz="1600" dirty="0">
+                <a:solidFill>
+                  <a:srgbClr val="486830"/>
+                </a:solidFill>
+                <a:effectLst/>
+                <a:latin typeface="D2Coding ligature" panose="020B0609020101020101" pitchFamily="49" charset="-127"/>
+                <a:ea typeface="D2Coding ligature" panose="020B0609020101020101" pitchFamily="49" charset="-127"/>
+              </a:rPr>
+              <a:t>"</a:t>
+            </a:r>
+            <a:r>
+              <a:rPr lang="ko-KR" altLang="ko-KR" sz="1600" dirty="0">
+                <a:solidFill>
+                  <a:srgbClr val="302A24"/>
                 </a:solidFill>
                 <a:effectLst/>
                 <a:latin typeface="D2Coding ligature" panose="020B0609020101020101" pitchFamily="49" charset="-127"/>
@@ -35001,9 +37791,9 @@
               <a:t>)</a:t>
             </a:r>
             <a:br>
-              <a:rPr lang="en-US" altLang="ko-KR" sz="1600" dirty="0">
-                <a:solidFill>
-                  <a:srgbClr val="080808"/>
+              <a:rPr lang="ko-KR" altLang="ko-KR" sz="1600" dirty="0">
+                <a:solidFill>
+                  <a:srgbClr val="302A24"/>
                 </a:solidFill>
                 <a:effectLst/>
                 <a:latin typeface="D2Coding ligature" panose="020B0609020101020101" pitchFamily="49" charset="-127"/>
@@ -35011,630 +37801,20 @@
               </a:rPr>
             </a:br>
             <a:r>
-              <a:rPr lang="en-US" altLang="ko-KR" sz="1600" dirty="0">
-                <a:solidFill>
-                  <a:srgbClr val="080808"/>
-                </a:solidFill>
-                <a:effectLst/>
-                <a:latin typeface="D2Coding ligature" panose="020B0609020101020101" pitchFamily="49" charset="-127"/>
-                <a:ea typeface="D2Coding ligature" panose="020B0609020101020101" pitchFamily="49" charset="-127"/>
-              </a:rPr>
-              <a:t>        </a:t>
-            </a:r>
-            <a:r>
-              <a:rPr lang="en-US" altLang="ko-KR" sz="1600" dirty="0" err="1">
-                <a:solidFill>
-                  <a:srgbClr val="0033B3"/>
-                </a:solidFill>
-                <a:effectLst/>
-                <a:latin typeface="D2Coding ligature" panose="020B0609020101020101" pitchFamily="49" charset="-127"/>
-                <a:ea typeface="D2Coding ligature" panose="020B0609020101020101" pitchFamily="49" charset="-127"/>
-              </a:rPr>
-              <a:t>val</a:t>
-            </a:r>
-            <a:r>
-              <a:rPr lang="en-US" altLang="ko-KR" sz="1600" dirty="0">
-                <a:solidFill>
-                  <a:srgbClr val="0033B3"/>
-                </a:solidFill>
-                <a:effectLst/>
-                <a:latin typeface="D2Coding ligature" panose="020B0609020101020101" pitchFamily="49" charset="-127"/>
-                <a:ea typeface="D2Coding ligature" panose="020B0609020101020101" pitchFamily="49" charset="-127"/>
-              </a:rPr>
-              <a:t> </a:t>
-            </a:r>
-            <a:r>
-              <a:rPr lang="en-US" altLang="ko-KR" sz="1600" dirty="0">
-                <a:solidFill>
-                  <a:srgbClr val="000000"/>
-                </a:solidFill>
-                <a:effectLst/>
-                <a:latin typeface="D2Coding ligature" panose="020B0609020101020101" pitchFamily="49" charset="-127"/>
-                <a:ea typeface="D2Coding ligature" panose="020B0609020101020101" pitchFamily="49" charset="-127"/>
-              </a:rPr>
-              <a:t>result </a:t>
-            </a:r>
-            <a:r>
-              <a:rPr lang="en-US" altLang="ko-KR" sz="1600" dirty="0">
-                <a:solidFill>
-                  <a:srgbClr val="080808"/>
-                </a:solidFill>
-                <a:effectLst/>
-                <a:latin typeface="D2Coding ligature" panose="020B0609020101020101" pitchFamily="49" charset="-127"/>
-                <a:ea typeface="D2Coding ligature" panose="020B0609020101020101" pitchFamily="49" charset="-127"/>
-              </a:rPr>
-              <a:t>= </a:t>
-            </a:r>
-            <a:r>
-              <a:rPr lang="en-US" altLang="ko-KR" sz="1600" dirty="0">
-                <a:solidFill>
-                  <a:srgbClr val="1750EB"/>
-                </a:solidFill>
-                <a:effectLst/>
-                <a:latin typeface="D2Coding ligature" panose="020B0609020101020101" pitchFamily="49" charset="-127"/>
-                <a:ea typeface="D2Coding ligature" panose="020B0609020101020101" pitchFamily="49" charset="-127"/>
-              </a:rPr>
-              <a:t>10 </a:t>
-            </a:r>
-            <a:r>
-              <a:rPr lang="en-US" altLang="ko-KR" sz="1600" dirty="0">
-                <a:solidFill>
-                  <a:srgbClr val="080808"/>
-                </a:solidFill>
-                <a:effectLst/>
-                <a:latin typeface="D2Coding ligature" panose="020B0609020101020101" pitchFamily="49" charset="-127"/>
-                <a:ea typeface="D2Coding ligature" panose="020B0609020101020101" pitchFamily="49" charset="-127"/>
-              </a:rPr>
-              <a:t>/ </a:t>
-            </a:r>
-            <a:r>
-              <a:rPr lang="en-US" altLang="ko-KR" sz="1600" dirty="0">
-                <a:solidFill>
-                  <a:srgbClr val="1750EB"/>
-                </a:solidFill>
-                <a:effectLst/>
-                <a:latin typeface="D2Coding ligature" panose="020B0609020101020101" pitchFamily="49" charset="-127"/>
-                <a:ea typeface="D2Coding ligature" panose="020B0609020101020101" pitchFamily="49" charset="-127"/>
-              </a:rPr>
-              <a:t>2</a:t>
+              <a:rPr lang="ko-KR" altLang="ko-KR" sz="1600" dirty="0">
+                <a:solidFill>
+                  <a:srgbClr val="302A24"/>
+                </a:solidFill>
+                <a:effectLst/>
+                <a:latin typeface="D2Coding ligature" panose="020B0609020101020101" pitchFamily="49" charset="-127"/>
+                <a:ea typeface="D2Coding ligature" panose="020B0609020101020101" pitchFamily="49" charset="-127"/>
+              </a:rPr>
+              <a:t>}</a:t>
             </a:r>
             <a:br>
-              <a:rPr lang="en-US" altLang="ko-KR" sz="1600" dirty="0">
-                <a:solidFill>
-                  <a:srgbClr val="1750EB"/>
-                </a:solidFill>
-                <a:effectLst/>
-                <a:latin typeface="D2Coding ligature" panose="020B0609020101020101" pitchFamily="49" charset="-127"/>
-                <a:ea typeface="D2Coding ligature" panose="020B0609020101020101" pitchFamily="49" charset="-127"/>
-              </a:rPr>
-            </a:br>
-            <a:r>
-              <a:rPr lang="en-US" altLang="ko-KR" sz="1600" dirty="0">
-                <a:solidFill>
-                  <a:srgbClr val="1750EB"/>
-                </a:solidFill>
-                <a:effectLst/>
-                <a:latin typeface="D2Coding ligature" panose="020B0609020101020101" pitchFamily="49" charset="-127"/>
-                <a:ea typeface="D2Coding ligature" panose="020B0609020101020101" pitchFamily="49" charset="-127"/>
-              </a:rPr>
-              <a:t>        </a:t>
-            </a:r>
-            <a:r>
-              <a:rPr lang="en-US" altLang="ko-KR" sz="1600" i="1" dirty="0" err="1">
-                <a:solidFill>
-                  <a:srgbClr val="00627A"/>
-                </a:solidFill>
-                <a:effectLst/>
-                <a:latin typeface="D2Coding ligature" panose="020B0609020101020101" pitchFamily="49" charset="-127"/>
-                <a:ea typeface="D2Coding ligature" panose="020B0609020101020101" pitchFamily="49" charset="-127"/>
-              </a:rPr>
-              <a:t>println</a:t>
-            </a:r>
-            <a:r>
-              <a:rPr lang="en-US" altLang="ko-KR" sz="1600" dirty="0">
-                <a:solidFill>
-                  <a:srgbClr val="080808"/>
-                </a:solidFill>
-                <a:effectLst/>
-                <a:latin typeface="D2Coding ligature" panose="020B0609020101020101" pitchFamily="49" charset="-127"/>
-                <a:ea typeface="D2Coding ligature" panose="020B0609020101020101" pitchFamily="49" charset="-127"/>
-              </a:rPr>
-              <a:t>(</a:t>
-            </a:r>
-            <a:r>
-              <a:rPr lang="en-US" altLang="ko-KR" sz="1600" dirty="0">
-                <a:solidFill>
-                  <a:srgbClr val="067D17"/>
-                </a:solidFill>
-                <a:effectLst/>
-                <a:latin typeface="D2Coding ligature" panose="020B0609020101020101" pitchFamily="49" charset="-127"/>
-                <a:ea typeface="D2Coding ligature" panose="020B0609020101020101" pitchFamily="49" charset="-127"/>
-              </a:rPr>
-              <a:t>"</a:t>
-            </a:r>
-            <a:r>
-              <a:rPr lang="ko-KR" altLang="en-US" sz="1600" dirty="0">
-                <a:solidFill>
-                  <a:srgbClr val="067D17"/>
-                </a:solidFill>
-                <a:effectLst/>
-                <a:latin typeface="D2Coding ligature" panose="020B0609020101020101" pitchFamily="49" charset="-127"/>
-                <a:ea typeface="D2Coding ligature" panose="020B0609020101020101" pitchFamily="49" charset="-127"/>
-              </a:rPr>
-              <a:t>결과</a:t>
-            </a:r>
-            <a:r>
-              <a:rPr lang="en-US" altLang="ko-KR" sz="1600" dirty="0">
-                <a:solidFill>
-                  <a:srgbClr val="067D17"/>
-                </a:solidFill>
-                <a:effectLst/>
-                <a:latin typeface="D2Coding ligature" panose="020B0609020101020101" pitchFamily="49" charset="-127"/>
-                <a:ea typeface="D2Coding ligature" panose="020B0609020101020101" pitchFamily="49" charset="-127"/>
-              </a:rPr>
-              <a:t>: </a:t>
-            </a:r>
-            <a:r>
-              <a:rPr lang="en-US" altLang="ko-KR" sz="1600" dirty="0">
-                <a:solidFill>
-                  <a:srgbClr val="0037A6"/>
-                </a:solidFill>
-                <a:effectLst/>
-                <a:latin typeface="D2Coding ligature" panose="020B0609020101020101" pitchFamily="49" charset="-127"/>
-                <a:ea typeface="D2Coding ligature" panose="020B0609020101020101" pitchFamily="49" charset="-127"/>
-              </a:rPr>
-              <a:t>$</a:t>
-            </a:r>
-            <a:r>
-              <a:rPr lang="en-US" altLang="ko-KR" sz="1600" dirty="0">
-                <a:solidFill>
-                  <a:srgbClr val="000000"/>
-                </a:solidFill>
-                <a:effectLst/>
-                <a:latin typeface="D2Coding ligature" panose="020B0609020101020101" pitchFamily="49" charset="-127"/>
-                <a:ea typeface="D2Coding ligature" panose="020B0609020101020101" pitchFamily="49" charset="-127"/>
-              </a:rPr>
-              <a:t>result</a:t>
-            </a:r>
-            <a:r>
-              <a:rPr lang="en-US" altLang="ko-KR" sz="1600" dirty="0">
-                <a:solidFill>
-                  <a:srgbClr val="067D17"/>
-                </a:solidFill>
-                <a:effectLst/>
-                <a:latin typeface="D2Coding ligature" panose="020B0609020101020101" pitchFamily="49" charset="-127"/>
-                <a:ea typeface="D2Coding ligature" panose="020B0609020101020101" pitchFamily="49" charset="-127"/>
-              </a:rPr>
-              <a:t>"</a:t>
-            </a:r>
-            <a:r>
-              <a:rPr lang="en-US" altLang="ko-KR" sz="1600" dirty="0">
-                <a:solidFill>
-                  <a:srgbClr val="080808"/>
-                </a:solidFill>
-                <a:effectLst/>
-                <a:latin typeface="D2Coding ligature" panose="020B0609020101020101" pitchFamily="49" charset="-127"/>
-                <a:ea typeface="D2Coding ligature" panose="020B0609020101020101" pitchFamily="49" charset="-127"/>
-              </a:rPr>
-              <a:t>)</a:t>
-            </a:r>
-            <a:br>
-              <a:rPr lang="en-US" altLang="ko-KR" sz="1600" dirty="0">
-                <a:solidFill>
-                  <a:srgbClr val="080808"/>
-                </a:solidFill>
-                <a:effectLst/>
-                <a:latin typeface="D2Coding ligature" panose="020B0609020101020101" pitchFamily="49" charset="-127"/>
-                <a:ea typeface="D2Coding ligature" panose="020B0609020101020101" pitchFamily="49" charset="-127"/>
-              </a:rPr>
-            </a:br>
-            <a:r>
-              <a:rPr lang="en-US" altLang="ko-KR" sz="1600" dirty="0">
-                <a:solidFill>
-                  <a:srgbClr val="080808"/>
-                </a:solidFill>
-                <a:effectLst/>
-                <a:latin typeface="D2Coding ligature" panose="020B0609020101020101" pitchFamily="49" charset="-127"/>
-                <a:ea typeface="D2Coding ligature" panose="020B0609020101020101" pitchFamily="49" charset="-127"/>
-              </a:rPr>
-              <a:t>    } </a:t>
-            </a:r>
-            <a:r>
-              <a:rPr lang="en-US" altLang="ko-KR" sz="1600" dirty="0">
-                <a:solidFill>
-                  <a:srgbClr val="0033B3"/>
-                </a:solidFill>
-                <a:effectLst/>
-                <a:latin typeface="D2Coding ligature" panose="020B0609020101020101" pitchFamily="49" charset="-127"/>
-                <a:ea typeface="D2Coding ligature" panose="020B0609020101020101" pitchFamily="49" charset="-127"/>
-              </a:rPr>
-              <a:t>catch </a:t>
-            </a:r>
-            <a:r>
-              <a:rPr lang="en-US" altLang="ko-KR" sz="1600" dirty="0">
-                <a:solidFill>
-                  <a:srgbClr val="080808"/>
-                </a:solidFill>
-                <a:effectLst/>
-                <a:latin typeface="D2Coding ligature" panose="020B0609020101020101" pitchFamily="49" charset="-127"/>
-                <a:ea typeface="D2Coding ligature" panose="020B0609020101020101" pitchFamily="49" charset="-127"/>
-              </a:rPr>
-              <a:t>(</a:t>
-            </a:r>
-            <a:r>
-              <a:rPr lang="en-US" altLang="ko-KR" sz="1600" dirty="0">
-                <a:solidFill>
-                  <a:srgbClr val="000000"/>
-                </a:solidFill>
-                <a:effectLst/>
-                <a:latin typeface="D2Coding ligature" panose="020B0609020101020101" pitchFamily="49" charset="-127"/>
-                <a:ea typeface="D2Coding ligature" panose="020B0609020101020101" pitchFamily="49" charset="-127"/>
-              </a:rPr>
-              <a:t>e</a:t>
-            </a:r>
-            <a:r>
-              <a:rPr lang="en-US" altLang="ko-KR" sz="1600" dirty="0">
-                <a:solidFill>
-                  <a:srgbClr val="080808"/>
-                </a:solidFill>
-                <a:effectLst/>
-                <a:latin typeface="D2Coding ligature" panose="020B0609020101020101" pitchFamily="49" charset="-127"/>
-                <a:ea typeface="D2Coding ligature" panose="020B0609020101020101" pitchFamily="49" charset="-127"/>
-              </a:rPr>
-              <a:t>: </a:t>
-            </a:r>
-            <a:r>
-              <a:rPr lang="en-US" altLang="ko-KR" sz="1600" dirty="0">
-                <a:solidFill>
-                  <a:srgbClr val="000000"/>
-                </a:solidFill>
-                <a:effectLst/>
-                <a:latin typeface="D2Coding ligature" panose="020B0609020101020101" pitchFamily="49" charset="-127"/>
-                <a:ea typeface="D2Coding ligature" panose="020B0609020101020101" pitchFamily="49" charset="-127"/>
-              </a:rPr>
-              <a:t>Exception</a:t>
-            </a:r>
-            <a:r>
-              <a:rPr lang="en-US" altLang="ko-KR" sz="1600" dirty="0">
-                <a:solidFill>
-                  <a:srgbClr val="080808"/>
-                </a:solidFill>
-                <a:effectLst/>
-                <a:latin typeface="D2Coding ligature" panose="020B0609020101020101" pitchFamily="49" charset="-127"/>
-                <a:ea typeface="D2Coding ligature" panose="020B0609020101020101" pitchFamily="49" charset="-127"/>
-              </a:rPr>
-              <a:t>) {</a:t>
-            </a:r>
-            <a:br>
-              <a:rPr lang="en-US" altLang="ko-KR" sz="1600" dirty="0">
-                <a:solidFill>
-                  <a:srgbClr val="080808"/>
-                </a:solidFill>
-                <a:effectLst/>
-                <a:latin typeface="D2Coding ligature" panose="020B0609020101020101" pitchFamily="49" charset="-127"/>
-                <a:ea typeface="D2Coding ligature" panose="020B0609020101020101" pitchFamily="49" charset="-127"/>
-              </a:rPr>
-            </a:br>
-            <a:r>
-              <a:rPr lang="en-US" altLang="ko-KR" sz="1600" dirty="0">
-                <a:solidFill>
-                  <a:srgbClr val="080808"/>
-                </a:solidFill>
-                <a:effectLst/>
-                <a:latin typeface="D2Coding ligature" panose="020B0609020101020101" pitchFamily="49" charset="-127"/>
-                <a:ea typeface="D2Coding ligature" panose="020B0609020101020101" pitchFamily="49" charset="-127"/>
-              </a:rPr>
-              <a:t>        </a:t>
-            </a:r>
-            <a:r>
-              <a:rPr lang="en-US" altLang="ko-KR" sz="1600" i="1" dirty="0" err="1">
-                <a:solidFill>
-                  <a:srgbClr val="00627A"/>
-                </a:solidFill>
-                <a:effectLst/>
-                <a:latin typeface="D2Coding ligature" panose="020B0609020101020101" pitchFamily="49" charset="-127"/>
-                <a:ea typeface="D2Coding ligature" panose="020B0609020101020101" pitchFamily="49" charset="-127"/>
-              </a:rPr>
-              <a:t>println</a:t>
-            </a:r>
-            <a:r>
-              <a:rPr lang="en-US" altLang="ko-KR" sz="1600" dirty="0">
-                <a:solidFill>
-                  <a:srgbClr val="080808"/>
-                </a:solidFill>
-                <a:effectLst/>
-                <a:latin typeface="D2Coding ligature" panose="020B0609020101020101" pitchFamily="49" charset="-127"/>
-                <a:ea typeface="D2Coding ligature" panose="020B0609020101020101" pitchFamily="49" charset="-127"/>
-              </a:rPr>
-              <a:t>(</a:t>
-            </a:r>
-            <a:r>
-              <a:rPr lang="en-US" altLang="ko-KR" sz="1600" dirty="0">
-                <a:solidFill>
-                  <a:srgbClr val="067D17"/>
-                </a:solidFill>
-                <a:effectLst/>
-                <a:latin typeface="D2Coding ligature" panose="020B0609020101020101" pitchFamily="49" charset="-127"/>
-                <a:ea typeface="D2Coding ligature" panose="020B0609020101020101" pitchFamily="49" charset="-127"/>
-              </a:rPr>
-              <a:t>"</a:t>
-            </a:r>
-            <a:r>
-              <a:rPr lang="ko-KR" altLang="en-US" sz="1600" dirty="0">
-                <a:solidFill>
-                  <a:srgbClr val="067D17"/>
-                </a:solidFill>
-                <a:effectLst/>
-                <a:latin typeface="D2Coding ligature" panose="020B0609020101020101" pitchFamily="49" charset="-127"/>
-                <a:ea typeface="D2Coding ligature" panose="020B0609020101020101" pitchFamily="49" charset="-127"/>
-              </a:rPr>
-              <a:t>예외 발생</a:t>
-            </a:r>
-            <a:r>
-              <a:rPr lang="en-US" altLang="ko-KR" sz="1600" dirty="0">
-                <a:solidFill>
-                  <a:srgbClr val="067D17"/>
-                </a:solidFill>
-                <a:effectLst/>
-                <a:latin typeface="D2Coding ligature" panose="020B0609020101020101" pitchFamily="49" charset="-127"/>
-                <a:ea typeface="D2Coding ligature" panose="020B0609020101020101" pitchFamily="49" charset="-127"/>
-              </a:rPr>
-              <a:t>: </a:t>
-            </a:r>
-            <a:r>
-              <a:rPr lang="en-US" altLang="ko-KR" sz="1600" dirty="0">
-                <a:solidFill>
-                  <a:srgbClr val="0037A6"/>
-                </a:solidFill>
-                <a:effectLst/>
-                <a:latin typeface="D2Coding ligature" panose="020B0609020101020101" pitchFamily="49" charset="-127"/>
-                <a:ea typeface="D2Coding ligature" panose="020B0609020101020101" pitchFamily="49" charset="-127"/>
-              </a:rPr>
-              <a:t>${</a:t>
-            </a:r>
-            <a:r>
-              <a:rPr lang="en-US" altLang="ko-KR" sz="1600" dirty="0" err="1">
-                <a:solidFill>
-                  <a:srgbClr val="000000"/>
-                </a:solidFill>
-                <a:effectLst/>
-                <a:latin typeface="D2Coding ligature" panose="020B0609020101020101" pitchFamily="49" charset="-127"/>
-                <a:ea typeface="D2Coding ligature" panose="020B0609020101020101" pitchFamily="49" charset="-127"/>
-              </a:rPr>
-              <a:t>e</a:t>
-            </a:r>
-            <a:r>
-              <a:rPr lang="en-US" altLang="ko-KR" sz="1600" dirty="0" err="1">
-                <a:solidFill>
-                  <a:srgbClr val="080808"/>
-                </a:solidFill>
-                <a:effectLst/>
-                <a:latin typeface="D2Coding ligature" panose="020B0609020101020101" pitchFamily="49" charset="-127"/>
-                <a:ea typeface="D2Coding ligature" panose="020B0609020101020101" pitchFamily="49" charset="-127"/>
-              </a:rPr>
-              <a:t>.</a:t>
-            </a:r>
-            <a:r>
-              <a:rPr lang="en-US" altLang="ko-KR" sz="1600" dirty="0" err="1">
-                <a:solidFill>
-                  <a:srgbClr val="871094"/>
-                </a:solidFill>
-                <a:effectLst/>
-                <a:latin typeface="D2Coding ligature" panose="020B0609020101020101" pitchFamily="49" charset="-127"/>
-                <a:ea typeface="D2Coding ligature" panose="020B0609020101020101" pitchFamily="49" charset="-127"/>
-              </a:rPr>
-              <a:t>message</a:t>
-            </a:r>
-            <a:r>
-              <a:rPr lang="en-US" altLang="ko-KR" sz="1600" dirty="0">
-                <a:solidFill>
-                  <a:srgbClr val="0037A6"/>
-                </a:solidFill>
-                <a:effectLst/>
-                <a:latin typeface="D2Coding ligature" panose="020B0609020101020101" pitchFamily="49" charset="-127"/>
-                <a:ea typeface="D2Coding ligature" panose="020B0609020101020101" pitchFamily="49" charset="-127"/>
-              </a:rPr>
-              <a:t>}</a:t>
-            </a:r>
-            <a:r>
-              <a:rPr lang="en-US" altLang="ko-KR" sz="1600" dirty="0">
-                <a:solidFill>
-                  <a:srgbClr val="067D17"/>
-                </a:solidFill>
-                <a:effectLst/>
-                <a:latin typeface="D2Coding ligature" panose="020B0609020101020101" pitchFamily="49" charset="-127"/>
-                <a:ea typeface="D2Coding ligature" panose="020B0609020101020101" pitchFamily="49" charset="-127"/>
-              </a:rPr>
-              <a:t>"</a:t>
-            </a:r>
-            <a:r>
-              <a:rPr lang="en-US" altLang="ko-KR" sz="1600" dirty="0">
-                <a:solidFill>
-                  <a:srgbClr val="080808"/>
-                </a:solidFill>
-                <a:effectLst/>
-                <a:latin typeface="D2Coding ligature" panose="020B0609020101020101" pitchFamily="49" charset="-127"/>
-                <a:ea typeface="D2Coding ligature" panose="020B0609020101020101" pitchFamily="49" charset="-127"/>
-              </a:rPr>
-              <a:t>)</a:t>
-            </a:r>
-            <a:br>
-              <a:rPr lang="en-US" altLang="ko-KR" sz="1600" dirty="0">
-                <a:solidFill>
-                  <a:srgbClr val="080808"/>
-                </a:solidFill>
-                <a:effectLst/>
-                <a:latin typeface="D2Coding ligature" panose="020B0609020101020101" pitchFamily="49" charset="-127"/>
-                <a:ea typeface="D2Coding ligature" panose="020B0609020101020101" pitchFamily="49" charset="-127"/>
-              </a:rPr>
-            </a:br>
-            <a:r>
-              <a:rPr lang="en-US" altLang="ko-KR" sz="1600" dirty="0">
-                <a:solidFill>
-                  <a:srgbClr val="080808"/>
-                </a:solidFill>
-                <a:effectLst/>
-                <a:latin typeface="D2Coding ligature" panose="020B0609020101020101" pitchFamily="49" charset="-127"/>
-                <a:ea typeface="D2Coding ligature" panose="020B0609020101020101" pitchFamily="49" charset="-127"/>
-              </a:rPr>
-              <a:t>    } </a:t>
-            </a:r>
-            <a:r>
-              <a:rPr lang="en-US" altLang="ko-KR" sz="1600" dirty="0">
-                <a:solidFill>
-                  <a:srgbClr val="0033B3"/>
-                </a:solidFill>
-                <a:effectLst/>
-                <a:latin typeface="D2Coding ligature" panose="020B0609020101020101" pitchFamily="49" charset="-127"/>
-                <a:ea typeface="D2Coding ligature" panose="020B0609020101020101" pitchFamily="49" charset="-127"/>
-              </a:rPr>
-              <a:t>finally </a:t>
-            </a:r>
-            <a:r>
-              <a:rPr lang="en-US" altLang="ko-KR" sz="1600" dirty="0">
-                <a:solidFill>
-                  <a:srgbClr val="080808"/>
-                </a:solidFill>
-                <a:effectLst/>
-                <a:latin typeface="D2Coding ligature" panose="020B0609020101020101" pitchFamily="49" charset="-127"/>
-                <a:ea typeface="D2Coding ligature" panose="020B0609020101020101" pitchFamily="49" charset="-127"/>
-              </a:rPr>
-              <a:t>{</a:t>
-            </a:r>
-            <a:br>
-              <a:rPr lang="en-US" altLang="ko-KR" sz="1600" dirty="0">
-                <a:solidFill>
-                  <a:srgbClr val="080808"/>
-                </a:solidFill>
-                <a:effectLst/>
-                <a:latin typeface="D2Coding ligature" panose="020B0609020101020101" pitchFamily="49" charset="-127"/>
-                <a:ea typeface="D2Coding ligature" panose="020B0609020101020101" pitchFamily="49" charset="-127"/>
-              </a:rPr>
-            </a:br>
-            <a:r>
-              <a:rPr lang="en-US" altLang="ko-KR" sz="1600" dirty="0">
-                <a:solidFill>
-                  <a:srgbClr val="080808"/>
-                </a:solidFill>
-                <a:effectLst/>
-                <a:latin typeface="D2Coding ligature" panose="020B0609020101020101" pitchFamily="49" charset="-127"/>
-                <a:ea typeface="D2Coding ligature" panose="020B0609020101020101" pitchFamily="49" charset="-127"/>
-              </a:rPr>
-              <a:t>        </a:t>
-            </a:r>
-            <a:r>
-              <a:rPr lang="en-US" altLang="ko-KR" sz="1600" i="1" dirty="0" err="1">
-                <a:solidFill>
-                  <a:srgbClr val="00627A"/>
-                </a:solidFill>
-                <a:effectLst/>
-                <a:latin typeface="D2Coding ligature" panose="020B0609020101020101" pitchFamily="49" charset="-127"/>
-                <a:ea typeface="D2Coding ligature" panose="020B0609020101020101" pitchFamily="49" charset="-127"/>
-              </a:rPr>
-              <a:t>println</a:t>
-            </a:r>
-            <a:r>
-              <a:rPr lang="en-US" altLang="ko-KR" sz="1600" dirty="0">
-                <a:solidFill>
-                  <a:srgbClr val="080808"/>
-                </a:solidFill>
-                <a:effectLst/>
-                <a:latin typeface="D2Coding ligature" panose="020B0609020101020101" pitchFamily="49" charset="-127"/>
-                <a:ea typeface="D2Coding ligature" panose="020B0609020101020101" pitchFamily="49" charset="-127"/>
-              </a:rPr>
-              <a:t>(</a:t>
-            </a:r>
-            <a:r>
-              <a:rPr lang="en-US" altLang="ko-KR" sz="1600" dirty="0">
-                <a:solidFill>
-                  <a:srgbClr val="067D17"/>
-                </a:solidFill>
-                <a:effectLst/>
-                <a:latin typeface="D2Coding ligature" panose="020B0609020101020101" pitchFamily="49" charset="-127"/>
-                <a:ea typeface="D2Coding ligature" panose="020B0609020101020101" pitchFamily="49" charset="-127"/>
-              </a:rPr>
-              <a:t>"finally </a:t>
-            </a:r>
-            <a:r>
-              <a:rPr lang="ko-KR" altLang="en-US" sz="1600" dirty="0">
-                <a:solidFill>
-                  <a:srgbClr val="067D17"/>
-                </a:solidFill>
-                <a:effectLst/>
-                <a:latin typeface="D2Coding ligature" panose="020B0609020101020101" pitchFamily="49" charset="-127"/>
-                <a:ea typeface="D2Coding ligature" panose="020B0609020101020101" pitchFamily="49" charset="-127"/>
-              </a:rPr>
-              <a:t>실행 </a:t>
-            </a:r>
-            <a:r>
-              <a:rPr lang="en-US" altLang="ko-KR" sz="1600" dirty="0">
-                <a:solidFill>
-                  <a:srgbClr val="067D17"/>
-                </a:solidFill>
-                <a:effectLst/>
-                <a:latin typeface="D2Coding ligature" panose="020B0609020101020101" pitchFamily="49" charset="-127"/>
-                <a:ea typeface="D2Coding ligature" panose="020B0609020101020101" pitchFamily="49" charset="-127"/>
-              </a:rPr>
-              <a:t>(</a:t>
-            </a:r>
-            <a:r>
-              <a:rPr lang="ko-KR" altLang="en-US" sz="1600" dirty="0">
-                <a:solidFill>
-                  <a:srgbClr val="067D17"/>
-                </a:solidFill>
-                <a:effectLst/>
-                <a:latin typeface="D2Coding ligature" panose="020B0609020101020101" pitchFamily="49" charset="-127"/>
-                <a:ea typeface="D2Coding ligature" panose="020B0609020101020101" pitchFamily="49" charset="-127"/>
-              </a:rPr>
-              <a:t>항상 실행됨</a:t>
-            </a:r>
-            <a:r>
-              <a:rPr lang="en-US" altLang="ko-KR" sz="1600" dirty="0">
-                <a:solidFill>
-                  <a:srgbClr val="067D17"/>
-                </a:solidFill>
-                <a:effectLst/>
-                <a:latin typeface="D2Coding ligature" panose="020B0609020101020101" pitchFamily="49" charset="-127"/>
-                <a:ea typeface="D2Coding ligature" panose="020B0609020101020101" pitchFamily="49" charset="-127"/>
-              </a:rPr>
-              <a:t>)"</a:t>
-            </a:r>
-            <a:r>
-              <a:rPr lang="en-US" altLang="ko-KR" sz="1600" dirty="0">
-                <a:solidFill>
-                  <a:srgbClr val="080808"/>
-                </a:solidFill>
-                <a:effectLst/>
-                <a:latin typeface="D2Coding ligature" panose="020B0609020101020101" pitchFamily="49" charset="-127"/>
-                <a:ea typeface="D2Coding ligature" panose="020B0609020101020101" pitchFamily="49" charset="-127"/>
-              </a:rPr>
-              <a:t>)</a:t>
-            </a:r>
-            <a:br>
-              <a:rPr lang="en-US" altLang="ko-KR" sz="1600" dirty="0">
-                <a:solidFill>
-                  <a:srgbClr val="080808"/>
-                </a:solidFill>
-                <a:effectLst/>
-                <a:latin typeface="D2Coding ligature" panose="020B0609020101020101" pitchFamily="49" charset="-127"/>
-                <a:ea typeface="D2Coding ligature" panose="020B0609020101020101" pitchFamily="49" charset="-127"/>
-              </a:rPr>
-            </a:br>
-            <a:r>
-              <a:rPr lang="en-US" altLang="ko-KR" sz="1600" dirty="0">
-                <a:solidFill>
-                  <a:srgbClr val="080808"/>
-                </a:solidFill>
-                <a:effectLst/>
-                <a:latin typeface="D2Coding ligature" panose="020B0609020101020101" pitchFamily="49" charset="-127"/>
-                <a:ea typeface="D2Coding ligature" panose="020B0609020101020101" pitchFamily="49" charset="-127"/>
-              </a:rPr>
-              <a:t>    }</a:t>
-            </a:r>
-            <a:br>
-              <a:rPr lang="en-US" altLang="ko-KR" sz="1600" dirty="0">
-                <a:solidFill>
-                  <a:srgbClr val="080808"/>
+              <a:rPr lang="ko-KR" altLang="ko-KR" sz="1600" dirty="0">
+                <a:solidFill>
+                  <a:srgbClr val="302A24"/>
                 </a:solidFill>
                 <a:effectLst/>
                 <a:latin typeface="D2Coding ligature" panose="020B0609020101020101" pitchFamily="49" charset="-127"/>
@@ -35642,9 +37822,9 @@
               </a:rPr>
             </a:br>
             <a:br>
-              <a:rPr lang="en-US" altLang="ko-KR" sz="1600" dirty="0">
-                <a:solidFill>
-                  <a:srgbClr val="080808"/>
+              <a:rPr lang="ko-KR" altLang="ko-KR" sz="1600" dirty="0">
+                <a:solidFill>
+                  <a:srgbClr val="302A24"/>
                 </a:solidFill>
                 <a:effectLst/>
                 <a:latin typeface="D2Coding ligature" panose="020B0609020101020101" pitchFamily="49" charset="-127"/>
@@ -35652,9 +37832,52 @@
               </a:rPr>
             </a:br>
             <a:r>
-              <a:rPr lang="en-US" altLang="ko-KR" sz="1600" dirty="0">
-                <a:solidFill>
-                  <a:srgbClr val="080808"/>
+              <a:rPr lang="ko-KR" altLang="ko-KR" sz="1600" dirty="0">
+                <a:solidFill>
+                  <a:srgbClr val="A0A0A0"/>
+                </a:solidFill>
+                <a:effectLst/>
+                <a:latin typeface="D2Coding ligature" panose="020B0609020101020101" pitchFamily="49" charset="-127"/>
+                <a:ea typeface="D2Coding ligature" panose="020B0609020101020101" pitchFamily="49" charset="-127"/>
+              </a:rPr>
+              <a:t>/*</a:t>
+            </a:r>
+            <a:r>
+              <a:rPr lang="ko-KR" altLang="ko-KR" sz="1600" dirty="0" err="1">
+                <a:solidFill>
+                  <a:srgbClr val="A0A0A0"/>
+                </a:solidFill>
+                <a:effectLst/>
+                <a:latin typeface="D2Coding ligature" panose="020B0609020101020101" pitchFamily="49" charset="-127"/>
+                <a:ea typeface="D2Coding ligature" panose="020B0609020101020101" pitchFamily="49" charset="-127"/>
+              </a:rPr>
+              <a:t>try</a:t>
+            </a:r>
+            <a:r>
+              <a:rPr lang="ko-KR" altLang="ko-KR" sz="1600" dirty="0">
+                <a:solidFill>
+                  <a:srgbClr val="A0A0A0"/>
+                </a:solidFill>
+                <a:effectLst/>
+                <a:latin typeface="D2Coding ligature" panose="020B0609020101020101" pitchFamily="49" charset="-127"/>
+                <a:ea typeface="D2Coding ligature" panose="020B0609020101020101" pitchFamily="49" charset="-127"/>
+              </a:rPr>
+              <a:t> {</a:t>
+            </a:r>
+            <a:br>
+              <a:rPr lang="ko-KR" altLang="ko-KR" sz="1600" dirty="0">
+                <a:solidFill>
+                  <a:srgbClr val="A0A0A0"/>
+                </a:solidFill>
+                <a:effectLst/>
+                <a:latin typeface="D2Coding ligature" panose="020B0609020101020101" pitchFamily="49" charset="-127"/>
+                <a:ea typeface="D2Coding ligature" panose="020B0609020101020101" pitchFamily="49" charset="-127"/>
+              </a:rPr>
+            </a:br>
+            <a:r>
+              <a:rPr lang="ko-KR" altLang="ko-KR" sz="1600" dirty="0">
+                <a:solidFill>
+                  <a:srgbClr val="A0A0A0"/>
                 </a:solidFill>
                 <a:effectLst/>
                 <a:latin typeface="D2Coding ligature" panose="020B0609020101020101" pitchFamily="49" charset="-127"/>
@@ -35663,20 +37886,528 @@
               <a:t>    </a:t>
             </a:r>
             <a:r>
-              <a:rPr lang="en-US" altLang="ko-KR" sz="1600" dirty="0" err="1">
-                <a:solidFill>
-                  <a:srgbClr val="0033B3"/>
-                </a:solidFill>
-                <a:effectLst/>
-                <a:latin typeface="D2Coding ligature" panose="020B0609020101020101" pitchFamily="49" charset="-127"/>
-                <a:ea typeface="D2Coding ligature" panose="020B0609020101020101" pitchFamily="49" charset="-127"/>
-              </a:rPr>
-              <a:t>val</a:t>
-            </a:r>
-            <a:r>
-              <a:rPr lang="en-US" altLang="ko-KR" sz="1600" dirty="0">
-                <a:solidFill>
-                  <a:srgbClr val="0033B3"/>
+              <a:rPr lang="ko-KR" altLang="ko-KR" sz="1600" dirty="0" err="1">
+                <a:solidFill>
+                  <a:srgbClr val="A0A0A0"/>
+                </a:solidFill>
+                <a:effectLst/>
+                <a:latin typeface="D2Coding ligature" panose="020B0609020101020101" pitchFamily="49" charset="-127"/>
+                <a:ea typeface="D2Coding ligature" panose="020B0609020101020101" pitchFamily="49" charset="-127"/>
+              </a:rPr>
+              <a:t>try</a:t>
+            </a:r>
+            <a:r>
+              <a:rPr lang="ko-KR" altLang="ko-KR" sz="1600" dirty="0">
+                <a:solidFill>
+                  <a:srgbClr val="A0A0A0"/>
+                </a:solidFill>
+                <a:effectLst/>
+                <a:latin typeface="D2Coding ligature" panose="020B0609020101020101" pitchFamily="49" charset="-127"/>
+                <a:ea typeface="D2Coding ligature" panose="020B0609020101020101" pitchFamily="49" charset="-127"/>
+              </a:rPr>
+              <a:t> {</a:t>
+            </a:r>
+            <a:br>
+              <a:rPr lang="ko-KR" altLang="ko-KR" sz="1600" dirty="0">
+                <a:solidFill>
+                  <a:srgbClr val="A0A0A0"/>
+                </a:solidFill>
+                <a:effectLst/>
+                <a:latin typeface="D2Coding ligature" panose="020B0609020101020101" pitchFamily="49" charset="-127"/>
+                <a:ea typeface="D2Coding ligature" panose="020B0609020101020101" pitchFamily="49" charset="-127"/>
+              </a:rPr>
+            </a:br>
+            <a:r>
+              <a:rPr lang="ko-KR" altLang="ko-KR" sz="1600" dirty="0">
+                <a:solidFill>
+                  <a:srgbClr val="A0A0A0"/>
+                </a:solidFill>
+                <a:effectLst/>
+                <a:latin typeface="D2Coding ligature" panose="020B0609020101020101" pitchFamily="49" charset="-127"/>
+                <a:ea typeface="D2Coding ligature" panose="020B0609020101020101" pitchFamily="49" charset="-127"/>
+              </a:rPr>
+              <a:t>        </a:t>
+            </a:r>
+            <a:r>
+              <a:rPr lang="ko-KR" altLang="ko-KR" sz="1600" dirty="0" err="1">
+                <a:solidFill>
+                  <a:srgbClr val="A0A0A0"/>
+                </a:solidFill>
+                <a:effectLst/>
+                <a:latin typeface="D2Coding ligature" panose="020B0609020101020101" pitchFamily="49" charset="-127"/>
+                <a:ea typeface="D2Coding ligature" panose="020B0609020101020101" pitchFamily="49" charset="-127"/>
+              </a:rPr>
+              <a:t>println</a:t>
+            </a:r>
+            <a:r>
+              <a:rPr lang="ko-KR" altLang="ko-KR" sz="1600" dirty="0">
+                <a:solidFill>
+                  <a:srgbClr val="A0A0A0"/>
+                </a:solidFill>
+                <a:effectLst/>
+                <a:latin typeface="D2Coding ligature" panose="020B0609020101020101" pitchFamily="49" charset="-127"/>
+                <a:ea typeface="D2Coding ligature" panose="020B0609020101020101" pitchFamily="49" charset="-127"/>
+              </a:rPr>
+              <a:t>("</a:t>
+            </a:r>
+            <a:r>
+              <a:rPr lang="ko-KR" altLang="ko-KR" sz="1600" dirty="0" err="1">
+                <a:solidFill>
+                  <a:srgbClr val="A0A0A0"/>
+                </a:solidFill>
+                <a:effectLst/>
+                <a:latin typeface="D2Coding ligature" panose="020B0609020101020101" pitchFamily="49" charset="-127"/>
+                <a:ea typeface="D2Coding ligature" panose="020B0609020101020101" pitchFamily="49" charset="-127"/>
+              </a:rPr>
+              <a:t>try</a:t>
+            </a:r>
+            <a:r>
+              <a:rPr lang="ko-KR" altLang="ko-KR" sz="1600" dirty="0">
+                <a:solidFill>
+                  <a:srgbClr val="A0A0A0"/>
+                </a:solidFill>
+                <a:effectLst/>
+                <a:latin typeface="D2Coding ligature" panose="020B0609020101020101" pitchFamily="49" charset="-127"/>
+                <a:ea typeface="D2Coding ligature" panose="020B0609020101020101" pitchFamily="49" charset="-127"/>
+              </a:rPr>
+              <a:t>")</a:t>
+            </a:r>
+            <a:br>
+              <a:rPr lang="ko-KR" altLang="ko-KR" sz="1600" dirty="0">
+                <a:solidFill>
+                  <a:srgbClr val="A0A0A0"/>
+                </a:solidFill>
+                <a:effectLst/>
+                <a:latin typeface="D2Coding ligature" panose="020B0609020101020101" pitchFamily="49" charset="-127"/>
+                <a:ea typeface="D2Coding ligature" panose="020B0609020101020101" pitchFamily="49" charset="-127"/>
+              </a:rPr>
+            </a:br>
+            <a:r>
+              <a:rPr lang="ko-KR" altLang="ko-KR" sz="1600" dirty="0">
+                <a:solidFill>
+                  <a:srgbClr val="A0A0A0"/>
+                </a:solidFill>
+                <a:effectLst/>
+                <a:latin typeface="D2Coding ligature" panose="020B0609020101020101" pitchFamily="49" charset="-127"/>
+                <a:ea typeface="D2Coding ligature" panose="020B0609020101020101" pitchFamily="49" charset="-127"/>
+              </a:rPr>
+              <a:t>    } </a:t>
+            </a:r>
+            <a:r>
+              <a:rPr lang="ko-KR" altLang="ko-KR" sz="1600" dirty="0" err="1">
+                <a:solidFill>
+                  <a:srgbClr val="A0A0A0"/>
+                </a:solidFill>
+                <a:effectLst/>
+                <a:latin typeface="D2Coding ligature" panose="020B0609020101020101" pitchFamily="49" charset="-127"/>
+                <a:ea typeface="D2Coding ligature" panose="020B0609020101020101" pitchFamily="49" charset="-127"/>
+              </a:rPr>
+              <a:t>catch</a:t>
+            </a:r>
+            <a:r>
+              <a:rPr lang="ko-KR" altLang="ko-KR" sz="1600" dirty="0">
+                <a:solidFill>
+                  <a:srgbClr val="A0A0A0"/>
+                </a:solidFill>
+                <a:effectLst/>
+                <a:latin typeface="D2Coding ligature" panose="020B0609020101020101" pitchFamily="49" charset="-127"/>
+                <a:ea typeface="D2Coding ligature" panose="020B0609020101020101" pitchFamily="49" charset="-127"/>
+              </a:rPr>
+              <a:t> (</a:t>
+            </a:r>
+            <a:r>
+              <a:rPr lang="ko-KR" altLang="ko-KR" sz="1600" dirty="0" err="1">
+                <a:solidFill>
+                  <a:srgbClr val="A0A0A0"/>
+                </a:solidFill>
+                <a:effectLst/>
+                <a:latin typeface="D2Coding ligature" panose="020B0609020101020101" pitchFamily="49" charset="-127"/>
+                <a:ea typeface="D2Coding ligature" panose="020B0609020101020101" pitchFamily="49" charset="-127"/>
+              </a:rPr>
+              <a:t>e</a:t>
+            </a:r>
+            <a:r>
+              <a:rPr lang="ko-KR" altLang="ko-KR" sz="1600" dirty="0">
+                <a:solidFill>
+                  <a:srgbClr val="A0A0A0"/>
+                </a:solidFill>
+                <a:effectLst/>
+                <a:latin typeface="D2Coding ligature" panose="020B0609020101020101" pitchFamily="49" charset="-127"/>
+                <a:ea typeface="D2Coding ligature" panose="020B0609020101020101" pitchFamily="49" charset="-127"/>
+              </a:rPr>
+              <a:t>: </a:t>
+            </a:r>
+            <a:r>
+              <a:rPr lang="ko-KR" altLang="ko-KR" sz="1600" dirty="0" err="1">
+                <a:solidFill>
+                  <a:srgbClr val="A0A0A0"/>
+                </a:solidFill>
+                <a:effectLst/>
+                <a:latin typeface="D2Coding ligature" panose="020B0609020101020101" pitchFamily="49" charset="-127"/>
+                <a:ea typeface="D2Coding ligature" panose="020B0609020101020101" pitchFamily="49" charset="-127"/>
+              </a:rPr>
+              <a:t>Exception</a:t>
+            </a:r>
+            <a:r>
+              <a:rPr lang="ko-KR" altLang="ko-KR" sz="1600" dirty="0">
+                <a:solidFill>
+                  <a:srgbClr val="A0A0A0"/>
+                </a:solidFill>
+                <a:effectLst/>
+                <a:latin typeface="D2Coding ligature" panose="020B0609020101020101" pitchFamily="49" charset="-127"/>
+                <a:ea typeface="D2Coding ligature" panose="020B0609020101020101" pitchFamily="49" charset="-127"/>
+              </a:rPr>
+              <a:t>) {</a:t>
+            </a:r>
+            <a:br>
+              <a:rPr lang="ko-KR" altLang="ko-KR" sz="1600" dirty="0">
+                <a:solidFill>
+                  <a:srgbClr val="A0A0A0"/>
+                </a:solidFill>
+                <a:effectLst/>
+                <a:latin typeface="D2Coding ligature" panose="020B0609020101020101" pitchFamily="49" charset="-127"/>
+                <a:ea typeface="D2Coding ligature" panose="020B0609020101020101" pitchFamily="49" charset="-127"/>
+              </a:rPr>
+            </a:br>
+            <a:r>
+              <a:rPr lang="ko-KR" altLang="ko-KR" sz="1600" dirty="0">
+                <a:solidFill>
+                  <a:srgbClr val="A0A0A0"/>
+                </a:solidFill>
+                <a:effectLst/>
+                <a:latin typeface="D2Coding ligature" panose="020B0609020101020101" pitchFamily="49" charset="-127"/>
+                <a:ea typeface="D2Coding ligature" panose="020B0609020101020101" pitchFamily="49" charset="-127"/>
+              </a:rPr>
+              <a:t>        </a:t>
+            </a:r>
+            <a:r>
+              <a:rPr lang="ko-KR" altLang="ko-KR" sz="1600" dirty="0" err="1">
+                <a:solidFill>
+                  <a:srgbClr val="A0A0A0"/>
+                </a:solidFill>
+                <a:effectLst/>
+                <a:latin typeface="D2Coding ligature" panose="020B0609020101020101" pitchFamily="49" charset="-127"/>
+                <a:ea typeface="D2Coding ligature" panose="020B0609020101020101" pitchFamily="49" charset="-127"/>
+              </a:rPr>
+              <a:t>println</a:t>
+            </a:r>
+            <a:r>
+              <a:rPr lang="ko-KR" altLang="ko-KR" sz="1600" dirty="0">
+                <a:solidFill>
+                  <a:srgbClr val="A0A0A0"/>
+                </a:solidFill>
+                <a:effectLst/>
+                <a:latin typeface="D2Coding ligature" panose="020B0609020101020101" pitchFamily="49" charset="-127"/>
+                <a:ea typeface="D2Coding ligature" panose="020B0609020101020101" pitchFamily="49" charset="-127"/>
+              </a:rPr>
+              <a:t>("</a:t>
+            </a:r>
+            <a:r>
+              <a:rPr lang="ko-KR" altLang="ko-KR" sz="1600" dirty="0" err="1">
+                <a:solidFill>
+                  <a:srgbClr val="A0A0A0"/>
+                </a:solidFill>
+                <a:effectLst/>
+                <a:latin typeface="D2Coding ligature" panose="020B0609020101020101" pitchFamily="49" charset="-127"/>
+                <a:ea typeface="D2Coding ligature" panose="020B0609020101020101" pitchFamily="49" charset="-127"/>
+              </a:rPr>
+              <a:t>catch</a:t>
+            </a:r>
+            <a:r>
+              <a:rPr lang="ko-KR" altLang="ko-KR" sz="1600" dirty="0">
+                <a:solidFill>
+                  <a:srgbClr val="A0A0A0"/>
+                </a:solidFill>
+                <a:effectLst/>
+                <a:latin typeface="D2Coding ligature" panose="020B0609020101020101" pitchFamily="49" charset="-127"/>
+                <a:ea typeface="D2Coding ligature" panose="020B0609020101020101" pitchFamily="49" charset="-127"/>
+              </a:rPr>
+              <a:t>")</a:t>
+            </a:r>
+            <a:br>
+              <a:rPr lang="ko-KR" altLang="ko-KR" sz="1600" dirty="0">
+                <a:solidFill>
+                  <a:srgbClr val="A0A0A0"/>
+                </a:solidFill>
+                <a:effectLst/>
+                <a:latin typeface="D2Coding ligature" panose="020B0609020101020101" pitchFamily="49" charset="-127"/>
+                <a:ea typeface="D2Coding ligature" panose="020B0609020101020101" pitchFamily="49" charset="-127"/>
+              </a:rPr>
+            </a:br>
+            <a:r>
+              <a:rPr lang="ko-KR" altLang="ko-KR" sz="1600" dirty="0">
+                <a:solidFill>
+                  <a:srgbClr val="A0A0A0"/>
+                </a:solidFill>
+                <a:effectLst/>
+                <a:latin typeface="D2Coding ligature" panose="020B0609020101020101" pitchFamily="49" charset="-127"/>
+                <a:ea typeface="D2Coding ligature" panose="020B0609020101020101" pitchFamily="49" charset="-127"/>
+              </a:rPr>
+              <a:t>    }</a:t>
+            </a:r>
+            <a:br>
+              <a:rPr lang="ko-KR" altLang="ko-KR" sz="1600" dirty="0">
+                <a:solidFill>
+                  <a:srgbClr val="A0A0A0"/>
+                </a:solidFill>
+                <a:effectLst/>
+                <a:latin typeface="D2Coding ligature" panose="020B0609020101020101" pitchFamily="49" charset="-127"/>
+                <a:ea typeface="D2Coding ligature" panose="020B0609020101020101" pitchFamily="49" charset="-127"/>
+              </a:rPr>
+            </a:br>
+            <a:br>
+              <a:rPr lang="ko-KR" altLang="ko-KR" sz="1600" dirty="0">
+                <a:solidFill>
+                  <a:srgbClr val="A0A0A0"/>
+                </a:solidFill>
+                <a:effectLst/>
+                <a:latin typeface="D2Coding ligature" panose="020B0609020101020101" pitchFamily="49" charset="-127"/>
+                <a:ea typeface="D2Coding ligature" panose="020B0609020101020101" pitchFamily="49" charset="-127"/>
+              </a:rPr>
+            </a:br>
+            <a:r>
+              <a:rPr lang="ko-KR" altLang="ko-KR" sz="1600" dirty="0">
+                <a:solidFill>
+                  <a:srgbClr val="A0A0A0"/>
+                </a:solidFill>
+                <a:effectLst/>
+                <a:latin typeface="D2Coding ligature" panose="020B0609020101020101" pitchFamily="49" charset="-127"/>
+                <a:ea typeface="D2Coding ligature" panose="020B0609020101020101" pitchFamily="49" charset="-127"/>
+              </a:rPr>
+              <a:t>    </a:t>
+            </a:r>
+            <a:r>
+              <a:rPr lang="ko-KR" altLang="ko-KR" sz="1600" dirty="0" err="1">
+                <a:solidFill>
+                  <a:srgbClr val="A0A0A0"/>
+                </a:solidFill>
+                <a:effectLst/>
+                <a:latin typeface="D2Coding ligature" panose="020B0609020101020101" pitchFamily="49" charset="-127"/>
+                <a:ea typeface="D2Coding ligature" panose="020B0609020101020101" pitchFamily="49" charset="-127"/>
+              </a:rPr>
+              <a:t>println</a:t>
+            </a:r>
+            <a:r>
+              <a:rPr lang="ko-KR" altLang="ko-KR" sz="1600" dirty="0">
+                <a:solidFill>
+                  <a:srgbClr val="A0A0A0"/>
+                </a:solidFill>
+                <a:effectLst/>
+                <a:latin typeface="D2Coding ligature" panose="020B0609020101020101" pitchFamily="49" charset="-127"/>
+                <a:ea typeface="D2Coding ligature" panose="020B0609020101020101" pitchFamily="49" charset="-127"/>
+              </a:rPr>
+              <a:t>("</a:t>
+            </a:r>
+            <a:r>
+              <a:rPr lang="ko-KR" altLang="ko-KR" sz="1600" dirty="0" err="1">
+                <a:solidFill>
+                  <a:srgbClr val="A0A0A0"/>
+                </a:solidFill>
+                <a:effectLst/>
+                <a:latin typeface="D2Coding ligature" panose="020B0609020101020101" pitchFamily="49" charset="-127"/>
+                <a:ea typeface="D2Coding ligature" panose="020B0609020101020101" pitchFamily="49" charset="-127"/>
+              </a:rPr>
+              <a:t>finally</a:t>
+            </a:r>
+            <a:r>
+              <a:rPr lang="ko-KR" altLang="ko-KR" sz="1600" dirty="0">
+                <a:solidFill>
+                  <a:srgbClr val="A0A0A0"/>
+                </a:solidFill>
+                <a:effectLst/>
+                <a:latin typeface="D2Coding ligature" panose="020B0609020101020101" pitchFamily="49" charset="-127"/>
+                <a:ea typeface="D2Coding ligature" panose="020B0609020101020101" pitchFamily="49" charset="-127"/>
+              </a:rPr>
+              <a:t>")</a:t>
+            </a:r>
+            <a:br>
+              <a:rPr lang="ko-KR" altLang="ko-KR" sz="1600" dirty="0">
+                <a:solidFill>
+                  <a:srgbClr val="A0A0A0"/>
+                </a:solidFill>
+                <a:effectLst/>
+                <a:latin typeface="D2Coding ligature" panose="020B0609020101020101" pitchFamily="49" charset="-127"/>
+                <a:ea typeface="D2Coding ligature" panose="020B0609020101020101" pitchFamily="49" charset="-127"/>
+              </a:rPr>
+            </a:br>
+            <a:r>
+              <a:rPr lang="ko-KR" altLang="ko-KR" sz="1600" dirty="0">
+                <a:solidFill>
+                  <a:srgbClr val="A0A0A0"/>
+                </a:solidFill>
+                <a:effectLst/>
+                <a:latin typeface="D2Coding ligature" panose="020B0609020101020101" pitchFamily="49" charset="-127"/>
+                <a:ea typeface="D2Coding ligature" panose="020B0609020101020101" pitchFamily="49" charset="-127"/>
+              </a:rPr>
+              <a:t>} </a:t>
+            </a:r>
+            <a:r>
+              <a:rPr lang="ko-KR" altLang="ko-KR" sz="1600" dirty="0" err="1">
+                <a:solidFill>
+                  <a:srgbClr val="A0A0A0"/>
+                </a:solidFill>
+                <a:effectLst/>
+                <a:latin typeface="D2Coding ligature" panose="020B0609020101020101" pitchFamily="49" charset="-127"/>
+                <a:ea typeface="D2Coding ligature" panose="020B0609020101020101" pitchFamily="49" charset="-127"/>
+              </a:rPr>
+              <a:t>catch</a:t>
+            </a:r>
+            <a:r>
+              <a:rPr lang="ko-KR" altLang="ko-KR" sz="1600" dirty="0">
+                <a:solidFill>
+                  <a:srgbClr val="A0A0A0"/>
+                </a:solidFill>
+                <a:effectLst/>
+                <a:latin typeface="D2Coding ligature" panose="020B0609020101020101" pitchFamily="49" charset="-127"/>
+                <a:ea typeface="D2Coding ligature" panose="020B0609020101020101" pitchFamily="49" charset="-127"/>
+              </a:rPr>
+              <a:t> (</a:t>
+            </a:r>
+            <a:r>
+              <a:rPr lang="ko-KR" altLang="ko-KR" sz="1600" dirty="0" err="1">
+                <a:solidFill>
+                  <a:srgbClr val="A0A0A0"/>
+                </a:solidFill>
+                <a:effectLst/>
+                <a:latin typeface="D2Coding ligature" panose="020B0609020101020101" pitchFamily="49" charset="-127"/>
+                <a:ea typeface="D2Coding ligature" panose="020B0609020101020101" pitchFamily="49" charset="-127"/>
+              </a:rPr>
+              <a:t>t</a:t>
+            </a:r>
+            <a:r>
+              <a:rPr lang="ko-KR" altLang="ko-KR" sz="1600" dirty="0">
+                <a:solidFill>
+                  <a:srgbClr val="A0A0A0"/>
+                </a:solidFill>
+                <a:effectLst/>
+                <a:latin typeface="D2Coding ligature" panose="020B0609020101020101" pitchFamily="49" charset="-127"/>
+                <a:ea typeface="D2Coding ligature" panose="020B0609020101020101" pitchFamily="49" charset="-127"/>
+              </a:rPr>
+              <a:t>: </a:t>
+            </a:r>
+            <a:r>
+              <a:rPr lang="ko-KR" altLang="ko-KR" sz="1600" dirty="0" err="1">
+                <a:solidFill>
+                  <a:srgbClr val="A0A0A0"/>
+                </a:solidFill>
+                <a:effectLst/>
+                <a:latin typeface="D2Coding ligature" panose="020B0609020101020101" pitchFamily="49" charset="-127"/>
+                <a:ea typeface="D2Coding ligature" panose="020B0609020101020101" pitchFamily="49" charset="-127"/>
+              </a:rPr>
+              <a:t>Throwable</a:t>
+            </a:r>
+            <a:r>
+              <a:rPr lang="ko-KR" altLang="ko-KR" sz="1600" dirty="0">
+                <a:solidFill>
+                  <a:srgbClr val="A0A0A0"/>
+                </a:solidFill>
+                <a:effectLst/>
+                <a:latin typeface="D2Coding ligature" panose="020B0609020101020101" pitchFamily="49" charset="-127"/>
+                <a:ea typeface="D2Coding ligature" panose="020B0609020101020101" pitchFamily="49" charset="-127"/>
+              </a:rPr>
+              <a:t>) {</a:t>
+            </a:r>
+            <a:br>
+              <a:rPr lang="ko-KR" altLang="ko-KR" sz="1600" dirty="0">
+                <a:solidFill>
+                  <a:srgbClr val="A0A0A0"/>
+                </a:solidFill>
+                <a:effectLst/>
+                <a:latin typeface="D2Coding ligature" panose="020B0609020101020101" pitchFamily="49" charset="-127"/>
+                <a:ea typeface="D2Coding ligature" panose="020B0609020101020101" pitchFamily="49" charset="-127"/>
+              </a:rPr>
+            </a:br>
+            <a:r>
+              <a:rPr lang="ko-KR" altLang="ko-KR" sz="1600" dirty="0">
+                <a:solidFill>
+                  <a:srgbClr val="A0A0A0"/>
+                </a:solidFill>
+                <a:effectLst/>
+                <a:latin typeface="D2Coding ligature" panose="020B0609020101020101" pitchFamily="49" charset="-127"/>
+                <a:ea typeface="D2Coding ligature" panose="020B0609020101020101" pitchFamily="49" charset="-127"/>
+              </a:rPr>
+              <a:t>    </a:t>
+            </a:r>
+            <a:r>
+              <a:rPr lang="ko-KR" altLang="ko-KR" sz="1600" dirty="0" err="1">
+                <a:solidFill>
+                  <a:srgbClr val="A0A0A0"/>
+                </a:solidFill>
+                <a:effectLst/>
+                <a:latin typeface="D2Coding ligature" panose="020B0609020101020101" pitchFamily="49" charset="-127"/>
+                <a:ea typeface="D2Coding ligature" panose="020B0609020101020101" pitchFamily="49" charset="-127"/>
+              </a:rPr>
+              <a:t>println</a:t>
+            </a:r>
+            <a:r>
+              <a:rPr lang="ko-KR" altLang="ko-KR" sz="1600" dirty="0">
+                <a:solidFill>
+                  <a:srgbClr val="A0A0A0"/>
+                </a:solidFill>
+                <a:effectLst/>
+                <a:latin typeface="D2Coding ligature" panose="020B0609020101020101" pitchFamily="49" charset="-127"/>
+                <a:ea typeface="D2Coding ligature" panose="020B0609020101020101" pitchFamily="49" charset="-127"/>
+              </a:rPr>
+              <a:t>("</a:t>
+            </a:r>
+            <a:r>
+              <a:rPr lang="ko-KR" altLang="ko-KR" sz="1600" dirty="0" err="1">
+                <a:solidFill>
+                  <a:srgbClr val="A0A0A0"/>
+                </a:solidFill>
+                <a:effectLst/>
+                <a:latin typeface="D2Coding ligature" panose="020B0609020101020101" pitchFamily="49" charset="-127"/>
+                <a:ea typeface="D2Coding ligature" panose="020B0609020101020101" pitchFamily="49" charset="-127"/>
+              </a:rPr>
+              <a:t>finally</a:t>
+            </a:r>
+            <a:r>
+              <a:rPr lang="ko-KR" altLang="ko-KR" sz="1600" dirty="0">
+                <a:solidFill>
+                  <a:srgbClr val="A0A0A0"/>
+                </a:solidFill>
+                <a:effectLst/>
+                <a:latin typeface="D2Coding ligature" panose="020B0609020101020101" pitchFamily="49" charset="-127"/>
+                <a:ea typeface="D2Coding ligature" panose="020B0609020101020101" pitchFamily="49" charset="-127"/>
+              </a:rPr>
+              <a:t>")</a:t>
+            </a:r>
+            <a:br>
+              <a:rPr lang="ko-KR" altLang="ko-KR" sz="1600" dirty="0">
+                <a:solidFill>
+                  <a:srgbClr val="A0A0A0"/>
+                </a:solidFill>
+                <a:effectLst/>
+                <a:latin typeface="D2Coding ligature" panose="020B0609020101020101" pitchFamily="49" charset="-127"/>
+                <a:ea typeface="D2Coding ligature" panose="020B0609020101020101" pitchFamily="49" charset="-127"/>
+              </a:rPr>
+            </a:br>
+            <a:r>
+              <a:rPr lang="ko-KR" altLang="ko-KR" sz="1600" dirty="0">
+                <a:solidFill>
+                  <a:srgbClr val="A0A0A0"/>
+                </a:solidFill>
+                <a:effectLst/>
+                <a:latin typeface="D2Coding ligature" panose="020B0609020101020101" pitchFamily="49" charset="-127"/>
+                <a:ea typeface="D2Coding ligature" panose="020B0609020101020101" pitchFamily="49" charset="-127"/>
+              </a:rPr>
+              <a:t>    </a:t>
+            </a:r>
+            <a:r>
+              <a:rPr lang="ko-KR" altLang="ko-KR" sz="1600" dirty="0" err="1">
+                <a:solidFill>
+                  <a:srgbClr val="A0A0A0"/>
+                </a:solidFill>
+                <a:effectLst/>
+                <a:latin typeface="D2Coding ligature" panose="020B0609020101020101" pitchFamily="49" charset="-127"/>
+                <a:ea typeface="D2Coding ligature" panose="020B0609020101020101" pitchFamily="49" charset="-127"/>
+              </a:rPr>
+              <a:t>throw</a:t>
+            </a:r>
+            <a:r>
+              <a:rPr lang="ko-KR" altLang="ko-KR" sz="1600" dirty="0">
+                <a:solidFill>
+                  <a:srgbClr val="A0A0A0"/>
                 </a:solidFill>
                 <a:effectLst/>
                 <a:latin typeface="D2Coding ligature" panose="020B0609020101020101" pitchFamily="49" charset="-127"/>
@@ -35685,53 +38416,20 @@
               <a:t> </a:t>
             </a:r>
             <a:r>
-              <a:rPr lang="en-US" altLang="ko-KR" sz="1600" dirty="0">
-                <a:solidFill>
-                  <a:srgbClr val="000000"/>
-                </a:solidFill>
-                <a:effectLst/>
-                <a:latin typeface="D2Coding ligature" panose="020B0609020101020101" pitchFamily="49" charset="-127"/>
-                <a:ea typeface="D2Coding ligature" panose="020B0609020101020101" pitchFamily="49" charset="-127"/>
-              </a:rPr>
-              <a:t>value </a:t>
-            </a:r>
-            <a:r>
-              <a:rPr lang="en-US" altLang="ko-KR" sz="1600" dirty="0">
-                <a:solidFill>
-                  <a:srgbClr val="080808"/>
-                </a:solidFill>
-                <a:effectLst/>
-                <a:latin typeface="D2Coding ligature" panose="020B0609020101020101" pitchFamily="49" charset="-127"/>
-                <a:ea typeface="D2Coding ligature" panose="020B0609020101020101" pitchFamily="49" charset="-127"/>
-              </a:rPr>
-              <a:t>= </a:t>
-            </a:r>
-            <a:r>
-              <a:rPr lang="en-US" altLang="ko-KR" sz="1600" dirty="0">
-                <a:solidFill>
-                  <a:srgbClr val="0033B3"/>
-                </a:solidFill>
-                <a:effectLst/>
-                <a:latin typeface="D2Coding ligature" panose="020B0609020101020101" pitchFamily="49" charset="-127"/>
-                <a:ea typeface="D2Coding ligature" panose="020B0609020101020101" pitchFamily="49" charset="-127"/>
-              </a:rPr>
-              <a:t>try </a:t>
-            </a:r>
-            <a:r>
-              <a:rPr lang="en-US" altLang="ko-KR" sz="1600" dirty="0">
-                <a:solidFill>
-                  <a:srgbClr val="080808"/>
-                </a:solidFill>
-                <a:effectLst/>
-                <a:latin typeface="D2Coding ligature" panose="020B0609020101020101" pitchFamily="49" charset="-127"/>
-                <a:ea typeface="D2Coding ligature" panose="020B0609020101020101" pitchFamily="49" charset="-127"/>
-              </a:rPr>
-              <a:t>{</a:t>
+              <a:rPr lang="ko-KR" altLang="ko-KR" sz="1600" dirty="0" err="1">
+                <a:solidFill>
+                  <a:srgbClr val="A0A0A0"/>
+                </a:solidFill>
+                <a:effectLst/>
+                <a:latin typeface="D2Coding ligature" panose="020B0609020101020101" pitchFamily="49" charset="-127"/>
+                <a:ea typeface="D2Coding ligature" panose="020B0609020101020101" pitchFamily="49" charset="-127"/>
+              </a:rPr>
+              <a:t>t</a:t>
             </a:r>
             <a:br>
-              <a:rPr lang="en-US" altLang="ko-KR" sz="1600" dirty="0">
-                <a:solidFill>
-                  <a:srgbClr val="080808"/>
+              <a:rPr lang="ko-KR" altLang="ko-KR" sz="1600" dirty="0">
+                <a:solidFill>
+                  <a:srgbClr val="A0A0A0"/>
                 </a:solidFill>
                 <a:effectLst/>
                 <a:latin typeface="D2Coding ligature" panose="020B0609020101020101" pitchFamily="49" charset="-127"/>
@@ -35739,786 +38437,81 @@
               </a:rPr>
             </a:br>
             <a:r>
-              <a:rPr lang="en-US" altLang="ko-KR" sz="1600" dirty="0">
-                <a:solidFill>
-                  <a:srgbClr val="080808"/>
-                </a:solidFill>
-                <a:effectLst/>
-                <a:latin typeface="D2Coding ligature" panose="020B0609020101020101" pitchFamily="49" charset="-127"/>
-                <a:ea typeface="D2Coding ligature" panose="020B0609020101020101" pitchFamily="49" charset="-127"/>
-              </a:rPr>
-              <a:t>        </a:t>
-            </a:r>
-            <a:r>
-              <a:rPr lang="en-US" altLang="ko-KR" sz="1600" i="1" dirty="0" err="1">
-                <a:solidFill>
-                  <a:srgbClr val="00627A"/>
-                </a:solidFill>
-                <a:effectLst/>
-                <a:latin typeface="D2Coding ligature" panose="020B0609020101020101" pitchFamily="49" charset="-127"/>
-                <a:ea typeface="D2Coding ligature" panose="020B0609020101020101" pitchFamily="49" charset="-127"/>
-              </a:rPr>
-              <a:t>println</a:t>
-            </a:r>
-            <a:r>
-              <a:rPr lang="en-US" altLang="ko-KR" sz="1600" dirty="0">
-                <a:solidFill>
-                  <a:srgbClr val="080808"/>
-                </a:solidFill>
-                <a:effectLst/>
-                <a:latin typeface="D2Coding ligature" panose="020B0609020101020101" pitchFamily="49" charset="-127"/>
-                <a:ea typeface="D2Coding ligature" panose="020B0609020101020101" pitchFamily="49" charset="-127"/>
-              </a:rPr>
-              <a:t>(</a:t>
-            </a:r>
-            <a:r>
-              <a:rPr lang="en-US" altLang="ko-KR" sz="1600" dirty="0">
-                <a:solidFill>
-                  <a:srgbClr val="067D17"/>
-                </a:solidFill>
-                <a:effectLst/>
-                <a:latin typeface="D2Coding ligature" panose="020B0609020101020101" pitchFamily="49" charset="-127"/>
-                <a:ea typeface="D2Coding ligature" panose="020B0609020101020101" pitchFamily="49" charset="-127"/>
-              </a:rPr>
-              <a:t>"try </a:t>
-            </a:r>
-            <a:r>
-              <a:rPr lang="ko-KR" altLang="en-US" sz="1600" dirty="0">
-                <a:solidFill>
-                  <a:srgbClr val="067D17"/>
-                </a:solidFill>
-                <a:effectLst/>
-                <a:latin typeface="D2Coding ligature" panose="020B0609020101020101" pitchFamily="49" charset="-127"/>
-                <a:ea typeface="D2Coding ligature" panose="020B0609020101020101" pitchFamily="49" charset="-127"/>
-              </a:rPr>
-              <a:t>블록 실행</a:t>
-            </a:r>
-            <a:r>
-              <a:rPr lang="en-US" altLang="ko-KR" sz="1600" dirty="0">
-                <a:solidFill>
-                  <a:srgbClr val="067D17"/>
-                </a:solidFill>
-                <a:effectLst/>
-                <a:latin typeface="D2Coding ligature" panose="020B0609020101020101" pitchFamily="49" charset="-127"/>
-                <a:ea typeface="D2Coding ligature" panose="020B0609020101020101" pitchFamily="49" charset="-127"/>
-              </a:rPr>
-              <a:t>"</a:t>
-            </a:r>
-            <a:r>
-              <a:rPr lang="en-US" altLang="ko-KR" sz="1600" dirty="0">
-                <a:solidFill>
-                  <a:srgbClr val="080808"/>
-                </a:solidFill>
-                <a:effectLst/>
-                <a:latin typeface="D2Coding ligature" panose="020B0609020101020101" pitchFamily="49" charset="-127"/>
-                <a:ea typeface="D2Coding ligature" panose="020B0609020101020101" pitchFamily="49" charset="-127"/>
-              </a:rPr>
-              <a:t>)</a:t>
-            </a:r>
-            <a:br>
-              <a:rPr lang="en-US" altLang="ko-KR" sz="1600" dirty="0">
-                <a:solidFill>
-                  <a:srgbClr val="080808"/>
-                </a:solidFill>
-                <a:effectLst/>
-                <a:latin typeface="D2Coding ligature" panose="020B0609020101020101" pitchFamily="49" charset="-127"/>
-                <a:ea typeface="D2Coding ligature" panose="020B0609020101020101" pitchFamily="49" charset="-127"/>
-              </a:rPr>
-            </a:br>
-            <a:r>
-              <a:rPr lang="en-US" altLang="ko-KR" sz="1600" dirty="0">
-                <a:solidFill>
-                  <a:srgbClr val="080808"/>
-                </a:solidFill>
-                <a:effectLst/>
-                <a:latin typeface="D2Coding ligature" panose="020B0609020101020101" pitchFamily="49" charset="-127"/>
-                <a:ea typeface="D2Coding ligature" panose="020B0609020101020101" pitchFamily="49" charset="-127"/>
-              </a:rPr>
-              <a:t>        </a:t>
-            </a:r>
-            <a:r>
-              <a:rPr lang="en-US" altLang="ko-KR" sz="1600" dirty="0" err="1">
-                <a:solidFill>
-                  <a:srgbClr val="0033B3"/>
-                </a:solidFill>
-                <a:effectLst/>
-                <a:latin typeface="D2Coding ligature" panose="020B0609020101020101" pitchFamily="49" charset="-127"/>
-                <a:ea typeface="D2Coding ligature" panose="020B0609020101020101" pitchFamily="49" charset="-127"/>
-              </a:rPr>
-              <a:t>val</a:t>
-            </a:r>
-            <a:r>
-              <a:rPr lang="en-US" altLang="ko-KR" sz="1600" dirty="0">
-                <a:solidFill>
-                  <a:srgbClr val="0033B3"/>
-                </a:solidFill>
-                <a:effectLst/>
-                <a:latin typeface="D2Coding ligature" panose="020B0609020101020101" pitchFamily="49" charset="-127"/>
-                <a:ea typeface="D2Coding ligature" panose="020B0609020101020101" pitchFamily="49" charset="-127"/>
-              </a:rPr>
-              <a:t> </a:t>
-            </a:r>
-            <a:r>
-              <a:rPr lang="en-US" altLang="ko-KR" sz="1600" dirty="0">
-                <a:solidFill>
-                  <a:srgbClr val="000000"/>
-                </a:solidFill>
-                <a:effectLst/>
-                <a:latin typeface="D2Coding ligature" panose="020B0609020101020101" pitchFamily="49" charset="-127"/>
-                <a:ea typeface="D2Coding ligature" panose="020B0609020101020101" pitchFamily="49" charset="-127"/>
-              </a:rPr>
-              <a:t>result </a:t>
-            </a:r>
-            <a:r>
-              <a:rPr lang="en-US" altLang="ko-KR" sz="1600" dirty="0">
-                <a:solidFill>
-                  <a:srgbClr val="080808"/>
-                </a:solidFill>
-                <a:effectLst/>
-                <a:latin typeface="D2Coding ligature" panose="020B0609020101020101" pitchFamily="49" charset="-127"/>
-                <a:ea typeface="D2Coding ligature" panose="020B0609020101020101" pitchFamily="49" charset="-127"/>
-              </a:rPr>
-              <a:t>= </a:t>
-            </a:r>
-            <a:r>
-              <a:rPr lang="en-US" altLang="ko-KR" sz="1600" dirty="0">
-                <a:solidFill>
-                  <a:srgbClr val="1750EB"/>
-                </a:solidFill>
-                <a:effectLst/>
-                <a:latin typeface="D2Coding ligature" panose="020B0609020101020101" pitchFamily="49" charset="-127"/>
-                <a:ea typeface="D2Coding ligature" panose="020B0609020101020101" pitchFamily="49" charset="-127"/>
-              </a:rPr>
-              <a:t>10 </a:t>
-            </a:r>
-            <a:r>
-              <a:rPr lang="en-US" altLang="ko-KR" sz="1600" dirty="0">
-                <a:solidFill>
-                  <a:srgbClr val="080808"/>
-                </a:solidFill>
-                <a:effectLst/>
-                <a:latin typeface="D2Coding ligature" panose="020B0609020101020101" pitchFamily="49" charset="-127"/>
-                <a:ea typeface="D2Coding ligature" panose="020B0609020101020101" pitchFamily="49" charset="-127"/>
-              </a:rPr>
-              <a:t>/ </a:t>
-            </a:r>
-            <a:r>
-              <a:rPr lang="en-US" altLang="ko-KR" sz="1600" dirty="0">
-                <a:solidFill>
-                  <a:srgbClr val="1750EB"/>
-                </a:solidFill>
-                <a:effectLst/>
-                <a:latin typeface="D2Coding ligature" panose="020B0609020101020101" pitchFamily="49" charset="-127"/>
-                <a:ea typeface="D2Coding ligature" panose="020B0609020101020101" pitchFamily="49" charset="-127"/>
-              </a:rPr>
-              <a:t>0</a:t>
-            </a:r>
-            <a:br>
-              <a:rPr lang="en-US" altLang="ko-KR" sz="1600" dirty="0">
-                <a:solidFill>
-                  <a:srgbClr val="1750EB"/>
-                </a:solidFill>
-                <a:effectLst/>
-                <a:latin typeface="D2Coding ligature" panose="020B0609020101020101" pitchFamily="49" charset="-127"/>
-                <a:ea typeface="D2Coding ligature" panose="020B0609020101020101" pitchFamily="49" charset="-127"/>
-              </a:rPr>
-            </a:br>
-            <a:r>
-              <a:rPr lang="en-US" altLang="ko-KR" sz="1600" dirty="0">
-                <a:solidFill>
-                  <a:srgbClr val="1750EB"/>
-                </a:solidFill>
-                <a:effectLst/>
-                <a:latin typeface="D2Coding ligature" panose="020B0609020101020101" pitchFamily="49" charset="-127"/>
-                <a:ea typeface="D2Coding ligature" panose="020B0609020101020101" pitchFamily="49" charset="-127"/>
-              </a:rPr>
-              <a:t>        </a:t>
-            </a:r>
-            <a:r>
-              <a:rPr lang="en-US" altLang="ko-KR" sz="1600" dirty="0">
-                <a:solidFill>
-                  <a:srgbClr val="000000"/>
-                </a:solidFill>
-                <a:effectLst/>
-                <a:latin typeface="D2Coding ligature" panose="020B0609020101020101" pitchFamily="49" charset="-127"/>
-                <a:ea typeface="D2Coding ligature" panose="020B0609020101020101" pitchFamily="49" charset="-127"/>
-              </a:rPr>
-              <a:t>result</a:t>
-            </a:r>
-            <a:br>
-              <a:rPr lang="en-US" altLang="ko-KR" sz="1600" dirty="0">
-                <a:solidFill>
-                  <a:srgbClr val="000000"/>
-                </a:solidFill>
-                <a:effectLst/>
-                <a:latin typeface="D2Coding ligature" panose="020B0609020101020101" pitchFamily="49" charset="-127"/>
-                <a:ea typeface="D2Coding ligature" panose="020B0609020101020101" pitchFamily="49" charset="-127"/>
-              </a:rPr>
-            </a:br>
-            <a:r>
-              <a:rPr lang="en-US" altLang="ko-KR" sz="1600" dirty="0">
-                <a:solidFill>
-                  <a:srgbClr val="000000"/>
-                </a:solidFill>
-                <a:effectLst/>
-                <a:latin typeface="D2Coding ligature" panose="020B0609020101020101" pitchFamily="49" charset="-127"/>
-                <a:ea typeface="D2Coding ligature" panose="020B0609020101020101" pitchFamily="49" charset="-127"/>
-              </a:rPr>
-              <a:t>    </a:t>
-            </a:r>
-            <a:r>
-              <a:rPr lang="en-US" altLang="ko-KR" sz="1600" dirty="0">
-                <a:solidFill>
-                  <a:srgbClr val="080808"/>
-                </a:solidFill>
-                <a:effectLst/>
-                <a:latin typeface="D2Coding ligature" panose="020B0609020101020101" pitchFamily="49" charset="-127"/>
-                <a:ea typeface="D2Coding ligature" panose="020B0609020101020101" pitchFamily="49" charset="-127"/>
-              </a:rPr>
-              <a:t>} </a:t>
-            </a:r>
-            <a:r>
-              <a:rPr lang="en-US" altLang="ko-KR" sz="1600" dirty="0">
-                <a:solidFill>
-                  <a:srgbClr val="0033B3"/>
-                </a:solidFill>
-                <a:effectLst/>
-                <a:latin typeface="D2Coding ligature" panose="020B0609020101020101" pitchFamily="49" charset="-127"/>
-                <a:ea typeface="D2Coding ligature" panose="020B0609020101020101" pitchFamily="49" charset="-127"/>
-              </a:rPr>
-              <a:t>catch </a:t>
-            </a:r>
-            <a:r>
-              <a:rPr lang="en-US" altLang="ko-KR" sz="1600" dirty="0">
-                <a:solidFill>
-                  <a:srgbClr val="080808"/>
-                </a:solidFill>
-                <a:effectLst/>
-                <a:latin typeface="D2Coding ligature" panose="020B0609020101020101" pitchFamily="49" charset="-127"/>
-                <a:ea typeface="D2Coding ligature" panose="020B0609020101020101" pitchFamily="49" charset="-127"/>
-              </a:rPr>
-              <a:t>(</a:t>
-            </a:r>
-            <a:r>
-              <a:rPr lang="en-US" altLang="ko-KR" sz="1600" dirty="0">
-                <a:solidFill>
-                  <a:srgbClr val="000000"/>
-                </a:solidFill>
-                <a:effectLst/>
-                <a:latin typeface="D2Coding ligature" panose="020B0609020101020101" pitchFamily="49" charset="-127"/>
-                <a:ea typeface="D2Coding ligature" panose="020B0609020101020101" pitchFamily="49" charset="-127"/>
-              </a:rPr>
-              <a:t>e</a:t>
-            </a:r>
-            <a:r>
-              <a:rPr lang="en-US" altLang="ko-KR" sz="1600" dirty="0">
-                <a:solidFill>
-                  <a:srgbClr val="080808"/>
-                </a:solidFill>
-                <a:effectLst/>
-                <a:latin typeface="D2Coding ligature" panose="020B0609020101020101" pitchFamily="49" charset="-127"/>
-                <a:ea typeface="D2Coding ligature" panose="020B0609020101020101" pitchFamily="49" charset="-127"/>
-              </a:rPr>
-              <a:t>: </a:t>
-            </a:r>
-            <a:r>
-              <a:rPr lang="en-US" altLang="ko-KR" sz="1600" dirty="0">
-                <a:solidFill>
-                  <a:srgbClr val="000000"/>
-                </a:solidFill>
-                <a:effectLst/>
-                <a:latin typeface="D2Coding ligature" panose="020B0609020101020101" pitchFamily="49" charset="-127"/>
-                <a:ea typeface="D2Coding ligature" panose="020B0609020101020101" pitchFamily="49" charset="-127"/>
-              </a:rPr>
-              <a:t>Exception</a:t>
-            </a:r>
-            <a:r>
-              <a:rPr lang="en-US" altLang="ko-KR" sz="1600" dirty="0">
-                <a:solidFill>
-                  <a:srgbClr val="080808"/>
-                </a:solidFill>
-                <a:effectLst/>
-                <a:latin typeface="D2Coding ligature" panose="020B0609020101020101" pitchFamily="49" charset="-127"/>
-                <a:ea typeface="D2Coding ligature" panose="020B0609020101020101" pitchFamily="49" charset="-127"/>
-              </a:rPr>
-              <a:t>) {</a:t>
-            </a:r>
-            <a:br>
-              <a:rPr lang="en-US" altLang="ko-KR" sz="1600" dirty="0">
-                <a:solidFill>
-                  <a:srgbClr val="080808"/>
-                </a:solidFill>
-                <a:effectLst/>
-                <a:latin typeface="D2Coding ligature" panose="020B0609020101020101" pitchFamily="49" charset="-127"/>
-                <a:ea typeface="D2Coding ligature" panose="020B0609020101020101" pitchFamily="49" charset="-127"/>
-              </a:rPr>
-            </a:br>
-            <a:r>
-              <a:rPr lang="en-US" altLang="ko-KR" sz="1600" dirty="0">
-                <a:solidFill>
-                  <a:srgbClr val="080808"/>
-                </a:solidFill>
-                <a:effectLst/>
-                <a:latin typeface="D2Coding ligature" panose="020B0609020101020101" pitchFamily="49" charset="-127"/>
-                <a:ea typeface="D2Coding ligature" panose="020B0609020101020101" pitchFamily="49" charset="-127"/>
-              </a:rPr>
-              <a:t>        </a:t>
-            </a:r>
-            <a:r>
-              <a:rPr lang="en-US" altLang="ko-KR" sz="1600" i="1" dirty="0" err="1">
-                <a:solidFill>
-                  <a:srgbClr val="00627A"/>
-                </a:solidFill>
-                <a:effectLst/>
-                <a:latin typeface="D2Coding ligature" panose="020B0609020101020101" pitchFamily="49" charset="-127"/>
-                <a:ea typeface="D2Coding ligature" panose="020B0609020101020101" pitchFamily="49" charset="-127"/>
-              </a:rPr>
-              <a:t>println</a:t>
-            </a:r>
-            <a:r>
-              <a:rPr lang="en-US" altLang="ko-KR" sz="1600" dirty="0">
-                <a:solidFill>
-                  <a:srgbClr val="080808"/>
-                </a:solidFill>
-                <a:effectLst/>
-                <a:latin typeface="D2Coding ligature" panose="020B0609020101020101" pitchFamily="49" charset="-127"/>
-                <a:ea typeface="D2Coding ligature" panose="020B0609020101020101" pitchFamily="49" charset="-127"/>
-              </a:rPr>
-              <a:t>(</a:t>
-            </a:r>
-            <a:r>
-              <a:rPr lang="en-US" altLang="ko-KR" sz="1600" dirty="0">
-                <a:solidFill>
-                  <a:srgbClr val="067D17"/>
-                </a:solidFill>
-                <a:effectLst/>
-                <a:latin typeface="D2Coding ligature" panose="020B0609020101020101" pitchFamily="49" charset="-127"/>
-                <a:ea typeface="D2Coding ligature" panose="020B0609020101020101" pitchFamily="49" charset="-127"/>
-              </a:rPr>
-              <a:t>"</a:t>
-            </a:r>
-            <a:r>
-              <a:rPr lang="ko-KR" altLang="en-US" sz="1600" dirty="0">
-                <a:solidFill>
-                  <a:srgbClr val="067D17"/>
-                </a:solidFill>
-                <a:effectLst/>
-                <a:latin typeface="D2Coding ligature" panose="020B0609020101020101" pitchFamily="49" charset="-127"/>
-                <a:ea typeface="D2Coding ligature" panose="020B0609020101020101" pitchFamily="49" charset="-127"/>
-              </a:rPr>
-              <a:t>예외 발생</a:t>
-            </a:r>
-            <a:r>
-              <a:rPr lang="en-US" altLang="ko-KR" sz="1600" dirty="0">
-                <a:solidFill>
-                  <a:srgbClr val="067D17"/>
-                </a:solidFill>
-                <a:effectLst/>
-                <a:latin typeface="D2Coding ligature" panose="020B0609020101020101" pitchFamily="49" charset="-127"/>
-                <a:ea typeface="D2Coding ligature" panose="020B0609020101020101" pitchFamily="49" charset="-127"/>
-              </a:rPr>
-              <a:t>: </a:t>
-            </a:r>
-            <a:r>
-              <a:rPr lang="en-US" altLang="ko-KR" sz="1600" dirty="0">
-                <a:solidFill>
-                  <a:srgbClr val="0037A6"/>
-                </a:solidFill>
-                <a:effectLst/>
-                <a:latin typeface="D2Coding ligature" panose="020B0609020101020101" pitchFamily="49" charset="-127"/>
-                <a:ea typeface="D2Coding ligature" panose="020B0609020101020101" pitchFamily="49" charset="-127"/>
-              </a:rPr>
-              <a:t>${</a:t>
-            </a:r>
-            <a:r>
-              <a:rPr lang="en-US" altLang="ko-KR" sz="1600" dirty="0" err="1">
-                <a:solidFill>
-                  <a:srgbClr val="000000"/>
-                </a:solidFill>
-                <a:effectLst/>
-                <a:latin typeface="D2Coding ligature" panose="020B0609020101020101" pitchFamily="49" charset="-127"/>
-                <a:ea typeface="D2Coding ligature" panose="020B0609020101020101" pitchFamily="49" charset="-127"/>
-              </a:rPr>
-              <a:t>e</a:t>
-            </a:r>
-            <a:r>
-              <a:rPr lang="en-US" altLang="ko-KR" sz="1600" dirty="0" err="1">
-                <a:solidFill>
-                  <a:srgbClr val="080808"/>
-                </a:solidFill>
-                <a:effectLst/>
-                <a:latin typeface="D2Coding ligature" panose="020B0609020101020101" pitchFamily="49" charset="-127"/>
-                <a:ea typeface="D2Coding ligature" panose="020B0609020101020101" pitchFamily="49" charset="-127"/>
-              </a:rPr>
-              <a:t>.</a:t>
-            </a:r>
-            <a:r>
-              <a:rPr lang="en-US" altLang="ko-KR" sz="1600" dirty="0" err="1">
-                <a:solidFill>
-                  <a:srgbClr val="871094"/>
-                </a:solidFill>
-                <a:effectLst/>
-                <a:latin typeface="D2Coding ligature" panose="020B0609020101020101" pitchFamily="49" charset="-127"/>
-                <a:ea typeface="D2Coding ligature" panose="020B0609020101020101" pitchFamily="49" charset="-127"/>
-              </a:rPr>
-              <a:t>message</a:t>
-            </a:r>
-            <a:r>
-              <a:rPr lang="en-US" altLang="ko-KR" sz="1600" dirty="0">
-                <a:solidFill>
-                  <a:srgbClr val="0037A6"/>
-                </a:solidFill>
-                <a:effectLst/>
-                <a:latin typeface="D2Coding ligature" panose="020B0609020101020101" pitchFamily="49" charset="-127"/>
-                <a:ea typeface="D2Coding ligature" panose="020B0609020101020101" pitchFamily="49" charset="-127"/>
-              </a:rPr>
-              <a:t>}</a:t>
-            </a:r>
-            <a:r>
-              <a:rPr lang="en-US" altLang="ko-KR" sz="1600" dirty="0">
-                <a:solidFill>
-                  <a:srgbClr val="067D17"/>
-                </a:solidFill>
-                <a:effectLst/>
-                <a:latin typeface="D2Coding ligature" panose="020B0609020101020101" pitchFamily="49" charset="-127"/>
-                <a:ea typeface="D2Coding ligature" panose="020B0609020101020101" pitchFamily="49" charset="-127"/>
-              </a:rPr>
-              <a:t>"</a:t>
-            </a:r>
-            <a:r>
-              <a:rPr lang="en-US" altLang="ko-KR" sz="1600" dirty="0">
-                <a:solidFill>
-                  <a:srgbClr val="080808"/>
-                </a:solidFill>
-                <a:effectLst/>
-                <a:latin typeface="D2Coding ligature" panose="020B0609020101020101" pitchFamily="49" charset="-127"/>
-                <a:ea typeface="D2Coding ligature" panose="020B0609020101020101" pitchFamily="49" charset="-127"/>
-              </a:rPr>
-              <a:t>)</a:t>
-            </a:r>
-            <a:br>
-              <a:rPr lang="en-US" altLang="ko-KR" sz="1600" dirty="0">
-                <a:solidFill>
-                  <a:srgbClr val="080808"/>
-                </a:solidFill>
-                <a:effectLst/>
-                <a:latin typeface="D2Coding ligature" panose="020B0609020101020101" pitchFamily="49" charset="-127"/>
-                <a:ea typeface="D2Coding ligature" panose="020B0609020101020101" pitchFamily="49" charset="-127"/>
-              </a:rPr>
-            </a:br>
-            <a:r>
-              <a:rPr lang="en-US" altLang="ko-KR" sz="1600" dirty="0">
-                <a:solidFill>
-                  <a:srgbClr val="080808"/>
-                </a:solidFill>
-                <a:effectLst/>
-                <a:latin typeface="D2Coding ligature" panose="020B0609020101020101" pitchFamily="49" charset="-127"/>
-                <a:ea typeface="D2Coding ligature" panose="020B0609020101020101" pitchFamily="49" charset="-127"/>
-              </a:rPr>
-              <a:t>        -</a:t>
-            </a:r>
-            <a:r>
-              <a:rPr lang="en-US" altLang="ko-KR" sz="1600" dirty="0">
-                <a:solidFill>
-                  <a:srgbClr val="1750EB"/>
-                </a:solidFill>
-                <a:effectLst/>
-                <a:latin typeface="D2Coding ligature" panose="020B0609020101020101" pitchFamily="49" charset="-127"/>
-                <a:ea typeface="D2Coding ligature" panose="020B0609020101020101" pitchFamily="49" charset="-127"/>
-              </a:rPr>
-              <a:t>1</a:t>
-            </a:r>
-            <a:br>
-              <a:rPr lang="en-US" altLang="ko-KR" sz="1600" dirty="0">
-                <a:solidFill>
-                  <a:srgbClr val="1750EB"/>
-                </a:solidFill>
-                <a:effectLst/>
-                <a:latin typeface="D2Coding ligature" panose="020B0609020101020101" pitchFamily="49" charset="-127"/>
-                <a:ea typeface="D2Coding ligature" panose="020B0609020101020101" pitchFamily="49" charset="-127"/>
-              </a:rPr>
-            </a:br>
-            <a:r>
-              <a:rPr lang="en-US" altLang="ko-KR" sz="1600" dirty="0">
-                <a:solidFill>
-                  <a:srgbClr val="1750EB"/>
-                </a:solidFill>
-                <a:effectLst/>
-                <a:latin typeface="D2Coding ligature" panose="020B0609020101020101" pitchFamily="49" charset="-127"/>
-                <a:ea typeface="D2Coding ligature" panose="020B0609020101020101" pitchFamily="49" charset="-127"/>
-              </a:rPr>
-              <a:t>    </a:t>
-            </a:r>
-            <a:r>
-              <a:rPr lang="en-US" altLang="ko-KR" sz="1600" dirty="0">
-                <a:solidFill>
-                  <a:srgbClr val="080808"/>
-                </a:solidFill>
-                <a:effectLst/>
-                <a:latin typeface="D2Coding ligature" panose="020B0609020101020101" pitchFamily="49" charset="-127"/>
-                <a:ea typeface="D2Coding ligature" panose="020B0609020101020101" pitchFamily="49" charset="-127"/>
-              </a:rPr>
-              <a:t>} </a:t>
-            </a:r>
-            <a:r>
-              <a:rPr lang="en-US" altLang="ko-KR" sz="1600" dirty="0">
-                <a:solidFill>
-                  <a:srgbClr val="0033B3"/>
-                </a:solidFill>
-                <a:effectLst/>
-                <a:latin typeface="D2Coding ligature" panose="020B0609020101020101" pitchFamily="49" charset="-127"/>
-                <a:ea typeface="D2Coding ligature" panose="020B0609020101020101" pitchFamily="49" charset="-127"/>
-              </a:rPr>
-              <a:t>finally </a:t>
-            </a:r>
-            <a:r>
-              <a:rPr lang="en-US" altLang="ko-KR" sz="1600" dirty="0">
-                <a:solidFill>
-                  <a:srgbClr val="080808"/>
-                </a:solidFill>
-                <a:effectLst/>
-                <a:latin typeface="D2Coding ligature" panose="020B0609020101020101" pitchFamily="49" charset="-127"/>
-                <a:ea typeface="D2Coding ligature" panose="020B0609020101020101" pitchFamily="49" charset="-127"/>
-              </a:rPr>
-              <a:t>{</a:t>
-            </a:r>
-            <a:br>
-              <a:rPr lang="en-US" altLang="ko-KR" sz="1600" dirty="0">
-                <a:solidFill>
-                  <a:srgbClr val="080808"/>
-                </a:solidFill>
-                <a:effectLst/>
-                <a:latin typeface="D2Coding ligature" panose="020B0609020101020101" pitchFamily="49" charset="-127"/>
-                <a:ea typeface="D2Coding ligature" panose="020B0609020101020101" pitchFamily="49" charset="-127"/>
-              </a:rPr>
-            </a:br>
-            <a:r>
-              <a:rPr lang="en-US" altLang="ko-KR" sz="1600" dirty="0">
-                <a:solidFill>
-                  <a:srgbClr val="080808"/>
-                </a:solidFill>
-                <a:effectLst/>
-                <a:latin typeface="D2Coding ligature" panose="020B0609020101020101" pitchFamily="49" charset="-127"/>
-                <a:ea typeface="D2Coding ligature" panose="020B0609020101020101" pitchFamily="49" charset="-127"/>
-              </a:rPr>
-              <a:t>        </a:t>
-            </a:r>
-            <a:r>
-              <a:rPr lang="en-US" altLang="ko-KR" sz="1600" i="1" dirty="0" err="1">
-                <a:solidFill>
-                  <a:srgbClr val="00627A"/>
-                </a:solidFill>
-                <a:effectLst/>
-                <a:latin typeface="D2Coding ligature" panose="020B0609020101020101" pitchFamily="49" charset="-127"/>
-                <a:ea typeface="D2Coding ligature" panose="020B0609020101020101" pitchFamily="49" charset="-127"/>
-              </a:rPr>
-              <a:t>println</a:t>
-            </a:r>
-            <a:r>
-              <a:rPr lang="en-US" altLang="ko-KR" sz="1600" dirty="0">
-                <a:solidFill>
-                  <a:srgbClr val="080808"/>
-                </a:solidFill>
-                <a:effectLst/>
-                <a:latin typeface="D2Coding ligature" panose="020B0609020101020101" pitchFamily="49" charset="-127"/>
-                <a:ea typeface="D2Coding ligature" panose="020B0609020101020101" pitchFamily="49" charset="-127"/>
-              </a:rPr>
-              <a:t>(</a:t>
-            </a:r>
-            <a:r>
-              <a:rPr lang="en-US" altLang="ko-KR" sz="1600" dirty="0">
-                <a:solidFill>
-                  <a:srgbClr val="067D17"/>
-                </a:solidFill>
-                <a:effectLst/>
-                <a:latin typeface="D2Coding ligature" panose="020B0609020101020101" pitchFamily="49" charset="-127"/>
-                <a:ea typeface="D2Coding ligature" panose="020B0609020101020101" pitchFamily="49" charset="-127"/>
-              </a:rPr>
-              <a:t>"finally </a:t>
-            </a:r>
-            <a:r>
-              <a:rPr lang="ko-KR" altLang="en-US" sz="1600" dirty="0">
-                <a:solidFill>
-                  <a:srgbClr val="067D17"/>
-                </a:solidFill>
-                <a:effectLst/>
-                <a:latin typeface="D2Coding ligature" panose="020B0609020101020101" pitchFamily="49" charset="-127"/>
-                <a:ea typeface="D2Coding ligature" panose="020B0609020101020101" pitchFamily="49" charset="-127"/>
-              </a:rPr>
-              <a:t>실행 </a:t>
-            </a:r>
-            <a:r>
-              <a:rPr lang="en-US" altLang="ko-KR" sz="1600" dirty="0">
-                <a:solidFill>
-                  <a:srgbClr val="067D17"/>
-                </a:solidFill>
-                <a:effectLst/>
-                <a:latin typeface="D2Coding ligature" panose="020B0609020101020101" pitchFamily="49" charset="-127"/>
-                <a:ea typeface="D2Coding ligature" panose="020B0609020101020101" pitchFamily="49" charset="-127"/>
-              </a:rPr>
-              <a:t>(</a:t>
-            </a:r>
-            <a:r>
-              <a:rPr lang="ko-KR" altLang="en-US" sz="1600" dirty="0">
-                <a:solidFill>
-                  <a:srgbClr val="067D17"/>
-                </a:solidFill>
-                <a:effectLst/>
-                <a:latin typeface="D2Coding ligature" panose="020B0609020101020101" pitchFamily="49" charset="-127"/>
-                <a:ea typeface="D2Coding ligature" panose="020B0609020101020101" pitchFamily="49" charset="-127"/>
-              </a:rPr>
-              <a:t>항상 실행됨</a:t>
-            </a:r>
-            <a:r>
-              <a:rPr lang="en-US" altLang="ko-KR" sz="1600" dirty="0">
-                <a:solidFill>
-                  <a:srgbClr val="067D17"/>
-                </a:solidFill>
-                <a:effectLst/>
-                <a:latin typeface="D2Coding ligature" panose="020B0609020101020101" pitchFamily="49" charset="-127"/>
-                <a:ea typeface="D2Coding ligature" panose="020B0609020101020101" pitchFamily="49" charset="-127"/>
-              </a:rPr>
-              <a:t>)"</a:t>
-            </a:r>
-            <a:r>
-              <a:rPr lang="en-US" altLang="ko-KR" sz="1600" dirty="0">
-                <a:solidFill>
-                  <a:srgbClr val="080808"/>
-                </a:solidFill>
-                <a:effectLst/>
-                <a:latin typeface="D2Coding ligature" panose="020B0609020101020101" pitchFamily="49" charset="-127"/>
-                <a:ea typeface="D2Coding ligature" panose="020B0609020101020101" pitchFamily="49" charset="-127"/>
-              </a:rPr>
-              <a:t>)</a:t>
-            </a:r>
-            <a:br>
-              <a:rPr lang="en-US" altLang="ko-KR" sz="1600" dirty="0">
-                <a:solidFill>
-                  <a:srgbClr val="080808"/>
-                </a:solidFill>
-                <a:effectLst/>
-                <a:latin typeface="D2Coding ligature" panose="020B0609020101020101" pitchFamily="49" charset="-127"/>
-                <a:ea typeface="D2Coding ligature" panose="020B0609020101020101" pitchFamily="49" charset="-127"/>
-              </a:rPr>
-            </a:br>
-            <a:r>
-              <a:rPr lang="en-US" altLang="ko-KR" sz="1600" dirty="0">
-                <a:solidFill>
-                  <a:srgbClr val="080808"/>
-                </a:solidFill>
-                <a:effectLst/>
-                <a:latin typeface="D2Coding ligature" panose="020B0609020101020101" pitchFamily="49" charset="-127"/>
-                <a:ea typeface="D2Coding ligature" panose="020B0609020101020101" pitchFamily="49" charset="-127"/>
-              </a:rPr>
-              <a:t>    }</a:t>
-            </a:r>
-            <a:br>
-              <a:rPr lang="en-US" altLang="ko-KR" sz="1600" dirty="0">
-                <a:solidFill>
-                  <a:srgbClr val="080808"/>
-                </a:solidFill>
-                <a:effectLst/>
-                <a:latin typeface="D2Coding ligature" panose="020B0609020101020101" pitchFamily="49" charset="-127"/>
-                <a:ea typeface="D2Coding ligature" panose="020B0609020101020101" pitchFamily="49" charset="-127"/>
-              </a:rPr>
-            </a:br>
-            <a:r>
-              <a:rPr lang="en-US" altLang="ko-KR" sz="1600" dirty="0">
-                <a:solidFill>
-                  <a:srgbClr val="080808"/>
-                </a:solidFill>
-                <a:effectLst/>
-                <a:latin typeface="D2Coding ligature" panose="020B0609020101020101" pitchFamily="49" charset="-127"/>
-                <a:ea typeface="D2Coding ligature" panose="020B0609020101020101" pitchFamily="49" charset="-127"/>
-              </a:rPr>
-              <a:t>    </a:t>
-            </a:r>
-            <a:br>
-              <a:rPr lang="en-US" altLang="ko-KR" sz="1600" dirty="0">
-                <a:solidFill>
-                  <a:srgbClr val="080808"/>
-                </a:solidFill>
-                <a:effectLst/>
-                <a:latin typeface="D2Coding ligature" panose="020B0609020101020101" pitchFamily="49" charset="-127"/>
-                <a:ea typeface="D2Coding ligature" panose="020B0609020101020101" pitchFamily="49" charset="-127"/>
-              </a:rPr>
-            </a:br>
-            <a:r>
-              <a:rPr lang="en-US" altLang="ko-KR" sz="1600" dirty="0">
-                <a:solidFill>
-                  <a:srgbClr val="080808"/>
-                </a:solidFill>
-                <a:effectLst/>
-                <a:latin typeface="D2Coding ligature" panose="020B0609020101020101" pitchFamily="49" charset="-127"/>
-                <a:ea typeface="D2Coding ligature" panose="020B0609020101020101" pitchFamily="49" charset="-127"/>
-              </a:rPr>
-              <a:t>    </a:t>
-            </a:r>
-            <a:r>
-              <a:rPr lang="en-US" altLang="ko-KR" sz="1600" i="1" dirty="0" err="1">
-                <a:solidFill>
-                  <a:srgbClr val="00627A"/>
-                </a:solidFill>
-                <a:effectLst/>
-                <a:latin typeface="D2Coding ligature" panose="020B0609020101020101" pitchFamily="49" charset="-127"/>
-                <a:ea typeface="D2Coding ligature" panose="020B0609020101020101" pitchFamily="49" charset="-127"/>
-              </a:rPr>
-              <a:t>println</a:t>
-            </a:r>
-            <a:r>
-              <a:rPr lang="en-US" altLang="ko-KR" sz="1600" dirty="0">
-                <a:solidFill>
-                  <a:srgbClr val="080808"/>
-                </a:solidFill>
-                <a:effectLst/>
-                <a:latin typeface="D2Coding ligature" panose="020B0609020101020101" pitchFamily="49" charset="-127"/>
-                <a:ea typeface="D2Coding ligature" panose="020B0609020101020101" pitchFamily="49" charset="-127"/>
-              </a:rPr>
-              <a:t>(</a:t>
-            </a:r>
-            <a:r>
-              <a:rPr lang="en-US" altLang="ko-KR" sz="1600" dirty="0">
-                <a:solidFill>
-                  <a:srgbClr val="000000"/>
-                </a:solidFill>
-                <a:effectLst/>
-                <a:latin typeface="D2Coding ligature" panose="020B0609020101020101" pitchFamily="49" charset="-127"/>
-                <a:ea typeface="D2Coding ligature" panose="020B0609020101020101" pitchFamily="49" charset="-127"/>
-              </a:rPr>
-              <a:t>value</a:t>
-            </a:r>
-            <a:r>
-              <a:rPr lang="en-US" altLang="ko-KR" sz="1600" dirty="0">
-                <a:solidFill>
-                  <a:srgbClr val="080808"/>
-                </a:solidFill>
-                <a:effectLst/>
-                <a:latin typeface="D2Coding ligature" panose="020B0609020101020101" pitchFamily="49" charset="-127"/>
-                <a:ea typeface="D2Coding ligature" panose="020B0609020101020101" pitchFamily="49" charset="-127"/>
-              </a:rPr>
-              <a:t>)</a:t>
-            </a:r>
-            <a:br>
-              <a:rPr lang="en-US" altLang="ko-KR" sz="1600" dirty="0">
-                <a:solidFill>
-                  <a:srgbClr val="080808"/>
-                </a:solidFill>
-                <a:effectLst/>
-                <a:latin typeface="D2Coding ligature" panose="020B0609020101020101" pitchFamily="49" charset="-127"/>
-                <a:ea typeface="D2Coding ligature" panose="020B0609020101020101" pitchFamily="49" charset="-127"/>
-              </a:rPr>
-            </a:br>
-            <a:r>
-              <a:rPr lang="en-US" altLang="ko-KR" sz="1600" dirty="0">
-                <a:solidFill>
-                  <a:srgbClr val="080808"/>
-                </a:solidFill>
-                <a:effectLst/>
-                <a:latin typeface="D2Coding ligature" panose="020B0609020101020101" pitchFamily="49" charset="-127"/>
-                <a:ea typeface="D2Coding ligature" panose="020B0609020101020101" pitchFamily="49" charset="-127"/>
-              </a:rPr>
-              <a:t>}</a:t>
-            </a:r>
+              <a:rPr lang="ko-KR" altLang="ko-KR" sz="1600" dirty="0">
+                <a:solidFill>
+                  <a:srgbClr val="A0A0A0"/>
+                </a:solidFill>
+                <a:effectLst/>
+                <a:latin typeface="D2Coding ligature" panose="020B0609020101020101" pitchFamily="49" charset="-127"/>
+                <a:ea typeface="D2Coding ligature" panose="020B0609020101020101" pitchFamily="49" charset="-127"/>
+              </a:rPr>
+              <a:t>}*/</a:t>
+            </a:r>
+            <a:endParaRPr lang="ko-KR" altLang="ko-KR" sz="1600" dirty="0">
+              <a:solidFill>
+                <a:srgbClr val="302A24"/>
+              </a:solidFill>
+              <a:effectLst/>
+              <a:latin typeface="D2Coding ligature" panose="020B0609020101020101" pitchFamily="49" charset="-127"/>
+              <a:ea typeface="D2Coding ligature" panose="020B0609020101020101" pitchFamily="49" charset="-127"/>
+            </a:endParaRPr>
+          </a:p>
+        </p:txBody>
+      </p:sp>
+      <p:sp>
+        <p:nvSpPr>
+          <p:cNvPr id="4" name="TextBox 3">
+            <a:extLst>
+              <a:ext uri="{FF2B5EF4-FFF2-40B4-BE49-F238E27FC236}">
+                <a16:creationId xmlns:a16="http://schemas.microsoft.com/office/drawing/2014/main" id="{3DE5929B-5785-B508-57D9-0A0A9C386AC1}"/>
+              </a:ext>
+            </a:extLst>
+          </p:cNvPr>
+          <p:cNvSpPr txBox="1"/>
+          <p:nvPr/>
+        </p:nvSpPr>
+        <p:spPr>
+          <a:xfrm>
+            <a:off x="8953500" y="6364843"/>
+            <a:ext cx="3057525" cy="369332"/>
+          </a:xfrm>
+          <a:prstGeom prst="rect">
+            <a:avLst/>
+          </a:prstGeom>
+          <a:noFill/>
+        </p:spPr>
+        <p:txBody>
+          <a:bodyPr wrap="square">
+            <a:spAutoFit/>
+          </a:bodyPr>
+          <a:lstStyle/>
+          <a:p>
+            <a:pPr algn="r">
+              <a:buNone/>
+            </a:pPr>
+            <a:r>
+              <a:rPr lang="en-US" altLang="ko-KR" sz="1800" dirty="0" err="1">
+                <a:solidFill>
+                  <a:schemeClr val="bg1">
+                    <a:lumMod val="50000"/>
+                  </a:schemeClr>
+                </a:solidFill>
+                <a:effectLst/>
+                <a:latin typeface="나눔스퀘어라운드OTF Light" panose="020B0600000101010101" pitchFamily="34" charset="-127"/>
+                <a:ea typeface="나눔스퀘어라운드OTF Light" panose="020B0600000101010101" pitchFamily="34" charset="-127"/>
+              </a:rPr>
+              <a:t>tryCatchFinally.kt</a:t>
+            </a:r>
+            <a:endParaRPr lang="ko-KR" altLang="ko-KR" sz="1800" dirty="0">
+              <a:solidFill>
+                <a:schemeClr val="bg1">
+                  <a:lumMod val="50000"/>
+                </a:schemeClr>
+              </a:solidFill>
+              <a:effectLst/>
+              <a:latin typeface="나눔스퀘어라운드OTF Light" panose="020B0600000101010101" pitchFamily="34" charset="-127"/>
+              <a:ea typeface="나눔스퀘어라운드OTF Light" panose="020B0600000101010101" pitchFamily="34" charset="-127"/>
+            </a:endParaRPr>
           </a:p>
         </p:txBody>
       </p:sp>
@@ -36535,7 +38528,7 @@
 </p:sld>
 </file>
 
-<file path=ppt/slides/slide33.xml><?xml version="1.0" encoding="utf-8"?>
+<file path=ppt/slides/slide35.xml><?xml version="1.0" encoding="utf-8"?>
 <p:sld xmlns:a="http://schemas.openxmlformats.org/drawingml/2006/main" xmlns:r="http://schemas.openxmlformats.org/officeDocument/2006/relationships" xmlns:p="http://schemas.openxmlformats.org/presentationml/2006/main">
   <p:cSld>
     <p:spTree>
